--- a/tmp/프로젝트 제출양식/VARO_ShoppingMall.pptx
+++ b/tmp/프로젝트 제출양식/VARO_ShoppingMall.pptx
@@ -4,6 +4,9 @@
   <p:sldMasterIdLst>
     <p:sldMasterId id="2147483648" r:id="rId1"/>
   </p:sldMasterIdLst>
+  <p:notesMasterIdLst>
+    <p:notesMasterId r:id="rId19"/>
+  </p:notesMasterIdLst>
   <p:sldIdLst>
     <p:sldId id="256" r:id="rId2"/>
     <p:sldId id="257" r:id="rId3"/>
@@ -17,13 +20,12 @@
     <p:sldId id="265" r:id="rId11"/>
     <p:sldId id="266" r:id="rId12"/>
     <p:sldId id="267" r:id="rId13"/>
-    <p:sldId id="268" r:id="rId14"/>
-    <p:sldId id="269" r:id="rId15"/>
-    <p:sldId id="270" r:id="rId16"/>
+    <p:sldId id="272" r:id="rId14"/>
+    <p:sldId id="273" r:id="rId15"/>
+    <p:sldId id="268" r:id="rId16"/>
+    <p:sldId id="269" r:id="rId17"/>
+    <p:sldId id="270" r:id="rId18"/>
   </p:sldIdLst>
-  <p:notesMasterIdLst>
-    <p:notesMasterId r:id="rId17"/>
-  </p:notesMasterIdLst>
   <p:sldSz cx="18288000" cy="10287000"/>
   <p:notesSz cx="10287000" cy="18288000"/>
   <p:defaultTextStyle>
@@ -118,6 +120,11 @@
       </a:defRPr>
     </a:lvl9pPr>
   </p:defaultTextStyle>
+  <p:extLst>
+    <p:ext uri="{EFAFB233-063F-42B5-8137-9DF3F51BA10A}">
+      <p15:sldGuideLst xmlns:p15="http://schemas.microsoft.com/office/powerpoint/2012/main"/>
+    </p:ext>
+  </p:extLst>
 </p:presentation>
 </file>
 
@@ -143,240 +150,16 @@
           <a:chExt cx="0" cy="0"/>
         </a:xfrm>
       </p:grpSpPr>
-      <p:sp>
-        <p:nvSpPr>
-          <p:cNvPr id="2" name="Header Placeholder 1"/>
-          <p:cNvSpPr>
-            <a:spLocks noGrp="1"/>
-          </p:cNvSpPr>
-          <p:nvPr>
-            <p:ph type="hdr" sz="quarter"/>
-          </p:nvPr>
-        </p:nvSpPr>
-        <p:spPr>
-          <a:xfrm>
-            <a:off x="0" y="0"/>
-            <a:ext cx="2971800" cy="458788"/>
-          </a:xfrm>
-          <a:prstGeom prst="rect">
-            <a:avLst/>
-          </a:prstGeom>
-        </p:spPr>
-        <p:txBody>
-          <a:bodyPr vert="horz" lIns="91440" tIns="45720" rIns="91440" bIns="45720" rtlCol="0"/>
-          <a:lstStyle>
-            <a:lvl1pPr algn="l">
-              <a:defRPr sz="1200"/>
-            </a:lvl1pPr>
-          </a:lstStyle>
-          <a:p>
-            <a:endParaRPr lang="en-US"/>
-          </a:p>
-        </p:txBody>
-      </p:sp>
-      <p:sp>
-        <p:nvSpPr>
-          <p:cNvPr id="3" name="Date Placeholder 2"/>
-          <p:cNvSpPr>
-            <a:spLocks noGrp="1"/>
-          </p:cNvSpPr>
-          <p:nvPr>
-            <p:ph type="dt" idx="1"/>
-          </p:nvPr>
-        </p:nvSpPr>
-        <p:spPr>
-          <a:xfrm>
-            <a:off x="3884613" y="0"/>
-            <a:ext cx="2971800" cy="458788"/>
-          </a:xfrm>
-          <a:prstGeom prst="rect">
-            <a:avLst/>
-          </a:prstGeom>
-        </p:spPr>
-        <p:txBody>
-          <a:bodyPr vert="horz" lIns="91440" tIns="45720" rIns="91440" bIns="45720" rtlCol="0"/>
-          <a:lstStyle>
-            <a:lvl1pPr algn="r">
-              <a:defRPr sz="1200"/>
-            </a:lvl1pPr>
-          </a:lstStyle>
-          <a:p>
-            <a:fld id="{5282F153-3F37-0F45-9E97-73ACFA13230C}" type="datetimeFigureOut">
-              <a:rPr lang="en-US"/>
-              <a:t>7/23/19</a:t>
-            </a:fld>
-            <a:endParaRPr lang="en-US"/>
-          </a:p>
-        </p:txBody>
-      </p:sp>
-      <p:sp>
-        <p:nvSpPr>
-          <p:cNvPr id="4" name="Slide Image Placeholder 3"/>
-          <p:cNvSpPr>
-            <a:spLocks noGrp="1" noRot="1" noChangeAspect="1"/>
-          </p:cNvSpPr>
-          <p:nvPr>
-            <p:ph type="sldImg" idx="2"/>
-          </p:nvPr>
-        </p:nvSpPr>
-        <p:spPr>
-          <a:xfrm>
-            <a:off x="685800" y="1143000"/>
-            <a:ext cx="5486400" cy="3086100"/>
-          </a:xfrm>
-          <a:prstGeom prst="rect">
-            <a:avLst/>
-          </a:prstGeom>
-          <a:noFill/>
-          <a:ln w="12700">
-            <a:solidFill>
-              <a:prstClr val="black"/>
-            </a:solidFill>
-          </a:ln>
-        </p:spPr>
-        <p:txBody>
-          <a:bodyPr vert="horz" lIns="91440" tIns="45720" rIns="91440" bIns="45720" rtlCol="0" anchor="ctr"/>
-          <a:lstStyle/>
-          <a:p>
-            <a:endParaRPr lang="en-US"/>
-          </a:p>
-        </p:txBody>
-      </p:sp>
-      <p:sp>
-        <p:nvSpPr>
-          <p:cNvPr id="5" name="Notes Placeholder 4"/>
-          <p:cNvSpPr>
-            <a:spLocks noGrp="1"/>
-          </p:cNvSpPr>
-          <p:nvPr>
-            <p:ph type="body" sz="quarter" idx="3"/>
-          </p:nvPr>
-        </p:nvSpPr>
-        <p:spPr>
-          <a:xfrm>
-            <a:off x="685800" y="4400550"/>
-            <a:ext cx="5486400" cy="3600450"/>
-          </a:xfrm>
-          <a:prstGeom prst="rect">
-            <a:avLst/>
-          </a:prstGeom>
-        </p:spPr>
-        <p:txBody>
-          <a:bodyPr vert="horz" lIns="91440" tIns="45720" rIns="91440" bIns="45720" rtlCol="0"/>
-          <a:lstStyle/>
-          <a:p>
-            <a:pPr lvl="0"/>
-            <a:r>
-              <a:rPr lang="en-US"/>
-              <a:t>Click to edit Master text styles</a:t>
-            </a:r>
-          </a:p>
-          <a:p>
-            <a:pPr lvl="1"/>
-            <a:r>
-              <a:rPr lang="en-US"/>
-              <a:t>Second level</a:t>
-            </a:r>
-          </a:p>
-          <a:p>
-            <a:pPr lvl="2"/>
-            <a:r>
-              <a:rPr lang="en-US"/>
-              <a:t>Third level</a:t>
-            </a:r>
-          </a:p>
-          <a:p>
-            <a:pPr lvl="3"/>
-            <a:r>
-              <a:rPr lang="en-US"/>
-              <a:t>Fourth level</a:t>
-            </a:r>
-          </a:p>
-          <a:p>
-            <a:pPr lvl="4"/>
-            <a:r>
-              <a:rPr lang="en-US"/>
-              <a:t>Fifth level</a:t>
-            </a:r>
-          </a:p>
-        </p:txBody>
-      </p:sp>
-      <p:sp>
-        <p:nvSpPr>
-          <p:cNvPr id="6" name="Footer Placeholder 5"/>
-          <p:cNvSpPr>
-            <a:spLocks noGrp="1"/>
-          </p:cNvSpPr>
-          <p:nvPr>
-            <p:ph type="ftr" sz="quarter" idx="4"/>
-          </p:nvPr>
-        </p:nvSpPr>
-        <p:spPr>
-          <a:xfrm>
-            <a:off x="0" y="8685213"/>
-            <a:ext cx="2971800" cy="458787"/>
-          </a:xfrm>
-          <a:prstGeom prst="rect">
-            <a:avLst/>
-          </a:prstGeom>
-        </p:spPr>
-        <p:txBody>
-          <a:bodyPr vert="horz" lIns="91440" tIns="45720" rIns="91440" bIns="45720" rtlCol="0" anchor="b"/>
-          <a:lstStyle>
-            <a:lvl1pPr algn="l">
-              <a:defRPr sz="1200"/>
-            </a:lvl1pPr>
-          </a:lstStyle>
-          <a:p>
-            <a:endParaRPr lang="en-US"/>
-          </a:p>
-        </p:txBody>
-      </p:sp>
-      <p:sp>
-        <p:nvSpPr>
-          <p:cNvPr id="7" name="Slide Number Placeholder 6"/>
-          <p:cNvSpPr>
-            <a:spLocks noGrp="1"/>
-          </p:cNvSpPr>
-          <p:nvPr>
-            <p:ph type="sldNum" sz="quarter" idx="5"/>
-          </p:nvPr>
-        </p:nvSpPr>
-        <p:spPr>
-          <a:xfrm>
-            <a:off x="3884613" y="8685213"/>
-            <a:ext cx="2971800" cy="458787"/>
-          </a:xfrm>
-          <a:prstGeom prst="rect">
-            <a:avLst/>
-          </a:prstGeom>
-        </p:spPr>
-        <p:txBody>
-          <a:bodyPr vert="horz" lIns="91440" tIns="45720" rIns="91440" bIns="45720" rtlCol="0" anchor="b"/>
-          <a:lstStyle>
-            <a:lvl1pPr algn="r">
-              <a:defRPr sz="1200"/>
-            </a:lvl1pPr>
-          </a:lstStyle>
-          <a:p>
-            <a:fld id="{CE5E9CC1-C706-0F49-92D6-E571CC5EEA8F}" type="slidenum">
-              <a:rPr lang="en-US"/>
-              <a:t>‹#›</a:t>
-            </a:fld>
-            <a:endParaRPr lang="en-US"/>
-          </a:p>
-        </p:txBody>
-      </p:sp>
     </p:spTree>
     <p:extLst>
       <p:ext uri="{BB962C8B-B14F-4D97-AF65-F5344CB8AC3E}">
-        <p14:creationId xmlns:p14="http://schemas.microsoft.com/office/powerpoint/2010/main" val="1024086991"/>
+        <p14:creationId xmlns:p14="http://schemas.microsoft.com/office/powerpoint/2010/main" val="4193116872"/>
       </p:ext>
     </p:extLst>
   </p:cSld>
   <p:clrMap bg1="lt1" tx1="dk1" bg2="lt2" tx2="dk2" accent1="accent1" accent2="accent2" accent3="accent3" accent4="accent4" accent5="accent5" accent6="accent6" hlink="hlink" folHlink="folHlink"/>
   <p:notesStyle>
-    <a:lvl1pPr marL="0" algn="l" defTabSz="914400" rtl="0" eaLnBrk="1" latinLnBrk="0" hangingPunct="1">
+    <a:lvl1pPr marL="0" algn="l" defTabSz="914400" rtl="0" eaLnBrk="1" latinLnBrk="1" hangingPunct="1">
       <a:defRPr sz="1200" kern="1200">
         <a:solidFill>
           <a:schemeClr val="tx1"/>
@@ -386,7 +169,7 @@
         <a:cs typeface="+mn-cs"/>
       </a:defRPr>
     </a:lvl1pPr>
-    <a:lvl2pPr marL="457200" algn="l" defTabSz="914400" rtl="0" eaLnBrk="1" latinLnBrk="0" hangingPunct="1">
+    <a:lvl2pPr marL="457200" algn="l" defTabSz="914400" rtl="0" eaLnBrk="1" latinLnBrk="1" hangingPunct="1">
       <a:defRPr sz="1200" kern="1200">
         <a:solidFill>
           <a:schemeClr val="tx1"/>
@@ -396,7 +179,7 @@
         <a:cs typeface="+mn-cs"/>
       </a:defRPr>
     </a:lvl2pPr>
-    <a:lvl3pPr marL="914400" algn="l" defTabSz="914400" rtl="0" eaLnBrk="1" latinLnBrk="0" hangingPunct="1">
+    <a:lvl3pPr marL="914400" algn="l" defTabSz="914400" rtl="0" eaLnBrk="1" latinLnBrk="1" hangingPunct="1">
       <a:defRPr sz="1200" kern="1200">
         <a:solidFill>
           <a:schemeClr val="tx1"/>
@@ -406,7 +189,7 @@
         <a:cs typeface="+mn-cs"/>
       </a:defRPr>
     </a:lvl3pPr>
-    <a:lvl4pPr marL="1371600" algn="l" defTabSz="914400" rtl="0" eaLnBrk="1" latinLnBrk="0" hangingPunct="1">
+    <a:lvl4pPr marL="1371600" algn="l" defTabSz="914400" rtl="0" eaLnBrk="1" latinLnBrk="1" hangingPunct="1">
       <a:defRPr sz="1200" kern="1200">
         <a:solidFill>
           <a:schemeClr val="tx1"/>
@@ -416,7 +199,7 @@
         <a:cs typeface="+mn-cs"/>
       </a:defRPr>
     </a:lvl4pPr>
-    <a:lvl5pPr marL="1828800" algn="l" defTabSz="914400" rtl="0" eaLnBrk="1" latinLnBrk="0" hangingPunct="1">
+    <a:lvl5pPr marL="1828800" algn="l" defTabSz="914400" rtl="0" eaLnBrk="1" latinLnBrk="1" hangingPunct="1">
       <a:defRPr sz="1200" kern="1200">
         <a:solidFill>
           <a:schemeClr val="tx1"/>
@@ -426,7 +209,7 @@
         <a:cs typeface="+mn-cs"/>
       </a:defRPr>
     </a:lvl5pPr>
-    <a:lvl6pPr marL="2286000" algn="l" defTabSz="914400" rtl="0" eaLnBrk="1" latinLnBrk="0" hangingPunct="1">
+    <a:lvl6pPr marL="2286000" algn="l" defTabSz="914400" rtl="0" eaLnBrk="1" latinLnBrk="1" hangingPunct="1">
       <a:defRPr sz="1200" kern="1200">
         <a:solidFill>
           <a:schemeClr val="tx1"/>
@@ -436,7 +219,7 @@
         <a:cs typeface="+mn-cs"/>
       </a:defRPr>
     </a:lvl6pPr>
-    <a:lvl7pPr marL="2743200" algn="l" defTabSz="914400" rtl="0" eaLnBrk="1" latinLnBrk="0" hangingPunct="1">
+    <a:lvl7pPr marL="2743200" algn="l" defTabSz="914400" rtl="0" eaLnBrk="1" latinLnBrk="1" hangingPunct="1">
       <a:defRPr sz="1200" kern="1200">
         <a:solidFill>
           <a:schemeClr val="tx1"/>
@@ -446,7 +229,7 @@
         <a:cs typeface="+mn-cs"/>
       </a:defRPr>
     </a:lvl7pPr>
-    <a:lvl8pPr marL="3200400" algn="l" defTabSz="914400" rtl="0" eaLnBrk="1" latinLnBrk="0" hangingPunct="1">
+    <a:lvl8pPr marL="3200400" algn="l" defTabSz="914400" rtl="0" eaLnBrk="1" latinLnBrk="1" hangingPunct="1">
       <a:defRPr sz="1200" kern="1200">
         <a:solidFill>
           <a:schemeClr val="tx1"/>
@@ -456,7 +239,7 @@
         <a:cs typeface="+mn-cs"/>
       </a:defRPr>
     </a:lvl8pPr>
-    <a:lvl9pPr marL="3657600" algn="l" defTabSz="914400" rtl="0" eaLnBrk="1" latinLnBrk="0" hangingPunct="1">
+    <a:lvl9pPr marL="3657600" algn="l" defTabSz="914400" rtl="0" eaLnBrk="1" latinLnBrk="1" hangingPunct="1">
       <a:defRPr sz="1200" kern="1200">
         <a:solidFill>
           <a:schemeClr val="tx1"/>
@@ -518,7 +301,6 @@
               <a:rPr lang="en-US" dirty="0"/>
               <a:t>안녕하세요, 오하율입니다. 오늘 제가 혼자서 기획부터 개발까지 진행한 VARO 쇼핑몰 프로젝트를 소개해 드리겠습니다. 저는 비전공자로 개발을 시작했는데, 이 프로젝트를 통해 실제 쇼핑몰이 어떻게 만들어지는지 처음부터 끝까지 경험해 볼 수 있었습니다.</a:t>
             </a:r>
-            <a:endParaRPr lang="en-US" dirty="0"/>
           </a:p>
         </p:txBody>
       </p:sp>
@@ -606,7 +388,6 @@
               <a:rPr lang="en-US" dirty="0"/>
               <a:t>두 번째는 쇼핑몰의 핵심인 상품 페이지예요. 화면에서 보시는 것처럼 주간 베스트 상품을 카테고리별로 보여주고, BEST, NEW, HOT, SALE 같은 배지를 달아서 한눈에 인기 상품을 알 수 있게 했어요. 상품 이미지에 마우스를 올리면 다른 각도의 사진도 볼 수 있습니다.</a:t>
             </a:r>
-            <a:endParaRPr lang="en-US" dirty="0"/>
           </a:p>
         </p:txBody>
       </p:sp>
@@ -694,7 +475,6 @@
               <a:rPr lang="en-US" dirty="0"/>
               <a:t>세 번째는 장바구니와 결제 시스템이에요. 재미있는 건, 로그인 안 한 상태에서 장바구니에 담아놓은 상품이 나중에 로그인하면 자동으로 합쳐진다는 거예요. 그래서 상품이 사라지는 일이 없어요. 결제는 토스페이먼츠를 연동해서 카카오페이, 신용카드 등 다양한 방법으로 결제할 수 있습니다.</a:t>
             </a:r>
-            <a:endParaRPr lang="en-US" dirty="0"/>
           </a:p>
         </p:txBody>
       </p:sp>
@@ -782,7 +562,6 @@
               <a:rPr lang="en-US" dirty="0"/>
               <a:t>네 번째는 관리자 화면입니다. 관리자로 로그인하면 상품을 추가하거나 수정할 수 있고, 메인 배너 이미지도 바꿀 수 있어요. FAQ나 공지사항 같은 커뮤니티 게시판도 관리할 수 있습니다. 드래그해서 배너 순서를 바꾸거나, 상품에 NEW, HOT 같은 배지를 붙이는 것도 가능해요.</a:t>
             </a:r>
-            <a:endParaRPr lang="en-US" dirty="0"/>
           </a:p>
         </p:txBody>
       </p:sp>
@@ -827,7 +606,13 @@
   <p:cSld>
     <p:spTree>
       <p:nvGrpSpPr>
-        <p:cNvPr id="1" name=""/>
+        <p:cNvPr id="1" name="">
+          <a:extLst>
+            <a:ext uri="{FF2B5EF4-FFF2-40B4-BE49-F238E27FC236}">
+              <a16:creationId xmlns:a16="http://schemas.microsoft.com/office/drawing/2014/main" id="{20313628-8931-511C-6E03-3472400969D0}"/>
+            </a:ext>
+          </a:extLst>
+        </p:cNvPr>
         <p:cNvGrpSpPr/>
         <p:nvPr/>
       </p:nvGrpSpPr>
@@ -841,7 +626,13 @@
       </p:grpSpPr>
       <p:sp>
         <p:nvSpPr>
-          <p:cNvPr id="2" name="Slide Image Placeholder 1"/>
+          <p:cNvPr id="2" name="Slide Image Placeholder 1">
+            <a:extLst>
+              <a:ext uri="{FF2B5EF4-FFF2-40B4-BE49-F238E27FC236}">
+                <a16:creationId xmlns:a16="http://schemas.microsoft.com/office/drawing/2014/main" id="{05CD59D9-AD5C-2DE8-9B94-C4E8D919698C}"/>
+              </a:ext>
+            </a:extLst>
+          </p:cNvPr>
           <p:cNvSpPr>
             <a:spLocks noGrp="1" noRot="1" noChangeAspect="1"/>
           </p:cNvSpPr>
@@ -853,7 +644,13 @@
       </p:sp>
       <p:sp>
         <p:nvSpPr>
-          <p:cNvPr id="3" name="Notes Placeholder 2"/>
+          <p:cNvPr id="3" name="Notes Placeholder 2">
+            <a:extLst>
+              <a:ext uri="{FF2B5EF4-FFF2-40B4-BE49-F238E27FC236}">
+                <a16:creationId xmlns:a16="http://schemas.microsoft.com/office/drawing/2014/main" id="{1EC2E6E2-001D-BA70-9674-A1FACC8EFFEE}"/>
+              </a:ext>
+            </a:extLst>
+          </p:cNvPr>
           <p:cNvSpPr>
             <a:spLocks noGrp="1"/>
           </p:cNvSpPr>
@@ -868,15 +665,20 @@
           <a:p>
             <a:r>
               <a:rPr lang="en-US" dirty="0"/>
-              <a:t>이제 실제 VARO 쇼핑몰을 라이브로 보여드리겠습니다. 메인 페이지부터 상품 검색, 장바구니, 결제, 그리고 관리자 화면까지 순서대로 시연하겠습니다.</a:t>
-            </a:r>
-            <a:endParaRPr lang="en-US" dirty="0"/>
-          </a:p>
-        </p:txBody>
-      </p:sp>
-      <p:sp>
-        <p:nvSpPr>
-          <p:cNvPr id="4" name="Slide Number Placeholder 3"/>
+              <a:t>네 번째는 관리자 화면입니다. 관리자로 로그인하면 상품을 추가하거나 수정할 수 있고, 메인 배너 이미지도 바꿀 수 있어요. FAQ나 공지사항 같은 커뮤니티 게시판도 관리할 수 있습니다. 드래그해서 배너 순서를 바꾸거나, 상품에 NEW, HOT 같은 배지를 붙이는 것도 가능해요.</a:t>
+            </a:r>
+          </a:p>
+        </p:txBody>
+      </p:sp>
+      <p:sp>
+        <p:nvSpPr>
+          <p:cNvPr id="4" name="Slide Number Placeholder 3">
+            <a:extLst>
+              <a:ext uri="{FF2B5EF4-FFF2-40B4-BE49-F238E27FC236}">
+                <a16:creationId xmlns:a16="http://schemas.microsoft.com/office/drawing/2014/main" id="{13518D74-7ED1-279A-F513-20AEC7C7B8EF}"/>
+              </a:ext>
+            </a:extLst>
+          </p:cNvPr>
           <p:cNvSpPr>
             <a:spLocks noGrp="1"/>
           </p:cNvSpPr>
@@ -900,7 +702,7 @@
     </p:spTree>
     <p:extLst>
       <p:ext uri="{BB962C8B-B14F-4D97-AF65-F5344CB8AC3E}">
-        <p14:creationId xmlns:p14="http://schemas.microsoft.com/office/powerpoint/2010/main" val="1024086991"/>
+        <p14:creationId xmlns:p14="http://schemas.microsoft.com/office/powerpoint/2010/main" val="3164613621"/>
       </p:ext>
     </p:extLst>
   </p:cSld>
@@ -915,7 +717,13 @@
   <p:cSld>
     <p:spTree>
       <p:nvGrpSpPr>
-        <p:cNvPr id="1" name=""/>
+        <p:cNvPr id="1" name="">
+          <a:extLst>
+            <a:ext uri="{FF2B5EF4-FFF2-40B4-BE49-F238E27FC236}">
+              <a16:creationId xmlns:a16="http://schemas.microsoft.com/office/drawing/2014/main" id="{0EA968D5-5135-6F11-38B3-824F05DE5067}"/>
+            </a:ext>
+          </a:extLst>
+        </p:cNvPr>
         <p:cNvGrpSpPr/>
         <p:nvPr/>
       </p:nvGrpSpPr>
@@ -929,7 +737,13 @@
       </p:grpSpPr>
       <p:sp>
         <p:nvSpPr>
-          <p:cNvPr id="2" name="Slide Image Placeholder 1"/>
+          <p:cNvPr id="2" name="Slide Image Placeholder 1">
+            <a:extLst>
+              <a:ext uri="{FF2B5EF4-FFF2-40B4-BE49-F238E27FC236}">
+                <a16:creationId xmlns:a16="http://schemas.microsoft.com/office/drawing/2014/main" id="{1BE188CA-3AD0-ABA1-A1D4-9042D51B1C76}"/>
+              </a:ext>
+            </a:extLst>
+          </p:cNvPr>
           <p:cNvSpPr>
             <a:spLocks noGrp="1" noRot="1" noChangeAspect="1"/>
           </p:cNvSpPr>
@@ -941,7 +755,13 @@
       </p:sp>
       <p:sp>
         <p:nvSpPr>
-          <p:cNvPr id="3" name="Notes Placeholder 2"/>
+          <p:cNvPr id="3" name="Notes Placeholder 2">
+            <a:extLst>
+              <a:ext uri="{FF2B5EF4-FFF2-40B4-BE49-F238E27FC236}">
+                <a16:creationId xmlns:a16="http://schemas.microsoft.com/office/drawing/2014/main" id="{04318B1B-BB58-12C3-5AEB-02FA551FA4C1}"/>
+              </a:ext>
+            </a:extLst>
+          </p:cNvPr>
           <p:cNvSpPr>
             <a:spLocks noGrp="1"/>
           </p:cNvSpPr>
@@ -956,15 +776,20 @@
           <a:p>
             <a:r>
               <a:rPr lang="en-US" dirty="0"/>
-              <a:t>프로젝트를 마치며 느낀 점입니다. 쇼핑몰을 이용만 해봤지, 직접 만들어보니 정말 많은 요소가 필요하다는 걸 알게 됐어요. 시간 관리를 좀 더 잘했으면 좋았을 것 같고, 테스트를 더 꼼꼼하게 했어야 했다는 반성도 있습니다. 하지만 처음부터 끝까지 혼자 만들어본 경험은 정말 값지다고 생각해요.</a:t>
-            </a:r>
-            <a:endParaRPr lang="en-US" dirty="0"/>
-          </a:p>
-        </p:txBody>
-      </p:sp>
-      <p:sp>
-        <p:nvSpPr>
-          <p:cNvPr id="4" name="Slide Number Placeholder 3"/>
+              <a:t>네 번째는 관리자 화면입니다. 관리자로 로그인하면 상품을 추가하거나 수정할 수 있고, 메인 배너 이미지도 바꿀 수 있어요. FAQ나 공지사항 같은 커뮤니티 게시판도 관리할 수 있습니다. 드래그해서 배너 순서를 바꾸거나, 상품에 NEW, HOT 같은 배지를 붙이는 것도 가능해요.</a:t>
+            </a:r>
+          </a:p>
+        </p:txBody>
+      </p:sp>
+      <p:sp>
+        <p:nvSpPr>
+          <p:cNvPr id="4" name="Slide Number Placeholder 3">
+            <a:extLst>
+              <a:ext uri="{FF2B5EF4-FFF2-40B4-BE49-F238E27FC236}">
+                <a16:creationId xmlns:a16="http://schemas.microsoft.com/office/drawing/2014/main" id="{E97891F5-BC28-7722-D9DC-0A2366AE5F75}"/>
+              </a:ext>
+            </a:extLst>
+          </p:cNvPr>
           <p:cNvSpPr>
             <a:spLocks noGrp="1"/>
           </p:cNvSpPr>
@@ -988,7 +813,7 @@
     </p:spTree>
     <p:extLst>
       <p:ext uri="{BB962C8B-B14F-4D97-AF65-F5344CB8AC3E}">
-        <p14:creationId xmlns:p14="http://schemas.microsoft.com/office/powerpoint/2010/main" val="1024086991"/>
+        <p14:creationId xmlns:p14="http://schemas.microsoft.com/office/powerpoint/2010/main" val="776728599"/>
       </p:ext>
     </p:extLst>
   </p:cSld>
@@ -1044,9 +869,8 @@
           <a:p>
             <a:r>
               <a:rPr lang="en-US" dirty="0"/>
-              <a:t>이상으로 VARO 쇼핑몰 발표를 마칩니다. 궁금하신 점이 있으시면 편하게 질문해 주세요. 감사합니다.</a:t>
-            </a:r>
-            <a:endParaRPr lang="en-US" dirty="0"/>
+              <a:t>이제 실제 VARO 쇼핑몰을 라이브로 보여드리겠습니다. 메인 페이지부터 상품 검색, 장바구니, 결제, 그리고 관리자 화면까지 순서대로 시연하겠습니다.</a:t>
+            </a:r>
           </a:p>
         </p:txBody>
       </p:sp>
@@ -1068,6 +892,188 @@
             <a:fld id="{F7021451-1387-4CA6-816F-3879F97B5CBC}" type="slidenum">
               <a:rPr lang="en-US"/>
               <a:t>15</a:t>
+            </a:fld>
+            <a:endParaRPr lang="en-US"/>
+          </a:p>
+        </p:txBody>
+      </p:sp>
+    </p:spTree>
+    <p:extLst>
+      <p:ext uri="{BB962C8B-B14F-4D97-AF65-F5344CB8AC3E}">
+        <p14:creationId xmlns:p14="http://schemas.microsoft.com/office/powerpoint/2010/main" val="1024086991"/>
+      </p:ext>
+    </p:extLst>
+  </p:cSld>
+  <p:clrMapOvr>
+    <a:masterClrMapping/>
+  </p:clrMapOvr>
+</p:notes>
+</file>
+
+<file path=ppt/notesSlides/notesSlide16.xml><?xml version="1.0" encoding="utf-8"?>
+<p:notes xmlns:a="http://schemas.openxmlformats.org/drawingml/2006/main" xmlns:r="http://schemas.openxmlformats.org/officeDocument/2006/relationships" xmlns:p="http://schemas.openxmlformats.org/presentationml/2006/main">
+  <p:cSld>
+    <p:spTree>
+      <p:nvGrpSpPr>
+        <p:cNvPr id="1" name=""/>
+        <p:cNvGrpSpPr/>
+        <p:nvPr/>
+      </p:nvGrpSpPr>
+      <p:grpSpPr>
+        <a:xfrm>
+          <a:off x="0" y="0"/>
+          <a:ext cx="0" cy="0"/>
+          <a:chOff x="0" y="0"/>
+          <a:chExt cx="0" cy="0"/>
+        </a:xfrm>
+      </p:grpSpPr>
+      <p:sp>
+        <p:nvSpPr>
+          <p:cNvPr id="2" name="Slide Image Placeholder 1"/>
+          <p:cNvSpPr>
+            <a:spLocks noGrp="1" noRot="1" noChangeAspect="1"/>
+          </p:cNvSpPr>
+          <p:nvPr>
+            <p:ph type="sldImg"/>
+          </p:nvPr>
+        </p:nvSpPr>
+        <p:spPr/>
+      </p:sp>
+      <p:sp>
+        <p:nvSpPr>
+          <p:cNvPr id="3" name="Notes Placeholder 2"/>
+          <p:cNvSpPr>
+            <a:spLocks noGrp="1"/>
+          </p:cNvSpPr>
+          <p:nvPr>
+            <p:ph type="body" idx="1"/>
+          </p:nvPr>
+        </p:nvSpPr>
+        <p:spPr/>
+        <p:txBody>
+          <a:bodyPr/>
+          <a:lstStyle/>
+          <a:p>
+            <a:r>
+              <a:rPr lang="en-US" dirty="0"/>
+              <a:t>프로젝트를 마치며 느낀 점입니다. 쇼핑몰을 이용만 해봤지, 직접 만들어보니 정말 많은 요소가 필요하다는 걸 알게 됐어요. 시간 관리를 좀 더 잘했으면 좋았을 것 같고, 테스트를 더 꼼꼼하게 했어야 했다는 반성도 있습니다. 하지만 처음부터 끝까지 혼자 만들어본 경험은 정말 값지다고 </a:t>
+            </a:r>
+            <a:r>
+              <a:rPr lang="en-US" dirty="0" err="1"/>
+              <a:t>생각해요</a:t>
+            </a:r>
+            <a:r>
+              <a:rPr lang="en-US" dirty="0"/>
+              <a:t>.</a:t>
+            </a:r>
+          </a:p>
+        </p:txBody>
+      </p:sp>
+      <p:sp>
+        <p:nvSpPr>
+          <p:cNvPr id="4" name="Slide Number Placeholder 3"/>
+          <p:cNvSpPr>
+            <a:spLocks noGrp="1"/>
+          </p:cNvSpPr>
+          <p:nvPr>
+            <p:ph type="sldNum" sz="quarter" idx="10"/>
+          </p:nvPr>
+        </p:nvSpPr>
+        <p:spPr/>
+        <p:txBody>
+          <a:bodyPr/>
+          <a:lstStyle/>
+          <a:p>
+            <a:fld id="{F7021451-1387-4CA6-816F-3879F97B5CBC}" type="slidenum">
+              <a:rPr lang="en-US"/>
+              <a:t>16</a:t>
+            </a:fld>
+            <a:endParaRPr lang="en-US"/>
+          </a:p>
+        </p:txBody>
+      </p:sp>
+    </p:spTree>
+    <p:extLst>
+      <p:ext uri="{BB962C8B-B14F-4D97-AF65-F5344CB8AC3E}">
+        <p14:creationId xmlns:p14="http://schemas.microsoft.com/office/powerpoint/2010/main" val="1024086991"/>
+      </p:ext>
+    </p:extLst>
+  </p:cSld>
+  <p:clrMapOvr>
+    <a:masterClrMapping/>
+  </p:clrMapOvr>
+</p:notes>
+</file>
+
+<file path=ppt/notesSlides/notesSlide17.xml><?xml version="1.0" encoding="utf-8"?>
+<p:notes xmlns:a="http://schemas.openxmlformats.org/drawingml/2006/main" xmlns:r="http://schemas.openxmlformats.org/officeDocument/2006/relationships" xmlns:p="http://schemas.openxmlformats.org/presentationml/2006/main">
+  <p:cSld>
+    <p:spTree>
+      <p:nvGrpSpPr>
+        <p:cNvPr id="1" name=""/>
+        <p:cNvGrpSpPr/>
+        <p:nvPr/>
+      </p:nvGrpSpPr>
+      <p:grpSpPr>
+        <a:xfrm>
+          <a:off x="0" y="0"/>
+          <a:ext cx="0" cy="0"/>
+          <a:chOff x="0" y="0"/>
+          <a:chExt cx="0" cy="0"/>
+        </a:xfrm>
+      </p:grpSpPr>
+      <p:sp>
+        <p:nvSpPr>
+          <p:cNvPr id="2" name="Slide Image Placeholder 1"/>
+          <p:cNvSpPr>
+            <a:spLocks noGrp="1" noRot="1" noChangeAspect="1"/>
+          </p:cNvSpPr>
+          <p:nvPr>
+            <p:ph type="sldImg"/>
+          </p:nvPr>
+        </p:nvSpPr>
+        <p:spPr/>
+      </p:sp>
+      <p:sp>
+        <p:nvSpPr>
+          <p:cNvPr id="3" name="Notes Placeholder 2"/>
+          <p:cNvSpPr>
+            <a:spLocks noGrp="1"/>
+          </p:cNvSpPr>
+          <p:nvPr>
+            <p:ph type="body" idx="1"/>
+          </p:nvPr>
+        </p:nvSpPr>
+        <p:spPr/>
+        <p:txBody>
+          <a:bodyPr/>
+          <a:lstStyle/>
+          <a:p>
+            <a:r>
+              <a:rPr lang="en-US" dirty="0"/>
+              <a:t>이상으로 VARO 쇼핑몰 발표를 마칩니다. 궁금하신 점이 있으시면 편하게 질문해 주세요. 감사합니다.</a:t>
+            </a:r>
+          </a:p>
+        </p:txBody>
+      </p:sp>
+      <p:sp>
+        <p:nvSpPr>
+          <p:cNvPr id="4" name="Slide Number Placeholder 3"/>
+          <p:cNvSpPr>
+            <a:spLocks noGrp="1"/>
+          </p:cNvSpPr>
+          <p:nvPr>
+            <p:ph type="sldNum" sz="quarter" idx="10"/>
+          </p:nvPr>
+        </p:nvSpPr>
+        <p:spPr/>
+        <p:txBody>
+          <a:bodyPr/>
+          <a:lstStyle/>
+          <a:p>
+            <a:fld id="{F7021451-1387-4CA6-816F-3879F97B5CBC}" type="slidenum">
+              <a:rPr lang="en-US"/>
+              <a:t>17</a:t>
             </a:fld>
             <a:endParaRPr lang="en-US"/>
           </a:p>
@@ -1134,7 +1140,6 @@
               <a:rPr lang="en-US" dirty="0"/>
               <a:t>오늘 발표 순서입니다. 먼저 프로젝트가 뭔지 간단히 소개하고, 어떤 기술을 썼는지, 어떻게 설계했는지 말씀드릴게요. 그 다음에 주요 기능들을 하나씩 보여드리고, 실제 동작하는 화면도 시연해 드리겠습니다. 마지막으로 이 프로젝트를 하면서 느낀 점을 공유하겠습니다.</a:t>
             </a:r>
-            <a:endParaRPr lang="en-US" dirty="0"/>
           </a:p>
         </p:txBody>
       </p:sp>
@@ -1222,7 +1227,6 @@
               <a:rPr lang="en-US" dirty="0"/>
               <a:t>VARO는 남성 패션 쇼핑몰입니다. 그냥 상품을 보여주는 단순한 사이트가 아니라, 회원이 아닌 분도 주문할 수 있고, 관리자가 매출을 한눈에 볼 수 있는 관리 화면까지 갖춘 종합 쇼핑몰이에요. 총 12가지 핵심 기능을 정의하고, 그걸 모두 구현하는 걸 목표로 했습니다.</a:t>
             </a:r>
-            <a:endParaRPr lang="en-US" dirty="0"/>
           </a:p>
         </p:txBody>
       </p:sp>
@@ -1310,7 +1314,6 @@
               <a:rPr lang="en-US" dirty="0"/>
               <a:t>사용한 기술들입니다. 쉽게 말하면, 화면에 보이는 부분은 자바스크립트와 CSS로 직접 만들었고, 뒤에서 데이터를 처리하는 서버는 Node.js라는 걸 썼어요. 상품이나 회원 정보를 저장하는 데이터베이스는 MySQL을 사용했고, 엑셀 데이터를 자동으로 읽어오는 기능도 넣었습니다.</a:t>
             </a:r>
-            <a:endParaRPr lang="en-US" dirty="0"/>
           </a:p>
         </p:txBody>
       </p:sp>
@@ -1398,7 +1401,6 @@
               <a:rPr lang="en-US" dirty="0"/>
               <a:t>이 화면은 프로젝트를 시작하기 전에 어떤 기능이 필요한지 정리한 요구사항 정의서입니다. 회원가입, 로그인, 상품 관리, 장바구니, 결제 같은 기능들을 하나하나 목록으로 만들고, 각각의 중요도를 매겨서 우선순위를 정했어요. 이렇게 미리 정리해두니까 개발할 때 빠뜨리는 기능 없이 체계적으로 진행할 수 있었습니다.</a:t>
             </a:r>
-            <a:endParaRPr lang="en-US" dirty="0"/>
           </a:p>
         </p:txBody>
       </p:sp>
@@ -1486,7 +1488,6 @@
               <a:rPr lang="en-US" dirty="0"/>
               <a:t>시스템 구조를 간단히 설명드리면, 3층짜리 건물이라고 생각하시면 돼요. 1층은 사용자가 보는 화면, 2층은 데이터를 처리하는 서버, 3층은 정보를 저장하는 데이터베이스예요. 사용자가 상품을 클릭하면, 서버가 데이터베이스에서 정보를 가져와서 화면에 보여주는 방식입니다.</a:t>
             </a:r>
-            <a:endParaRPr lang="en-US" dirty="0"/>
           </a:p>
         </p:txBody>
       </p:sp>
@@ -1574,7 +1575,6 @@
               <a:rPr lang="en-US" dirty="0"/>
               <a:t>이 다이어그램은 쇼핑몰을 누가, 어떻게 사용하는지를 그림으로 정리한 거예요. 왼쪽에 비회원, 아래쪽에 회원, 오른쪽에 관리자가 있고, 각각 할 수 있는 기능이 다릅니다. 비회원은 상품 검색과 주문만 가능하고, 회원은 리뷰 작성이나 장바구니 같은 추가 기능을 쓸 수 있어요. 관리자는 매출 확인이나 상품 관리 같은 운영 기능을 담당합니다.</a:t>
             </a:r>
-            <a:endParaRPr lang="en-US" dirty="0"/>
           </a:p>
         </p:txBody>
       </p:sp>
@@ -1662,7 +1662,6 @@
               <a:rPr lang="en-US" dirty="0"/>
               <a:t>ER 다이어그램은 쉽게 말해서 데이터를 어떤 구조로 저장할지 설계한 도면이에요. 총 11개의 테이블, 그러니까 11개의 정보 저장 공간을 만들었어요. 예를 들어 회원 정보, 상품 정보, 주문 내역 등이 각각 따로 저장되고, 서로 연결되어 있어서 '누가 어떤 상품을 주문했는지' 같은 정보를 쉽게 찾을 수 있습니다.</a:t>
             </a:r>
-            <a:endParaRPr lang="en-US" dirty="0"/>
           </a:p>
         </p:txBody>
       </p:sp>
@@ -1750,7 +1749,6 @@
               <a:rPr lang="en-US" dirty="0"/>
               <a:t>첫 번째 주요 기능은 로그인입니다. 직접 아이디와 비밀번호를 만들어서 가입할 수도 있고, 네이버, 카카오, 구글 같은 소셜 계정으로 간편하게 로그인할 수도 있어요. 보안을 위해서 JWT라는 방식으로 로그인 상태를 안전하게 관리하고 있습니다. 비밀번호는 암호화해서 저장하기 때문에 관리자도 볼 수 없어요.</a:t>
             </a:r>
-            <a:endParaRPr lang="en-US" dirty="0"/>
           </a:p>
         </p:txBody>
       </p:sp>
@@ -1823,6 +1821,11 @@
 <file path=ppt/slideMasters/slideMaster1.xml><?xml version="1.0" encoding="utf-8"?>
 <p:sldMaster xmlns:a="http://schemas.openxmlformats.org/drawingml/2006/main" xmlns:r="http://schemas.openxmlformats.org/officeDocument/2006/relationships" xmlns:p="http://schemas.openxmlformats.org/presentationml/2006/main">
   <p:cSld>
+    <p:bg>
+      <p:bgRef idx="1001">
+        <a:schemeClr val="bg1"/>
+      </p:bgRef>
+    </p:bg>
     <p:spTree>
       <p:nvGrpSpPr>
         <p:cNvPr id="1" name=""/>
@@ -2133,6 +2136,13 @@
           </a:solidFill>
           <a:ln/>
         </p:spPr>
+        <p:txBody>
+          <a:bodyPr/>
+          <a:lstStyle/>
+          <a:p>
+            <a:endParaRPr lang="ko-KR" altLang="en-US"/>
+          </a:p>
+        </p:txBody>
       </p:sp>
       <p:sp>
         <p:nvSpPr>
@@ -2155,6 +2165,13 @@
           </a:solidFill>
           <a:ln/>
         </p:spPr>
+        <p:txBody>
+          <a:bodyPr/>
+          <a:lstStyle/>
+          <a:p>
+            <a:endParaRPr lang="ko-KR" altLang="en-US"/>
+          </a:p>
+        </p:txBody>
       </p:sp>
       <p:sp>
         <p:nvSpPr>
@@ -2177,6 +2194,13 @@
           </a:solidFill>
           <a:ln/>
         </p:spPr>
+        <p:txBody>
+          <a:bodyPr/>
+          <a:lstStyle/>
+          <a:p>
+            <a:endParaRPr lang="ko-KR" altLang="en-US"/>
+          </a:p>
+        </p:txBody>
       </p:sp>
       <p:sp>
         <p:nvSpPr>
@@ -2199,17 +2223,24 @@
           </a:solidFill>
           <a:ln/>
         </p:spPr>
+        <p:txBody>
+          <a:bodyPr/>
+          <a:lstStyle/>
+          <a:p>
+            <a:endParaRPr lang="ko-KR" altLang="en-US"/>
+          </a:p>
+        </p:txBody>
       </p:sp>
       <p:pic>
         <p:nvPicPr>
-          <p:cNvPr id="6" name="Image 0" descr="preencoded.png">    </p:cNvPr>
+          <p:cNvPr id="6" name="Image 0" descr="preencoded.png"/>
           <p:cNvPicPr>
             <a:picLocks noChangeAspect="1"/>
           </p:cNvPicPr>
           <p:nvPr/>
         </p:nvPicPr>
         <p:blipFill>
-          <a:blip r:embed="rId1"/>
+          <a:blip r:embed="rId3"/>
           <a:stretch>
             <a:fillRect/>
           </a:stretch>
@@ -2232,8 +2263,8 @@
         </p:nvSpPr>
         <p:spPr>
           <a:xfrm>
-            <a:off x="7130650" y="3638550"/>
-            <a:ext cx="4026700" cy="1695450"/>
+            <a:off x="7130649" y="3638550"/>
+            <a:ext cx="4267023" cy="1695450"/>
           </a:xfrm>
           <a:prstGeom prst="rect">
             <a:avLst/>
@@ -2247,11 +2278,11 @@
           </a:bodyPr>
           <a:lstStyle/>
           <a:p>
-            <a:pPr algn="ctr" indent="0" marL="0">
+            <a:pPr marL="0" indent="0" algn="ctr">
               <a:buNone/>
             </a:pPr>
             <a:r>
-              <a:rPr lang="en-US" sz="9750" b="1" spc="1050" kern="0" dirty="0">
+              <a:rPr lang="en-US" sz="9750" b="1" kern="0" spc="1050" dirty="0">
                 <a:solidFill>
                   <a:srgbClr val="5C4A33"/>
                 </a:solidFill>
@@ -2288,11 +2319,11 @@
           </a:bodyPr>
           <a:lstStyle/>
           <a:p>
-            <a:pPr algn="ctr" indent="0" marL="0">
+            <a:pPr marL="0" indent="0" algn="ctr">
               <a:buNone/>
             </a:pPr>
             <a:r>
-              <a:rPr lang="en-US" sz="2250" spc="600" kern="0" dirty="0">
+              <a:rPr lang="en-US" sz="2250" kern="0" spc="600" dirty="0">
                 <a:solidFill>
                   <a:srgbClr val="9A7D52"/>
                 </a:solidFill>
@@ -2325,6 +2356,13 @@
           </a:solidFill>
           <a:ln/>
         </p:spPr>
+        <p:txBody>
+          <a:bodyPr/>
+          <a:lstStyle/>
+          <a:p>
+            <a:endParaRPr lang="ko-KR" altLang="en-US"/>
+          </a:p>
+        </p:txBody>
       </p:sp>
       <p:sp>
         <p:nvSpPr>
@@ -2345,11 +2383,11 @@
         </p:spPr>
         <p:txBody>
           <a:bodyPr wrap="square" lIns="25400" tIns="25400" rIns="25400" bIns="25400" rtlCol="0" anchor="t">
-            <a:normAutofit/>
+            <a:normAutofit fontScale="92500" lnSpcReduction="10000"/>
           </a:bodyPr>
           <a:lstStyle/>
           <a:p>
-            <a:pPr algn="ctr" indent="0" marL="0">
+            <a:pPr marL="0" indent="0" algn="ctr">
               <a:lnSpc>
                 <a:spcPct val="200000"/>
               </a:lnSpc>
@@ -2364,7 +2402,26 @@
                 <a:ea typeface="Arial" pitchFamily="34" charset="-122"/>
                 <a:cs typeface="Arial" pitchFamily="34" charset="-120"/>
               </a:rPr>
-              <a:t>발표자 : 오하율 2026. 04. 30</a:t>
+              <a:t>발표자 : 오하율 </a:t>
+            </a:r>
+          </a:p>
+          <a:p>
+            <a:pPr marL="0" indent="0" algn="ctr">
+              <a:lnSpc>
+                <a:spcPct val="200000"/>
+              </a:lnSpc>
+              <a:buNone/>
+            </a:pPr>
+            <a:r>
+              <a:rPr lang="en-US" sz="1950" dirty="0">
+                <a:solidFill>
+                  <a:srgbClr val="7A6243"/>
+                </a:solidFill>
+                <a:latin typeface="Arial" pitchFamily="34" charset="0"/>
+                <a:ea typeface="Arial" pitchFamily="34" charset="-122"/>
+                <a:cs typeface="Arial" pitchFamily="34" charset="-120"/>
+              </a:rPr>
+              <a:t>2026. 04. 30</a:t>
             </a:r>
             <a:endParaRPr lang="en-US" sz="1950" dirty="0"/>
           </a:p>
@@ -2386,6 +2443,7 @@
         <a:solidFill>
           <a:srgbClr val="FAF7F2"/>
         </a:solidFill>
+        <a:effectLst/>
       </p:bgPr>
     </p:bg>
     <p:spTree>
@@ -2421,11 +2479,11 @@
         </p:spPr>
         <p:txBody>
           <a:bodyPr wrap="square" lIns="25400" tIns="25400" rIns="25400" bIns="25400" rtlCol="0" anchor="t">
-            <a:normAutofit/>
+            <a:normAutofit fontScale="92500" lnSpcReduction="20000"/>
           </a:bodyPr>
           <a:lstStyle/>
           <a:p>
-            <a:pPr algn="l" indent="0" marL="0">
+            <a:pPr marL="0" indent="0" algn="l">
               <a:lnSpc>
                 <a:spcPct val="100000"/>
               </a:lnSpc>
@@ -2469,7 +2527,7 @@
           </a:bodyPr>
           <a:lstStyle/>
           <a:p>
-            <a:pPr algn="l" indent="0" marL="0">
+            <a:pPr marL="0" indent="0" algn="l">
               <a:buNone/>
             </a:pPr>
             <a:r>
@@ -2510,7 +2568,7 @@
           </a:bodyPr>
           <a:lstStyle/>
           <a:p>
-            <a:pPr algn="l" indent="0" marL="0">
+            <a:pPr marL="0" indent="0" algn="l">
               <a:lnSpc>
                 <a:spcPct val="180000"/>
               </a:lnSpc>
@@ -2552,6 +2610,14 @@
           </a:solidFill>
           <a:ln/>
         </p:spPr>
+        <p:txBody>
+          <a:bodyPr anchor="ctr"/>
+          <a:lstStyle/>
+          <a:p>
+            <a:pPr algn="ctr"/>
+            <a:endParaRPr lang="ko-KR" altLang="en-US"/>
+          </a:p>
+        </p:txBody>
       </p:sp>
       <p:sp>
         <p:nvSpPr>
@@ -2561,7 +2627,7 @@
         </p:nvSpPr>
         <p:spPr>
           <a:xfrm>
-            <a:off x="1143000" y="6834188"/>
+            <a:off x="1104900" y="6834188"/>
             <a:ext cx="1191816" cy="371475"/>
           </a:xfrm>
           <a:prstGeom prst="rect">
@@ -2571,12 +2637,12 @@
           <a:ln/>
         </p:spPr>
         <p:txBody>
-          <a:bodyPr wrap="square" lIns="25400" tIns="25400" rIns="25400" bIns="25400" rtlCol="0" anchor="t">
-            <a:normAutofit/>
+          <a:bodyPr wrap="square" lIns="25400" tIns="25400" rIns="25400" bIns="25400" rtlCol="0" anchor="ctr">
+            <a:normAutofit fontScale="92500"/>
           </a:bodyPr>
           <a:lstStyle/>
           <a:p>
-            <a:pPr algn="l" indent="0" marL="0">
+            <a:pPr marL="0" indent="0" algn="ctr">
               <a:buNone/>
             </a:pPr>
             <a:r>
@@ -2615,6 +2681,14 @@
           </a:solidFill>
           <a:ln/>
         </p:spPr>
+        <p:txBody>
+          <a:bodyPr anchor="ctr"/>
+          <a:lstStyle/>
+          <a:p>
+            <a:pPr algn="ctr"/>
+            <a:endParaRPr lang="ko-KR" altLang="en-US"/>
+          </a:p>
+        </p:txBody>
       </p:sp>
       <p:sp>
         <p:nvSpPr>
@@ -2624,7 +2698,7 @@
         </p:nvSpPr>
         <p:spPr>
           <a:xfrm>
-            <a:off x="2796332" y="6834188"/>
+            <a:off x="2758232" y="6834188"/>
             <a:ext cx="1402110" cy="371475"/>
           </a:xfrm>
           <a:prstGeom prst="rect">
@@ -2634,12 +2708,12 @@
           <a:ln/>
         </p:spPr>
         <p:txBody>
-          <a:bodyPr wrap="square" lIns="25400" tIns="25400" rIns="25400" bIns="25400" rtlCol="0" anchor="t">
-            <a:normAutofit/>
+          <a:bodyPr wrap="square" lIns="25400" tIns="25400" rIns="25400" bIns="25400" rtlCol="0" anchor="ctr">
+            <a:normAutofit fontScale="85000" lnSpcReduction="10000"/>
           </a:bodyPr>
           <a:lstStyle/>
           <a:p>
-            <a:pPr algn="l" indent="0" marL="0">
+            <a:pPr marL="0" indent="0" algn="ctr">
               <a:buNone/>
             </a:pPr>
             <a:r>
@@ -2678,6 +2752,14 @@
           </a:solidFill>
           <a:ln/>
         </p:spPr>
+        <p:txBody>
+          <a:bodyPr anchor="ctr"/>
+          <a:lstStyle/>
+          <a:p>
+            <a:pPr algn="ctr"/>
+            <a:endParaRPr lang="ko-KR" altLang="en-US"/>
+          </a:p>
+        </p:txBody>
       </p:sp>
       <p:sp>
         <p:nvSpPr>
@@ -2687,7 +2769,7 @@
         </p:nvSpPr>
         <p:spPr>
           <a:xfrm>
-            <a:off x="4659957" y="6834188"/>
+            <a:off x="4621857" y="6834188"/>
             <a:ext cx="981521" cy="371475"/>
           </a:xfrm>
           <a:prstGeom prst="rect">
@@ -2697,12 +2779,12 @@
           <a:ln/>
         </p:spPr>
         <p:txBody>
-          <a:bodyPr wrap="square" lIns="25400" tIns="25400" rIns="25400" bIns="25400" rtlCol="0" anchor="t">
-            <a:normAutofit/>
+          <a:bodyPr wrap="square" lIns="25400" tIns="25400" rIns="25400" bIns="25400" rtlCol="0" anchor="ctr">
+            <a:normAutofit fontScale="92500"/>
           </a:bodyPr>
           <a:lstStyle/>
           <a:p>
-            <a:pPr algn="l" indent="0" marL="0">
+            <a:pPr marL="0" indent="0" algn="ctr">
               <a:buNone/>
             </a:pPr>
             <a:r>
@@ -2738,24 +2820,31 @@
           </a:prstGeom>
           <a:ln/>
           <a:effectLst>
-            <a:outerShdw sx="100000" sy="100000" kx="0" ky="0" algn="bl" rotWithShape="0" blurRad="381000" dist="76200" dir="5400000">
+            <a:outerShdw blurRad="381000" dist="76200" dir="5400000" algn="bl" rotWithShape="0">
               <a:srgbClr val="3D3224">
                 <a:alpha val="12000"/>
               </a:srgbClr>
             </a:outerShdw>
           </a:effectLst>
         </p:spPr>
+        <p:txBody>
+          <a:bodyPr/>
+          <a:lstStyle/>
+          <a:p>
+            <a:endParaRPr lang="ko-KR" altLang="en-US"/>
+          </a:p>
+        </p:txBody>
       </p:sp>
       <p:pic>
         <p:nvPicPr>
-          <p:cNvPr id="12" name="Image 0" descr="preencoded.png">    </p:cNvPr>
+          <p:cNvPr id="12" name="Image 0" descr="preencoded.png"/>
           <p:cNvPicPr>
             <a:picLocks noChangeAspect="1"/>
           </p:cNvPicPr>
           <p:nvPr/>
         </p:nvPicPr>
         <p:blipFill>
-          <a:blip r:embed="rId1"/>
+          <a:blip r:embed="rId3"/>
           <a:stretch>
             <a:fillRect/>
           </a:stretch>
@@ -2786,6 +2875,7 @@
         <a:solidFill>
           <a:srgbClr val="3D3224"/>
         </a:solidFill>
+        <a:effectLst/>
       </p:bgPr>
     </p:bg>
     <p:spTree>
@@ -2821,11 +2911,11 @@
         </p:spPr>
         <p:txBody>
           <a:bodyPr wrap="square" lIns="25400" tIns="25400" rIns="25400" bIns="25400" rtlCol="0" anchor="t">
-            <a:normAutofit/>
+            <a:normAutofit fontScale="92500" lnSpcReduction="20000"/>
           </a:bodyPr>
           <a:lstStyle/>
           <a:p>
-            <a:pPr algn="l" indent="0" marL="0">
+            <a:pPr marL="0" indent="0" algn="l">
               <a:lnSpc>
                 <a:spcPct val="100000"/>
               </a:lnSpc>
@@ -2869,7 +2959,7 @@
           </a:bodyPr>
           <a:lstStyle/>
           <a:p>
-            <a:pPr algn="l" indent="0" marL="0">
+            <a:pPr marL="0" indent="0" algn="l">
               <a:buNone/>
             </a:pPr>
             <a:r>
@@ -2910,7 +3000,7 @@
           </a:bodyPr>
           <a:lstStyle/>
           <a:p>
-            <a:pPr algn="l" indent="0" marL="0">
+            <a:pPr marL="0" indent="0" algn="l">
               <a:lnSpc>
                 <a:spcPct val="180000"/>
               </a:lnSpc>
@@ -2952,6 +3042,14 @@
           </a:solidFill>
           <a:ln/>
         </p:spPr>
+        <p:txBody>
+          <a:bodyPr anchor="ctr"/>
+          <a:lstStyle/>
+          <a:p>
+            <a:pPr algn="ctr"/>
+            <a:endParaRPr lang="ko-KR" altLang="en-US"/>
+          </a:p>
+        </p:txBody>
       </p:sp>
       <p:sp>
         <p:nvSpPr>
@@ -2961,7 +3059,7 @@
         </p:nvSpPr>
         <p:spPr>
           <a:xfrm>
-            <a:off x="1143000" y="6834188"/>
+            <a:off x="1104900" y="6834188"/>
             <a:ext cx="981521" cy="371475"/>
           </a:xfrm>
           <a:prstGeom prst="rect">
@@ -2971,12 +3069,12 @@
           <a:ln/>
         </p:spPr>
         <p:txBody>
-          <a:bodyPr wrap="square" lIns="25400" tIns="25400" rIns="25400" bIns="25400" rtlCol="0" anchor="t">
-            <a:normAutofit/>
+          <a:bodyPr wrap="square" lIns="25400" tIns="25400" rIns="25400" bIns="25400" rtlCol="0" anchor="ctr">
+            <a:normAutofit fontScale="92500"/>
           </a:bodyPr>
           <a:lstStyle/>
           <a:p>
-            <a:pPr algn="l" indent="0" marL="0">
+            <a:pPr marL="0" indent="0" algn="ctr">
               <a:buNone/>
             </a:pPr>
             <a:r>
@@ -3015,6 +3113,14 @@
           </a:solidFill>
           <a:ln/>
         </p:spPr>
+        <p:txBody>
+          <a:bodyPr anchor="ctr"/>
+          <a:lstStyle/>
+          <a:p>
+            <a:pPr algn="ctr"/>
+            <a:endParaRPr lang="ko-KR" altLang="en-US"/>
+          </a:p>
+        </p:txBody>
       </p:sp>
       <p:sp>
         <p:nvSpPr>
@@ -3024,7 +3130,7 @@
         </p:nvSpPr>
         <p:spPr>
           <a:xfrm>
-            <a:off x="2586038" y="6834188"/>
+            <a:off x="2547938" y="6834188"/>
             <a:ext cx="1191816" cy="371475"/>
           </a:xfrm>
           <a:prstGeom prst="rect">
@@ -3034,12 +3140,12 @@
           <a:ln/>
         </p:spPr>
         <p:txBody>
-          <a:bodyPr wrap="square" lIns="25400" tIns="25400" rIns="25400" bIns="25400" rtlCol="0" anchor="t">
-            <a:normAutofit/>
+          <a:bodyPr wrap="square" lIns="25400" tIns="25400" rIns="25400" bIns="25400" rtlCol="0" anchor="ctr">
+            <a:normAutofit fontScale="92500"/>
           </a:bodyPr>
           <a:lstStyle/>
           <a:p>
-            <a:pPr algn="l" indent="0" marL="0">
+            <a:pPr marL="0" indent="0" algn="ctr">
               <a:buNone/>
             </a:pPr>
             <a:r>
@@ -3078,6 +3184,14 @@
           </a:solidFill>
           <a:ln/>
         </p:spPr>
+        <p:txBody>
+          <a:bodyPr anchor="ctr"/>
+          <a:lstStyle/>
+          <a:p>
+            <a:pPr algn="ctr"/>
+            <a:endParaRPr lang="ko-KR" altLang="en-US"/>
+          </a:p>
+        </p:txBody>
       </p:sp>
       <p:sp>
         <p:nvSpPr>
@@ -3087,7 +3201,7 @@
         </p:nvSpPr>
         <p:spPr>
           <a:xfrm>
-            <a:off x="4239369" y="6834188"/>
+            <a:off x="4201269" y="6834188"/>
             <a:ext cx="1338114" cy="371475"/>
           </a:xfrm>
           <a:prstGeom prst="rect">
@@ -3097,12 +3211,12 @@
           <a:ln/>
         </p:spPr>
         <p:txBody>
-          <a:bodyPr wrap="square" lIns="25400" tIns="25400" rIns="25400" bIns="25400" rtlCol="0" anchor="t">
-            <a:normAutofit/>
+          <a:bodyPr wrap="square" lIns="25400" tIns="25400" rIns="25400" bIns="25400" rtlCol="0" anchor="ctr">
+            <a:normAutofit fontScale="85000" lnSpcReduction="10000"/>
           </a:bodyPr>
           <a:lstStyle/>
           <a:p>
-            <a:pPr algn="l" indent="0" marL="0">
+            <a:pPr marL="0" indent="0" algn="ctr">
               <a:buNone/>
             </a:pPr>
             <a:r>
@@ -3138,32 +3252,39 @@
           </a:prstGeom>
           <a:ln/>
           <a:effectLst>
-            <a:outerShdw sx="100000" sy="100000" kx="0" ky="0" algn="bl" rotWithShape="0" blurRad="381000" dist="76200" dir="5400000">
+            <a:outerShdw blurRad="381000" dist="76200" dir="5400000" algn="bl" rotWithShape="0">
               <a:srgbClr val="3D3224">
                 <a:alpha val="12000"/>
               </a:srgbClr>
             </a:outerShdw>
           </a:effectLst>
         </p:spPr>
+        <p:txBody>
+          <a:bodyPr/>
+          <a:lstStyle/>
+          <a:p>
+            <a:endParaRPr lang="ko-KR" altLang="en-US"/>
+          </a:p>
+        </p:txBody>
       </p:sp>
       <p:pic>
         <p:nvPicPr>
-          <p:cNvPr id="12" name="Image 0" descr="preencoded.png">    </p:cNvPr>
+          <p:cNvPr id="12" name="Image 0" descr="preencoded.png"/>
           <p:cNvPicPr>
             <a:picLocks noChangeAspect="1"/>
           </p:cNvPicPr>
           <p:nvPr/>
         </p:nvPicPr>
         <p:blipFill>
-          <a:blip r:embed="rId1"/>
+          <a:blip r:embed="rId3"/>
           <a:stretch>
             <a:fillRect/>
           </a:stretch>
         </p:blipFill>
         <p:spPr>
           <a:xfrm>
-            <a:off x="9410700" y="3471714"/>
-            <a:ext cx="7924800" cy="3534073"/>
+            <a:off x="9267443" y="3471714"/>
+            <a:ext cx="8458437" cy="3772049"/>
           </a:xfrm>
           <a:prstGeom prst="rect">
             <a:avLst/>
@@ -3186,6 +3307,7 @@
         <a:solidFill>
           <a:srgbClr val="FAF7F2"/>
         </a:solidFill>
+        <a:effectLst/>
       </p:bgPr>
     </p:bg>
     <p:spTree>
@@ -3225,7 +3347,7 @@
           </a:bodyPr>
           <a:lstStyle/>
           <a:p>
-            <a:pPr algn="l" indent="0" marL="0">
+            <a:pPr marL="0" indent="0" algn="l">
               <a:buNone/>
             </a:pPr>
             <a:r>
@@ -3266,11 +3388,11 @@
           </a:bodyPr>
           <a:lstStyle/>
           <a:p>
-            <a:pPr algn="l" indent="0" marL="0">
+            <a:pPr marL="0" indent="0" algn="l">
               <a:buNone/>
             </a:pPr>
             <a:r>
-              <a:rPr lang="en-US" sz="2550" dirty="0">
+              <a:rPr lang="en-US" sz="2400" dirty="0">
                 <a:solidFill>
                   <a:srgbClr val="9A7D52"/>
                 </a:solidFill>
@@ -3278,294 +3400,411 @@
                 <a:ea typeface="Arial" pitchFamily="34" charset="-122"/>
                 <a:cs typeface="Arial" pitchFamily="34" charset="-120"/>
               </a:rPr>
-              <a:t>상품 · 배너 · 커뮤니티를 한 곳에서 관리</a:t>
-            </a:r>
-            <a:endParaRPr lang="en-US" sz="2550" dirty="0"/>
-          </a:p>
-        </p:txBody>
-      </p:sp>
-      <p:sp>
-        <p:nvSpPr>
-          <p:cNvPr id="4" name="Shape 2"/>
-          <p:cNvSpPr/>
-          <p:nvPr/>
-        </p:nvSpPr>
-        <p:spPr>
-          <a:xfrm>
-            <a:off x="952500" y="3171825"/>
-            <a:ext cx="8058150" cy="4546104"/>
-          </a:xfrm>
-          <a:prstGeom prst="roundRect">
-            <a:avLst>
-              <a:gd name="adj" fmla="val 3352"/>
-            </a:avLst>
-          </a:prstGeom>
-          <a:solidFill>
-            <a:srgbClr val="FFFFFF"/>
-          </a:solidFill>
-          <a:ln/>
-          <a:effectLst>
-            <a:outerShdw sx="100000" sy="100000" kx="0" ky="0" algn="bl" rotWithShape="0" blurRad="228600" dist="38100" dir="5400000">
-              <a:srgbClr val="3D3224">
-                <a:alpha val="8000"/>
-              </a:srgbClr>
-            </a:outerShdw>
-          </a:effectLst>
-        </p:spPr>
-      </p:sp>
-      <p:pic>
-        <p:nvPicPr>
-          <p:cNvPr id="5" name="Image 0" descr="preencoded.png">    </p:cNvPr>
-          <p:cNvPicPr>
-            <a:picLocks noChangeAspect="1"/>
-          </p:cNvPicPr>
-          <p:nvPr/>
-        </p:nvPicPr>
-        <p:blipFill>
-          <a:blip r:embed="rId1"/>
-          <a:stretch>
-            <a:fillRect/>
-          </a:stretch>
-        </p:blipFill>
-        <p:spPr>
-          <a:xfrm>
-            <a:off x="952500" y="3171825"/>
-            <a:ext cx="8058150" cy="3619202"/>
-          </a:xfrm>
-          <a:prstGeom prst="rect">
-            <a:avLst/>
-          </a:prstGeom>
-        </p:spPr>
-      </p:pic>
-      <p:sp>
-        <p:nvSpPr>
-          <p:cNvPr id="6" name="Text 3"/>
-          <p:cNvSpPr/>
-          <p:nvPr/>
-        </p:nvSpPr>
-        <p:spPr>
-          <a:xfrm>
-            <a:off x="1181100" y="6981527"/>
-            <a:ext cx="7842694" cy="390525"/>
-          </a:xfrm>
-          <a:prstGeom prst="rect">
-            <a:avLst/>
-          </a:prstGeom>
-          <a:noFill/>
-          <a:ln/>
-        </p:spPr>
-        <p:txBody>
-          <a:bodyPr wrap="square" lIns="25400" tIns="25400" rIns="25400" bIns="25400" rtlCol="0" anchor="t">
-            <a:normAutofit/>
-          </a:bodyPr>
-          <a:lstStyle/>
-          <a:p>
-            <a:pPr algn="l" indent="0" marL="0">
-              <a:buNone/>
-            </a:pPr>
-            <a:r>
-              <a:rPr lang="en-US" sz="1950" b="1" dirty="0">
-                <a:solidFill>
-                  <a:srgbClr val="5C4A33"/>
-                </a:solidFill>
-                <a:latin typeface="Arial" pitchFamily="34" charset="0"/>
-                <a:ea typeface="Arial" pitchFamily="34" charset="-122"/>
-                <a:cs typeface="Arial" pitchFamily="34" charset="-120"/>
-              </a:rPr>
-              <a:t>상품 관리</a:t>
-            </a:r>
-            <a:endParaRPr lang="en-US" sz="1950" dirty="0"/>
-          </a:p>
-        </p:txBody>
-      </p:sp>
-      <p:sp>
-        <p:nvSpPr>
-          <p:cNvPr id="7" name="Shape 4"/>
-          <p:cNvSpPr/>
-          <p:nvPr/>
-        </p:nvSpPr>
-        <p:spPr>
-          <a:xfrm>
-            <a:off x="9277350" y="3171825"/>
-            <a:ext cx="8058150" cy="4546104"/>
-          </a:xfrm>
-          <a:prstGeom prst="roundRect">
-            <a:avLst>
-              <a:gd name="adj" fmla="val 3352"/>
-            </a:avLst>
-          </a:prstGeom>
-          <a:solidFill>
-            <a:srgbClr val="FFFFFF"/>
-          </a:solidFill>
-          <a:ln/>
-          <a:effectLst>
-            <a:outerShdw sx="100000" sy="100000" kx="0" ky="0" algn="bl" rotWithShape="0" blurRad="228600" dist="38100" dir="5400000">
-              <a:srgbClr val="3D3224">
-                <a:alpha val="8000"/>
-              </a:srgbClr>
-            </a:outerShdw>
-          </a:effectLst>
-        </p:spPr>
-      </p:sp>
-      <p:pic>
-        <p:nvPicPr>
-          <p:cNvPr id="8" name="Image 1" descr="preencoded.png">    </p:cNvPr>
-          <p:cNvPicPr>
-            <a:picLocks noChangeAspect="1"/>
-          </p:cNvPicPr>
-          <p:nvPr/>
-        </p:nvPicPr>
-        <p:blipFill>
-          <a:blip r:embed="rId2"/>
-          <a:stretch>
-            <a:fillRect/>
-          </a:stretch>
-        </p:blipFill>
-        <p:spPr>
-          <a:xfrm>
-            <a:off x="9277350" y="3171825"/>
-            <a:ext cx="8058150" cy="3812679"/>
-          </a:xfrm>
-          <a:prstGeom prst="rect">
-            <a:avLst/>
-          </a:prstGeom>
-        </p:spPr>
-      </p:pic>
-      <p:sp>
-        <p:nvSpPr>
-          <p:cNvPr id="9" name="Text 5"/>
-          <p:cNvSpPr/>
-          <p:nvPr/>
-        </p:nvSpPr>
-        <p:spPr>
-          <a:xfrm>
-            <a:off x="9505950" y="7175004"/>
-            <a:ext cx="7842694" cy="390525"/>
-          </a:xfrm>
-          <a:prstGeom prst="rect">
-            <a:avLst/>
-          </a:prstGeom>
-          <a:noFill/>
-          <a:ln/>
-        </p:spPr>
-        <p:txBody>
-          <a:bodyPr wrap="square" lIns="25400" tIns="25400" rIns="25400" bIns="25400" rtlCol="0" anchor="t">
-            <a:normAutofit/>
-          </a:bodyPr>
-          <a:lstStyle/>
-          <a:p>
-            <a:pPr algn="l" indent="0" marL="0">
-              <a:buNone/>
-            </a:pPr>
-            <a:r>
-              <a:rPr lang="en-US" sz="1950" b="1" dirty="0">
-                <a:solidFill>
-                  <a:srgbClr val="5C4A33"/>
-                </a:solidFill>
-                <a:latin typeface="Arial" pitchFamily="34" charset="0"/>
-                <a:ea typeface="Arial" pitchFamily="34" charset="-122"/>
-                <a:cs typeface="Arial" pitchFamily="34" charset="-120"/>
-              </a:rPr>
-              <a:t>배너 관리</a:t>
-            </a:r>
-            <a:endParaRPr lang="en-US" sz="1950" dirty="0"/>
-          </a:p>
-        </p:txBody>
-      </p:sp>
-      <p:sp>
-        <p:nvSpPr>
-          <p:cNvPr id="10" name="Shape 6"/>
-          <p:cNvSpPr/>
-          <p:nvPr/>
-        </p:nvSpPr>
-        <p:spPr>
-          <a:xfrm>
-            <a:off x="952500" y="7984629"/>
-            <a:ext cx="16383000" cy="8485138"/>
-          </a:xfrm>
-          <a:prstGeom prst="roundRect">
-            <a:avLst>
-              <a:gd name="adj" fmla="val 1796"/>
-            </a:avLst>
-          </a:prstGeom>
-          <a:solidFill>
-            <a:srgbClr val="FFFFFF"/>
-          </a:solidFill>
-          <a:ln/>
-          <a:effectLst>
-            <a:outerShdw sx="100000" sy="100000" kx="0" ky="0" algn="bl" rotWithShape="0" blurRad="228600" dist="38100" dir="5400000">
-              <a:srgbClr val="3D3224">
-                <a:alpha val="8000"/>
-              </a:srgbClr>
-            </a:outerShdw>
-          </a:effectLst>
-        </p:spPr>
-      </p:sp>
-      <p:pic>
-        <p:nvPicPr>
-          <p:cNvPr id="11" name="Image 2" descr="preencoded.png">    </p:cNvPr>
-          <p:cNvPicPr>
-            <a:picLocks noChangeAspect="1"/>
-          </p:cNvPicPr>
-          <p:nvPr/>
-        </p:nvPicPr>
-        <p:blipFill>
-          <a:blip r:embed="rId3"/>
-          <a:stretch>
-            <a:fillRect/>
-          </a:stretch>
-        </p:blipFill>
-        <p:spPr>
-          <a:xfrm>
-            <a:off x="952500" y="7984629"/>
-            <a:ext cx="16383000" cy="7751713"/>
-          </a:xfrm>
-          <a:prstGeom prst="rect">
-            <a:avLst/>
-          </a:prstGeom>
-        </p:spPr>
-      </p:pic>
-      <p:sp>
-        <p:nvSpPr>
-          <p:cNvPr id="12" name="Text 7"/>
-          <p:cNvSpPr/>
-          <p:nvPr/>
-        </p:nvSpPr>
-        <p:spPr>
-          <a:xfrm>
-            <a:off x="1181100" y="15926842"/>
-            <a:ext cx="16417290" cy="390525"/>
-          </a:xfrm>
-          <a:prstGeom prst="rect">
-            <a:avLst/>
-          </a:prstGeom>
-          <a:noFill/>
-          <a:ln/>
-        </p:spPr>
-        <p:txBody>
-          <a:bodyPr wrap="square" lIns="25400" tIns="25400" rIns="25400" bIns="25400" rtlCol="0" anchor="t">
-            <a:normAutofit/>
-          </a:bodyPr>
-          <a:lstStyle/>
-          <a:p>
-            <a:pPr algn="l" indent="0" marL="0">
-              <a:buNone/>
-            </a:pPr>
-            <a:r>
-              <a:rPr lang="en-US" sz="1950" b="1" dirty="0">
-                <a:solidFill>
-                  <a:srgbClr val="5C4A33"/>
-                </a:solidFill>
-                <a:latin typeface="Arial" pitchFamily="34" charset="0"/>
-                <a:ea typeface="Arial" pitchFamily="34" charset="-122"/>
-                <a:cs typeface="Arial" pitchFamily="34" charset="-120"/>
-              </a:rPr>
-              <a:t>커뮤니티 관리 (FAQ · 리뷰 · Q&amp;A)</a:t>
-            </a:r>
-            <a:endParaRPr lang="en-US" sz="1950" dirty="0"/>
-          </a:p>
-        </p:txBody>
-      </p:sp>
+              <a:t>상품 · 배너 · 커뮤니티를 한 </a:t>
+            </a:r>
+            <a:r>
+              <a:rPr lang="en-US" sz="2400" dirty="0" err="1">
+                <a:solidFill>
+                  <a:srgbClr val="9A7D52"/>
+                </a:solidFill>
+                <a:latin typeface="Arial" pitchFamily="34" charset="0"/>
+                <a:ea typeface="Arial" pitchFamily="34" charset="-122"/>
+                <a:cs typeface="Arial" pitchFamily="34" charset="-120"/>
+              </a:rPr>
+              <a:t>곳에서</a:t>
+            </a:r>
+            <a:r>
+              <a:rPr lang="en-US" sz="2400" dirty="0">
+                <a:solidFill>
+                  <a:srgbClr val="9A7D52"/>
+                </a:solidFill>
+                <a:latin typeface="Arial" pitchFamily="34" charset="0"/>
+                <a:ea typeface="Arial" pitchFamily="34" charset="-122"/>
+                <a:cs typeface="Arial" pitchFamily="34" charset="-120"/>
+              </a:rPr>
+              <a:t> </a:t>
+            </a:r>
+            <a:r>
+              <a:rPr lang="en-US" sz="2400" dirty="0" err="1">
+                <a:solidFill>
+                  <a:srgbClr val="9A7D52"/>
+                </a:solidFill>
+                <a:latin typeface="Arial" pitchFamily="34" charset="0"/>
+                <a:ea typeface="Arial" pitchFamily="34" charset="-122"/>
+                <a:cs typeface="Arial" pitchFamily="34" charset="-120"/>
+              </a:rPr>
+              <a:t>관리</a:t>
+            </a:r>
+            <a:endParaRPr lang="en-US" sz="2400" dirty="0"/>
+          </a:p>
+        </p:txBody>
+      </p:sp>
+      <p:grpSp>
+        <p:nvGrpSpPr>
+          <p:cNvPr id="15" name="그룹 14">
+            <a:extLst>
+              <a:ext uri="{FF2B5EF4-FFF2-40B4-BE49-F238E27FC236}">
+                <a16:creationId xmlns:a16="http://schemas.microsoft.com/office/drawing/2014/main" id="{1D3E4E6C-A0A5-85BF-8898-2813A813AD02}"/>
+              </a:ext>
+            </a:extLst>
+          </p:cNvPr>
+          <p:cNvGrpSpPr/>
+          <p:nvPr/>
+        </p:nvGrpSpPr>
+        <p:grpSpPr>
+          <a:xfrm>
+            <a:off x="952500" y="3133078"/>
+            <a:ext cx="10394994" cy="5854913"/>
+            <a:chOff x="952500" y="2968625"/>
+            <a:chExt cx="8071294" cy="4546104"/>
+          </a:xfrm>
+        </p:grpSpPr>
+        <p:sp>
+          <p:nvSpPr>
+            <p:cNvPr id="4" name="Shape 2"/>
+            <p:cNvSpPr/>
+            <p:nvPr/>
+          </p:nvSpPr>
+          <p:spPr>
+            <a:xfrm>
+              <a:off x="952500" y="2968625"/>
+              <a:ext cx="8058150" cy="4546104"/>
+            </a:xfrm>
+            <a:prstGeom prst="roundRect">
+              <a:avLst>
+                <a:gd name="adj" fmla="val 3352"/>
+              </a:avLst>
+            </a:prstGeom>
+            <a:solidFill>
+              <a:srgbClr val="FFFFFF"/>
+            </a:solidFill>
+            <a:ln/>
+            <a:effectLst>
+              <a:outerShdw blurRad="228600" dist="38100" dir="5400000" algn="bl" rotWithShape="0">
+                <a:srgbClr val="3D3224">
+                  <a:alpha val="8000"/>
+                </a:srgbClr>
+              </a:outerShdw>
+            </a:effectLst>
+          </p:spPr>
+          <p:txBody>
+            <a:bodyPr/>
+            <a:lstStyle/>
+            <a:p>
+              <a:endParaRPr lang="ko-KR" altLang="en-US"/>
+            </a:p>
+          </p:txBody>
+        </p:sp>
+        <p:pic>
+          <p:nvPicPr>
+            <p:cNvPr id="5" name="Image 0" descr="preencoded.png"/>
+            <p:cNvPicPr>
+              <a:picLocks noChangeAspect="1"/>
+            </p:cNvPicPr>
+            <p:nvPr/>
+          </p:nvPicPr>
+          <p:blipFill>
+            <a:blip r:embed="rId3"/>
+            <a:stretch>
+              <a:fillRect/>
+            </a:stretch>
+          </p:blipFill>
+          <p:spPr>
+            <a:xfrm>
+              <a:off x="952500" y="2968625"/>
+              <a:ext cx="8058150" cy="3619202"/>
+            </a:xfrm>
+            <a:prstGeom prst="rect">
+              <a:avLst/>
+            </a:prstGeom>
+          </p:spPr>
+        </p:pic>
+        <p:sp>
+          <p:nvSpPr>
+            <p:cNvPr id="6" name="Text 3"/>
+            <p:cNvSpPr/>
+            <p:nvPr/>
+          </p:nvSpPr>
+          <p:spPr>
+            <a:xfrm>
+              <a:off x="1181100" y="6778327"/>
+              <a:ext cx="7842694" cy="390525"/>
+            </a:xfrm>
+            <a:prstGeom prst="rect">
+              <a:avLst/>
+            </a:prstGeom>
+            <a:noFill/>
+            <a:ln/>
+          </p:spPr>
+          <p:txBody>
+            <a:bodyPr wrap="square" lIns="25400" tIns="25400" rIns="25400" bIns="25400" rtlCol="0" anchor="t">
+              <a:normAutofit fontScale="92500" lnSpcReduction="10000"/>
+            </a:bodyPr>
+            <a:lstStyle/>
+            <a:p>
+              <a:pPr marL="0" indent="0" algn="l">
+                <a:buNone/>
+              </a:pPr>
+              <a:r>
+                <a:rPr lang="en-US" sz="3200" b="1" dirty="0">
+                  <a:solidFill>
+                    <a:srgbClr val="5C4A33"/>
+                  </a:solidFill>
+                  <a:latin typeface="Arial" pitchFamily="34" charset="0"/>
+                  <a:ea typeface="Arial" pitchFamily="34" charset="-122"/>
+                  <a:cs typeface="Arial" pitchFamily="34" charset="-120"/>
+                </a:rPr>
+                <a:t>상품 관리</a:t>
+              </a:r>
+              <a:endParaRPr lang="en-US" sz="3200" dirty="0"/>
+            </a:p>
+          </p:txBody>
+        </p:sp>
+      </p:grpSp>
+      <p:grpSp>
+        <p:nvGrpSpPr>
+          <p:cNvPr id="14" name="그룹 13">
+            <a:extLst>
+              <a:ext uri="{FF2B5EF4-FFF2-40B4-BE49-F238E27FC236}">
+                <a16:creationId xmlns:a16="http://schemas.microsoft.com/office/drawing/2014/main" id="{FE3F78D2-FADA-EF9A-5663-4FE0BB7A4561}"/>
+              </a:ext>
+            </a:extLst>
+          </p:cNvPr>
+          <p:cNvGrpSpPr/>
+          <p:nvPr/>
+        </p:nvGrpSpPr>
+        <p:grpSpPr>
+          <a:xfrm>
+            <a:off x="12972561" y="3133078"/>
+            <a:ext cx="3448959" cy="2129016"/>
+            <a:chOff x="9277350" y="2968625"/>
+            <a:chExt cx="8071294" cy="4982347"/>
+          </a:xfrm>
+        </p:grpSpPr>
+        <p:sp>
+          <p:nvSpPr>
+            <p:cNvPr id="7" name="Shape 4"/>
+            <p:cNvSpPr/>
+            <p:nvPr/>
+          </p:nvSpPr>
+          <p:spPr>
+            <a:xfrm>
+              <a:off x="9277350" y="2968625"/>
+              <a:ext cx="8058149" cy="4982347"/>
+            </a:xfrm>
+            <a:prstGeom prst="roundRect">
+              <a:avLst>
+                <a:gd name="adj" fmla="val 3352"/>
+              </a:avLst>
+            </a:prstGeom>
+            <a:solidFill>
+              <a:srgbClr val="FFFFFF"/>
+            </a:solidFill>
+            <a:ln/>
+            <a:effectLst>
+              <a:outerShdw blurRad="228600" dist="38100" dir="5400000" algn="bl" rotWithShape="0">
+                <a:srgbClr val="3D3224">
+                  <a:alpha val="8000"/>
+                </a:srgbClr>
+              </a:outerShdw>
+            </a:effectLst>
+          </p:spPr>
+          <p:txBody>
+            <a:bodyPr/>
+            <a:lstStyle/>
+            <a:p>
+              <a:endParaRPr lang="ko-KR" altLang="en-US"/>
+            </a:p>
+          </p:txBody>
+        </p:sp>
+        <p:pic>
+          <p:nvPicPr>
+            <p:cNvPr id="8" name="Image 1" descr="preencoded.png"/>
+            <p:cNvPicPr>
+              <a:picLocks noChangeAspect="1"/>
+            </p:cNvPicPr>
+            <p:nvPr/>
+          </p:nvPicPr>
+          <p:blipFill>
+            <a:blip r:embed="rId4"/>
+            <a:stretch>
+              <a:fillRect/>
+            </a:stretch>
+          </p:blipFill>
+          <p:spPr>
+            <a:xfrm>
+              <a:off x="9277350" y="2968625"/>
+              <a:ext cx="8058150" cy="3812679"/>
+            </a:xfrm>
+            <a:prstGeom prst="rect">
+              <a:avLst/>
+            </a:prstGeom>
+          </p:spPr>
+        </p:pic>
+        <p:sp>
+          <p:nvSpPr>
+            <p:cNvPr id="9" name="Text 5"/>
+            <p:cNvSpPr/>
+            <p:nvPr/>
+          </p:nvSpPr>
+          <p:spPr>
+            <a:xfrm>
+              <a:off x="9505950" y="6971804"/>
+              <a:ext cx="7842694" cy="390525"/>
+            </a:xfrm>
+            <a:prstGeom prst="rect">
+              <a:avLst/>
+            </a:prstGeom>
+            <a:noFill/>
+            <a:ln/>
+          </p:spPr>
+          <p:txBody>
+            <a:bodyPr wrap="square" lIns="25400" tIns="25400" rIns="25400" bIns="25400" rtlCol="0" anchor="t">
+              <a:normAutofit fontScale="47500" lnSpcReduction="20000"/>
+            </a:bodyPr>
+            <a:lstStyle/>
+            <a:p>
+              <a:pPr marL="0" indent="0" algn="l">
+                <a:buNone/>
+              </a:pPr>
+              <a:r>
+                <a:rPr lang="en-US" sz="1950" b="1" dirty="0">
+                  <a:solidFill>
+                    <a:srgbClr val="5C4A33"/>
+                  </a:solidFill>
+                  <a:latin typeface="Arial" pitchFamily="34" charset="0"/>
+                  <a:ea typeface="Arial" pitchFamily="34" charset="-122"/>
+                  <a:cs typeface="Arial" pitchFamily="34" charset="-120"/>
+                </a:rPr>
+                <a:t>배너 관리</a:t>
+              </a:r>
+              <a:endParaRPr lang="en-US" sz="1950" dirty="0"/>
+            </a:p>
+          </p:txBody>
+        </p:sp>
+      </p:grpSp>
+      <p:grpSp>
+        <p:nvGrpSpPr>
+          <p:cNvPr id="13" name="그룹 12">
+            <a:extLst>
+              <a:ext uri="{FF2B5EF4-FFF2-40B4-BE49-F238E27FC236}">
+                <a16:creationId xmlns:a16="http://schemas.microsoft.com/office/drawing/2014/main" id="{6BF8141C-9695-EED4-D9C3-7ED966761E86}"/>
+              </a:ext>
+            </a:extLst>
+          </p:cNvPr>
+          <p:cNvGrpSpPr/>
+          <p:nvPr/>
+        </p:nvGrpSpPr>
+        <p:grpSpPr>
+          <a:xfrm>
+            <a:off x="11985105" y="5746663"/>
+            <a:ext cx="5350395" cy="3059524"/>
+            <a:chOff x="952500" y="7705229"/>
+            <a:chExt cx="16645890" cy="9518644"/>
+          </a:xfrm>
+        </p:grpSpPr>
+        <p:sp>
+          <p:nvSpPr>
+            <p:cNvPr id="10" name="Shape 6"/>
+            <p:cNvSpPr/>
+            <p:nvPr/>
+          </p:nvSpPr>
+          <p:spPr>
+            <a:xfrm>
+              <a:off x="952500" y="7984626"/>
+              <a:ext cx="16383001" cy="9239247"/>
+            </a:xfrm>
+            <a:prstGeom prst="roundRect">
+              <a:avLst>
+                <a:gd name="adj" fmla="val 1796"/>
+              </a:avLst>
+            </a:prstGeom>
+            <a:solidFill>
+              <a:srgbClr val="FFFFFF"/>
+            </a:solidFill>
+            <a:ln/>
+            <a:effectLst>
+              <a:outerShdw blurRad="228600" dist="38100" dir="5400000" algn="bl" rotWithShape="0">
+                <a:srgbClr val="3D3224">
+                  <a:alpha val="8000"/>
+                </a:srgbClr>
+              </a:outerShdw>
+            </a:effectLst>
+          </p:spPr>
+          <p:txBody>
+            <a:bodyPr/>
+            <a:lstStyle/>
+            <a:p>
+              <a:endParaRPr lang="ko-KR" altLang="en-US"/>
+            </a:p>
+          </p:txBody>
+        </p:sp>
+        <p:pic>
+          <p:nvPicPr>
+            <p:cNvPr id="11" name="Image 2" descr="preencoded.png"/>
+            <p:cNvPicPr>
+              <a:picLocks noChangeAspect="1"/>
+            </p:cNvPicPr>
+            <p:nvPr/>
+          </p:nvPicPr>
+          <p:blipFill>
+            <a:blip r:embed="rId5"/>
+            <a:stretch>
+              <a:fillRect/>
+            </a:stretch>
+          </p:blipFill>
+          <p:spPr>
+            <a:xfrm>
+              <a:off x="952500" y="7705229"/>
+              <a:ext cx="16383000" cy="7751713"/>
+            </a:xfrm>
+            <a:prstGeom prst="rect">
+              <a:avLst/>
+            </a:prstGeom>
+          </p:spPr>
+        </p:pic>
+        <p:sp>
+          <p:nvSpPr>
+            <p:cNvPr id="12" name="Text 7"/>
+            <p:cNvSpPr/>
+            <p:nvPr/>
+          </p:nvSpPr>
+          <p:spPr>
+            <a:xfrm>
+              <a:off x="1181100" y="15926842"/>
+              <a:ext cx="16417290" cy="390525"/>
+            </a:xfrm>
+            <a:prstGeom prst="rect">
+              <a:avLst/>
+            </a:prstGeom>
+            <a:noFill/>
+            <a:ln/>
+          </p:spPr>
+          <p:txBody>
+            <a:bodyPr wrap="square" lIns="25400" tIns="25400" rIns="25400" bIns="25400" rtlCol="0" anchor="t">
+              <a:normAutofit fontScale="85000" lnSpcReduction="20000"/>
+            </a:bodyPr>
+            <a:lstStyle/>
+            <a:p>
+              <a:pPr marL="0" indent="0" algn="l">
+                <a:buNone/>
+              </a:pPr>
+              <a:r>
+                <a:rPr lang="en-US" sz="700" b="1" dirty="0">
+                  <a:solidFill>
+                    <a:srgbClr val="5C4A33"/>
+                  </a:solidFill>
+                  <a:latin typeface="Arial" pitchFamily="34" charset="0"/>
+                  <a:ea typeface="Arial" pitchFamily="34" charset="-122"/>
+                  <a:cs typeface="Arial" pitchFamily="34" charset="-120"/>
+                </a:rPr>
+                <a:t>커뮤니티 관리 (FAQ · 리뷰 · Q&amp;A)</a:t>
+              </a:r>
+              <a:endParaRPr lang="en-US" sz="700" dirty="0"/>
+            </a:p>
+          </p:txBody>
+        </p:sp>
+      </p:grpSp>
     </p:spTree>
   </p:cSld>
   <p:clrMapOvr>
@@ -3576,12 +3815,1137 @@
 
 <file path=ppt/slides/slide13.xml><?xml version="1.0" encoding="utf-8"?>
 <p:sld xmlns:a="http://schemas.openxmlformats.org/drawingml/2006/main" xmlns:r="http://schemas.openxmlformats.org/officeDocument/2006/relationships" xmlns:p="http://schemas.openxmlformats.org/presentationml/2006/main">
+  <p:cSld>
+    <p:spTree>
+      <p:nvGrpSpPr>
+        <p:cNvPr id="1" name="">
+          <a:extLst>
+            <a:ext uri="{FF2B5EF4-FFF2-40B4-BE49-F238E27FC236}">
+              <a16:creationId xmlns:a16="http://schemas.microsoft.com/office/drawing/2014/main" id="{EF3CE824-D578-A89B-4B17-7906EFC5566C}"/>
+            </a:ext>
+          </a:extLst>
+        </p:cNvPr>
+        <p:cNvGrpSpPr/>
+        <p:nvPr/>
+      </p:nvGrpSpPr>
+      <p:grpSpPr>
+        <a:xfrm>
+          <a:off x="0" y="0"/>
+          <a:ext cx="0" cy="0"/>
+          <a:chOff x="0" y="0"/>
+          <a:chExt cx="0" cy="0"/>
+        </a:xfrm>
+      </p:grpSpPr>
+      <p:sp>
+        <p:nvSpPr>
+          <p:cNvPr id="2" name="Text 0">
+            <a:extLst>
+              <a:ext uri="{FF2B5EF4-FFF2-40B4-BE49-F238E27FC236}">
+                <a16:creationId xmlns:a16="http://schemas.microsoft.com/office/drawing/2014/main" id="{37800B8F-932E-0A6F-BEC1-60E67052C141}"/>
+              </a:ext>
+            </a:extLst>
+          </p:cNvPr>
+          <p:cNvSpPr/>
+          <p:nvPr/>
+        </p:nvSpPr>
+        <p:spPr>
+          <a:xfrm>
+            <a:off x="952500" y="952500"/>
+            <a:ext cx="16874490" cy="914400"/>
+          </a:xfrm>
+          <a:prstGeom prst="rect">
+            <a:avLst/>
+          </a:prstGeom>
+          <a:noFill/>
+          <a:ln/>
+        </p:spPr>
+        <p:txBody>
+          <a:bodyPr wrap="square" lIns="25400" tIns="25400" rIns="25400" bIns="25400" rtlCol="0" anchor="t">
+            <a:normAutofit/>
+          </a:bodyPr>
+          <a:lstStyle/>
+          <a:p>
+            <a:pPr marL="0" indent="0" algn="l">
+              <a:buNone/>
+            </a:pPr>
+            <a:r>
+              <a:rPr lang="en-US" sz="4800" b="1" dirty="0">
+                <a:solidFill>
+                  <a:srgbClr val="5C4A33"/>
+                </a:solidFill>
+                <a:latin typeface="Arial" pitchFamily="34" charset="0"/>
+                <a:ea typeface="Arial" pitchFamily="34" charset="-122"/>
+                <a:cs typeface="Arial" pitchFamily="34" charset="-120"/>
+              </a:rPr>
+              <a:t>Admin 관리 화면</a:t>
+            </a:r>
+            <a:endParaRPr lang="en-US" sz="4800" dirty="0"/>
+          </a:p>
+        </p:txBody>
+      </p:sp>
+      <p:sp>
+        <p:nvSpPr>
+          <p:cNvPr id="3" name="Text 1">
+            <a:extLst>
+              <a:ext uri="{FF2B5EF4-FFF2-40B4-BE49-F238E27FC236}">
+                <a16:creationId xmlns:a16="http://schemas.microsoft.com/office/drawing/2014/main" id="{CF178D7F-2C49-A8DD-6F12-904673AB2BCD}"/>
+              </a:ext>
+            </a:extLst>
+          </p:cNvPr>
+          <p:cNvSpPr/>
+          <p:nvPr/>
+        </p:nvSpPr>
+        <p:spPr>
+          <a:xfrm>
+            <a:off x="952500" y="2324100"/>
+            <a:ext cx="16874490" cy="504825"/>
+          </a:xfrm>
+          <a:prstGeom prst="rect">
+            <a:avLst/>
+          </a:prstGeom>
+          <a:noFill/>
+          <a:ln/>
+        </p:spPr>
+        <p:txBody>
+          <a:bodyPr wrap="square" lIns="25400" tIns="25400" rIns="25400" bIns="25400" rtlCol="0" anchor="t">
+            <a:normAutofit/>
+          </a:bodyPr>
+          <a:lstStyle/>
+          <a:p>
+            <a:pPr marL="0" indent="0" algn="l">
+              <a:buNone/>
+            </a:pPr>
+            <a:r>
+              <a:rPr lang="en-US" sz="2550" dirty="0">
+                <a:solidFill>
+                  <a:srgbClr val="9A7D52"/>
+                </a:solidFill>
+                <a:latin typeface="Arial" pitchFamily="34" charset="0"/>
+                <a:ea typeface="Arial" pitchFamily="34" charset="-122"/>
+                <a:cs typeface="Arial" pitchFamily="34" charset="-120"/>
+              </a:rPr>
+              <a:t>상품 · 배너 · 커뮤니티를 한 곳에서 관리</a:t>
+            </a:r>
+            <a:endParaRPr lang="en-US" sz="2550" dirty="0"/>
+          </a:p>
+        </p:txBody>
+      </p:sp>
+      <p:grpSp>
+        <p:nvGrpSpPr>
+          <p:cNvPr id="15" name="그룹 14">
+            <a:extLst>
+              <a:ext uri="{FF2B5EF4-FFF2-40B4-BE49-F238E27FC236}">
+                <a16:creationId xmlns:a16="http://schemas.microsoft.com/office/drawing/2014/main" id="{42AAD2D8-F5E1-261B-5083-27DA76EF26CA}"/>
+              </a:ext>
+            </a:extLst>
+          </p:cNvPr>
+          <p:cNvGrpSpPr/>
+          <p:nvPr/>
+        </p:nvGrpSpPr>
+        <p:grpSpPr>
+          <a:xfrm>
+            <a:off x="14132015" y="3320664"/>
+            <a:ext cx="3118986" cy="1756749"/>
+            <a:chOff x="952500" y="2968625"/>
+            <a:chExt cx="8071294" cy="4546104"/>
+          </a:xfrm>
+        </p:grpSpPr>
+        <p:sp>
+          <p:nvSpPr>
+            <p:cNvPr id="4" name="Shape 2">
+              <a:extLst>
+                <a:ext uri="{FF2B5EF4-FFF2-40B4-BE49-F238E27FC236}">
+                  <a16:creationId xmlns:a16="http://schemas.microsoft.com/office/drawing/2014/main" id="{C5C5E513-99D6-9657-6603-13F74E6E8593}"/>
+                </a:ext>
+              </a:extLst>
+            </p:cNvPr>
+            <p:cNvSpPr/>
+            <p:nvPr/>
+          </p:nvSpPr>
+          <p:spPr>
+            <a:xfrm>
+              <a:off x="952500" y="2968625"/>
+              <a:ext cx="8058150" cy="4546104"/>
+            </a:xfrm>
+            <a:prstGeom prst="roundRect">
+              <a:avLst>
+                <a:gd name="adj" fmla="val 3352"/>
+              </a:avLst>
+            </a:prstGeom>
+            <a:solidFill>
+              <a:srgbClr val="FFFFFF"/>
+            </a:solidFill>
+            <a:ln/>
+            <a:effectLst>
+              <a:outerShdw blurRad="228600" dist="38100" dir="5400000" algn="bl" rotWithShape="0">
+                <a:srgbClr val="3D3224">
+                  <a:alpha val="8000"/>
+                </a:srgbClr>
+              </a:outerShdw>
+            </a:effectLst>
+          </p:spPr>
+          <p:txBody>
+            <a:bodyPr/>
+            <a:lstStyle/>
+            <a:p>
+              <a:endParaRPr lang="ko-KR" altLang="en-US"/>
+            </a:p>
+          </p:txBody>
+        </p:sp>
+        <p:pic>
+          <p:nvPicPr>
+            <p:cNvPr id="5" name="Image 0" descr="preencoded.png">
+              <a:extLst>
+                <a:ext uri="{FF2B5EF4-FFF2-40B4-BE49-F238E27FC236}">
+                  <a16:creationId xmlns:a16="http://schemas.microsoft.com/office/drawing/2014/main" id="{07035448-2F10-2EBD-4C9E-34986BD33DBF}"/>
+                </a:ext>
+              </a:extLst>
+            </p:cNvPr>
+            <p:cNvPicPr>
+              <a:picLocks noChangeAspect="1"/>
+            </p:cNvPicPr>
+            <p:nvPr/>
+          </p:nvPicPr>
+          <p:blipFill>
+            <a:blip r:embed="rId3"/>
+            <a:stretch>
+              <a:fillRect/>
+            </a:stretch>
+          </p:blipFill>
+          <p:spPr>
+            <a:xfrm>
+              <a:off x="952500" y="2968625"/>
+              <a:ext cx="8058150" cy="3619202"/>
+            </a:xfrm>
+            <a:prstGeom prst="rect">
+              <a:avLst/>
+            </a:prstGeom>
+          </p:spPr>
+        </p:pic>
+        <p:sp>
+          <p:nvSpPr>
+            <p:cNvPr id="6" name="Text 3">
+              <a:extLst>
+                <a:ext uri="{FF2B5EF4-FFF2-40B4-BE49-F238E27FC236}">
+                  <a16:creationId xmlns:a16="http://schemas.microsoft.com/office/drawing/2014/main" id="{664AAB4F-BC88-C411-C8B3-868BAEC4C908}"/>
+                </a:ext>
+              </a:extLst>
+            </p:cNvPr>
+            <p:cNvSpPr/>
+            <p:nvPr/>
+          </p:nvSpPr>
+          <p:spPr>
+            <a:xfrm>
+              <a:off x="1181100" y="6778327"/>
+              <a:ext cx="7842694" cy="390525"/>
+            </a:xfrm>
+            <a:prstGeom prst="rect">
+              <a:avLst/>
+            </a:prstGeom>
+            <a:noFill/>
+            <a:ln/>
+          </p:spPr>
+          <p:txBody>
+            <a:bodyPr wrap="square" lIns="25400" tIns="25400" rIns="25400" bIns="25400" rtlCol="0" anchor="t">
+              <a:noAutofit/>
+            </a:bodyPr>
+            <a:lstStyle/>
+            <a:p>
+              <a:pPr marL="0" indent="0" algn="l">
+                <a:buNone/>
+              </a:pPr>
+              <a:r>
+                <a:rPr lang="en-US" sz="900" b="1" dirty="0">
+                  <a:solidFill>
+                    <a:srgbClr val="5C4A33"/>
+                  </a:solidFill>
+                  <a:latin typeface="Arial" pitchFamily="34" charset="0"/>
+                  <a:ea typeface="Arial" pitchFamily="34" charset="-122"/>
+                  <a:cs typeface="Arial" pitchFamily="34" charset="-120"/>
+                </a:rPr>
+                <a:t>상품 관리</a:t>
+              </a:r>
+              <a:endParaRPr lang="en-US" sz="900" dirty="0"/>
+            </a:p>
+          </p:txBody>
+        </p:sp>
+      </p:grpSp>
+      <p:grpSp>
+        <p:nvGrpSpPr>
+          <p:cNvPr id="14" name="그룹 13">
+            <a:extLst>
+              <a:ext uri="{FF2B5EF4-FFF2-40B4-BE49-F238E27FC236}">
+                <a16:creationId xmlns:a16="http://schemas.microsoft.com/office/drawing/2014/main" id="{5601740D-FBD2-382F-6E87-E7EFD69F2E09}"/>
+              </a:ext>
+            </a:extLst>
+          </p:cNvPr>
+          <p:cNvGrpSpPr/>
+          <p:nvPr/>
+        </p:nvGrpSpPr>
+        <p:grpSpPr>
+          <a:xfrm>
+            <a:off x="786979" y="3137837"/>
+            <a:ext cx="10328442" cy="6375668"/>
+            <a:chOff x="9277350" y="2968625"/>
+            <a:chExt cx="8071294" cy="4982347"/>
+          </a:xfrm>
+        </p:grpSpPr>
+        <p:sp>
+          <p:nvSpPr>
+            <p:cNvPr id="7" name="Shape 4">
+              <a:extLst>
+                <a:ext uri="{FF2B5EF4-FFF2-40B4-BE49-F238E27FC236}">
+                  <a16:creationId xmlns:a16="http://schemas.microsoft.com/office/drawing/2014/main" id="{98BF2D3D-59D7-B7AC-EBD7-9D5EF1849769}"/>
+                </a:ext>
+              </a:extLst>
+            </p:cNvPr>
+            <p:cNvSpPr/>
+            <p:nvPr/>
+          </p:nvSpPr>
+          <p:spPr>
+            <a:xfrm>
+              <a:off x="9277350" y="2968625"/>
+              <a:ext cx="8058149" cy="4982347"/>
+            </a:xfrm>
+            <a:prstGeom prst="roundRect">
+              <a:avLst>
+                <a:gd name="adj" fmla="val 3352"/>
+              </a:avLst>
+            </a:prstGeom>
+            <a:solidFill>
+              <a:srgbClr val="FFFFFF"/>
+            </a:solidFill>
+            <a:ln/>
+            <a:effectLst>
+              <a:outerShdw blurRad="228600" dist="38100" dir="5400000" algn="bl" rotWithShape="0">
+                <a:srgbClr val="3D3224">
+                  <a:alpha val="8000"/>
+                </a:srgbClr>
+              </a:outerShdw>
+            </a:effectLst>
+          </p:spPr>
+          <p:txBody>
+            <a:bodyPr/>
+            <a:lstStyle/>
+            <a:p>
+              <a:endParaRPr lang="ko-KR" altLang="en-US"/>
+            </a:p>
+          </p:txBody>
+        </p:sp>
+        <p:pic>
+          <p:nvPicPr>
+            <p:cNvPr id="8" name="Image 1" descr="preencoded.png">
+              <a:extLst>
+                <a:ext uri="{FF2B5EF4-FFF2-40B4-BE49-F238E27FC236}">
+                  <a16:creationId xmlns:a16="http://schemas.microsoft.com/office/drawing/2014/main" id="{63722FFC-E234-B459-F993-B09484FE4528}"/>
+                </a:ext>
+              </a:extLst>
+            </p:cNvPr>
+            <p:cNvPicPr>
+              <a:picLocks noChangeAspect="1"/>
+            </p:cNvPicPr>
+            <p:nvPr/>
+          </p:nvPicPr>
+          <p:blipFill>
+            <a:blip r:embed="rId4"/>
+            <a:stretch>
+              <a:fillRect/>
+            </a:stretch>
+          </p:blipFill>
+          <p:spPr>
+            <a:xfrm>
+              <a:off x="9277350" y="2968625"/>
+              <a:ext cx="8058150" cy="3812679"/>
+            </a:xfrm>
+            <a:prstGeom prst="rect">
+              <a:avLst/>
+            </a:prstGeom>
+          </p:spPr>
+        </p:pic>
+        <p:sp>
+          <p:nvSpPr>
+            <p:cNvPr id="9" name="Text 5">
+              <a:extLst>
+                <a:ext uri="{FF2B5EF4-FFF2-40B4-BE49-F238E27FC236}">
+                  <a16:creationId xmlns:a16="http://schemas.microsoft.com/office/drawing/2014/main" id="{917E572F-4FDB-B63A-BA7A-3AFCE2E320FB}"/>
+                </a:ext>
+              </a:extLst>
+            </p:cNvPr>
+            <p:cNvSpPr/>
+            <p:nvPr/>
+          </p:nvSpPr>
+          <p:spPr>
+            <a:xfrm>
+              <a:off x="9505950" y="6971804"/>
+              <a:ext cx="7842694" cy="390525"/>
+            </a:xfrm>
+            <a:prstGeom prst="rect">
+              <a:avLst/>
+            </a:prstGeom>
+            <a:noFill/>
+            <a:ln/>
+          </p:spPr>
+          <p:txBody>
+            <a:bodyPr wrap="square" lIns="25400" tIns="25400" rIns="25400" bIns="25400" rtlCol="0" anchor="t">
+              <a:normAutofit fontScale="92500" lnSpcReduction="20000"/>
+            </a:bodyPr>
+            <a:lstStyle/>
+            <a:p>
+              <a:pPr marL="0" indent="0" algn="l">
+                <a:buNone/>
+              </a:pPr>
+              <a:r>
+                <a:rPr lang="en-US" sz="3600" b="1" dirty="0">
+                  <a:solidFill>
+                    <a:srgbClr val="5C4A33"/>
+                  </a:solidFill>
+                  <a:latin typeface="Arial" pitchFamily="34" charset="0"/>
+                  <a:ea typeface="Arial" pitchFamily="34" charset="-122"/>
+                  <a:cs typeface="Arial" pitchFamily="34" charset="-120"/>
+                </a:rPr>
+                <a:t>배너 관리</a:t>
+              </a:r>
+              <a:endParaRPr lang="en-US" sz="3600" dirty="0"/>
+            </a:p>
+          </p:txBody>
+        </p:sp>
+      </p:grpSp>
+      <p:grpSp>
+        <p:nvGrpSpPr>
+          <p:cNvPr id="13" name="그룹 12">
+            <a:extLst>
+              <a:ext uri="{FF2B5EF4-FFF2-40B4-BE49-F238E27FC236}">
+                <a16:creationId xmlns:a16="http://schemas.microsoft.com/office/drawing/2014/main" id="{3FDD8A90-1626-3F26-DF97-B978494D8220}"/>
+              </a:ext>
+            </a:extLst>
+          </p:cNvPr>
+          <p:cNvGrpSpPr/>
+          <p:nvPr/>
+        </p:nvGrpSpPr>
+        <p:grpSpPr>
+          <a:xfrm>
+            <a:off x="11985105" y="5746663"/>
+            <a:ext cx="5350395" cy="3059524"/>
+            <a:chOff x="952500" y="7705229"/>
+            <a:chExt cx="16645890" cy="9518644"/>
+          </a:xfrm>
+        </p:grpSpPr>
+        <p:sp>
+          <p:nvSpPr>
+            <p:cNvPr id="10" name="Shape 6">
+              <a:extLst>
+                <a:ext uri="{FF2B5EF4-FFF2-40B4-BE49-F238E27FC236}">
+                  <a16:creationId xmlns:a16="http://schemas.microsoft.com/office/drawing/2014/main" id="{548C4FD3-F838-9F41-6B03-2B00499C4963}"/>
+                </a:ext>
+              </a:extLst>
+            </p:cNvPr>
+            <p:cNvSpPr/>
+            <p:nvPr/>
+          </p:nvSpPr>
+          <p:spPr>
+            <a:xfrm>
+              <a:off x="952500" y="7984626"/>
+              <a:ext cx="16383001" cy="9239247"/>
+            </a:xfrm>
+            <a:prstGeom prst="roundRect">
+              <a:avLst>
+                <a:gd name="adj" fmla="val 1796"/>
+              </a:avLst>
+            </a:prstGeom>
+            <a:solidFill>
+              <a:srgbClr val="FFFFFF"/>
+            </a:solidFill>
+            <a:ln/>
+            <a:effectLst>
+              <a:outerShdw blurRad="228600" dist="38100" dir="5400000" algn="bl" rotWithShape="0">
+                <a:srgbClr val="3D3224">
+                  <a:alpha val="8000"/>
+                </a:srgbClr>
+              </a:outerShdw>
+            </a:effectLst>
+          </p:spPr>
+          <p:txBody>
+            <a:bodyPr/>
+            <a:lstStyle/>
+            <a:p>
+              <a:endParaRPr lang="ko-KR" altLang="en-US"/>
+            </a:p>
+          </p:txBody>
+        </p:sp>
+        <p:pic>
+          <p:nvPicPr>
+            <p:cNvPr id="11" name="Image 2" descr="preencoded.png">
+              <a:extLst>
+                <a:ext uri="{FF2B5EF4-FFF2-40B4-BE49-F238E27FC236}">
+                  <a16:creationId xmlns:a16="http://schemas.microsoft.com/office/drawing/2014/main" id="{49BE66EF-EA41-0D68-0871-054485DF2A62}"/>
+                </a:ext>
+              </a:extLst>
+            </p:cNvPr>
+            <p:cNvPicPr>
+              <a:picLocks noChangeAspect="1"/>
+            </p:cNvPicPr>
+            <p:nvPr/>
+          </p:nvPicPr>
+          <p:blipFill>
+            <a:blip r:embed="rId5"/>
+            <a:stretch>
+              <a:fillRect/>
+            </a:stretch>
+          </p:blipFill>
+          <p:spPr>
+            <a:xfrm>
+              <a:off x="952500" y="7705229"/>
+              <a:ext cx="16383000" cy="7751713"/>
+            </a:xfrm>
+            <a:prstGeom prst="rect">
+              <a:avLst/>
+            </a:prstGeom>
+          </p:spPr>
+        </p:pic>
+        <p:sp>
+          <p:nvSpPr>
+            <p:cNvPr id="12" name="Text 7">
+              <a:extLst>
+                <a:ext uri="{FF2B5EF4-FFF2-40B4-BE49-F238E27FC236}">
+                  <a16:creationId xmlns:a16="http://schemas.microsoft.com/office/drawing/2014/main" id="{A50F3601-05CA-0597-0653-F2A7728B0932}"/>
+                </a:ext>
+              </a:extLst>
+            </p:cNvPr>
+            <p:cNvSpPr/>
+            <p:nvPr/>
+          </p:nvSpPr>
+          <p:spPr>
+            <a:xfrm>
+              <a:off x="1181100" y="15926842"/>
+              <a:ext cx="16417290" cy="390525"/>
+            </a:xfrm>
+            <a:prstGeom prst="rect">
+              <a:avLst/>
+            </a:prstGeom>
+            <a:noFill/>
+            <a:ln/>
+          </p:spPr>
+          <p:txBody>
+            <a:bodyPr wrap="square" lIns="25400" tIns="25400" rIns="25400" bIns="25400" rtlCol="0" anchor="t">
+              <a:normAutofit fontScale="32500" lnSpcReduction="20000"/>
+            </a:bodyPr>
+            <a:lstStyle/>
+            <a:p>
+              <a:pPr marL="0" indent="0" algn="l">
+                <a:buNone/>
+              </a:pPr>
+              <a:r>
+                <a:rPr lang="en-US" sz="1950" b="1" dirty="0">
+                  <a:solidFill>
+                    <a:srgbClr val="5C4A33"/>
+                  </a:solidFill>
+                  <a:latin typeface="Arial" pitchFamily="34" charset="0"/>
+                  <a:ea typeface="Arial" pitchFamily="34" charset="-122"/>
+                  <a:cs typeface="Arial" pitchFamily="34" charset="-120"/>
+                </a:rPr>
+                <a:t>커뮤니티 관리 (FAQ · 리뷰 · Q&amp;A)</a:t>
+              </a:r>
+              <a:endParaRPr lang="en-US" sz="1950" dirty="0"/>
+            </a:p>
+          </p:txBody>
+        </p:sp>
+      </p:grpSp>
+    </p:spTree>
+    <p:extLst>
+      <p:ext uri="{BB962C8B-B14F-4D97-AF65-F5344CB8AC3E}">
+        <p14:creationId xmlns:p14="http://schemas.microsoft.com/office/powerpoint/2010/main" val="2289942303"/>
+      </p:ext>
+    </p:extLst>
+  </p:cSld>
+  <p:clrMapOvr>
+    <a:masterClrMapping/>
+  </p:clrMapOvr>
+  <mc:AlternateContent xmlns:mc="http://schemas.openxmlformats.org/markup-compatibility/2006">
+    <mc:Choice xmlns:p159="http://schemas.microsoft.com/office/powerpoint/2015/09/main" Requires="p159">
+      <p:transition xmlns:p14="http://schemas.microsoft.com/office/powerpoint/2010/main" spd="slow" p14:dur="2000">
+        <p159:morph option="byObject"/>
+      </p:transition>
+    </mc:Choice>
+    <mc:Fallback>
+      <p:transition spd="slow">
+        <p:fade/>
+      </p:transition>
+    </mc:Fallback>
+  </mc:AlternateContent>
+</p:sld>
+</file>
+
+<file path=ppt/slides/slide14.xml><?xml version="1.0" encoding="utf-8"?>
+<p:sld xmlns:a="http://schemas.openxmlformats.org/drawingml/2006/main" xmlns:r="http://schemas.openxmlformats.org/officeDocument/2006/relationships" xmlns:p="http://schemas.openxmlformats.org/presentationml/2006/main">
+  <p:cSld>
+    <p:spTree>
+      <p:nvGrpSpPr>
+        <p:cNvPr id="1" name="">
+          <a:extLst>
+            <a:ext uri="{FF2B5EF4-FFF2-40B4-BE49-F238E27FC236}">
+              <a16:creationId xmlns:a16="http://schemas.microsoft.com/office/drawing/2014/main" id="{9B010FF0-6798-AAA0-E4C4-EB474C230581}"/>
+            </a:ext>
+          </a:extLst>
+        </p:cNvPr>
+        <p:cNvGrpSpPr/>
+        <p:nvPr/>
+      </p:nvGrpSpPr>
+      <p:grpSpPr>
+        <a:xfrm>
+          <a:off x="0" y="0"/>
+          <a:ext cx="0" cy="0"/>
+          <a:chOff x="0" y="0"/>
+          <a:chExt cx="0" cy="0"/>
+        </a:xfrm>
+      </p:grpSpPr>
+      <p:sp>
+        <p:nvSpPr>
+          <p:cNvPr id="2" name="Text 0">
+            <a:extLst>
+              <a:ext uri="{FF2B5EF4-FFF2-40B4-BE49-F238E27FC236}">
+                <a16:creationId xmlns:a16="http://schemas.microsoft.com/office/drawing/2014/main" id="{0DE4CDF4-4F86-7215-EB0B-F8D1DCB25DA0}"/>
+              </a:ext>
+            </a:extLst>
+          </p:cNvPr>
+          <p:cNvSpPr/>
+          <p:nvPr/>
+        </p:nvSpPr>
+        <p:spPr>
+          <a:xfrm>
+            <a:off x="952500" y="952500"/>
+            <a:ext cx="16874490" cy="914400"/>
+          </a:xfrm>
+          <a:prstGeom prst="rect">
+            <a:avLst/>
+          </a:prstGeom>
+          <a:noFill/>
+          <a:ln/>
+        </p:spPr>
+        <p:txBody>
+          <a:bodyPr wrap="square" lIns="25400" tIns="25400" rIns="25400" bIns="25400" rtlCol="0" anchor="t">
+            <a:normAutofit/>
+          </a:bodyPr>
+          <a:lstStyle/>
+          <a:p>
+            <a:pPr marL="0" indent="0" algn="l">
+              <a:buNone/>
+            </a:pPr>
+            <a:r>
+              <a:rPr lang="en-US" sz="4800" b="1" dirty="0">
+                <a:solidFill>
+                  <a:srgbClr val="5C4A33"/>
+                </a:solidFill>
+                <a:latin typeface="Arial" pitchFamily="34" charset="0"/>
+                <a:ea typeface="Arial" pitchFamily="34" charset="-122"/>
+                <a:cs typeface="Arial" pitchFamily="34" charset="-120"/>
+              </a:rPr>
+              <a:t>Admin 관리 화면</a:t>
+            </a:r>
+            <a:endParaRPr lang="en-US" sz="4800" dirty="0"/>
+          </a:p>
+        </p:txBody>
+      </p:sp>
+      <p:sp>
+        <p:nvSpPr>
+          <p:cNvPr id="3" name="Text 1">
+            <a:extLst>
+              <a:ext uri="{FF2B5EF4-FFF2-40B4-BE49-F238E27FC236}">
+                <a16:creationId xmlns:a16="http://schemas.microsoft.com/office/drawing/2014/main" id="{7FE0D329-A150-6205-359C-8E373AE3A9C3}"/>
+              </a:ext>
+            </a:extLst>
+          </p:cNvPr>
+          <p:cNvSpPr/>
+          <p:nvPr/>
+        </p:nvSpPr>
+        <p:spPr>
+          <a:xfrm>
+            <a:off x="952500" y="2324100"/>
+            <a:ext cx="16874490" cy="504825"/>
+          </a:xfrm>
+          <a:prstGeom prst="rect">
+            <a:avLst/>
+          </a:prstGeom>
+          <a:noFill/>
+          <a:ln/>
+        </p:spPr>
+        <p:txBody>
+          <a:bodyPr wrap="square" lIns="25400" tIns="25400" rIns="25400" bIns="25400" rtlCol="0" anchor="t">
+            <a:normAutofit/>
+          </a:bodyPr>
+          <a:lstStyle/>
+          <a:p>
+            <a:pPr marL="0" indent="0" algn="l">
+              <a:buNone/>
+            </a:pPr>
+            <a:r>
+              <a:rPr lang="en-US" sz="2550" dirty="0">
+                <a:solidFill>
+                  <a:srgbClr val="9A7D52"/>
+                </a:solidFill>
+                <a:latin typeface="Arial" pitchFamily="34" charset="0"/>
+                <a:ea typeface="Arial" pitchFamily="34" charset="-122"/>
+                <a:cs typeface="Arial" pitchFamily="34" charset="-120"/>
+              </a:rPr>
+              <a:t>상품 · 배너 · 커뮤니티를 한 곳에서 관리</a:t>
+            </a:r>
+            <a:endParaRPr lang="en-US" sz="2550" dirty="0"/>
+          </a:p>
+        </p:txBody>
+      </p:sp>
+      <p:grpSp>
+        <p:nvGrpSpPr>
+          <p:cNvPr id="14" name="그룹 13">
+            <a:extLst>
+              <a:ext uri="{FF2B5EF4-FFF2-40B4-BE49-F238E27FC236}">
+                <a16:creationId xmlns:a16="http://schemas.microsoft.com/office/drawing/2014/main" id="{84157829-1263-8F42-9FA0-5A754216106E}"/>
+              </a:ext>
+            </a:extLst>
+          </p:cNvPr>
+          <p:cNvGrpSpPr/>
+          <p:nvPr/>
+        </p:nvGrpSpPr>
+        <p:grpSpPr>
+          <a:xfrm>
+            <a:off x="14096191" y="5653088"/>
+            <a:ext cx="3149731" cy="1944305"/>
+            <a:chOff x="9277350" y="2968625"/>
+            <a:chExt cx="8071294" cy="4982347"/>
+          </a:xfrm>
+        </p:grpSpPr>
+        <p:sp>
+          <p:nvSpPr>
+            <p:cNvPr id="7" name="Shape 4">
+              <a:extLst>
+                <a:ext uri="{FF2B5EF4-FFF2-40B4-BE49-F238E27FC236}">
+                  <a16:creationId xmlns:a16="http://schemas.microsoft.com/office/drawing/2014/main" id="{29328926-AFEA-D26B-98DC-E1E4F4E095FD}"/>
+                </a:ext>
+              </a:extLst>
+            </p:cNvPr>
+            <p:cNvSpPr/>
+            <p:nvPr/>
+          </p:nvSpPr>
+          <p:spPr>
+            <a:xfrm>
+              <a:off x="9277350" y="2968625"/>
+              <a:ext cx="8058149" cy="4982347"/>
+            </a:xfrm>
+            <a:prstGeom prst="roundRect">
+              <a:avLst>
+                <a:gd name="adj" fmla="val 3352"/>
+              </a:avLst>
+            </a:prstGeom>
+            <a:solidFill>
+              <a:srgbClr val="FFFFFF"/>
+            </a:solidFill>
+            <a:ln/>
+            <a:effectLst>
+              <a:outerShdw blurRad="228600" dist="38100" dir="5400000" algn="bl" rotWithShape="0">
+                <a:srgbClr val="3D3224">
+                  <a:alpha val="8000"/>
+                </a:srgbClr>
+              </a:outerShdw>
+            </a:effectLst>
+          </p:spPr>
+          <p:txBody>
+            <a:bodyPr/>
+            <a:lstStyle/>
+            <a:p>
+              <a:endParaRPr lang="ko-KR" altLang="en-US" sz="800"/>
+            </a:p>
+          </p:txBody>
+        </p:sp>
+        <p:pic>
+          <p:nvPicPr>
+            <p:cNvPr id="8" name="Image 1" descr="preencoded.png">
+              <a:extLst>
+                <a:ext uri="{FF2B5EF4-FFF2-40B4-BE49-F238E27FC236}">
+                  <a16:creationId xmlns:a16="http://schemas.microsoft.com/office/drawing/2014/main" id="{BCF70DA8-1809-A3B4-D3D0-101C55851A02}"/>
+                </a:ext>
+              </a:extLst>
+            </p:cNvPr>
+            <p:cNvPicPr>
+              <a:picLocks noChangeAspect="1"/>
+            </p:cNvPicPr>
+            <p:nvPr/>
+          </p:nvPicPr>
+          <p:blipFill>
+            <a:blip r:embed="rId3"/>
+            <a:stretch>
+              <a:fillRect/>
+            </a:stretch>
+          </p:blipFill>
+          <p:spPr>
+            <a:xfrm>
+              <a:off x="9277350" y="2968625"/>
+              <a:ext cx="8058150" cy="3812679"/>
+            </a:xfrm>
+            <a:prstGeom prst="rect">
+              <a:avLst/>
+            </a:prstGeom>
+          </p:spPr>
+        </p:pic>
+        <p:sp>
+          <p:nvSpPr>
+            <p:cNvPr id="9" name="Text 5">
+              <a:extLst>
+                <a:ext uri="{FF2B5EF4-FFF2-40B4-BE49-F238E27FC236}">
+                  <a16:creationId xmlns:a16="http://schemas.microsoft.com/office/drawing/2014/main" id="{03F211C5-5495-4BC2-32CC-0F3AE4BD3DA1}"/>
+                </a:ext>
+              </a:extLst>
+            </p:cNvPr>
+            <p:cNvSpPr/>
+            <p:nvPr/>
+          </p:nvSpPr>
+          <p:spPr>
+            <a:xfrm>
+              <a:off x="9505950" y="6971804"/>
+              <a:ext cx="7842694" cy="390525"/>
+            </a:xfrm>
+            <a:prstGeom prst="rect">
+              <a:avLst/>
+            </a:prstGeom>
+            <a:noFill/>
+            <a:ln/>
+          </p:spPr>
+          <p:txBody>
+            <a:bodyPr wrap="square" lIns="25400" tIns="25400" rIns="25400" bIns="25400" rtlCol="0" anchor="t">
+              <a:noAutofit/>
+            </a:bodyPr>
+            <a:lstStyle/>
+            <a:p>
+              <a:pPr marL="0" indent="0" algn="l">
+                <a:buNone/>
+              </a:pPr>
+              <a:r>
+                <a:rPr lang="en-US" sz="1200" b="1" dirty="0">
+                  <a:solidFill>
+                    <a:srgbClr val="5C4A33"/>
+                  </a:solidFill>
+                  <a:latin typeface="Arial" pitchFamily="34" charset="0"/>
+                  <a:ea typeface="Arial" pitchFamily="34" charset="-122"/>
+                  <a:cs typeface="Arial" pitchFamily="34" charset="-120"/>
+                </a:rPr>
+                <a:t>배너 관리</a:t>
+              </a:r>
+              <a:endParaRPr lang="en-US" sz="1200" dirty="0"/>
+            </a:p>
+          </p:txBody>
+        </p:sp>
+      </p:grpSp>
+      <p:grpSp>
+        <p:nvGrpSpPr>
+          <p:cNvPr id="13" name="그룹 12">
+            <a:extLst>
+              <a:ext uri="{FF2B5EF4-FFF2-40B4-BE49-F238E27FC236}">
+                <a16:creationId xmlns:a16="http://schemas.microsoft.com/office/drawing/2014/main" id="{A5D2E550-E523-F38E-E65F-99C2452E2DCE}"/>
+              </a:ext>
+            </a:extLst>
+          </p:cNvPr>
+          <p:cNvGrpSpPr/>
+          <p:nvPr/>
+        </p:nvGrpSpPr>
+        <p:grpSpPr>
+          <a:xfrm>
+            <a:off x="461010" y="2917550"/>
+            <a:ext cx="12661194" cy="6550563"/>
+            <a:chOff x="952500" y="7705229"/>
+            <a:chExt cx="16645890" cy="8612138"/>
+          </a:xfrm>
+        </p:grpSpPr>
+        <p:sp>
+          <p:nvSpPr>
+            <p:cNvPr id="10" name="Shape 6">
+              <a:extLst>
+                <a:ext uri="{FF2B5EF4-FFF2-40B4-BE49-F238E27FC236}">
+                  <a16:creationId xmlns:a16="http://schemas.microsoft.com/office/drawing/2014/main" id="{EA3346E9-8C42-937E-297A-46C75E2C59D0}"/>
+                </a:ext>
+              </a:extLst>
+            </p:cNvPr>
+            <p:cNvSpPr/>
+            <p:nvPr/>
+          </p:nvSpPr>
+          <p:spPr>
+            <a:xfrm>
+              <a:off x="952500" y="7984626"/>
+              <a:ext cx="16383000" cy="8332741"/>
+            </a:xfrm>
+            <a:prstGeom prst="roundRect">
+              <a:avLst>
+                <a:gd name="adj" fmla="val 1796"/>
+              </a:avLst>
+            </a:prstGeom>
+            <a:solidFill>
+              <a:srgbClr val="FFFFFF"/>
+            </a:solidFill>
+            <a:ln/>
+            <a:effectLst>
+              <a:outerShdw blurRad="228600" dist="38100" dir="5400000" algn="bl" rotWithShape="0">
+                <a:srgbClr val="3D3224">
+                  <a:alpha val="8000"/>
+                </a:srgbClr>
+              </a:outerShdw>
+            </a:effectLst>
+          </p:spPr>
+          <p:txBody>
+            <a:bodyPr/>
+            <a:lstStyle/>
+            <a:p>
+              <a:endParaRPr lang="ko-KR" altLang="en-US"/>
+            </a:p>
+          </p:txBody>
+        </p:sp>
+        <p:pic>
+          <p:nvPicPr>
+            <p:cNvPr id="11" name="Image 2" descr="preencoded.png">
+              <a:extLst>
+                <a:ext uri="{FF2B5EF4-FFF2-40B4-BE49-F238E27FC236}">
+                  <a16:creationId xmlns:a16="http://schemas.microsoft.com/office/drawing/2014/main" id="{5C769A8D-D770-A5AB-A994-5E1C9CEFA7E5}"/>
+                </a:ext>
+              </a:extLst>
+            </p:cNvPr>
+            <p:cNvPicPr>
+              <a:picLocks noChangeAspect="1"/>
+            </p:cNvPicPr>
+            <p:nvPr/>
+          </p:nvPicPr>
+          <p:blipFill>
+            <a:blip r:embed="rId4"/>
+            <a:stretch>
+              <a:fillRect/>
+            </a:stretch>
+          </p:blipFill>
+          <p:spPr>
+            <a:xfrm>
+              <a:off x="952500" y="7705229"/>
+              <a:ext cx="16383000" cy="7751713"/>
+            </a:xfrm>
+            <a:prstGeom prst="rect">
+              <a:avLst/>
+            </a:prstGeom>
+          </p:spPr>
+        </p:pic>
+        <p:sp>
+          <p:nvSpPr>
+            <p:cNvPr id="12" name="Text 7">
+              <a:extLst>
+                <a:ext uri="{FF2B5EF4-FFF2-40B4-BE49-F238E27FC236}">
+                  <a16:creationId xmlns:a16="http://schemas.microsoft.com/office/drawing/2014/main" id="{9EA7B443-E8FD-968C-E0AA-520FA91EDB19}"/>
+                </a:ext>
+              </a:extLst>
+            </p:cNvPr>
+            <p:cNvSpPr/>
+            <p:nvPr/>
+          </p:nvSpPr>
+          <p:spPr>
+            <a:xfrm>
+              <a:off x="1181100" y="15573458"/>
+              <a:ext cx="16417290" cy="743909"/>
+            </a:xfrm>
+            <a:prstGeom prst="rect">
+              <a:avLst/>
+            </a:prstGeom>
+            <a:noFill/>
+            <a:ln/>
+          </p:spPr>
+          <p:txBody>
+            <a:bodyPr wrap="square" lIns="25400" tIns="25400" rIns="25400" bIns="25400" rtlCol="0" anchor="t">
+              <a:normAutofit lnSpcReduction="10000"/>
+            </a:bodyPr>
+            <a:lstStyle/>
+            <a:p>
+              <a:pPr marL="0" indent="0" algn="l">
+                <a:buNone/>
+              </a:pPr>
+              <a:r>
+                <a:rPr lang="en-US" sz="3600" b="1" dirty="0">
+                  <a:solidFill>
+                    <a:srgbClr val="5C4A33"/>
+                  </a:solidFill>
+                  <a:latin typeface="Arial" pitchFamily="34" charset="0"/>
+                  <a:ea typeface="Arial" pitchFamily="34" charset="-122"/>
+                  <a:cs typeface="Arial" pitchFamily="34" charset="-120"/>
+                </a:rPr>
+                <a:t>커뮤니티 관리 (FAQ · 리뷰 · Q&amp;A)</a:t>
+              </a:r>
+              <a:endParaRPr lang="en-US" sz="3600" dirty="0"/>
+            </a:p>
+          </p:txBody>
+        </p:sp>
+      </p:grpSp>
+      <p:grpSp>
+        <p:nvGrpSpPr>
+          <p:cNvPr id="16" name="그룹 15">
+            <a:extLst>
+              <a:ext uri="{FF2B5EF4-FFF2-40B4-BE49-F238E27FC236}">
+                <a16:creationId xmlns:a16="http://schemas.microsoft.com/office/drawing/2014/main" id="{CF300957-9DA5-84DA-999B-C614CF6F550E}"/>
+              </a:ext>
+            </a:extLst>
+          </p:cNvPr>
+          <p:cNvGrpSpPr/>
+          <p:nvPr/>
+        </p:nvGrpSpPr>
+        <p:grpSpPr>
+          <a:xfrm>
+            <a:off x="14132015" y="3320664"/>
+            <a:ext cx="3118986" cy="1756749"/>
+            <a:chOff x="952500" y="2968625"/>
+            <a:chExt cx="8071294" cy="4546104"/>
+          </a:xfrm>
+        </p:grpSpPr>
+        <p:sp>
+          <p:nvSpPr>
+            <p:cNvPr id="17" name="Shape 2">
+              <a:extLst>
+                <a:ext uri="{FF2B5EF4-FFF2-40B4-BE49-F238E27FC236}">
+                  <a16:creationId xmlns:a16="http://schemas.microsoft.com/office/drawing/2014/main" id="{2389D38B-A385-C537-EEE5-0F055411A6F3}"/>
+                </a:ext>
+              </a:extLst>
+            </p:cNvPr>
+            <p:cNvSpPr/>
+            <p:nvPr/>
+          </p:nvSpPr>
+          <p:spPr>
+            <a:xfrm>
+              <a:off x="952500" y="2968625"/>
+              <a:ext cx="8058150" cy="4546104"/>
+            </a:xfrm>
+            <a:prstGeom prst="roundRect">
+              <a:avLst>
+                <a:gd name="adj" fmla="val 3352"/>
+              </a:avLst>
+            </a:prstGeom>
+            <a:solidFill>
+              <a:srgbClr val="FFFFFF"/>
+            </a:solidFill>
+            <a:ln/>
+            <a:effectLst>
+              <a:outerShdw blurRad="228600" dist="38100" dir="5400000" algn="bl" rotWithShape="0">
+                <a:srgbClr val="3D3224">
+                  <a:alpha val="8000"/>
+                </a:srgbClr>
+              </a:outerShdw>
+            </a:effectLst>
+          </p:spPr>
+          <p:txBody>
+            <a:bodyPr/>
+            <a:lstStyle/>
+            <a:p>
+              <a:endParaRPr lang="ko-KR" altLang="en-US"/>
+            </a:p>
+          </p:txBody>
+        </p:sp>
+        <p:pic>
+          <p:nvPicPr>
+            <p:cNvPr id="18" name="Image 0" descr="preencoded.png">
+              <a:extLst>
+                <a:ext uri="{FF2B5EF4-FFF2-40B4-BE49-F238E27FC236}">
+                  <a16:creationId xmlns:a16="http://schemas.microsoft.com/office/drawing/2014/main" id="{54932F8F-4856-2DAD-3238-C10C742DCE4E}"/>
+                </a:ext>
+              </a:extLst>
+            </p:cNvPr>
+            <p:cNvPicPr>
+              <a:picLocks noChangeAspect="1"/>
+            </p:cNvPicPr>
+            <p:nvPr/>
+          </p:nvPicPr>
+          <p:blipFill>
+            <a:blip r:embed="rId5"/>
+            <a:stretch>
+              <a:fillRect/>
+            </a:stretch>
+          </p:blipFill>
+          <p:spPr>
+            <a:xfrm>
+              <a:off x="952500" y="2968625"/>
+              <a:ext cx="8058150" cy="3619202"/>
+            </a:xfrm>
+            <a:prstGeom prst="rect">
+              <a:avLst/>
+            </a:prstGeom>
+          </p:spPr>
+        </p:pic>
+        <p:sp>
+          <p:nvSpPr>
+            <p:cNvPr id="19" name="Text 3">
+              <a:extLst>
+                <a:ext uri="{FF2B5EF4-FFF2-40B4-BE49-F238E27FC236}">
+                  <a16:creationId xmlns:a16="http://schemas.microsoft.com/office/drawing/2014/main" id="{AE21FA5C-661A-DC05-6827-5B3C6E8F0FB5}"/>
+                </a:ext>
+              </a:extLst>
+            </p:cNvPr>
+            <p:cNvSpPr/>
+            <p:nvPr/>
+          </p:nvSpPr>
+          <p:spPr>
+            <a:xfrm>
+              <a:off x="1181100" y="6778327"/>
+              <a:ext cx="7842694" cy="390525"/>
+            </a:xfrm>
+            <a:prstGeom prst="rect">
+              <a:avLst/>
+            </a:prstGeom>
+            <a:noFill/>
+            <a:ln/>
+          </p:spPr>
+          <p:txBody>
+            <a:bodyPr wrap="square" lIns="25400" tIns="25400" rIns="25400" bIns="25400" rtlCol="0" anchor="t">
+              <a:noAutofit/>
+            </a:bodyPr>
+            <a:lstStyle/>
+            <a:p>
+              <a:pPr marL="0" indent="0" algn="l">
+                <a:buNone/>
+              </a:pPr>
+              <a:r>
+                <a:rPr lang="en-US" sz="900" b="1" dirty="0">
+                  <a:solidFill>
+                    <a:srgbClr val="5C4A33"/>
+                  </a:solidFill>
+                  <a:latin typeface="Arial" pitchFamily="34" charset="0"/>
+                  <a:ea typeface="Arial" pitchFamily="34" charset="-122"/>
+                  <a:cs typeface="Arial" pitchFamily="34" charset="-120"/>
+                </a:rPr>
+                <a:t>상품 관리</a:t>
+              </a:r>
+              <a:endParaRPr lang="en-US" sz="900" dirty="0"/>
+            </a:p>
+          </p:txBody>
+        </p:sp>
+      </p:grpSp>
+    </p:spTree>
+    <p:extLst>
+      <p:ext uri="{BB962C8B-B14F-4D97-AF65-F5344CB8AC3E}">
+        <p14:creationId xmlns:p14="http://schemas.microsoft.com/office/powerpoint/2010/main" val="2026944206"/>
+      </p:ext>
+    </p:extLst>
+  </p:cSld>
+  <p:clrMapOvr>
+    <a:masterClrMapping/>
+  </p:clrMapOvr>
+  <mc:AlternateContent xmlns:mc="http://schemas.openxmlformats.org/markup-compatibility/2006">
+    <mc:Choice xmlns:p159="http://schemas.microsoft.com/office/powerpoint/2015/09/main" Requires="p159">
+      <p:transition xmlns:p14="http://schemas.microsoft.com/office/powerpoint/2010/main" spd="slow" p14:dur="2000">
+        <p159:morph option="byObject"/>
+      </p:transition>
+    </mc:Choice>
+    <mc:Fallback>
+      <p:transition spd="slow">
+        <p:fade/>
+      </p:transition>
+    </mc:Fallback>
+  </mc:AlternateContent>
+</p:sld>
+</file>
+
+<file path=ppt/slides/slide15.xml><?xml version="1.0" encoding="utf-8"?>
+<p:sld xmlns:a="http://schemas.openxmlformats.org/drawingml/2006/main" xmlns:r="http://schemas.openxmlformats.org/officeDocument/2006/relationships" xmlns:p="http://schemas.openxmlformats.org/presentationml/2006/main">
   <p:cSld name="Slide 13">
     <p:bg>
       <p:bgPr>
         <a:solidFill>
           <a:srgbClr val="3D3224"/>
         </a:solidFill>
+        <a:effectLst/>
       </p:bgPr>
     </p:bg>
     <p:spTree>
@@ -3621,6 +4985,13 @@
             <a:prstDash val="solid"/>
           </a:ln>
         </p:spPr>
+        <p:txBody>
+          <a:bodyPr/>
+          <a:lstStyle/>
+          <a:p>
+            <a:endParaRPr lang="ko-KR" altLang="en-US"/>
+          </a:p>
+        </p:txBody>
       </p:sp>
       <p:sp>
         <p:nvSpPr>
@@ -3645,6 +5016,13 @@
             <a:prstDash val="solid"/>
           </a:ln>
         </p:spPr>
+        <p:txBody>
+          <a:bodyPr/>
+          <a:lstStyle/>
+          <a:p>
+            <a:endParaRPr lang="ko-KR" altLang="en-US"/>
+          </a:p>
+        </p:txBody>
       </p:sp>
       <p:sp>
         <p:nvSpPr>
@@ -3669,6 +5047,13 @@
             <a:prstDash val="solid"/>
           </a:ln>
         </p:spPr>
+        <p:txBody>
+          <a:bodyPr/>
+          <a:lstStyle/>
+          <a:p>
+            <a:endParaRPr lang="ko-KR" altLang="en-US"/>
+          </a:p>
+        </p:txBody>
       </p:sp>
       <p:sp>
         <p:nvSpPr>
@@ -3689,24 +5074,31 @@
           </a:solidFill>
           <a:ln/>
           <a:effectLst>
-            <a:outerShdw sx="100000" sy="100000" kx="0" ky="0" algn="bl" rotWithShape="0" blurRad="101600" dist="50800" dir="16200000">
+            <a:outerShdw blurRad="101600" dist="50800" dir="16200000" algn="bl" rotWithShape="0">
               <a:srgbClr val="C8956C">
                 <a:alpha val="800"/>
               </a:srgbClr>
             </a:outerShdw>
           </a:effectLst>
         </p:spPr>
+        <p:txBody>
+          <a:bodyPr/>
+          <a:lstStyle/>
+          <a:p>
+            <a:endParaRPr lang="ko-KR" altLang="en-US"/>
+          </a:p>
+        </p:txBody>
       </p:sp>
       <p:pic>
         <p:nvPicPr>
-          <p:cNvPr id="6" name="Image 0" descr="preencoded.png">    </p:cNvPr>
+          <p:cNvPr id="6" name="Image 0" descr="preencoded.png"/>
           <p:cNvPicPr>
             <a:picLocks noChangeAspect="1"/>
           </p:cNvPicPr>
           <p:nvPr/>
         </p:nvPicPr>
         <p:blipFill>
-          <a:blip r:embed="rId1"/>
+          <a:blip r:embed="rId3"/>
           <a:stretch>
             <a:fillRect/>
           </a:stretch>
@@ -3740,11 +5132,11 @@
         </p:spPr>
         <p:txBody>
           <a:bodyPr wrap="square" lIns="25400" tIns="25400" rIns="25400" bIns="25400" rtlCol="0" anchor="t">
-            <a:normAutofit/>
+            <a:normAutofit fontScale="92500"/>
           </a:bodyPr>
           <a:lstStyle/>
           <a:p>
-            <a:pPr algn="ctr" indent="0" marL="0">
+            <a:pPr marL="0" indent="0" algn="ctr">
               <a:buNone/>
             </a:pPr>
             <a:r>
@@ -3781,11 +5173,11 @@
         </p:spPr>
         <p:txBody>
           <a:bodyPr wrap="square" lIns="25400" tIns="25400" rIns="25400" bIns="25400" rtlCol="0" anchor="t">
-            <a:normAutofit/>
+            <a:normAutofit fontScale="92500"/>
           </a:bodyPr>
           <a:lstStyle/>
           <a:p>
-            <a:pPr algn="ctr" indent="0" marL="0">
+            <a:pPr marL="0" indent="0" algn="ctr">
               <a:buNone/>
             </a:pPr>
             <a:r>
@@ -3811,7 +5203,7 @@
 </p:sld>
 </file>
 
-<file path=ppt/slides/slide14.xml><?xml version="1.0" encoding="utf-8"?>
+<file path=ppt/slides/slide16.xml><?xml version="1.0" encoding="utf-8"?>
 <p:sld xmlns:a="http://schemas.openxmlformats.org/drawingml/2006/main" xmlns:r="http://schemas.openxmlformats.org/officeDocument/2006/relationships" xmlns:p="http://schemas.openxmlformats.org/presentationml/2006/main">
   <p:cSld name="Slide 14">
     <p:bg>
@@ -3819,6 +5211,7 @@
         <a:solidFill>
           <a:srgbClr val="FAF7F2"/>
         </a:solidFill>
+        <a:effectLst/>
       </p:bgPr>
     </p:bg>
     <p:spTree>
@@ -3858,7 +5251,7 @@
           </a:bodyPr>
           <a:lstStyle/>
           <a:p>
-            <a:pPr algn="l" indent="0" marL="0">
+            <a:pPr marL="0" indent="0" algn="l">
               <a:buNone/>
             </a:pPr>
             <a:r>
@@ -3897,13 +5290,20 @@
           </a:solidFill>
           <a:ln/>
           <a:effectLst>
-            <a:outerShdw sx="100000" sy="100000" kx="0" ky="0" algn="bl" rotWithShape="0" blurRad="228600" dist="38100" dir="5400000">
+            <a:outerShdw blurRad="228600" dist="38100" dir="5400000" algn="bl" rotWithShape="0">
               <a:srgbClr val="3D3224">
                 <a:alpha val="6000"/>
               </a:srgbClr>
             </a:outerShdw>
           </a:effectLst>
         </p:spPr>
+        <p:txBody>
+          <a:bodyPr/>
+          <a:lstStyle/>
+          <a:p>
+            <a:endParaRPr lang="ko-KR" altLang="en-US"/>
+          </a:p>
+        </p:txBody>
       </p:sp>
       <p:sp>
         <p:nvSpPr>
@@ -3926,330 +5326,17 @@
           </a:solidFill>
           <a:ln/>
         </p:spPr>
+        <p:txBody>
+          <a:bodyPr/>
+          <a:lstStyle/>
+          <a:p>
+            <a:endParaRPr lang="ko-KR" altLang="en-US"/>
+          </a:p>
+        </p:txBody>
       </p:sp>
       <p:pic>
         <p:nvPicPr>
-          <p:cNvPr id="5" name="Image 0" descr="preencoded.png">    </p:cNvPr>
-          <p:cNvPicPr>
-            <a:picLocks noChangeAspect="1"/>
-          </p:cNvPicPr>
-          <p:nvPr/>
-        </p:nvPicPr>
-        <p:blipFill>
-          <a:blip r:embed="rId1"/>
-          <a:stretch>
-            <a:fillRect/>
-          </a:stretch>
-        </p:blipFill>
-        <p:spPr>
-          <a:xfrm>
-            <a:off x="1543050" y="2914717"/>
-            <a:ext cx="419100" cy="419100"/>
-          </a:xfrm>
-          <a:prstGeom prst="rect">
-            <a:avLst/>
-          </a:prstGeom>
-        </p:spPr>
-      </p:pic>
-      <p:sp>
-        <p:nvSpPr>
-          <p:cNvPr id="6" name="Text 3"/>
-          <p:cNvSpPr/>
-          <p:nvPr/>
-        </p:nvSpPr>
-        <p:spPr>
-          <a:xfrm>
-            <a:off x="1333500" y="3810000"/>
-            <a:ext cx="4604461" cy="561975"/>
-          </a:xfrm>
-          <a:prstGeom prst="rect">
-            <a:avLst/>
-          </a:prstGeom>
-          <a:noFill/>
-          <a:ln/>
-        </p:spPr>
-        <p:txBody>
-          <a:bodyPr wrap="square" lIns="25400" tIns="25400" rIns="25400" bIns="25400" rtlCol="0" anchor="t">
-            <a:normAutofit/>
-          </a:bodyPr>
-          <a:lstStyle/>
-          <a:p>
-            <a:pPr algn="l" indent="0" marL="0">
-              <a:buNone/>
-            </a:pPr>
-            <a:r>
-              <a:rPr lang="en-US" sz="2850" b="1" dirty="0">
-                <a:solidFill>
-                  <a:srgbClr val="5C4A33"/>
-                </a:solidFill>
-                <a:latin typeface="Arial" pitchFamily="34" charset="0"/>
-                <a:ea typeface="Arial" pitchFamily="34" charset="-122"/>
-                <a:cs typeface="Arial" pitchFamily="34" charset="-120"/>
-              </a:rPr>
-              <a:t>느낀점</a:t>
-            </a:r>
-            <a:endParaRPr lang="en-US" sz="2850" dirty="0"/>
-          </a:p>
-        </p:txBody>
-      </p:sp>
-      <p:sp>
-        <p:nvSpPr>
-          <p:cNvPr id="7" name="Text 4"/>
-          <p:cNvSpPr/>
-          <p:nvPr/>
-        </p:nvSpPr>
-        <p:spPr>
-          <a:xfrm>
-            <a:off x="1333500" y="4524375"/>
-            <a:ext cx="4604461" cy="2304752"/>
-          </a:xfrm>
-          <a:prstGeom prst="rect">
-            <a:avLst/>
-          </a:prstGeom>
-          <a:noFill/>
-          <a:ln/>
-        </p:spPr>
-        <p:txBody>
-          <a:bodyPr wrap="square" lIns="25400" tIns="25400" rIns="25400" bIns="25400" rtlCol="0" anchor="t">
-            <a:normAutofit/>
-          </a:bodyPr>
-          <a:lstStyle/>
-          <a:p>
-            <a:pPr algn="l" indent="0" marL="0">
-              <a:lnSpc>
-                <a:spcPct val="170000"/>
-              </a:lnSpc>
-              <a:buNone/>
-            </a:pPr>
-            <a:r>
-              <a:rPr lang="en-US" sz="2100" dirty="0">
-                <a:solidFill>
-                  <a:srgbClr val="7A6243"/>
-                </a:solidFill>
-                <a:latin typeface="Arial" pitchFamily="34" charset="0"/>
-                <a:ea typeface="Arial" pitchFamily="34" charset="-122"/>
-                <a:cs typeface="Arial" pitchFamily="34" charset="-120"/>
-              </a:rPr>
-              <a:t>쇼핑몰을 이용만 해봤었지 직접 만들려고하니까 여러가지 요소가 필요하고 다양한 기술이 많아서 여러 쇼핑몰을 찾아보면서 배워나간 계기가 되었습니다.</a:t>
-            </a:r>
-            <a:endParaRPr lang="en-US" sz="2100" dirty="0"/>
-          </a:p>
-        </p:txBody>
-      </p:sp>
-      <p:sp>
-        <p:nvSpPr>
-          <p:cNvPr id="8" name="Shape 5"/>
-          <p:cNvSpPr/>
-          <p:nvPr/>
-        </p:nvSpPr>
-        <p:spPr>
-          <a:xfrm>
-            <a:off x="6527750" y="2324100"/>
-            <a:ext cx="5232499" cy="7200900"/>
-          </a:xfrm>
-          <a:prstGeom prst="roundRect">
-            <a:avLst>
-              <a:gd name="adj" fmla="val 3641"/>
-            </a:avLst>
-          </a:prstGeom>
-          <a:solidFill>
-            <a:srgbClr val="FFFFFF"/>
-          </a:solidFill>
-          <a:ln/>
-          <a:effectLst>
-            <a:outerShdw sx="100000" sy="100000" kx="0" ky="0" algn="bl" rotWithShape="0" blurRad="228600" dist="38100" dir="5400000">
-              <a:srgbClr val="3D3224">
-                <a:alpha val="6000"/>
-              </a:srgbClr>
-            </a:outerShdw>
-          </a:effectLst>
-        </p:spPr>
-      </p:sp>
-      <p:sp>
-        <p:nvSpPr>
-          <p:cNvPr id="9" name="Shape 6"/>
-          <p:cNvSpPr/>
-          <p:nvPr/>
-        </p:nvSpPr>
-        <p:spPr>
-          <a:xfrm>
-            <a:off x="6908750" y="2710024"/>
-            <a:ext cx="838200" cy="838200"/>
-          </a:xfrm>
-          <a:prstGeom prst="roundRect">
-            <a:avLst>
-              <a:gd name="adj" fmla="val 22727"/>
-            </a:avLst>
-          </a:prstGeom>
-          <a:solidFill>
-            <a:srgbClr val="F3EDE4"/>
-          </a:solidFill>
-          <a:ln/>
-        </p:spPr>
-      </p:sp>
-      <p:pic>
-        <p:nvPicPr>
-          <p:cNvPr id="10" name="Image 1" descr="preencoded.png">    </p:cNvPr>
-          <p:cNvPicPr>
-            <a:picLocks noChangeAspect="1"/>
-          </p:cNvPicPr>
-          <p:nvPr/>
-        </p:nvPicPr>
-        <p:blipFill>
-          <a:blip r:embed="rId2"/>
-          <a:stretch>
-            <a:fillRect/>
-          </a:stretch>
-        </p:blipFill>
-        <p:spPr>
-          <a:xfrm>
-            <a:off x="7118300" y="2919574"/>
-            <a:ext cx="419100" cy="419100"/>
-          </a:xfrm>
-          <a:prstGeom prst="rect">
-            <a:avLst/>
-          </a:prstGeom>
-        </p:spPr>
-      </p:pic>
-      <p:sp>
-        <p:nvSpPr>
-          <p:cNvPr id="11" name="Text 7"/>
-          <p:cNvSpPr/>
-          <p:nvPr/>
-        </p:nvSpPr>
-        <p:spPr>
-          <a:xfrm>
-            <a:off x="6908750" y="3810000"/>
-            <a:ext cx="4604614" cy="561975"/>
-          </a:xfrm>
-          <a:prstGeom prst="rect">
-            <a:avLst/>
-          </a:prstGeom>
-          <a:noFill/>
-          <a:ln/>
-        </p:spPr>
-        <p:txBody>
-          <a:bodyPr wrap="square" lIns="25400" tIns="25400" rIns="25400" bIns="25400" rtlCol="0" anchor="t">
-            <a:normAutofit/>
-          </a:bodyPr>
-          <a:lstStyle/>
-          <a:p>
-            <a:pPr algn="l" indent="0" marL="0">
-              <a:buNone/>
-            </a:pPr>
-            <a:r>
-              <a:rPr lang="en-US" sz="2850" b="1" dirty="0">
-                <a:solidFill>
-                  <a:srgbClr val="5C4A33"/>
-                </a:solidFill>
-                <a:latin typeface="Arial" pitchFamily="34" charset="0"/>
-                <a:ea typeface="Arial" pitchFamily="34" charset="-122"/>
-                <a:cs typeface="Arial" pitchFamily="34" charset="-120"/>
-              </a:rPr>
-              <a:t>반성할 점</a:t>
-            </a:r>
-            <a:endParaRPr lang="en-US" sz="2850" dirty="0"/>
-          </a:p>
-        </p:txBody>
-      </p:sp>
-      <p:sp>
-        <p:nvSpPr>
-          <p:cNvPr id="12" name="Text 8"/>
-          <p:cNvSpPr/>
-          <p:nvPr/>
-        </p:nvSpPr>
-        <p:spPr>
-          <a:xfrm>
-            <a:off x="6908750" y="4524375"/>
-            <a:ext cx="4604614" cy="1851422"/>
-          </a:xfrm>
-          <a:prstGeom prst="rect">
-            <a:avLst/>
-          </a:prstGeom>
-          <a:noFill/>
-          <a:ln/>
-        </p:spPr>
-        <p:txBody>
-          <a:bodyPr wrap="square" lIns="25400" tIns="25400" rIns="25400" bIns="25400" rtlCol="0" anchor="t">
-            <a:normAutofit/>
-          </a:bodyPr>
-          <a:lstStyle/>
-          <a:p>
-            <a:pPr algn="l" indent="0" marL="0">
-              <a:lnSpc>
-                <a:spcPct val="170000"/>
-              </a:lnSpc>
-              <a:buNone/>
-            </a:pPr>
-            <a:r>
-              <a:rPr lang="en-US" sz="2100" dirty="0">
-                <a:solidFill>
-                  <a:srgbClr val="7A6243"/>
-                </a:solidFill>
-                <a:latin typeface="Arial" pitchFamily="34" charset="0"/>
-                <a:ea typeface="Arial" pitchFamily="34" charset="-122"/>
-                <a:cs typeface="Arial" pitchFamily="34" charset="-120"/>
-              </a:rPr>
-              <a:t>테스트를 더 꼼꼼하게 진행했어야 했고, 시간 관리를 좀 더 체계적으로 했으면 좋았을 것 같습니다.</a:t>
-            </a:r>
-            <a:endParaRPr lang="en-US" sz="2100" dirty="0"/>
-          </a:p>
-        </p:txBody>
-      </p:sp>
-      <p:sp>
-        <p:nvSpPr>
-          <p:cNvPr id="13" name="Shape 9"/>
-          <p:cNvSpPr/>
-          <p:nvPr/>
-        </p:nvSpPr>
-        <p:spPr>
-          <a:xfrm>
-            <a:off x="12103150" y="2324100"/>
-            <a:ext cx="5232350" cy="7200900"/>
-          </a:xfrm>
-          <a:prstGeom prst="roundRect">
-            <a:avLst>
-              <a:gd name="adj" fmla="val 3641"/>
-            </a:avLst>
-          </a:prstGeom>
-          <a:solidFill>
-            <a:srgbClr val="FFFFFF"/>
-          </a:solidFill>
-          <a:ln/>
-          <a:effectLst>
-            <a:outerShdw sx="100000" sy="100000" kx="0" ky="0" algn="bl" rotWithShape="0" blurRad="228600" dist="38100" dir="5400000">
-              <a:srgbClr val="3D3224">
-                <a:alpha val="6000"/>
-              </a:srgbClr>
-            </a:outerShdw>
-          </a:effectLst>
-        </p:spPr>
-      </p:sp>
-      <p:sp>
-        <p:nvSpPr>
-          <p:cNvPr id="14" name="Shape 10"/>
-          <p:cNvSpPr/>
-          <p:nvPr/>
-        </p:nvSpPr>
-        <p:spPr>
-          <a:xfrm>
-            <a:off x="12484150" y="2727817"/>
-            <a:ext cx="838200" cy="838200"/>
-          </a:xfrm>
-          <a:prstGeom prst="roundRect">
-            <a:avLst>
-              <a:gd name="adj" fmla="val 22727"/>
-            </a:avLst>
-          </a:prstGeom>
-          <a:solidFill>
-            <a:srgbClr val="F3EDE4"/>
-          </a:solidFill>
-          <a:ln/>
-        </p:spPr>
-      </p:sp>
-      <p:pic>
-        <p:nvPicPr>
-          <p:cNvPr id="15" name="Image 2" descr="preencoded.png">    </p:cNvPr>
+          <p:cNvPr id="5" name="Image 0" descr="preencoded.png"/>
           <p:cNvPicPr>
             <a:picLocks noChangeAspect="1"/>
           </p:cNvPicPr>
@@ -4263,7 +5350,7 @@
         </p:blipFill>
         <p:spPr>
           <a:xfrm>
-            <a:off x="12693700" y="2937367"/>
+            <a:off x="1543050" y="2914717"/>
             <a:ext cx="419100" cy="419100"/>
           </a:xfrm>
           <a:prstGeom prst="rect">
@@ -4273,13 +5360,13 @@
       </p:pic>
       <p:sp>
         <p:nvSpPr>
-          <p:cNvPr id="16" name="Text 11"/>
-          <p:cNvSpPr/>
-          <p:nvPr/>
-        </p:nvSpPr>
-        <p:spPr>
-          <a:xfrm>
-            <a:off x="12484150" y="3810000"/>
+          <p:cNvPr id="6" name="Text 3"/>
+          <p:cNvSpPr/>
+          <p:nvPr/>
+        </p:nvSpPr>
+        <p:spPr>
+          <a:xfrm>
+            <a:off x="1333500" y="3810000"/>
             <a:ext cx="4604461" cy="561975"/>
           </a:xfrm>
           <a:prstGeom prst="rect">
@@ -4294,7 +5381,7 @@
           </a:bodyPr>
           <a:lstStyle/>
           <a:p>
-            <a:pPr algn="l" indent="0" marL="0">
+            <a:pPr marL="0" indent="0" algn="l">
               <a:buNone/>
             </a:pPr>
             <a:r>
@@ -4306,7 +5393,7 @@
                 <a:ea typeface="Arial" pitchFamily="34" charset="-122"/>
                 <a:cs typeface="Arial" pitchFamily="34" charset="-120"/>
               </a:rPr>
-              <a:t>배운점</a:t>
+              <a:t>느낀점</a:t>
             </a:r>
             <a:endParaRPr lang="en-US" sz="2850" dirty="0"/>
           </a:p>
@@ -4314,14 +5401,14 @@
       </p:sp>
       <p:sp>
         <p:nvSpPr>
-          <p:cNvPr id="17" name="Text 12"/>
-          <p:cNvSpPr/>
-          <p:nvPr/>
-        </p:nvSpPr>
-        <p:spPr>
-          <a:xfrm>
-            <a:off x="12484150" y="4524375"/>
-            <a:ext cx="4604461" cy="1851422"/>
+          <p:cNvPr id="7" name="Text 4"/>
+          <p:cNvSpPr/>
+          <p:nvPr/>
+        </p:nvSpPr>
+        <p:spPr>
+          <a:xfrm>
+            <a:off x="1333500" y="4524375"/>
+            <a:ext cx="4604461" cy="2304752"/>
           </a:xfrm>
           <a:prstGeom prst="rect">
             <a:avLst/>
@@ -4335,7 +5422,437 @@
           </a:bodyPr>
           <a:lstStyle/>
           <a:p>
-            <a:pPr algn="l" indent="0" marL="0">
+            <a:pPr marL="0" indent="0" algn="l">
+              <a:lnSpc>
+                <a:spcPct val="170000"/>
+              </a:lnSpc>
+              <a:buNone/>
+            </a:pPr>
+            <a:r>
+              <a:rPr lang="ko-KR" altLang="en-US" sz="2100" dirty="0">
+                <a:solidFill>
+                  <a:srgbClr val="7A6243"/>
+                </a:solidFill>
+                <a:latin typeface="Arial" pitchFamily="34" charset="0"/>
+                <a:ea typeface="Arial" pitchFamily="34" charset="-122"/>
+                <a:cs typeface="Arial" pitchFamily="34" charset="-120"/>
+              </a:rPr>
+              <a:t>쇼핑몰을 구매자 입장과 더불어 직접 운영하기 위한 사이트를 개발하면서</a:t>
+            </a:r>
+            <a:r>
+              <a:rPr lang="en-US" altLang="ko-KR" sz="2100" dirty="0">
+                <a:solidFill>
+                  <a:srgbClr val="7A6243"/>
+                </a:solidFill>
+                <a:latin typeface="Arial" pitchFamily="34" charset="0"/>
+                <a:ea typeface="Arial" pitchFamily="34" charset="-122"/>
+                <a:cs typeface="Arial" pitchFamily="34" charset="-120"/>
+              </a:rPr>
+              <a:t>, </a:t>
+            </a:r>
+            <a:r>
+              <a:rPr lang="ko-KR" altLang="en-US" sz="2100" dirty="0">
+                <a:solidFill>
+                  <a:srgbClr val="7A6243"/>
+                </a:solidFill>
+                <a:latin typeface="Arial" pitchFamily="34" charset="0"/>
+                <a:ea typeface="Arial" pitchFamily="34" charset="-122"/>
+                <a:cs typeface="Arial" pitchFamily="34" charset="-120"/>
+              </a:rPr>
+              <a:t>다양한 요소와 기술이 필요한 것을 알 수 있었습니다</a:t>
+            </a:r>
+            <a:r>
+              <a:rPr lang="en-US" altLang="ko-KR" sz="2100" dirty="0">
+                <a:solidFill>
+                  <a:srgbClr val="7A6243"/>
+                </a:solidFill>
+                <a:latin typeface="Arial" pitchFamily="34" charset="0"/>
+                <a:ea typeface="Arial" pitchFamily="34" charset="-122"/>
+                <a:cs typeface="Arial" pitchFamily="34" charset="-120"/>
+              </a:rPr>
+              <a:t>.</a:t>
+            </a:r>
+          </a:p>
+        </p:txBody>
+      </p:sp>
+      <p:sp>
+        <p:nvSpPr>
+          <p:cNvPr id="8" name="Shape 5"/>
+          <p:cNvSpPr/>
+          <p:nvPr/>
+        </p:nvSpPr>
+        <p:spPr>
+          <a:xfrm>
+            <a:off x="6527750" y="2324100"/>
+            <a:ext cx="5232499" cy="7200900"/>
+          </a:xfrm>
+          <a:prstGeom prst="roundRect">
+            <a:avLst>
+              <a:gd name="adj" fmla="val 3641"/>
+            </a:avLst>
+          </a:prstGeom>
+          <a:solidFill>
+            <a:srgbClr val="FFFFFF"/>
+          </a:solidFill>
+          <a:ln/>
+          <a:effectLst>
+            <a:outerShdw blurRad="228600" dist="38100" dir="5400000" algn="bl" rotWithShape="0">
+              <a:srgbClr val="3D3224">
+                <a:alpha val="6000"/>
+              </a:srgbClr>
+            </a:outerShdw>
+          </a:effectLst>
+        </p:spPr>
+        <p:txBody>
+          <a:bodyPr/>
+          <a:lstStyle/>
+          <a:p>
+            <a:endParaRPr lang="ko-KR" altLang="en-US"/>
+          </a:p>
+        </p:txBody>
+      </p:sp>
+      <p:sp>
+        <p:nvSpPr>
+          <p:cNvPr id="9" name="Shape 6"/>
+          <p:cNvSpPr/>
+          <p:nvPr/>
+        </p:nvSpPr>
+        <p:spPr>
+          <a:xfrm>
+            <a:off x="6908750" y="2710024"/>
+            <a:ext cx="838200" cy="838200"/>
+          </a:xfrm>
+          <a:prstGeom prst="roundRect">
+            <a:avLst>
+              <a:gd name="adj" fmla="val 22727"/>
+            </a:avLst>
+          </a:prstGeom>
+          <a:solidFill>
+            <a:srgbClr val="F3EDE4"/>
+          </a:solidFill>
+          <a:ln/>
+        </p:spPr>
+        <p:txBody>
+          <a:bodyPr/>
+          <a:lstStyle/>
+          <a:p>
+            <a:endParaRPr lang="ko-KR" altLang="en-US"/>
+          </a:p>
+        </p:txBody>
+      </p:sp>
+      <p:pic>
+        <p:nvPicPr>
+          <p:cNvPr id="10" name="Image 1" descr="preencoded.png"/>
+          <p:cNvPicPr>
+            <a:picLocks noChangeAspect="1"/>
+          </p:cNvPicPr>
+          <p:nvPr/>
+        </p:nvPicPr>
+        <p:blipFill>
+          <a:blip r:embed="rId4"/>
+          <a:stretch>
+            <a:fillRect/>
+          </a:stretch>
+        </p:blipFill>
+        <p:spPr>
+          <a:xfrm>
+            <a:off x="7118300" y="2919574"/>
+            <a:ext cx="419100" cy="419100"/>
+          </a:xfrm>
+          <a:prstGeom prst="rect">
+            <a:avLst/>
+          </a:prstGeom>
+        </p:spPr>
+      </p:pic>
+      <p:sp>
+        <p:nvSpPr>
+          <p:cNvPr id="11" name="Text 7"/>
+          <p:cNvSpPr/>
+          <p:nvPr/>
+        </p:nvSpPr>
+        <p:spPr>
+          <a:xfrm>
+            <a:off x="6908750" y="3810000"/>
+            <a:ext cx="4604614" cy="561975"/>
+          </a:xfrm>
+          <a:prstGeom prst="rect">
+            <a:avLst/>
+          </a:prstGeom>
+          <a:noFill/>
+          <a:ln/>
+        </p:spPr>
+        <p:txBody>
+          <a:bodyPr wrap="square" lIns="25400" tIns="25400" rIns="25400" bIns="25400" rtlCol="0" anchor="t">
+            <a:normAutofit/>
+          </a:bodyPr>
+          <a:lstStyle/>
+          <a:p>
+            <a:pPr marL="0" indent="0" algn="l">
+              <a:buNone/>
+            </a:pPr>
+            <a:r>
+              <a:rPr lang="en-US" sz="2850" b="1" dirty="0">
+                <a:solidFill>
+                  <a:srgbClr val="5C4A33"/>
+                </a:solidFill>
+                <a:latin typeface="Arial" pitchFamily="34" charset="0"/>
+                <a:ea typeface="Arial" pitchFamily="34" charset="-122"/>
+                <a:cs typeface="Arial" pitchFamily="34" charset="-120"/>
+              </a:rPr>
+              <a:t>반성할 점</a:t>
+            </a:r>
+            <a:endParaRPr lang="en-US" sz="2850" dirty="0"/>
+          </a:p>
+        </p:txBody>
+      </p:sp>
+      <p:sp>
+        <p:nvSpPr>
+          <p:cNvPr id="12" name="Text 8"/>
+          <p:cNvSpPr/>
+          <p:nvPr/>
+        </p:nvSpPr>
+        <p:spPr>
+          <a:xfrm>
+            <a:off x="6908750" y="4524374"/>
+            <a:ext cx="4604614" cy="3311525"/>
+          </a:xfrm>
+          <a:prstGeom prst="rect">
+            <a:avLst/>
+          </a:prstGeom>
+          <a:noFill/>
+          <a:ln/>
+        </p:spPr>
+        <p:txBody>
+          <a:bodyPr wrap="square" lIns="25400" tIns="25400" rIns="25400" bIns="25400" rtlCol="0" anchor="t">
+            <a:normAutofit/>
+          </a:bodyPr>
+          <a:lstStyle/>
+          <a:p>
+            <a:pPr>
+              <a:lnSpc>
+                <a:spcPct val="170000"/>
+              </a:lnSpc>
+            </a:pPr>
+            <a:r>
+              <a:rPr lang="ko-KR" altLang="en-US" sz="2100" dirty="0">
+                <a:solidFill>
+                  <a:srgbClr val="7A6243"/>
+                </a:solidFill>
+                <a:latin typeface="Arial" pitchFamily="34" charset="0"/>
+                <a:ea typeface="Arial" pitchFamily="34" charset="-122"/>
+                <a:cs typeface="Arial" pitchFamily="34" charset="-120"/>
+              </a:rPr>
+              <a:t>시간 관리를 좀 더 체계적으로 하여</a:t>
+            </a:r>
+          </a:p>
+          <a:p>
+            <a:pPr>
+              <a:lnSpc>
+                <a:spcPct val="170000"/>
+              </a:lnSpc>
+            </a:pPr>
+            <a:r>
+              <a:rPr lang="ko-KR" altLang="en-US" sz="2100" dirty="0">
+                <a:solidFill>
+                  <a:srgbClr val="7A6243"/>
+                </a:solidFill>
+                <a:latin typeface="Arial" pitchFamily="34" charset="0"/>
+                <a:ea typeface="Arial" pitchFamily="34" charset="-122"/>
+                <a:cs typeface="Arial" pitchFamily="34" charset="-120"/>
+              </a:rPr>
+              <a:t>디버깅 작업을 늘리고</a:t>
+            </a:r>
+            <a:r>
+              <a:rPr lang="en-US" altLang="ko-KR" sz="2100" dirty="0">
+                <a:solidFill>
+                  <a:srgbClr val="7A6243"/>
+                </a:solidFill>
+                <a:latin typeface="Arial" pitchFamily="34" charset="0"/>
+                <a:ea typeface="Arial" pitchFamily="34" charset="-122"/>
+                <a:cs typeface="Arial" pitchFamily="34" charset="-120"/>
+              </a:rPr>
+              <a:t>, </a:t>
+            </a:r>
+            <a:r>
+              <a:rPr lang="ko-KR" altLang="en-US" sz="2100" dirty="0">
+                <a:solidFill>
+                  <a:srgbClr val="7A6243"/>
+                </a:solidFill>
+                <a:latin typeface="Arial" pitchFamily="34" charset="0"/>
+                <a:ea typeface="Arial" pitchFamily="34" charset="-122"/>
+                <a:cs typeface="Arial" pitchFamily="34" charset="-120"/>
+              </a:rPr>
+              <a:t>다양한 기존 플랫폼을 모니터링하면 더 나은 결과를 도출했을 것이라 생각합니다</a:t>
+            </a:r>
+            <a:r>
+              <a:rPr lang="en-US" altLang="ko-KR" sz="2100" dirty="0">
+                <a:solidFill>
+                  <a:srgbClr val="7A6243"/>
+                </a:solidFill>
+                <a:latin typeface="Arial" pitchFamily="34" charset="0"/>
+                <a:ea typeface="Arial" pitchFamily="34" charset="-122"/>
+                <a:cs typeface="Arial" pitchFamily="34" charset="-120"/>
+              </a:rPr>
+              <a:t>.</a:t>
+            </a:r>
+            <a:endParaRPr lang="en-US" sz="2100" dirty="0"/>
+          </a:p>
+        </p:txBody>
+      </p:sp>
+      <p:sp>
+        <p:nvSpPr>
+          <p:cNvPr id="13" name="Shape 9"/>
+          <p:cNvSpPr/>
+          <p:nvPr/>
+        </p:nvSpPr>
+        <p:spPr>
+          <a:xfrm>
+            <a:off x="12103150" y="2324100"/>
+            <a:ext cx="5232350" cy="7200900"/>
+          </a:xfrm>
+          <a:prstGeom prst="roundRect">
+            <a:avLst>
+              <a:gd name="adj" fmla="val 3641"/>
+            </a:avLst>
+          </a:prstGeom>
+          <a:solidFill>
+            <a:srgbClr val="FFFFFF"/>
+          </a:solidFill>
+          <a:ln/>
+          <a:effectLst>
+            <a:outerShdw blurRad="228600" dist="38100" dir="5400000" algn="bl" rotWithShape="0">
+              <a:srgbClr val="3D3224">
+                <a:alpha val="6000"/>
+              </a:srgbClr>
+            </a:outerShdw>
+          </a:effectLst>
+        </p:spPr>
+        <p:txBody>
+          <a:bodyPr/>
+          <a:lstStyle/>
+          <a:p>
+            <a:endParaRPr lang="ko-KR" altLang="en-US"/>
+          </a:p>
+        </p:txBody>
+      </p:sp>
+      <p:sp>
+        <p:nvSpPr>
+          <p:cNvPr id="14" name="Shape 10"/>
+          <p:cNvSpPr/>
+          <p:nvPr/>
+        </p:nvSpPr>
+        <p:spPr>
+          <a:xfrm>
+            <a:off x="12484150" y="2727817"/>
+            <a:ext cx="838200" cy="838200"/>
+          </a:xfrm>
+          <a:prstGeom prst="roundRect">
+            <a:avLst>
+              <a:gd name="adj" fmla="val 22727"/>
+            </a:avLst>
+          </a:prstGeom>
+          <a:solidFill>
+            <a:srgbClr val="F3EDE4"/>
+          </a:solidFill>
+          <a:ln/>
+        </p:spPr>
+        <p:txBody>
+          <a:bodyPr/>
+          <a:lstStyle/>
+          <a:p>
+            <a:endParaRPr lang="ko-KR" altLang="en-US"/>
+          </a:p>
+        </p:txBody>
+      </p:sp>
+      <p:pic>
+        <p:nvPicPr>
+          <p:cNvPr id="15" name="Image 2" descr="preencoded.png"/>
+          <p:cNvPicPr>
+            <a:picLocks noChangeAspect="1"/>
+          </p:cNvPicPr>
+          <p:nvPr/>
+        </p:nvPicPr>
+        <p:blipFill>
+          <a:blip r:embed="rId5"/>
+          <a:stretch>
+            <a:fillRect/>
+          </a:stretch>
+        </p:blipFill>
+        <p:spPr>
+          <a:xfrm>
+            <a:off x="12693700" y="2937367"/>
+            <a:ext cx="419100" cy="419100"/>
+          </a:xfrm>
+          <a:prstGeom prst="rect">
+            <a:avLst/>
+          </a:prstGeom>
+        </p:spPr>
+      </p:pic>
+      <p:sp>
+        <p:nvSpPr>
+          <p:cNvPr id="16" name="Text 11"/>
+          <p:cNvSpPr/>
+          <p:nvPr/>
+        </p:nvSpPr>
+        <p:spPr>
+          <a:xfrm>
+            <a:off x="12484150" y="3810000"/>
+            <a:ext cx="4604461" cy="561975"/>
+          </a:xfrm>
+          <a:prstGeom prst="rect">
+            <a:avLst/>
+          </a:prstGeom>
+          <a:noFill/>
+          <a:ln/>
+        </p:spPr>
+        <p:txBody>
+          <a:bodyPr wrap="square" lIns="25400" tIns="25400" rIns="25400" bIns="25400" rtlCol="0" anchor="t">
+            <a:normAutofit/>
+          </a:bodyPr>
+          <a:lstStyle/>
+          <a:p>
+            <a:pPr marL="0" indent="0" algn="l">
+              <a:buNone/>
+            </a:pPr>
+            <a:r>
+              <a:rPr lang="en-US" sz="2850" b="1" dirty="0">
+                <a:solidFill>
+                  <a:srgbClr val="5C4A33"/>
+                </a:solidFill>
+                <a:latin typeface="Arial" pitchFamily="34" charset="0"/>
+                <a:ea typeface="Arial" pitchFamily="34" charset="-122"/>
+                <a:cs typeface="Arial" pitchFamily="34" charset="-120"/>
+              </a:rPr>
+              <a:t>배운점</a:t>
+            </a:r>
+            <a:endParaRPr lang="en-US" sz="2850" dirty="0"/>
+          </a:p>
+        </p:txBody>
+      </p:sp>
+      <p:sp>
+        <p:nvSpPr>
+          <p:cNvPr id="17" name="Text 12"/>
+          <p:cNvSpPr/>
+          <p:nvPr/>
+        </p:nvSpPr>
+        <p:spPr>
+          <a:xfrm>
+            <a:off x="12484150" y="4524375"/>
+            <a:ext cx="4604461" cy="1851422"/>
+          </a:xfrm>
+          <a:prstGeom prst="rect">
+            <a:avLst/>
+          </a:prstGeom>
+          <a:noFill/>
+          <a:ln/>
+        </p:spPr>
+        <p:txBody>
+          <a:bodyPr wrap="square" lIns="25400" tIns="25400" rIns="25400" bIns="25400" rtlCol="0" anchor="t">
+            <a:normAutofit/>
+          </a:bodyPr>
+          <a:lstStyle/>
+          <a:p>
+            <a:pPr marL="0" indent="0" algn="l">
               <a:lnSpc>
                 <a:spcPct val="170000"/>
               </a:lnSpc>
@@ -4364,7 +5881,7 @@
 </p:sld>
 </file>
 
-<file path=ppt/slides/slide15.xml><?xml version="1.0" encoding="utf-8"?>
+<file path=ppt/slides/slide17.xml><?xml version="1.0" encoding="utf-8"?>
 <p:sld xmlns:a="http://schemas.openxmlformats.org/drawingml/2006/main" xmlns:r="http://schemas.openxmlformats.org/officeDocument/2006/relationships" xmlns:p="http://schemas.openxmlformats.org/presentationml/2006/main">
   <p:cSld name="Slide 15">
     <p:spTree>
@@ -4400,6 +5917,13 @@
           </a:solidFill>
           <a:ln/>
         </p:spPr>
+        <p:txBody>
+          <a:bodyPr/>
+          <a:lstStyle/>
+          <a:p>
+            <a:endParaRPr lang="ko-KR" altLang="en-US"/>
+          </a:p>
+        </p:txBody>
       </p:sp>
       <p:sp>
         <p:nvSpPr>
@@ -4422,6 +5946,13 @@
           </a:solidFill>
           <a:ln/>
         </p:spPr>
+        <p:txBody>
+          <a:bodyPr/>
+          <a:lstStyle/>
+          <a:p>
+            <a:endParaRPr lang="ko-KR" altLang="en-US"/>
+          </a:p>
+        </p:txBody>
       </p:sp>
       <p:sp>
         <p:nvSpPr>
@@ -4444,17 +5975,24 @@
           </a:solidFill>
           <a:ln/>
         </p:spPr>
+        <p:txBody>
+          <a:bodyPr/>
+          <a:lstStyle/>
+          <a:p>
+            <a:endParaRPr lang="ko-KR" altLang="en-US"/>
+          </a:p>
+        </p:txBody>
       </p:sp>
       <p:pic>
         <p:nvPicPr>
-          <p:cNvPr id="5" name="Image 0" descr="preencoded.png">    </p:cNvPr>
+          <p:cNvPr id="5" name="Image 0" descr="preencoded.png"/>
           <p:cNvPicPr>
             <a:picLocks noChangeAspect="1"/>
           </p:cNvPicPr>
           <p:nvPr/>
         </p:nvPicPr>
         <p:blipFill>
-          <a:blip r:embed="rId1"/>
+          <a:blip r:embed="rId3"/>
           <a:stretch>
             <a:fillRect/>
           </a:stretch>
@@ -4492,7 +6030,7 @@
           </a:bodyPr>
           <a:lstStyle/>
           <a:p>
-            <a:pPr algn="ctr" indent="0" marL="0">
+            <a:pPr marL="0" indent="0" algn="ctr">
               <a:buNone/>
             </a:pPr>
             <a:r>
@@ -4529,11 +6067,11 @@
         </p:spPr>
         <p:txBody>
           <a:bodyPr wrap="square" lIns="25400" tIns="25400" rIns="25400" bIns="25400" rtlCol="0" anchor="t">
-            <a:normAutofit/>
+            <a:normAutofit fontScale="85000" lnSpcReduction="10000"/>
           </a:bodyPr>
           <a:lstStyle/>
           <a:p>
-            <a:pPr algn="ctr" indent="0" marL="0">
+            <a:pPr marL="0" indent="0" algn="ctr">
               <a:buNone/>
             </a:pPr>
             <a:r>
@@ -4570,6 +6108,13 @@
           </a:solidFill>
           <a:ln/>
         </p:spPr>
+        <p:txBody>
+          <a:bodyPr/>
+          <a:lstStyle/>
+          <a:p>
+            <a:endParaRPr lang="ko-KR" altLang="en-US"/>
+          </a:p>
+        </p:txBody>
       </p:sp>
       <p:sp>
         <p:nvSpPr>
@@ -4590,11 +6135,11 @@
         </p:spPr>
         <p:txBody>
           <a:bodyPr wrap="square" lIns="25400" tIns="25400" rIns="25400" bIns="25400" rtlCol="0" anchor="t">
-            <a:normAutofit/>
+            <a:normAutofit fontScale="92500"/>
           </a:bodyPr>
           <a:lstStyle/>
           <a:p>
-            <a:pPr algn="ctr" indent="0" marL="0">
+            <a:pPr marL="0" indent="0" algn="ctr">
               <a:lnSpc>
                 <a:spcPct val="200000"/>
               </a:lnSpc>
@@ -4611,12 +6156,6 @@
               </a:rPr>
               <a:t>오하율 </a:t>
             </a:r>
-            <a:pPr algn="ctr" indent="0" marL="0">
-              <a:lnSpc>
-                <a:spcPct val="200000"/>
-              </a:lnSpc>
-              <a:buNone/>
-            </a:pPr>
             <a:r>
               <a:rPr lang="en-US" sz="2100" dirty="0">
                 <a:solidFill>
@@ -4648,6 +6187,7 @@
         <a:solidFill>
           <a:srgbClr val="FAF7F2"/>
         </a:solidFill>
+        <a:effectLst/>
       </p:bgPr>
     </p:bg>
     <p:spTree>
@@ -4687,7 +6227,7 @@
           </a:bodyPr>
           <a:lstStyle/>
           <a:p>
-            <a:pPr algn="l" indent="0" marL="0">
+            <a:pPr marL="0" indent="0" algn="l">
               <a:buNone/>
             </a:pPr>
             <a:r>
@@ -4726,13 +6266,20 @@
           </a:solidFill>
           <a:ln/>
           <a:effectLst>
-            <a:outerShdw sx="100000" sy="100000" kx="0" ky="0" algn="bl" rotWithShape="0" blurRad="190500" dist="19050" dir="5400000">
+            <a:outerShdw blurRad="190500" dist="19050" dir="5400000" algn="bl" rotWithShape="0">
               <a:srgbClr val="3D3224">
                 <a:alpha val="6000"/>
               </a:srgbClr>
             </a:outerShdw>
           </a:effectLst>
         </p:spPr>
+        <p:txBody>
+          <a:bodyPr/>
+          <a:lstStyle/>
+          <a:p>
+            <a:endParaRPr lang="ko-KR" altLang="en-US"/>
+          </a:p>
+        </p:txBody>
       </p:sp>
       <p:sp>
         <p:nvSpPr>
@@ -4757,7 +6304,7 @@
           </a:bodyPr>
           <a:lstStyle/>
           <a:p>
-            <a:pPr algn="ctr" indent="0" marL="0">
+            <a:pPr marL="0" indent="0" algn="ctr">
               <a:buNone/>
             </a:pPr>
             <a:r>
@@ -4798,7 +6345,7 @@
           </a:bodyPr>
           <a:lstStyle/>
           <a:p>
-            <a:pPr algn="ctr" indent="0" marL="0">
+            <a:pPr marL="0" indent="0" algn="ctr">
               <a:buNone/>
             </a:pPr>
             <a:r>
@@ -4837,13 +6384,20 @@
           </a:solidFill>
           <a:ln/>
           <a:effectLst>
-            <a:outerShdw sx="100000" sy="100000" kx="0" ky="0" algn="bl" rotWithShape="0" blurRad="190500" dist="19050" dir="5400000">
+            <a:outerShdw blurRad="190500" dist="19050" dir="5400000" algn="bl" rotWithShape="0">
               <a:srgbClr val="3D3224">
                 <a:alpha val="6000"/>
               </a:srgbClr>
             </a:outerShdw>
           </a:effectLst>
         </p:spPr>
+        <p:txBody>
+          <a:bodyPr/>
+          <a:lstStyle/>
+          <a:p>
+            <a:endParaRPr lang="ko-KR" altLang="en-US"/>
+          </a:p>
+        </p:txBody>
       </p:sp>
       <p:sp>
         <p:nvSpPr>
@@ -4868,7 +6422,7 @@
           </a:bodyPr>
           <a:lstStyle/>
           <a:p>
-            <a:pPr algn="ctr" indent="0" marL="0">
+            <a:pPr marL="0" indent="0" algn="ctr">
               <a:buNone/>
             </a:pPr>
             <a:r>
@@ -4909,7 +6463,7 @@
           </a:bodyPr>
           <a:lstStyle/>
           <a:p>
-            <a:pPr algn="ctr" indent="0" marL="0">
+            <a:pPr marL="0" indent="0" algn="ctr">
               <a:buNone/>
             </a:pPr>
             <a:r>
@@ -4948,13 +6502,20 @@
           </a:solidFill>
           <a:ln/>
           <a:effectLst>
-            <a:outerShdw sx="100000" sy="100000" kx="0" ky="0" algn="bl" rotWithShape="0" blurRad="190500" dist="19050" dir="5400000">
+            <a:outerShdw blurRad="190500" dist="19050" dir="5400000" algn="bl" rotWithShape="0">
               <a:srgbClr val="3D3224">
                 <a:alpha val="6000"/>
               </a:srgbClr>
             </a:outerShdw>
           </a:effectLst>
         </p:spPr>
+        <p:txBody>
+          <a:bodyPr/>
+          <a:lstStyle/>
+          <a:p>
+            <a:endParaRPr lang="ko-KR" altLang="en-US"/>
+          </a:p>
+        </p:txBody>
       </p:sp>
       <p:sp>
         <p:nvSpPr>
@@ -4979,7 +6540,7 @@
           </a:bodyPr>
           <a:lstStyle/>
           <a:p>
-            <a:pPr algn="ctr" indent="0" marL="0">
+            <a:pPr marL="0" indent="0" algn="ctr">
               <a:buNone/>
             </a:pPr>
             <a:r>
@@ -5020,7 +6581,7 @@
           </a:bodyPr>
           <a:lstStyle/>
           <a:p>
-            <a:pPr algn="ctr" indent="0" marL="0">
+            <a:pPr marL="0" indent="0" algn="ctr">
               <a:buNone/>
             </a:pPr>
             <a:r>
@@ -5059,13 +6620,20 @@
           </a:solidFill>
           <a:ln/>
           <a:effectLst>
-            <a:outerShdw sx="100000" sy="100000" kx="0" ky="0" algn="bl" rotWithShape="0" blurRad="190500" dist="19050" dir="5400000">
+            <a:outerShdw blurRad="190500" dist="19050" dir="5400000" algn="bl" rotWithShape="0">
               <a:srgbClr val="3D3224">
                 <a:alpha val="6000"/>
               </a:srgbClr>
             </a:outerShdw>
           </a:effectLst>
         </p:spPr>
+        <p:txBody>
+          <a:bodyPr/>
+          <a:lstStyle/>
+          <a:p>
+            <a:endParaRPr lang="ko-KR" altLang="en-US"/>
+          </a:p>
+        </p:txBody>
       </p:sp>
       <p:sp>
         <p:nvSpPr>
@@ -5090,7 +6658,7 @@
           </a:bodyPr>
           <a:lstStyle/>
           <a:p>
-            <a:pPr algn="ctr" indent="0" marL="0">
+            <a:pPr marL="0" indent="0" algn="ctr">
               <a:buNone/>
             </a:pPr>
             <a:r>
@@ -5131,7 +6699,7 @@
           </a:bodyPr>
           <a:lstStyle/>
           <a:p>
-            <a:pPr algn="ctr" indent="0" marL="0">
+            <a:pPr marL="0" indent="0" algn="ctr">
               <a:buNone/>
             </a:pPr>
             <a:r>
@@ -5170,13 +6738,20 @@
           </a:solidFill>
           <a:ln/>
           <a:effectLst>
-            <a:outerShdw sx="100000" sy="100000" kx="0" ky="0" algn="bl" rotWithShape="0" blurRad="190500" dist="19050" dir="5400000">
+            <a:outerShdw blurRad="190500" dist="19050" dir="5400000" algn="bl" rotWithShape="0">
               <a:srgbClr val="3D3224">
                 <a:alpha val="6000"/>
               </a:srgbClr>
             </a:outerShdw>
           </a:effectLst>
         </p:spPr>
+        <p:txBody>
+          <a:bodyPr/>
+          <a:lstStyle/>
+          <a:p>
+            <a:endParaRPr lang="ko-KR" altLang="en-US"/>
+          </a:p>
+        </p:txBody>
       </p:sp>
       <p:sp>
         <p:nvSpPr>
@@ -5201,7 +6776,7 @@
           </a:bodyPr>
           <a:lstStyle/>
           <a:p>
-            <a:pPr algn="ctr" indent="0" marL="0">
+            <a:pPr marL="0" indent="0" algn="ctr">
               <a:buNone/>
             </a:pPr>
             <a:r>
@@ -5242,7 +6817,7 @@
           </a:bodyPr>
           <a:lstStyle/>
           <a:p>
-            <a:pPr algn="ctr" indent="0" marL="0">
+            <a:pPr marL="0" indent="0" algn="ctr">
               <a:buNone/>
             </a:pPr>
             <a:r>
@@ -5281,13 +6856,20 @@
           </a:solidFill>
           <a:ln/>
           <a:effectLst>
-            <a:outerShdw sx="100000" sy="100000" kx="0" ky="0" algn="bl" rotWithShape="0" blurRad="190500" dist="19050" dir="5400000">
+            <a:outerShdw blurRad="190500" dist="19050" dir="5400000" algn="bl" rotWithShape="0">
               <a:srgbClr val="3D3224">
                 <a:alpha val="6000"/>
               </a:srgbClr>
             </a:outerShdw>
           </a:effectLst>
         </p:spPr>
+        <p:txBody>
+          <a:bodyPr/>
+          <a:lstStyle/>
+          <a:p>
+            <a:endParaRPr lang="ko-KR" altLang="en-US"/>
+          </a:p>
+        </p:txBody>
       </p:sp>
       <p:sp>
         <p:nvSpPr>
@@ -5312,7 +6894,7 @@
           </a:bodyPr>
           <a:lstStyle/>
           <a:p>
-            <a:pPr algn="ctr" indent="0" marL="0">
+            <a:pPr marL="0" indent="0" algn="ctr">
               <a:buNone/>
             </a:pPr>
             <a:r>
@@ -5353,7 +6935,7 @@
           </a:bodyPr>
           <a:lstStyle/>
           <a:p>
-            <a:pPr algn="ctr" indent="0" marL="0">
+            <a:pPr marL="0" indent="0" algn="ctr">
               <a:buNone/>
             </a:pPr>
             <a:r>
@@ -5392,13 +6974,20 @@
           </a:solidFill>
           <a:ln/>
           <a:effectLst>
-            <a:outerShdw sx="100000" sy="100000" kx="0" ky="0" algn="bl" rotWithShape="0" blurRad="190500" dist="19050" dir="5400000">
+            <a:outerShdw blurRad="190500" dist="19050" dir="5400000" algn="bl" rotWithShape="0">
               <a:srgbClr val="3D3224">
                 <a:alpha val="6000"/>
               </a:srgbClr>
             </a:outerShdw>
           </a:effectLst>
         </p:spPr>
+        <p:txBody>
+          <a:bodyPr/>
+          <a:lstStyle/>
+          <a:p>
+            <a:endParaRPr lang="ko-KR" altLang="en-US"/>
+          </a:p>
+        </p:txBody>
       </p:sp>
       <p:sp>
         <p:nvSpPr>
@@ -5423,7 +7012,7 @@
           </a:bodyPr>
           <a:lstStyle/>
           <a:p>
-            <a:pPr algn="ctr" indent="0" marL="0">
+            <a:pPr marL="0" indent="0" algn="ctr">
               <a:buNone/>
             </a:pPr>
             <a:r>
@@ -5464,7 +7053,7 @@
           </a:bodyPr>
           <a:lstStyle/>
           <a:p>
-            <a:pPr algn="ctr" indent="0" marL="0">
+            <a:pPr marL="0" indent="0" algn="ctr">
               <a:buNone/>
             </a:pPr>
             <a:r>
@@ -5503,13 +7092,20 @@
           </a:solidFill>
           <a:ln/>
           <a:effectLst>
-            <a:outerShdw sx="100000" sy="100000" kx="0" ky="0" algn="bl" rotWithShape="0" blurRad="190500" dist="19050" dir="5400000">
+            <a:outerShdw blurRad="190500" dist="19050" dir="5400000" algn="bl" rotWithShape="0">
               <a:srgbClr val="3D3224">
                 <a:alpha val="6000"/>
               </a:srgbClr>
             </a:outerShdw>
           </a:effectLst>
         </p:spPr>
+        <p:txBody>
+          <a:bodyPr/>
+          <a:lstStyle/>
+          <a:p>
+            <a:endParaRPr lang="ko-KR" altLang="en-US"/>
+          </a:p>
+        </p:txBody>
       </p:sp>
       <p:sp>
         <p:nvSpPr>
@@ -5534,7 +7130,7 @@
           </a:bodyPr>
           <a:lstStyle/>
           <a:p>
-            <a:pPr algn="ctr" indent="0" marL="0">
+            <a:pPr marL="0" indent="0" algn="ctr">
               <a:buNone/>
             </a:pPr>
             <a:r>
@@ -5575,7 +7171,7 @@
           </a:bodyPr>
           <a:lstStyle/>
           <a:p>
-            <a:pPr algn="ctr" indent="0" marL="0">
+            <a:pPr marL="0" indent="0" algn="ctr">
               <a:buNone/>
             </a:pPr>
             <a:r>
@@ -5609,6 +7205,7 @@
         <a:solidFill>
           <a:srgbClr val="FAF7F2"/>
         </a:solidFill>
+        <a:effectLst/>
       </p:bgPr>
     </p:bg>
     <p:spTree>
@@ -5648,7 +7245,7 @@
           </a:bodyPr>
           <a:lstStyle/>
           <a:p>
-            <a:pPr algn="l" indent="0" marL="0">
+            <a:pPr marL="0" indent="0" algn="l">
               <a:buNone/>
             </a:pPr>
             <a:r>
@@ -5687,13 +7284,20 @@
           </a:solidFill>
           <a:ln/>
           <a:effectLst>
-            <a:outerShdw sx="100000" sy="100000" kx="0" ky="0" algn="bl" rotWithShape="0" blurRad="228600" dist="38100" dir="5400000">
+            <a:outerShdw blurRad="228600" dist="38100" dir="5400000" algn="bl" rotWithShape="0">
               <a:srgbClr val="3D3224">
                 <a:alpha val="6000"/>
               </a:srgbClr>
             </a:outerShdw>
           </a:effectLst>
         </p:spPr>
+        <p:txBody>
+          <a:bodyPr/>
+          <a:lstStyle/>
+          <a:p>
+            <a:endParaRPr lang="ko-KR" altLang="en-US"/>
+          </a:p>
+        </p:txBody>
       </p:sp>
       <p:sp>
         <p:nvSpPr>
@@ -5716,354 +7320,17 @@
           </a:solidFill>
           <a:ln/>
         </p:spPr>
+        <p:txBody>
+          <a:bodyPr/>
+          <a:lstStyle/>
+          <a:p>
+            <a:endParaRPr lang="ko-KR" altLang="en-US"/>
+          </a:p>
+        </p:txBody>
       </p:sp>
       <p:pic>
         <p:nvPicPr>
-          <p:cNvPr id="5" name="Image 0" descr="preencoded.png">    </p:cNvPr>
-          <p:cNvPicPr>
-            <a:picLocks noChangeAspect="1"/>
-          </p:cNvPicPr>
-          <p:nvPr/>
-        </p:nvPicPr>
-        <p:blipFill>
-          <a:blip r:embed="rId1"/>
-          <a:stretch>
-            <a:fillRect/>
-          </a:stretch>
-        </p:blipFill>
-        <p:spPr>
-          <a:xfrm>
-            <a:off x="3371850" y="4839583"/>
-            <a:ext cx="419100" cy="419100"/>
-          </a:xfrm>
-          <a:prstGeom prst="rect">
-            <a:avLst/>
-          </a:prstGeom>
-        </p:spPr>
-      </p:pic>
-      <p:sp>
-        <p:nvSpPr>
-          <p:cNvPr id="6" name="Text 3"/>
-          <p:cNvSpPr/>
-          <p:nvPr/>
-        </p:nvSpPr>
-        <p:spPr>
-          <a:xfrm>
-            <a:off x="2798415" y="5683597"/>
-            <a:ext cx="1565970" cy="504825"/>
-          </a:xfrm>
-          <a:prstGeom prst="rect">
-            <a:avLst/>
-          </a:prstGeom>
-          <a:noFill/>
-          <a:ln/>
-        </p:spPr>
-        <p:txBody>
-          <a:bodyPr wrap="square" lIns="25400" tIns="25400" rIns="25400" bIns="25400" rtlCol="0" anchor="t">
-            <a:normAutofit/>
-          </a:bodyPr>
-          <a:lstStyle/>
-          <a:p>
-            <a:pPr algn="ctr" indent="0" marL="0">
-              <a:buNone/>
-            </a:pPr>
-            <a:r>
-              <a:rPr lang="en-US" sz="2550" b="1" dirty="0">
-                <a:solidFill>
-                  <a:srgbClr val="5C4A33"/>
-                </a:solidFill>
-                <a:latin typeface="Arial" pitchFamily="34" charset="0"/>
-                <a:ea typeface="Arial" pitchFamily="34" charset="-122"/>
-                <a:cs typeface="Arial" pitchFamily="34" charset="-120"/>
-              </a:rPr>
-              <a:t>프로젝트명</a:t>
-            </a:r>
-            <a:endParaRPr lang="en-US" sz="2550" dirty="0"/>
-          </a:p>
-        </p:txBody>
-      </p:sp>
-      <p:sp>
-        <p:nvSpPr>
-          <p:cNvPr id="7" name="Text 4"/>
-          <p:cNvSpPr/>
-          <p:nvPr/>
-        </p:nvSpPr>
-        <p:spPr>
-          <a:xfrm>
-            <a:off x="2293144" y="6340822"/>
-            <a:ext cx="2576513" cy="891480"/>
-          </a:xfrm>
-          <a:prstGeom prst="rect">
-            <a:avLst/>
-          </a:prstGeom>
-          <a:noFill/>
-          <a:ln/>
-        </p:spPr>
-        <p:txBody>
-          <a:bodyPr wrap="square" lIns="25400" tIns="25400" rIns="25400" bIns="25400" rtlCol="0" anchor="t">
-            <a:normAutofit/>
-          </a:bodyPr>
-          <a:lstStyle/>
-          <a:p>
-            <a:pPr algn="ctr" indent="0" marL="0">
-              <a:lnSpc>
-                <a:spcPct val="160000"/>
-              </a:lnSpc>
-              <a:buNone/>
-            </a:pPr>
-            <a:r>
-              <a:rPr lang="en-US" sz="2100" dirty="0">
-                <a:solidFill>
-                  <a:srgbClr val="7A6243"/>
-                </a:solidFill>
-                <a:latin typeface="Arial" pitchFamily="34" charset="0"/>
-                <a:ea typeface="Arial" pitchFamily="34" charset="-122"/>
-                <a:cs typeface="Arial" pitchFamily="34" charset="-120"/>
-              </a:rPr>
-              <a:t>VARO Shopping Mall </a:t>
-            </a:r>
-            <a:pPr algn="ctr" indent="0" marL="0">
-              <a:lnSpc>
-                <a:spcPct val="160000"/>
-              </a:lnSpc>
-              <a:buNone/>
-            </a:pPr>
-            <a:r>
-              <a:rPr lang="en-US" sz="1800" dirty="0">
-                <a:solidFill>
-                  <a:srgbClr val="9A7D52"/>
-                </a:solidFill>
-                <a:latin typeface="Arial" pitchFamily="34" charset="0"/>
-                <a:ea typeface="Arial" pitchFamily="34" charset="-122"/>
-                <a:cs typeface="Arial" pitchFamily="34" charset="-120"/>
-              </a:rPr>
-              <a:t>남성 패션 종합 쇼핑몰</a:t>
-            </a:r>
-            <a:endParaRPr lang="en-US" sz="2100" dirty="0"/>
-          </a:p>
-        </p:txBody>
-      </p:sp>
-      <p:sp>
-        <p:nvSpPr>
-          <p:cNvPr id="8" name="Shape 5"/>
-          <p:cNvSpPr/>
-          <p:nvPr/>
-        </p:nvSpPr>
-        <p:spPr>
-          <a:xfrm>
-            <a:off x="6515100" y="2324100"/>
-            <a:ext cx="5257800" cy="7200900"/>
-          </a:xfrm>
-          <a:prstGeom prst="roundRect">
-            <a:avLst>
-              <a:gd name="adj" fmla="val 3623"/>
-            </a:avLst>
-          </a:prstGeom>
-          <a:solidFill>
-            <a:srgbClr val="FFFFFF"/>
-          </a:solidFill>
-          <a:ln/>
-          <a:effectLst>
-            <a:outerShdw sx="100000" sy="100000" kx="0" ky="0" algn="bl" rotWithShape="0" blurRad="228600" dist="38100" dir="5400000">
-              <a:srgbClr val="3D3224">
-                <a:alpha val="6000"/>
-              </a:srgbClr>
-            </a:outerShdw>
-          </a:effectLst>
-        </p:spPr>
-      </p:sp>
-      <p:sp>
-        <p:nvSpPr>
-          <p:cNvPr id="9" name="Shape 6"/>
-          <p:cNvSpPr/>
-          <p:nvPr/>
-        </p:nvSpPr>
-        <p:spPr>
-          <a:xfrm>
-            <a:off x="8724900" y="4648897"/>
-            <a:ext cx="838200" cy="838200"/>
-          </a:xfrm>
-          <a:prstGeom prst="roundRect">
-            <a:avLst>
-              <a:gd name="adj" fmla="val 22727"/>
-            </a:avLst>
-          </a:prstGeom>
-          <a:solidFill>
-            <a:srgbClr val="F3EDE4"/>
-          </a:solidFill>
-          <a:ln/>
-        </p:spPr>
-      </p:sp>
-      <p:pic>
-        <p:nvPicPr>
-          <p:cNvPr id="10" name="Image 1" descr="preencoded.png">    </p:cNvPr>
-          <p:cNvPicPr>
-            <a:picLocks noChangeAspect="1"/>
-          </p:cNvPicPr>
-          <p:nvPr/>
-        </p:nvPicPr>
-        <p:blipFill>
-          <a:blip r:embed="rId2"/>
-          <a:stretch>
-            <a:fillRect/>
-          </a:stretch>
-        </p:blipFill>
-        <p:spPr>
-          <a:xfrm>
-            <a:off x="8934450" y="4858447"/>
-            <a:ext cx="419100" cy="419100"/>
-          </a:xfrm>
-          <a:prstGeom prst="rect">
-            <a:avLst/>
-          </a:prstGeom>
-        </p:spPr>
-      </p:pic>
-      <p:sp>
-        <p:nvSpPr>
-          <p:cNvPr id="11" name="Text 7"/>
-          <p:cNvSpPr/>
-          <p:nvPr/>
-        </p:nvSpPr>
-        <p:spPr>
-          <a:xfrm>
-            <a:off x="8464600" y="5683597"/>
-            <a:ext cx="1358652" cy="504825"/>
-          </a:xfrm>
-          <a:prstGeom prst="rect">
-            <a:avLst/>
-          </a:prstGeom>
-          <a:noFill/>
-          <a:ln/>
-        </p:spPr>
-        <p:txBody>
-          <a:bodyPr wrap="square" lIns="25400" tIns="25400" rIns="25400" bIns="25400" rtlCol="0" anchor="t">
-            <a:normAutofit/>
-          </a:bodyPr>
-          <a:lstStyle/>
-          <a:p>
-            <a:pPr algn="ctr" indent="0" marL="0">
-              <a:buNone/>
-            </a:pPr>
-            <a:r>
-              <a:rPr lang="en-US" sz="2550" b="1" dirty="0">
-                <a:solidFill>
-                  <a:srgbClr val="5C4A33"/>
-                </a:solidFill>
-                <a:latin typeface="Arial" pitchFamily="34" charset="0"/>
-                <a:ea typeface="Arial" pitchFamily="34" charset="-122"/>
-                <a:cs typeface="Arial" pitchFamily="34" charset="-120"/>
-              </a:rPr>
-              <a:t>주요 목표</a:t>
-            </a:r>
-            <a:endParaRPr lang="en-US" sz="2550" dirty="0"/>
-          </a:p>
-        </p:txBody>
-      </p:sp>
-      <p:sp>
-        <p:nvSpPr>
-          <p:cNvPr id="12" name="Text 8"/>
-          <p:cNvSpPr/>
-          <p:nvPr/>
-        </p:nvSpPr>
-        <p:spPr>
-          <a:xfrm>
-            <a:off x="7524920" y="6340822"/>
-            <a:ext cx="3238161" cy="891480"/>
-          </a:xfrm>
-          <a:prstGeom prst="rect">
-            <a:avLst/>
-          </a:prstGeom>
-          <a:noFill/>
-          <a:ln/>
-        </p:spPr>
-        <p:txBody>
-          <a:bodyPr wrap="square" lIns="25400" tIns="25400" rIns="25400" bIns="25400" rtlCol="0" anchor="t">
-            <a:normAutofit/>
-          </a:bodyPr>
-          <a:lstStyle/>
-          <a:p>
-            <a:pPr algn="ctr" indent="0" marL="0">
-              <a:lnSpc>
-                <a:spcPct val="160000"/>
-              </a:lnSpc>
-              <a:buNone/>
-            </a:pPr>
-            <a:r>
-              <a:rPr lang="en-US" sz="2100" dirty="0">
-                <a:solidFill>
-                  <a:srgbClr val="7A6243"/>
-                </a:solidFill>
-                <a:latin typeface="Arial" pitchFamily="34" charset="0"/>
-                <a:ea typeface="Arial" pitchFamily="34" charset="-122"/>
-                <a:cs typeface="Arial" pitchFamily="34" charset="-120"/>
-              </a:rPr>
-              <a:t>회원 · 비회원 · 관리자 3가지 역할의 통합 쇼핑 경험</a:t>
-            </a:r>
-            <a:endParaRPr lang="en-US" sz="2100" dirty="0"/>
-          </a:p>
-        </p:txBody>
-      </p:sp>
-      <p:sp>
-        <p:nvSpPr>
-          <p:cNvPr id="13" name="Shape 9"/>
-          <p:cNvSpPr/>
-          <p:nvPr/>
-        </p:nvSpPr>
-        <p:spPr>
-          <a:xfrm>
-            <a:off x="12077700" y="2324100"/>
-            <a:ext cx="5257800" cy="7200900"/>
-          </a:xfrm>
-          <a:prstGeom prst="roundRect">
-            <a:avLst>
-              <a:gd name="adj" fmla="val 3623"/>
-            </a:avLst>
-          </a:prstGeom>
-          <a:solidFill>
-            <a:srgbClr val="FFFFFF"/>
-          </a:solidFill>
-          <a:ln/>
-          <a:effectLst>
-            <a:outerShdw sx="100000" sy="100000" kx="0" ky="0" algn="bl" rotWithShape="0" blurRad="228600" dist="38100" dir="5400000">
-              <a:srgbClr val="3D3224">
-                <a:alpha val="6000"/>
-              </a:srgbClr>
-            </a:outerShdw>
-          </a:effectLst>
-        </p:spPr>
-      </p:sp>
-      <p:sp>
-        <p:nvSpPr>
-          <p:cNvPr id="14" name="Shape 10"/>
-          <p:cNvSpPr/>
-          <p:nvPr/>
-        </p:nvSpPr>
-        <p:spPr>
-          <a:xfrm>
-            <a:off x="14287500" y="4533007"/>
-            <a:ext cx="838200" cy="838200"/>
-          </a:xfrm>
-          <a:prstGeom prst="roundRect">
-            <a:avLst>
-              <a:gd name="adj" fmla="val 22727"/>
-            </a:avLst>
-          </a:prstGeom>
-          <a:solidFill>
-            <a:srgbClr val="F3EDE4"/>
-          </a:solidFill>
-          <a:ln/>
-          <a:effectLst>
-            <a:outerShdw sx="100000" sy="100000" kx="0" ky="0" algn="bl" rotWithShape="0" blurRad="101600" dist="50800" dir="16200000">
-              <a:srgbClr val="C8956C">
-                <a:alpha val="10000"/>
-              </a:srgbClr>
-            </a:outerShdw>
-          </a:effectLst>
-        </p:spPr>
-      </p:sp>
-      <p:pic>
-        <p:nvPicPr>
-          <p:cNvPr id="15" name="Image 2" descr="preencoded.png">    </p:cNvPr>
+          <p:cNvPr id="5" name="Image 0" descr="preencoded.png"/>
           <p:cNvPicPr>
             <a:picLocks noChangeAspect="1"/>
           </p:cNvPicPr>
@@ -6077,7 +7344,7 @@
         </p:blipFill>
         <p:spPr>
           <a:xfrm>
-            <a:off x="14497050" y="4742557"/>
+            <a:off x="3371850" y="4839583"/>
             <a:ext cx="419100" cy="419100"/>
           </a:xfrm>
           <a:prstGeom prst="rect">
@@ -6087,14 +7354,14 @@
       </p:pic>
       <p:sp>
         <p:nvSpPr>
-          <p:cNvPr id="16" name="Text 11"/>
-          <p:cNvSpPr/>
-          <p:nvPr/>
-        </p:nvSpPr>
-        <p:spPr>
-          <a:xfrm>
-            <a:off x="13878223" y="5561707"/>
-            <a:ext cx="1656606" cy="504825"/>
+          <p:cNvPr id="6" name="Text 3"/>
+          <p:cNvSpPr/>
+          <p:nvPr/>
+        </p:nvSpPr>
+        <p:spPr>
+          <a:xfrm>
+            <a:off x="2798414" y="5683597"/>
+            <a:ext cx="1674973" cy="504825"/>
           </a:xfrm>
           <a:prstGeom prst="rect">
             <a:avLst/>
@@ -6108,7 +7375,7 @@
           </a:bodyPr>
           <a:lstStyle/>
           <a:p>
-            <a:pPr algn="ctr" indent="0" marL="0">
+            <a:pPr marL="0" indent="0" algn="ctr">
               <a:buNone/>
             </a:pPr>
             <a:r>
@@ -6120,7 +7387,7 @@
                 <a:ea typeface="Arial" pitchFamily="34" charset="-122"/>
                 <a:cs typeface="Arial" pitchFamily="34" charset="-120"/>
               </a:rPr>
-              <a:t>기능 충족률</a:t>
+              <a:t>프로젝트명</a:t>
             </a:r>
             <a:endParaRPr lang="en-US" sz="2550" dirty="0"/>
           </a:p>
@@ -6128,14 +7395,14 @@
       </p:sp>
       <p:sp>
         <p:nvSpPr>
-          <p:cNvPr id="17" name="Text 12"/>
-          <p:cNvSpPr/>
-          <p:nvPr/>
-        </p:nvSpPr>
-        <p:spPr>
-          <a:xfrm>
-            <a:off x="14043720" y="6218932"/>
-            <a:ext cx="1325761" cy="769590"/>
+          <p:cNvPr id="7" name="Text 4"/>
+          <p:cNvSpPr/>
+          <p:nvPr/>
+        </p:nvSpPr>
+        <p:spPr>
+          <a:xfrm>
+            <a:off x="2293144" y="6340822"/>
+            <a:ext cx="2576513" cy="891480"/>
           </a:xfrm>
           <a:prstGeom prst="rect">
             <a:avLst/>
@@ -6145,41 +7412,141 @@
         </p:spPr>
         <p:txBody>
           <a:bodyPr wrap="square" lIns="25400" tIns="25400" rIns="25400" bIns="25400" rtlCol="0" anchor="t">
-            <a:normAutofit/>
+            <a:normAutofit fontScale="92500"/>
           </a:bodyPr>
           <a:lstStyle/>
           <a:p>
-            <a:pPr algn="ctr" indent="0" marL="0">
+            <a:pPr marL="0" indent="0" algn="ctr">
               <a:lnSpc>
                 <a:spcPct val="160000"/>
               </a:lnSpc>
               <a:buNone/>
             </a:pPr>
             <a:r>
-              <a:rPr lang="en-US" sz="3600" b="1" dirty="0">
-                <a:solidFill>
-                  <a:srgbClr val="C8956C"/>
-                </a:solidFill>
-                <a:latin typeface="Arial" pitchFamily="34" charset="0"/>
-                <a:ea typeface="Arial" pitchFamily="34" charset="-122"/>
-                <a:cs typeface="Arial" pitchFamily="34" charset="-120"/>
-              </a:rPr>
-              <a:t>100%</a:t>
-            </a:r>
-            <a:endParaRPr lang="en-US" sz="3600" dirty="0"/>
-          </a:p>
-        </p:txBody>
-      </p:sp>
-      <p:sp>
-        <p:nvSpPr>
-          <p:cNvPr id="18" name="Text 13"/>
-          <p:cNvSpPr/>
-          <p:nvPr/>
-        </p:nvSpPr>
-        <p:spPr>
-          <a:xfrm>
-            <a:off x="13709898" y="6950422"/>
-            <a:ext cx="1993255" cy="403771"/>
+              <a:rPr lang="en-US" sz="2100" dirty="0">
+                <a:solidFill>
+                  <a:srgbClr val="7A6243"/>
+                </a:solidFill>
+                <a:latin typeface="Arial" pitchFamily="34" charset="0"/>
+                <a:ea typeface="Arial" pitchFamily="34" charset="-122"/>
+                <a:cs typeface="Arial" pitchFamily="34" charset="-120"/>
+              </a:rPr>
+              <a:t>VARO Shopping Mall </a:t>
+            </a:r>
+            <a:r>
+              <a:rPr lang="en-US" sz="1800" dirty="0">
+                <a:solidFill>
+                  <a:srgbClr val="9A7D52"/>
+                </a:solidFill>
+                <a:latin typeface="Arial" pitchFamily="34" charset="0"/>
+                <a:ea typeface="Arial" pitchFamily="34" charset="-122"/>
+                <a:cs typeface="Arial" pitchFamily="34" charset="-120"/>
+              </a:rPr>
+              <a:t>남성 패션 종합 쇼핑몰</a:t>
+            </a:r>
+            <a:endParaRPr lang="en-US" sz="2100" dirty="0"/>
+          </a:p>
+        </p:txBody>
+      </p:sp>
+      <p:sp>
+        <p:nvSpPr>
+          <p:cNvPr id="8" name="Shape 5"/>
+          <p:cNvSpPr/>
+          <p:nvPr/>
+        </p:nvSpPr>
+        <p:spPr>
+          <a:xfrm>
+            <a:off x="6515100" y="2324100"/>
+            <a:ext cx="5257800" cy="7200900"/>
+          </a:xfrm>
+          <a:prstGeom prst="roundRect">
+            <a:avLst>
+              <a:gd name="adj" fmla="val 3623"/>
+            </a:avLst>
+          </a:prstGeom>
+          <a:solidFill>
+            <a:srgbClr val="FFFFFF"/>
+          </a:solidFill>
+          <a:ln/>
+          <a:effectLst>
+            <a:outerShdw blurRad="228600" dist="38100" dir="5400000" algn="bl" rotWithShape="0">
+              <a:srgbClr val="3D3224">
+                <a:alpha val="6000"/>
+              </a:srgbClr>
+            </a:outerShdw>
+          </a:effectLst>
+        </p:spPr>
+        <p:txBody>
+          <a:bodyPr/>
+          <a:lstStyle/>
+          <a:p>
+            <a:endParaRPr lang="ko-KR" altLang="en-US"/>
+          </a:p>
+        </p:txBody>
+      </p:sp>
+      <p:sp>
+        <p:nvSpPr>
+          <p:cNvPr id="9" name="Shape 6"/>
+          <p:cNvSpPr/>
+          <p:nvPr/>
+        </p:nvSpPr>
+        <p:spPr>
+          <a:xfrm>
+            <a:off x="8724900" y="4648897"/>
+            <a:ext cx="838200" cy="838200"/>
+          </a:xfrm>
+          <a:prstGeom prst="roundRect">
+            <a:avLst>
+              <a:gd name="adj" fmla="val 22727"/>
+            </a:avLst>
+          </a:prstGeom>
+          <a:solidFill>
+            <a:srgbClr val="F3EDE4"/>
+          </a:solidFill>
+          <a:ln/>
+        </p:spPr>
+        <p:txBody>
+          <a:bodyPr/>
+          <a:lstStyle/>
+          <a:p>
+            <a:endParaRPr lang="ko-KR" altLang="en-US"/>
+          </a:p>
+        </p:txBody>
+      </p:sp>
+      <p:pic>
+        <p:nvPicPr>
+          <p:cNvPr id="10" name="Image 1" descr="preencoded.png"/>
+          <p:cNvPicPr>
+            <a:picLocks noChangeAspect="1"/>
+          </p:cNvPicPr>
+          <p:nvPr/>
+        </p:nvPicPr>
+        <p:blipFill>
+          <a:blip r:embed="rId4"/>
+          <a:stretch>
+            <a:fillRect/>
+          </a:stretch>
+        </p:blipFill>
+        <p:spPr>
+          <a:xfrm>
+            <a:off x="8934450" y="4858447"/>
+            <a:ext cx="419100" cy="419100"/>
+          </a:xfrm>
+          <a:prstGeom prst="rect">
+            <a:avLst/>
+          </a:prstGeom>
+        </p:spPr>
+      </p:pic>
+      <p:sp>
+        <p:nvSpPr>
+          <p:cNvPr id="11" name="Text 7"/>
+          <p:cNvSpPr/>
+          <p:nvPr/>
+        </p:nvSpPr>
+        <p:spPr>
+          <a:xfrm>
+            <a:off x="8464600" y="5683597"/>
+            <a:ext cx="1495188" cy="504825"/>
           </a:xfrm>
           <a:prstGeom prst="rect">
             <a:avLst/>
@@ -6193,7 +7560,316 @@
           </a:bodyPr>
           <a:lstStyle/>
           <a:p>
-            <a:pPr algn="ctr" indent="0" marL="0">
+            <a:pPr marL="0" indent="0" algn="ctr">
+              <a:buNone/>
+            </a:pPr>
+            <a:r>
+              <a:rPr lang="en-US" sz="2550" b="1" dirty="0">
+                <a:solidFill>
+                  <a:srgbClr val="5C4A33"/>
+                </a:solidFill>
+                <a:latin typeface="Arial" pitchFamily="34" charset="0"/>
+                <a:ea typeface="Arial" pitchFamily="34" charset="-122"/>
+                <a:cs typeface="Arial" pitchFamily="34" charset="-120"/>
+              </a:rPr>
+              <a:t>주요 목표</a:t>
+            </a:r>
+            <a:endParaRPr lang="en-US" sz="2550" dirty="0"/>
+          </a:p>
+        </p:txBody>
+      </p:sp>
+      <p:sp>
+        <p:nvSpPr>
+          <p:cNvPr id="12" name="Text 8"/>
+          <p:cNvSpPr/>
+          <p:nvPr/>
+        </p:nvSpPr>
+        <p:spPr>
+          <a:xfrm>
+            <a:off x="7524920" y="6340822"/>
+            <a:ext cx="3238161" cy="891480"/>
+          </a:xfrm>
+          <a:prstGeom prst="rect">
+            <a:avLst/>
+          </a:prstGeom>
+          <a:noFill/>
+          <a:ln/>
+        </p:spPr>
+        <p:txBody>
+          <a:bodyPr wrap="square" lIns="25400" tIns="25400" rIns="25400" bIns="25400" rtlCol="0" anchor="t">
+            <a:normAutofit fontScale="92500" lnSpcReduction="10000"/>
+          </a:bodyPr>
+          <a:lstStyle/>
+          <a:p>
+            <a:pPr marL="0" indent="0" algn="ctr">
+              <a:lnSpc>
+                <a:spcPct val="160000"/>
+              </a:lnSpc>
+              <a:buNone/>
+            </a:pPr>
+            <a:r>
+              <a:rPr lang="en-US" sz="2100" dirty="0">
+                <a:solidFill>
+                  <a:srgbClr val="7A6243"/>
+                </a:solidFill>
+                <a:latin typeface="Arial" pitchFamily="34" charset="0"/>
+                <a:ea typeface="Arial" pitchFamily="34" charset="-122"/>
+                <a:cs typeface="Arial" pitchFamily="34" charset="-120"/>
+              </a:rPr>
+              <a:t>회원 · 비회원 · </a:t>
+            </a:r>
+            <a:r>
+              <a:rPr lang="en-US" sz="2100" dirty="0" err="1">
+                <a:solidFill>
+                  <a:srgbClr val="7A6243"/>
+                </a:solidFill>
+                <a:latin typeface="Arial" pitchFamily="34" charset="0"/>
+                <a:ea typeface="Arial" pitchFamily="34" charset="-122"/>
+                <a:cs typeface="Arial" pitchFamily="34" charset="-120"/>
+              </a:rPr>
+              <a:t>관리자</a:t>
+            </a:r>
+            <a:r>
+              <a:rPr lang="en-US" sz="2100" dirty="0">
+                <a:solidFill>
+                  <a:srgbClr val="7A6243"/>
+                </a:solidFill>
+                <a:latin typeface="Arial" pitchFamily="34" charset="0"/>
+                <a:ea typeface="Arial" pitchFamily="34" charset="-122"/>
+                <a:cs typeface="Arial" pitchFamily="34" charset="-120"/>
+              </a:rPr>
+              <a:t> </a:t>
+            </a:r>
+            <a:br>
+              <a:rPr lang="en-US" sz="2100" dirty="0">
+                <a:solidFill>
+                  <a:srgbClr val="7A6243"/>
+                </a:solidFill>
+                <a:latin typeface="Arial" pitchFamily="34" charset="0"/>
+                <a:ea typeface="Arial" pitchFamily="34" charset="-122"/>
+                <a:cs typeface="Arial" pitchFamily="34" charset="-120"/>
+              </a:rPr>
+            </a:br>
+            <a:r>
+              <a:rPr lang="en-US" sz="2100" dirty="0">
+                <a:solidFill>
+                  <a:srgbClr val="7A6243"/>
+                </a:solidFill>
+                <a:latin typeface="Arial" pitchFamily="34" charset="0"/>
+                <a:ea typeface="Arial" pitchFamily="34" charset="-122"/>
+                <a:cs typeface="Arial" pitchFamily="34" charset="-120"/>
+              </a:rPr>
+              <a:t>3가지 역할의 통합 쇼핑 경험</a:t>
+            </a:r>
+            <a:endParaRPr lang="en-US" sz="2100" dirty="0"/>
+          </a:p>
+        </p:txBody>
+      </p:sp>
+      <p:sp>
+        <p:nvSpPr>
+          <p:cNvPr id="13" name="Shape 9"/>
+          <p:cNvSpPr/>
+          <p:nvPr/>
+        </p:nvSpPr>
+        <p:spPr>
+          <a:xfrm>
+            <a:off x="12077700" y="2324100"/>
+            <a:ext cx="5257800" cy="7200900"/>
+          </a:xfrm>
+          <a:prstGeom prst="roundRect">
+            <a:avLst>
+              <a:gd name="adj" fmla="val 3623"/>
+            </a:avLst>
+          </a:prstGeom>
+          <a:solidFill>
+            <a:srgbClr val="FFFFFF"/>
+          </a:solidFill>
+          <a:ln/>
+          <a:effectLst>
+            <a:outerShdw blurRad="228600" dist="38100" dir="5400000" algn="bl" rotWithShape="0">
+              <a:srgbClr val="3D3224">
+                <a:alpha val="6000"/>
+              </a:srgbClr>
+            </a:outerShdw>
+          </a:effectLst>
+        </p:spPr>
+        <p:txBody>
+          <a:bodyPr/>
+          <a:lstStyle/>
+          <a:p>
+            <a:endParaRPr lang="ko-KR" altLang="en-US"/>
+          </a:p>
+        </p:txBody>
+      </p:sp>
+      <p:sp>
+        <p:nvSpPr>
+          <p:cNvPr id="14" name="Shape 10"/>
+          <p:cNvSpPr/>
+          <p:nvPr/>
+        </p:nvSpPr>
+        <p:spPr>
+          <a:xfrm>
+            <a:off x="14287500" y="4533007"/>
+            <a:ext cx="838200" cy="838200"/>
+          </a:xfrm>
+          <a:prstGeom prst="roundRect">
+            <a:avLst>
+              <a:gd name="adj" fmla="val 22727"/>
+            </a:avLst>
+          </a:prstGeom>
+          <a:solidFill>
+            <a:srgbClr val="F3EDE4"/>
+          </a:solidFill>
+          <a:ln/>
+          <a:effectLst>
+            <a:outerShdw blurRad="101600" dist="50800" dir="16200000" algn="bl" rotWithShape="0">
+              <a:srgbClr val="C8956C">
+                <a:alpha val="10000"/>
+              </a:srgbClr>
+            </a:outerShdw>
+          </a:effectLst>
+        </p:spPr>
+        <p:txBody>
+          <a:bodyPr/>
+          <a:lstStyle/>
+          <a:p>
+            <a:endParaRPr lang="ko-KR" altLang="en-US"/>
+          </a:p>
+        </p:txBody>
+      </p:sp>
+      <p:pic>
+        <p:nvPicPr>
+          <p:cNvPr id="15" name="Image 2" descr="preencoded.png"/>
+          <p:cNvPicPr>
+            <a:picLocks noChangeAspect="1"/>
+          </p:cNvPicPr>
+          <p:nvPr/>
+        </p:nvPicPr>
+        <p:blipFill>
+          <a:blip r:embed="rId5"/>
+          <a:stretch>
+            <a:fillRect/>
+          </a:stretch>
+        </p:blipFill>
+        <p:spPr>
+          <a:xfrm>
+            <a:off x="14497050" y="4742557"/>
+            <a:ext cx="419100" cy="419100"/>
+          </a:xfrm>
+          <a:prstGeom prst="rect">
+            <a:avLst/>
+          </a:prstGeom>
+        </p:spPr>
+      </p:pic>
+      <p:sp>
+        <p:nvSpPr>
+          <p:cNvPr id="16" name="Text 11"/>
+          <p:cNvSpPr/>
+          <p:nvPr/>
+        </p:nvSpPr>
+        <p:spPr>
+          <a:xfrm>
+            <a:off x="13878223" y="5561707"/>
+            <a:ext cx="1824930" cy="504825"/>
+          </a:xfrm>
+          <a:prstGeom prst="rect">
+            <a:avLst/>
+          </a:prstGeom>
+          <a:noFill/>
+          <a:ln/>
+        </p:spPr>
+        <p:txBody>
+          <a:bodyPr wrap="square" lIns="25400" tIns="25400" rIns="25400" bIns="25400" rtlCol="0" anchor="t">
+            <a:normAutofit/>
+          </a:bodyPr>
+          <a:lstStyle/>
+          <a:p>
+            <a:pPr marL="0" indent="0" algn="ctr">
+              <a:buNone/>
+            </a:pPr>
+            <a:r>
+              <a:rPr lang="en-US" sz="2550" b="1" dirty="0">
+                <a:solidFill>
+                  <a:srgbClr val="5C4A33"/>
+                </a:solidFill>
+                <a:latin typeface="Arial" pitchFamily="34" charset="0"/>
+                <a:ea typeface="Arial" pitchFamily="34" charset="-122"/>
+                <a:cs typeface="Arial" pitchFamily="34" charset="-120"/>
+              </a:rPr>
+              <a:t>기능 충족률</a:t>
+            </a:r>
+            <a:endParaRPr lang="en-US" sz="2550" dirty="0"/>
+          </a:p>
+        </p:txBody>
+      </p:sp>
+      <p:sp>
+        <p:nvSpPr>
+          <p:cNvPr id="17" name="Text 12"/>
+          <p:cNvSpPr/>
+          <p:nvPr/>
+        </p:nvSpPr>
+        <p:spPr>
+          <a:xfrm>
+            <a:off x="14043720" y="6218932"/>
+            <a:ext cx="1325761" cy="769590"/>
+          </a:xfrm>
+          <a:prstGeom prst="rect">
+            <a:avLst/>
+          </a:prstGeom>
+          <a:noFill/>
+          <a:ln/>
+        </p:spPr>
+        <p:txBody>
+          <a:bodyPr wrap="square" lIns="25400" tIns="25400" rIns="25400" bIns="25400" rtlCol="0" anchor="t">
+            <a:normAutofit fontScale="92500"/>
+          </a:bodyPr>
+          <a:lstStyle/>
+          <a:p>
+            <a:pPr marL="0" indent="0" algn="ctr">
+              <a:lnSpc>
+                <a:spcPct val="160000"/>
+              </a:lnSpc>
+              <a:buNone/>
+            </a:pPr>
+            <a:r>
+              <a:rPr lang="en-US" sz="3600" b="1" dirty="0">
+                <a:solidFill>
+                  <a:srgbClr val="C8956C"/>
+                </a:solidFill>
+                <a:latin typeface="Arial" pitchFamily="34" charset="0"/>
+                <a:ea typeface="Arial" pitchFamily="34" charset="-122"/>
+                <a:cs typeface="Arial" pitchFamily="34" charset="-120"/>
+              </a:rPr>
+              <a:t>100%</a:t>
+            </a:r>
+            <a:endParaRPr lang="en-US" sz="3600" dirty="0"/>
+          </a:p>
+        </p:txBody>
+      </p:sp>
+      <p:sp>
+        <p:nvSpPr>
+          <p:cNvPr id="18" name="Text 13"/>
+          <p:cNvSpPr/>
+          <p:nvPr/>
+        </p:nvSpPr>
+        <p:spPr>
+          <a:xfrm>
+            <a:off x="13709898" y="6950422"/>
+            <a:ext cx="2139702" cy="403771"/>
+          </a:xfrm>
+          <a:prstGeom prst="rect">
+            <a:avLst/>
+          </a:prstGeom>
+          <a:noFill/>
+          <a:ln/>
+        </p:spPr>
+        <p:txBody>
+          <a:bodyPr wrap="square" lIns="25400" tIns="25400" rIns="25400" bIns="25400" rtlCol="0" anchor="t">
+            <a:normAutofit fontScale="92500" lnSpcReduction="10000"/>
+          </a:bodyPr>
+          <a:lstStyle/>
+          <a:p>
+            <a:pPr marL="0" indent="0" algn="ctr">
               <a:lnSpc>
                 <a:spcPct val="160000"/>
               </a:lnSpc>
@@ -6258,6 +7934,13 @@
           </a:solidFill>
           <a:ln/>
         </p:spPr>
+        <p:txBody>
+          <a:bodyPr/>
+          <a:lstStyle/>
+          <a:p>
+            <a:endParaRPr lang="ko-KR" altLang="en-US"/>
+          </a:p>
+        </p:txBody>
       </p:sp>
       <p:sp>
         <p:nvSpPr>
@@ -6282,7 +7965,7 @@
           </a:bodyPr>
           <a:lstStyle/>
           <a:p>
-            <a:pPr algn="l" indent="0" marL="0">
+            <a:pPr marL="0" indent="0" algn="l">
               <a:buNone/>
             </a:pPr>
             <a:r>
@@ -6321,24 +8004,31 @@
           </a:solidFill>
           <a:ln/>
           <a:effectLst>
-            <a:outerShdw sx="100000" sy="100000" kx="0" ky="0" algn="bl" rotWithShape="0" blurRad="152400" dist="19050" dir="5400000">
+            <a:outerShdw blurRad="152400" dist="19050" dir="5400000" algn="bl" rotWithShape="0">
               <a:srgbClr val="3D3224">
                 <a:alpha val="6000"/>
               </a:srgbClr>
             </a:outerShdw>
           </a:effectLst>
         </p:spPr>
+        <p:txBody>
+          <a:bodyPr/>
+          <a:lstStyle/>
+          <a:p>
+            <a:endParaRPr lang="ko-KR" altLang="en-US"/>
+          </a:p>
+        </p:txBody>
       </p:sp>
       <p:pic>
         <p:nvPicPr>
-          <p:cNvPr id="5" name="Image 0" descr="preencoded.png">    </p:cNvPr>
+          <p:cNvPr id="5" name="Image 0" descr="preencoded.png"/>
           <p:cNvPicPr>
             <a:picLocks noChangeAspect="1"/>
           </p:cNvPicPr>
           <p:nvPr/>
         </p:nvPicPr>
         <p:blipFill>
-          <a:blip r:embed="rId1">
+          <a:blip r:embed="rId3">
             <a:alphaModFix amt="97000"/>
           </a:blip>
           <a:stretch>
@@ -6378,11 +8068,11 @@
           </a:bodyPr>
           <a:lstStyle/>
           <a:p>
-            <a:pPr algn="ctr" indent="0" marL="0">
+            <a:pPr marL="0" indent="0" algn="ctr">
               <a:buNone/>
             </a:pPr>
             <a:r>
-              <a:rPr lang="en-US" sz="1800" spc="150" kern="0" dirty="0">
+              <a:rPr lang="en-US" sz="1800" kern="0" spc="150" dirty="0">
                 <a:solidFill>
                   <a:srgbClr val="9A7D52"/>
                 </a:solidFill>
@@ -6419,7 +8109,7 @@
           </a:bodyPr>
           <a:lstStyle/>
           <a:p>
-            <a:pPr algn="ctr" indent="0" marL="0">
+            <a:pPr marL="0" indent="0" algn="ctr">
               <a:buNone/>
             </a:pPr>
             <a:r>
@@ -6460,7 +8150,7 @@
           </a:bodyPr>
           <a:lstStyle/>
           <a:p>
-            <a:pPr algn="ctr" indent="0" marL="0">
+            <a:pPr marL="0" indent="0" algn="ctr">
               <a:buNone/>
             </a:pPr>
             <a:r>
@@ -6499,24 +8189,31 @@
           </a:solidFill>
           <a:ln/>
           <a:effectLst>
-            <a:outerShdw sx="100000" sy="100000" kx="0" ky="0" algn="bl" rotWithShape="0" blurRad="152400" dist="19050" dir="5400000">
+            <a:outerShdw blurRad="152400" dist="19050" dir="5400000" algn="bl" rotWithShape="0">
               <a:srgbClr val="3D3224">
                 <a:alpha val="6000"/>
               </a:srgbClr>
             </a:outerShdw>
           </a:effectLst>
         </p:spPr>
+        <p:txBody>
+          <a:bodyPr/>
+          <a:lstStyle/>
+          <a:p>
+            <a:endParaRPr lang="ko-KR" altLang="en-US"/>
+          </a:p>
+        </p:txBody>
       </p:sp>
       <p:pic>
         <p:nvPicPr>
-          <p:cNvPr id="10" name="Image 1" descr="preencoded.png">    </p:cNvPr>
+          <p:cNvPr id="10" name="Image 1" descr="preencoded.png"/>
           <p:cNvPicPr>
             <a:picLocks noChangeAspect="1"/>
           </p:cNvPicPr>
           <p:nvPr/>
         </p:nvPicPr>
         <p:blipFill>
-          <a:blip r:embed="rId2">
+          <a:blip r:embed="rId4">
             <a:alphaModFix amt="91000"/>
           </a:blip>
           <a:stretch>
@@ -6556,11 +8253,11 @@
           </a:bodyPr>
           <a:lstStyle/>
           <a:p>
-            <a:pPr algn="ctr" indent="0" marL="0">
+            <a:pPr marL="0" indent="0" algn="ctr">
               <a:buNone/>
             </a:pPr>
             <a:r>
-              <a:rPr lang="en-US" sz="1800" spc="150" kern="0" dirty="0">
+              <a:rPr lang="en-US" sz="1800" kern="0" spc="150" dirty="0">
                 <a:solidFill>
                   <a:srgbClr val="9A7D52"/>
                 </a:solidFill>
@@ -6597,7 +8294,7 @@
           </a:bodyPr>
           <a:lstStyle/>
           <a:p>
-            <a:pPr algn="ctr" indent="0" marL="0">
+            <a:pPr marL="0" indent="0" algn="ctr">
               <a:buNone/>
             </a:pPr>
             <a:r>
@@ -6638,7 +8335,7 @@
           </a:bodyPr>
           <a:lstStyle/>
           <a:p>
-            <a:pPr algn="ctr" indent="0" marL="0">
+            <a:pPr marL="0" indent="0" algn="ctr">
               <a:buNone/>
             </a:pPr>
             <a:r>
@@ -6677,24 +8374,31 @@
           </a:solidFill>
           <a:ln/>
           <a:effectLst>
-            <a:outerShdw sx="100000" sy="100000" kx="0" ky="0" algn="bl" rotWithShape="0" blurRad="152400" dist="19050" dir="5400000">
+            <a:outerShdw blurRad="152400" dist="19050" dir="5400000" algn="bl" rotWithShape="0">
               <a:srgbClr val="3D3224">
                 <a:alpha val="6000"/>
               </a:srgbClr>
             </a:outerShdw>
           </a:effectLst>
         </p:spPr>
+        <p:txBody>
+          <a:bodyPr/>
+          <a:lstStyle/>
+          <a:p>
+            <a:endParaRPr lang="ko-KR" altLang="en-US"/>
+          </a:p>
+        </p:txBody>
       </p:sp>
       <p:pic>
         <p:nvPicPr>
-          <p:cNvPr id="15" name="Image 2" descr="preencoded.png">    </p:cNvPr>
+          <p:cNvPr id="15" name="Image 2" descr="preencoded.png"/>
           <p:cNvPicPr>
             <a:picLocks noChangeAspect="1"/>
           </p:cNvPicPr>
           <p:nvPr/>
         </p:nvPicPr>
         <p:blipFill>
-          <a:blip r:embed="rId3">
+          <a:blip r:embed="rId5">
             <a:alphaModFix amt="83000"/>
           </a:blip>
           <a:stretch>
@@ -6734,11 +8438,11 @@
           </a:bodyPr>
           <a:lstStyle/>
           <a:p>
-            <a:pPr algn="ctr" indent="0" marL="0">
+            <a:pPr marL="0" indent="0" algn="ctr">
               <a:buNone/>
             </a:pPr>
             <a:r>
-              <a:rPr lang="en-US" sz="1800" spc="150" kern="0" dirty="0">
+              <a:rPr lang="en-US" sz="1800" kern="0" spc="150" dirty="0">
                 <a:solidFill>
                   <a:srgbClr val="9A7D52"/>
                 </a:solidFill>
@@ -6775,7 +8479,7 @@
           </a:bodyPr>
           <a:lstStyle/>
           <a:p>
-            <a:pPr algn="ctr" indent="0" marL="0">
+            <a:pPr marL="0" indent="0" algn="ctr">
               <a:buNone/>
             </a:pPr>
             <a:r>
@@ -6816,7 +8520,7 @@
           </a:bodyPr>
           <a:lstStyle/>
           <a:p>
-            <a:pPr algn="ctr" indent="0" marL="0">
+            <a:pPr marL="0" indent="0" algn="ctr">
               <a:buNone/>
             </a:pPr>
             <a:r>
@@ -6855,24 +8559,31 @@
           </a:solidFill>
           <a:ln/>
           <a:effectLst>
-            <a:outerShdw sx="100000" sy="100000" kx="0" ky="0" algn="bl" rotWithShape="0" blurRad="152400" dist="19050" dir="5400000">
+            <a:outerShdw blurRad="152400" dist="19050" dir="5400000" algn="bl" rotWithShape="0">
               <a:srgbClr val="3D3224">
                 <a:alpha val="6000"/>
               </a:srgbClr>
             </a:outerShdw>
           </a:effectLst>
         </p:spPr>
+        <p:txBody>
+          <a:bodyPr/>
+          <a:lstStyle/>
+          <a:p>
+            <a:endParaRPr lang="ko-KR" altLang="en-US"/>
+          </a:p>
+        </p:txBody>
       </p:sp>
       <p:pic>
         <p:nvPicPr>
-          <p:cNvPr id="20" name="Image 3" descr="preencoded.png">    </p:cNvPr>
+          <p:cNvPr id="20" name="Image 3" descr="preencoded.png"/>
           <p:cNvPicPr>
             <a:picLocks noChangeAspect="1"/>
           </p:cNvPicPr>
           <p:nvPr/>
         </p:nvPicPr>
         <p:blipFill>
-          <a:blip r:embed="rId4">
+          <a:blip r:embed="rId6">
             <a:alphaModFix amt="76000"/>
           </a:blip>
           <a:stretch>
@@ -6912,11 +8623,11 @@
           </a:bodyPr>
           <a:lstStyle/>
           <a:p>
-            <a:pPr algn="ctr" indent="0" marL="0">
+            <a:pPr marL="0" indent="0" algn="ctr">
               <a:buNone/>
             </a:pPr>
             <a:r>
-              <a:rPr lang="en-US" sz="1800" spc="150" kern="0" dirty="0">
+              <a:rPr lang="en-US" sz="1800" kern="0" spc="150" dirty="0">
                 <a:solidFill>
                   <a:srgbClr val="9A7D52"/>
                 </a:solidFill>
@@ -6953,7 +8664,7 @@
           </a:bodyPr>
           <a:lstStyle/>
           <a:p>
-            <a:pPr algn="ctr" indent="0" marL="0">
+            <a:pPr marL="0" indent="0" algn="ctr">
               <a:buNone/>
             </a:pPr>
             <a:r>
@@ -6990,11 +8701,11 @@
         </p:spPr>
         <p:txBody>
           <a:bodyPr wrap="square" lIns="25400" tIns="25400" rIns="25400" bIns="25400" rtlCol="0" anchor="t">
-            <a:normAutofit/>
+            <a:normAutofit lnSpcReduction="10000"/>
           </a:bodyPr>
           <a:lstStyle/>
           <a:p>
-            <a:pPr algn="ctr" indent="0" marL="0">
+            <a:pPr marL="0" indent="0" algn="ctr">
               <a:buNone/>
             </a:pPr>
             <a:r>
@@ -7033,24 +8744,31 @@
           </a:solidFill>
           <a:ln/>
           <a:effectLst>
-            <a:outerShdw sx="100000" sy="100000" kx="0" ky="0" algn="bl" rotWithShape="0" blurRad="152400" dist="19050" dir="5400000">
+            <a:outerShdw blurRad="152400" dist="19050" dir="5400000" algn="bl" rotWithShape="0">
               <a:srgbClr val="3D3224">
                 <a:alpha val="6000"/>
               </a:srgbClr>
             </a:outerShdw>
           </a:effectLst>
         </p:spPr>
+        <p:txBody>
+          <a:bodyPr/>
+          <a:lstStyle/>
+          <a:p>
+            <a:endParaRPr lang="ko-KR" altLang="en-US"/>
+          </a:p>
+        </p:txBody>
       </p:sp>
       <p:pic>
         <p:nvPicPr>
-          <p:cNvPr id="25" name="Image 4" descr="preencoded.png">    </p:cNvPr>
+          <p:cNvPr id="25" name="Image 4" descr="preencoded.png"/>
           <p:cNvPicPr>
             <a:picLocks noChangeAspect="1"/>
           </p:cNvPicPr>
           <p:nvPr/>
         </p:nvPicPr>
         <p:blipFill>
-          <a:blip r:embed="rId5">
+          <a:blip r:embed="rId7">
             <a:alphaModFix amt="97000"/>
           </a:blip>
           <a:stretch>
@@ -7090,11 +8808,11 @@
           </a:bodyPr>
           <a:lstStyle/>
           <a:p>
-            <a:pPr algn="ctr" indent="0" marL="0">
+            <a:pPr marL="0" indent="0" algn="ctr">
               <a:buNone/>
             </a:pPr>
             <a:r>
-              <a:rPr lang="en-US" sz="1800" spc="150" kern="0" dirty="0">
+              <a:rPr lang="en-US" sz="1800" kern="0" spc="150" dirty="0">
                 <a:solidFill>
                   <a:srgbClr val="9A7D52"/>
                 </a:solidFill>
@@ -7131,7 +8849,7 @@
           </a:bodyPr>
           <a:lstStyle/>
           <a:p>
-            <a:pPr algn="ctr" indent="0" marL="0">
+            <a:pPr marL="0" indent="0" algn="ctr">
               <a:buNone/>
             </a:pPr>
             <a:r>
@@ -7172,7 +8890,7 @@
           </a:bodyPr>
           <a:lstStyle/>
           <a:p>
-            <a:pPr algn="ctr" indent="0" marL="0">
+            <a:pPr marL="0" indent="0" algn="ctr">
               <a:buNone/>
             </a:pPr>
             <a:r>
@@ -7211,24 +8929,31 @@
           </a:solidFill>
           <a:ln/>
           <a:effectLst>
-            <a:outerShdw sx="100000" sy="100000" kx="0" ky="0" algn="bl" rotWithShape="0" blurRad="152400" dist="19050" dir="5400000">
+            <a:outerShdw blurRad="152400" dist="19050" dir="5400000" algn="bl" rotWithShape="0">
               <a:srgbClr val="3D3224">
                 <a:alpha val="6000"/>
               </a:srgbClr>
             </a:outerShdw>
           </a:effectLst>
         </p:spPr>
+        <p:txBody>
+          <a:bodyPr/>
+          <a:lstStyle/>
+          <a:p>
+            <a:endParaRPr lang="ko-KR" altLang="en-US"/>
+          </a:p>
+        </p:txBody>
       </p:sp>
       <p:pic>
         <p:nvPicPr>
-          <p:cNvPr id="30" name="Image 5" descr="preencoded.png">    </p:cNvPr>
+          <p:cNvPr id="30" name="Image 5" descr="preencoded.png"/>
           <p:cNvPicPr>
             <a:picLocks noChangeAspect="1"/>
           </p:cNvPicPr>
           <p:nvPr/>
         </p:nvPicPr>
         <p:blipFill>
-          <a:blip r:embed="rId6">
+          <a:blip r:embed="rId8">
             <a:alphaModFix amt="91000"/>
           </a:blip>
           <a:stretch>
@@ -7268,11 +8993,11 @@
           </a:bodyPr>
           <a:lstStyle/>
           <a:p>
-            <a:pPr algn="ctr" indent="0" marL="0">
+            <a:pPr marL="0" indent="0" algn="ctr">
               <a:buNone/>
             </a:pPr>
             <a:r>
-              <a:rPr lang="en-US" sz="1800" spc="150" kern="0" dirty="0">
+              <a:rPr lang="en-US" sz="1800" kern="0" spc="150" dirty="0">
                 <a:solidFill>
                   <a:srgbClr val="9A7D52"/>
                 </a:solidFill>
@@ -7309,7 +9034,7 @@
           </a:bodyPr>
           <a:lstStyle/>
           <a:p>
-            <a:pPr algn="ctr" indent="0" marL="0">
+            <a:pPr marL="0" indent="0" algn="ctr">
               <a:buNone/>
             </a:pPr>
             <a:r>
@@ -7346,11 +9071,11 @@
         </p:spPr>
         <p:txBody>
           <a:bodyPr wrap="square" lIns="25400" tIns="25400" rIns="25400" bIns="25400" rtlCol="0" anchor="t">
-            <a:normAutofit/>
+            <a:normAutofit lnSpcReduction="10000"/>
           </a:bodyPr>
           <a:lstStyle/>
           <a:p>
-            <a:pPr algn="ctr" indent="0" marL="0">
+            <a:pPr marL="0" indent="0" algn="ctr">
               <a:buNone/>
             </a:pPr>
             <a:r>
@@ -7389,24 +9114,31 @@
           </a:solidFill>
           <a:ln/>
           <a:effectLst>
-            <a:outerShdw sx="100000" sy="100000" kx="0" ky="0" algn="bl" rotWithShape="0" blurRad="152400" dist="19050" dir="5400000">
+            <a:outerShdw blurRad="152400" dist="19050" dir="5400000" algn="bl" rotWithShape="0">
               <a:srgbClr val="3D3224">
                 <a:alpha val="6000"/>
               </a:srgbClr>
             </a:outerShdw>
           </a:effectLst>
         </p:spPr>
+        <p:txBody>
+          <a:bodyPr/>
+          <a:lstStyle/>
+          <a:p>
+            <a:endParaRPr lang="ko-KR" altLang="en-US"/>
+          </a:p>
+        </p:txBody>
       </p:sp>
       <p:pic>
         <p:nvPicPr>
-          <p:cNvPr id="35" name="Image 6" descr="preencoded.png">    </p:cNvPr>
+          <p:cNvPr id="35" name="Image 6" descr="preencoded.png"/>
           <p:cNvPicPr>
             <a:picLocks noChangeAspect="1"/>
           </p:cNvPicPr>
           <p:nvPr/>
         </p:nvPicPr>
         <p:blipFill>
-          <a:blip r:embed="rId7">
+          <a:blip r:embed="rId9">
             <a:alphaModFix amt="83000"/>
           </a:blip>
           <a:stretch>
@@ -7446,11 +9178,11 @@
           </a:bodyPr>
           <a:lstStyle/>
           <a:p>
-            <a:pPr algn="ctr" indent="0" marL="0">
+            <a:pPr marL="0" indent="0" algn="ctr">
               <a:buNone/>
             </a:pPr>
             <a:r>
-              <a:rPr lang="en-US" sz="1800" spc="150" kern="0" dirty="0">
+              <a:rPr lang="en-US" sz="1800" kern="0" spc="150" dirty="0">
                 <a:solidFill>
                   <a:srgbClr val="9A7D52"/>
                 </a:solidFill>
@@ -7487,7 +9219,7 @@
           </a:bodyPr>
           <a:lstStyle/>
           <a:p>
-            <a:pPr algn="ctr" indent="0" marL="0">
+            <a:pPr marL="0" indent="0" algn="ctr">
               <a:buNone/>
             </a:pPr>
             <a:r>
@@ -7524,11 +9256,11 @@
         </p:spPr>
         <p:txBody>
           <a:bodyPr wrap="square" lIns="25400" tIns="25400" rIns="25400" bIns="25400" rtlCol="0" anchor="t">
-            <a:normAutofit/>
+            <a:normAutofit lnSpcReduction="10000"/>
           </a:bodyPr>
           <a:lstStyle/>
           <a:p>
-            <a:pPr algn="ctr" indent="0" marL="0">
+            <a:pPr marL="0" indent="0" algn="ctr">
               <a:buNone/>
             </a:pPr>
             <a:r>
@@ -7567,24 +9299,31 @@
           </a:solidFill>
           <a:ln/>
           <a:effectLst>
-            <a:outerShdw sx="100000" sy="100000" kx="0" ky="0" algn="bl" rotWithShape="0" blurRad="152400" dist="19050" dir="5400000">
+            <a:outerShdw blurRad="152400" dist="19050" dir="5400000" algn="bl" rotWithShape="0">
               <a:srgbClr val="3D3224">
                 <a:alpha val="6000"/>
               </a:srgbClr>
             </a:outerShdw>
           </a:effectLst>
         </p:spPr>
+        <p:txBody>
+          <a:bodyPr/>
+          <a:lstStyle/>
+          <a:p>
+            <a:endParaRPr lang="ko-KR" altLang="en-US"/>
+          </a:p>
+        </p:txBody>
       </p:sp>
       <p:pic>
         <p:nvPicPr>
-          <p:cNvPr id="40" name="Image 7" descr="preencoded.png">    </p:cNvPr>
+          <p:cNvPr id="40" name="Image 7" descr="preencoded.png"/>
           <p:cNvPicPr>
             <a:picLocks noChangeAspect="1"/>
           </p:cNvPicPr>
           <p:nvPr/>
         </p:nvPicPr>
         <p:blipFill>
-          <a:blip r:embed="rId8">
+          <a:blip r:embed="rId10">
             <a:alphaModFix amt="76000"/>
           </a:blip>
           <a:stretch>
@@ -7624,11 +9363,11 @@
           </a:bodyPr>
           <a:lstStyle/>
           <a:p>
-            <a:pPr algn="ctr" indent="0" marL="0">
+            <a:pPr marL="0" indent="0" algn="ctr">
               <a:buNone/>
             </a:pPr>
             <a:r>
-              <a:rPr lang="en-US" sz="1800" spc="150" kern="0" dirty="0">
+              <a:rPr lang="en-US" sz="1800" kern="0" spc="150" dirty="0">
                 <a:solidFill>
                   <a:srgbClr val="9A7D52"/>
                 </a:solidFill>
@@ -7665,7 +9404,7 @@
           </a:bodyPr>
           <a:lstStyle/>
           <a:p>
-            <a:pPr algn="ctr" indent="0" marL="0">
+            <a:pPr marL="0" indent="0" algn="ctr">
               <a:buNone/>
             </a:pPr>
             <a:r>
@@ -7706,7 +9445,7 @@
           </a:bodyPr>
           <a:lstStyle/>
           <a:p>
-            <a:pPr algn="ctr" indent="0" marL="0">
+            <a:pPr marL="0" indent="0" algn="ctr">
               <a:buNone/>
             </a:pPr>
             <a:r>
@@ -7740,6 +9479,7 @@
         <a:solidFill>
           <a:srgbClr val="FAF7F2"/>
         </a:solidFill>
+        <a:effectLst/>
       </p:bgPr>
     </p:bg>
     <p:spTree>
@@ -7779,7 +9519,7 @@
           </a:bodyPr>
           <a:lstStyle/>
           <a:p>
-            <a:pPr algn="l" indent="0" marL="0">
+            <a:pPr marL="0" indent="0" algn="l">
               <a:buNone/>
             </a:pPr>
             <a:r>
@@ -7820,10 +9560,21 @@
           </a:bodyPr>
           <a:lstStyle/>
           <a:p>
-            <a:pPr algn="l" indent="0" marL="0">
+            <a:pPr marL="0" indent="0" algn="l">
               <a:buNone/>
             </a:pPr>
             <a:r>
+              <a:rPr lang="en-US" sz="2550" dirty="0" err="1">
+                <a:solidFill>
+                  <a:srgbClr val="9A7D52"/>
+                </a:solidFill>
+                <a:latin typeface="Arial" pitchFamily="34" charset="0"/>
+                <a:ea typeface="Arial" pitchFamily="34" charset="-122"/>
+                <a:cs typeface="Arial" pitchFamily="34" charset="-120"/>
+              </a:rPr>
+              <a:t>핵심</a:t>
+            </a:r>
+            <a:r>
               <a:rPr lang="en-US" sz="2550" dirty="0">
                 <a:solidFill>
                   <a:srgbClr val="9A7D52"/>
@@ -7832,7 +9583,40 @@
                 <a:ea typeface="Arial" pitchFamily="34" charset="-122"/>
                 <a:cs typeface="Arial" pitchFamily="34" charset="-120"/>
               </a:rPr>
-              <a:t>12개 핵심 기능 요구사항 (FR-01 ~ FR-12)</a:t>
+              <a:t> </a:t>
+            </a:r>
+            <a:r>
+              <a:rPr lang="en-US" sz="2550" dirty="0" err="1">
+                <a:solidFill>
+                  <a:srgbClr val="9A7D52"/>
+                </a:solidFill>
+                <a:latin typeface="Arial" pitchFamily="34" charset="0"/>
+                <a:ea typeface="Arial" pitchFamily="34" charset="-122"/>
+                <a:cs typeface="Arial" pitchFamily="34" charset="-120"/>
+              </a:rPr>
+              <a:t>기능</a:t>
+            </a:r>
+            <a:r>
+              <a:rPr lang="en-US" sz="2550" dirty="0">
+                <a:solidFill>
+                  <a:srgbClr val="9A7D52"/>
+                </a:solidFill>
+                <a:latin typeface="Arial" pitchFamily="34" charset="0"/>
+                <a:ea typeface="Arial" pitchFamily="34" charset="-122"/>
+                <a:cs typeface="Arial" pitchFamily="34" charset="-120"/>
+              </a:rPr>
+              <a:t> </a:t>
+            </a:r>
+            <a:r>
+              <a:rPr lang="en-US" sz="2550" dirty="0" err="1">
+                <a:solidFill>
+                  <a:srgbClr val="9A7D52"/>
+                </a:solidFill>
+                <a:latin typeface="Arial" pitchFamily="34" charset="0"/>
+                <a:ea typeface="Arial" pitchFamily="34" charset="-122"/>
+                <a:cs typeface="Arial" pitchFamily="34" charset="-120"/>
+              </a:rPr>
+              <a:t>요구사항</a:t>
             </a:r>
             <a:endParaRPr lang="en-US" sz="2550" dirty="0"/>
           </a:p>
@@ -7856,35 +9640,50 @@
           </a:prstGeom>
           <a:ln/>
           <a:effectLst>
-            <a:outerShdw sx="100000" sy="100000" kx="0" ky="0" algn="bl" rotWithShape="0" blurRad="381000" dist="76200" dir="5400000">
+            <a:outerShdw blurRad="381000" dist="76200" dir="5400000" algn="bl" rotWithShape="0">
               <a:srgbClr val="3D3224">
                 <a:alpha val="12000"/>
               </a:srgbClr>
             </a:outerShdw>
           </a:effectLst>
         </p:spPr>
+        <p:txBody>
+          <a:bodyPr/>
+          <a:lstStyle/>
+          <a:p>
+            <a:endParaRPr lang="ko-KR" altLang="en-US"/>
+          </a:p>
+        </p:txBody>
       </p:sp>
       <p:pic>
         <p:nvPicPr>
-          <p:cNvPr id="5" name="Image 0" descr="preencoded.png">    </p:cNvPr>
+          <p:cNvPr id="5" name="Image 0" descr="preencoded.png"/>
           <p:cNvPicPr>
             <a:picLocks noChangeAspect="1"/>
           </p:cNvPicPr>
           <p:nvPr/>
         </p:nvPicPr>
         <p:blipFill>
-          <a:blip r:embed="rId1"/>
-          <a:srcRect l="0" r="0" t="0" b="0"/>
+          <a:blip r:embed="rId3"/>
+          <a:srcRect/>
           <a:stretch/>
         </p:blipFill>
         <p:spPr>
           <a:xfrm>
-            <a:off x="2671763" y="4352925"/>
-            <a:ext cx="12944475" cy="3876675"/>
-          </a:xfrm>
-          <a:prstGeom prst="rect">
-            <a:avLst/>
-          </a:prstGeom>
+            <a:off x="597913" y="3286125"/>
+            <a:ext cx="17092174" cy="5741334"/>
+          </a:xfrm>
+          <a:prstGeom prst="rect">
+            <a:avLst/>
+          </a:prstGeom>
+          <a:effectLst>
+            <a:outerShdw blurRad="50800" dist="38100" dir="2700000" algn="tl" rotWithShape="0">
+              <a:prstClr val="black">
+                <a:alpha val="40000"/>
+              </a:prstClr>
+            </a:outerShdw>
+            <a:softEdge rad="0"/>
+          </a:effectLst>
         </p:spPr>
       </p:pic>
     </p:spTree>
@@ -7903,6 +9702,7 @@
         <a:solidFill>
           <a:srgbClr val="FAF7F2"/>
         </a:solidFill>
+        <a:effectLst/>
       </p:bgPr>
     </p:bg>
     <p:spTree>
@@ -7942,7 +9742,7 @@
           </a:bodyPr>
           <a:lstStyle/>
           <a:p>
-            <a:pPr algn="l" indent="0" marL="0">
+            <a:pPr marL="0" indent="0" algn="l">
               <a:buNone/>
             </a:pPr>
             <a:r>
@@ -7983,7 +9783,7 @@
           </a:bodyPr>
           <a:lstStyle/>
           <a:p>
-            <a:pPr algn="l" indent="0" marL="0">
+            <a:pPr marL="0" indent="0" algn="l">
               <a:buNone/>
             </a:pPr>
             <a:r>
@@ -8022,13 +9822,20 @@
           </a:solidFill>
           <a:ln/>
           <a:effectLst>
-            <a:outerShdw sx="100000" sy="100000" kx="0" ky="0" algn="bl" rotWithShape="0" blurRad="228600" dist="38100" dir="5400000">
+            <a:outerShdw blurRad="228600" dist="38100" dir="5400000" algn="bl" rotWithShape="0">
               <a:srgbClr val="3D3224">
                 <a:alpha val="6000"/>
               </a:srgbClr>
             </a:outerShdw>
           </a:effectLst>
         </p:spPr>
+        <p:txBody>
+          <a:bodyPr/>
+          <a:lstStyle/>
+          <a:p>
+            <a:endParaRPr lang="ko-KR" altLang="en-US"/>
+          </a:p>
+        </p:txBody>
       </p:sp>
       <p:sp>
         <p:nvSpPr>
@@ -8049,490 +9856,17 @@
           </a:solidFill>
           <a:ln/>
         </p:spPr>
+        <p:txBody>
+          <a:bodyPr/>
+          <a:lstStyle/>
+          <a:p>
+            <a:endParaRPr lang="ko-KR" altLang="en-US"/>
+          </a:p>
+        </p:txBody>
       </p:sp>
       <p:pic>
         <p:nvPicPr>
-          <p:cNvPr id="6" name="Image 0" descr="preencoded.png">    </p:cNvPr>
-          <p:cNvPicPr>
-            <a:picLocks noChangeAspect="1"/>
-          </p:cNvPicPr>
-          <p:nvPr/>
-        </p:nvPicPr>
-        <p:blipFill>
-          <a:blip r:embed="rId1"/>
-          <a:stretch>
-            <a:fillRect/>
-          </a:stretch>
-        </p:blipFill>
-        <p:spPr>
-          <a:xfrm>
-            <a:off x="3041600" y="4913535"/>
-            <a:ext cx="495300" cy="495300"/>
-          </a:xfrm>
-          <a:prstGeom prst="rect">
-            <a:avLst/>
-          </a:prstGeom>
-        </p:spPr>
-      </p:pic>
-      <p:sp>
-        <p:nvSpPr>
-          <p:cNvPr id="7" name="Text 4"/>
-          <p:cNvSpPr/>
-          <p:nvPr/>
-        </p:nvSpPr>
-        <p:spPr>
-          <a:xfrm>
-            <a:off x="2602706" y="5578822"/>
-            <a:ext cx="1373088" cy="390525"/>
-          </a:xfrm>
-          <a:prstGeom prst="rect">
-            <a:avLst/>
-          </a:prstGeom>
-          <a:noFill/>
-          <a:ln/>
-        </p:spPr>
-        <p:txBody>
-          <a:bodyPr wrap="square" lIns="25400" tIns="25400" rIns="25400" bIns="25400" rtlCol="0" anchor="t">
-            <a:normAutofit/>
-          </a:bodyPr>
-          <a:lstStyle/>
-          <a:p>
-            <a:pPr algn="ctr" indent="0" marL="0">
-              <a:buNone/>
-            </a:pPr>
-            <a:r>
-              <a:rPr lang="en-US" sz="1950" b="1" spc="225" kern="0" dirty="0">
-                <a:solidFill>
-                  <a:srgbClr val="C8956C"/>
-                </a:solidFill>
-                <a:latin typeface="Arial" pitchFamily="34" charset="0"/>
-                <a:ea typeface="Arial" pitchFamily="34" charset="-122"/>
-                <a:cs typeface="Arial" pitchFamily="34" charset="-120"/>
-              </a:rPr>
-              <a:t>1층 · 화면</a:t>
-            </a:r>
-            <a:endParaRPr lang="en-US" sz="1950" dirty="0"/>
-          </a:p>
-        </p:txBody>
-      </p:sp>
-      <p:sp>
-        <p:nvSpPr>
-          <p:cNvPr id="8" name="Text 5"/>
-          <p:cNvSpPr/>
-          <p:nvPr/>
-        </p:nvSpPr>
-        <p:spPr>
-          <a:xfrm>
-            <a:off x="2367855" y="6121747"/>
-            <a:ext cx="1842641" cy="561975"/>
-          </a:xfrm>
-          <a:prstGeom prst="rect">
-            <a:avLst/>
-          </a:prstGeom>
-          <a:noFill/>
-          <a:ln/>
-        </p:spPr>
-        <p:txBody>
-          <a:bodyPr wrap="square" lIns="25400" tIns="25400" rIns="25400" bIns="25400" rtlCol="0" anchor="t">
-            <a:normAutofit/>
-          </a:bodyPr>
-          <a:lstStyle/>
-          <a:p>
-            <a:pPr algn="ctr" indent="0" marL="0">
-              <a:buNone/>
-            </a:pPr>
-            <a:r>
-              <a:rPr lang="en-US" sz="2850" b="1" dirty="0">
-                <a:solidFill>
-                  <a:srgbClr val="5C4A33"/>
-                </a:solidFill>
-                <a:latin typeface="Arial" pitchFamily="34" charset="0"/>
-                <a:ea typeface="Arial" pitchFamily="34" charset="-122"/>
-                <a:cs typeface="Arial" pitchFamily="34" charset="-120"/>
-              </a:rPr>
-              <a:t>웹 브라우저</a:t>
-            </a:r>
-            <a:endParaRPr lang="en-US" sz="2850" dirty="0"/>
-          </a:p>
-        </p:txBody>
-      </p:sp>
-      <p:sp>
-        <p:nvSpPr>
-          <p:cNvPr id="9" name="Text 6"/>
-          <p:cNvSpPr/>
-          <p:nvPr/>
-        </p:nvSpPr>
-        <p:spPr>
-          <a:xfrm>
-            <a:off x="2191345" y="6798022"/>
-            <a:ext cx="2195661" cy="929580"/>
-          </a:xfrm>
-          <a:prstGeom prst="rect">
-            <a:avLst/>
-          </a:prstGeom>
-          <a:noFill/>
-          <a:ln/>
-        </p:spPr>
-        <p:txBody>
-          <a:bodyPr wrap="square" lIns="25400" tIns="25400" rIns="25400" bIns="25400" rtlCol="0" anchor="t">
-            <a:normAutofit/>
-          </a:bodyPr>
-          <a:lstStyle/>
-          <a:p>
-            <a:pPr algn="ctr" indent="0" marL="0">
-              <a:lnSpc>
-                <a:spcPct val="180000"/>
-              </a:lnSpc>
-              <a:buNone/>
-            </a:pPr>
-            <a:r>
-              <a:rPr lang="en-US" sz="1950" dirty="0">
-                <a:solidFill>
-                  <a:srgbClr val="9A7D52"/>
-                </a:solidFill>
-                <a:latin typeface="Arial" pitchFamily="34" charset="0"/>
-                <a:ea typeface="Arial" pitchFamily="34" charset="-122"/>
-                <a:cs typeface="Arial" pitchFamily="34" charset="-120"/>
-              </a:rPr>
-              <a:t>사용자가 보는 화면 글래스모피즘 디자인</a:t>
-            </a:r>
-            <a:endParaRPr lang="en-US" sz="1950" dirty="0"/>
-          </a:p>
-        </p:txBody>
-      </p:sp>
-      <p:sp>
-        <p:nvSpPr>
-          <p:cNvPr id="10" name="Text 7"/>
-          <p:cNvSpPr/>
-          <p:nvPr/>
-        </p:nvSpPr>
-        <p:spPr>
-          <a:xfrm>
-            <a:off x="6007001" y="6053138"/>
-            <a:ext cx="495300" cy="514350"/>
-          </a:xfrm>
-          <a:prstGeom prst="rect">
-            <a:avLst/>
-          </a:prstGeom>
-          <a:noFill/>
-          <a:ln/>
-        </p:spPr>
-        <p:txBody>
-          <a:bodyPr wrap="square" lIns="25400" tIns="25400" rIns="25400" bIns="25400" rtlCol="0" anchor="t">
-            <a:normAutofit/>
-          </a:bodyPr>
-          <a:lstStyle/>
-          <a:p>
-            <a:pPr algn="l" indent="0" marL="0">
-              <a:buNone/>
-            </a:pPr>
-            <a:r>
-              <a:rPr lang="en-US" sz="3300" dirty="0">
-                <a:solidFill>
-                  <a:srgbClr val="C8956C"/>
-                </a:solidFill>
-                <a:latin typeface="Arial" pitchFamily="34" charset="0"/>
-                <a:ea typeface="Arial" pitchFamily="34" charset="-122"/>
-                <a:cs typeface="Arial" pitchFamily="34" charset="-120"/>
-              </a:rPr>
-              <a:t>→</a:t>
-            </a:r>
-            <a:endParaRPr lang="en-US" sz="3300" dirty="0"/>
-          </a:p>
-        </p:txBody>
-      </p:sp>
-      <p:sp>
-        <p:nvSpPr>
-          <p:cNvPr id="11" name="Shape 8"/>
-          <p:cNvSpPr/>
-          <p:nvPr/>
-        </p:nvSpPr>
-        <p:spPr>
-          <a:xfrm>
-            <a:off x="6807101" y="4473922"/>
-            <a:ext cx="4673650" cy="3634680"/>
-          </a:xfrm>
-          <a:prstGeom prst="roundRect">
-            <a:avLst>
-              <a:gd name="adj" fmla="val 5241"/>
-            </a:avLst>
-          </a:prstGeom>
-          <a:solidFill>
-            <a:srgbClr val="FFFFFF"/>
-          </a:solidFill>
-          <a:ln/>
-          <a:effectLst>
-            <a:outerShdw sx="100000" sy="100000" kx="0" ky="0" algn="bl" rotWithShape="0" blurRad="228600" dist="38100" dir="5400000">
-              <a:srgbClr val="3D3224">
-                <a:alpha val="6000"/>
-              </a:srgbClr>
-            </a:outerShdw>
-          </a:effectLst>
-        </p:spPr>
-      </p:sp>
-      <p:sp>
-        <p:nvSpPr>
-          <p:cNvPr id="12" name="Shape 9"/>
-          <p:cNvSpPr/>
-          <p:nvPr/>
-        </p:nvSpPr>
-        <p:spPr>
-          <a:xfrm>
-            <a:off x="6807101" y="4473922"/>
-            <a:ext cx="4673650" cy="38100"/>
-          </a:xfrm>
-          <a:prstGeom prst="rect">
-            <a:avLst/>
-          </a:prstGeom>
-          <a:solidFill>
-            <a:srgbClr val="9A7D52"/>
-          </a:solidFill>
-          <a:ln/>
-        </p:spPr>
-      </p:sp>
-      <p:pic>
-        <p:nvPicPr>
-          <p:cNvPr id="13" name="Image 1" descr="preencoded.png">    </p:cNvPr>
-          <p:cNvPicPr>
-            <a:picLocks noChangeAspect="1"/>
-          </p:cNvPicPr>
-          <p:nvPr/>
-        </p:nvPicPr>
-        <p:blipFill>
-          <a:blip r:embed="rId2"/>
-          <a:stretch>
-            <a:fillRect/>
-          </a:stretch>
-        </p:blipFill>
-        <p:spPr>
-          <a:xfrm>
-            <a:off x="8896201" y="4888746"/>
-            <a:ext cx="495300" cy="495300"/>
-          </a:xfrm>
-          <a:prstGeom prst="rect">
-            <a:avLst/>
-          </a:prstGeom>
-        </p:spPr>
-      </p:pic>
-      <p:sp>
-        <p:nvSpPr>
-          <p:cNvPr id="14" name="Text 10"/>
-          <p:cNvSpPr/>
-          <p:nvPr/>
-        </p:nvSpPr>
-        <p:spPr>
-          <a:xfrm>
-            <a:off x="8457307" y="5578822"/>
-            <a:ext cx="1373088" cy="390525"/>
-          </a:xfrm>
-          <a:prstGeom prst="rect">
-            <a:avLst/>
-          </a:prstGeom>
-          <a:noFill/>
-          <a:ln/>
-        </p:spPr>
-        <p:txBody>
-          <a:bodyPr wrap="square" lIns="25400" tIns="25400" rIns="25400" bIns="25400" rtlCol="0" anchor="t">
-            <a:normAutofit/>
-          </a:bodyPr>
-          <a:lstStyle/>
-          <a:p>
-            <a:pPr algn="ctr" indent="0" marL="0">
-              <a:buNone/>
-            </a:pPr>
-            <a:r>
-              <a:rPr lang="en-US" sz="1950" b="1" spc="225" kern="0" dirty="0">
-                <a:solidFill>
-                  <a:srgbClr val="C8956C"/>
-                </a:solidFill>
-                <a:latin typeface="Arial" pitchFamily="34" charset="0"/>
-                <a:ea typeface="Arial" pitchFamily="34" charset="-122"/>
-                <a:cs typeface="Arial" pitchFamily="34" charset="-120"/>
-              </a:rPr>
-              <a:t>2층 · 서버</a:t>
-            </a:r>
-            <a:endParaRPr lang="en-US" sz="1950" dirty="0"/>
-          </a:p>
-        </p:txBody>
-      </p:sp>
-      <p:sp>
-        <p:nvSpPr>
-          <p:cNvPr id="15" name="Text 11"/>
-          <p:cNvSpPr/>
-          <p:nvPr/>
-        </p:nvSpPr>
-        <p:spPr>
-          <a:xfrm>
-            <a:off x="8431262" y="6121747"/>
-            <a:ext cx="1425327" cy="561975"/>
-          </a:xfrm>
-          <a:prstGeom prst="rect">
-            <a:avLst/>
-          </a:prstGeom>
-          <a:noFill/>
-          <a:ln/>
-        </p:spPr>
-        <p:txBody>
-          <a:bodyPr wrap="square" lIns="25400" tIns="25400" rIns="25400" bIns="25400" rtlCol="0" anchor="t">
-            <a:normAutofit/>
-          </a:bodyPr>
-          <a:lstStyle/>
-          <a:p>
-            <a:pPr algn="ctr" indent="0" marL="0">
-              <a:buNone/>
-            </a:pPr>
-            <a:r>
-              <a:rPr lang="en-US" sz="2850" b="1" dirty="0">
-                <a:solidFill>
-                  <a:srgbClr val="5C4A33"/>
-                </a:solidFill>
-                <a:latin typeface="Arial" pitchFamily="34" charset="0"/>
-                <a:ea typeface="Arial" pitchFamily="34" charset="-122"/>
-                <a:cs typeface="Arial" pitchFamily="34" charset="-120"/>
-              </a:rPr>
-              <a:t>Node.js</a:t>
-            </a:r>
-            <a:endParaRPr lang="en-US" sz="2850" dirty="0"/>
-          </a:p>
-        </p:txBody>
-      </p:sp>
-      <p:sp>
-        <p:nvSpPr>
-          <p:cNvPr id="16" name="Text 12"/>
-          <p:cNvSpPr/>
-          <p:nvPr/>
-        </p:nvSpPr>
-        <p:spPr>
-          <a:xfrm>
-            <a:off x="7901583" y="6798022"/>
-            <a:ext cx="2484537" cy="929580"/>
-          </a:xfrm>
-          <a:prstGeom prst="rect">
-            <a:avLst/>
-          </a:prstGeom>
-          <a:noFill/>
-          <a:ln/>
-        </p:spPr>
-        <p:txBody>
-          <a:bodyPr wrap="square" lIns="25400" tIns="25400" rIns="25400" bIns="25400" rtlCol="0" anchor="t">
-            <a:normAutofit/>
-          </a:bodyPr>
-          <a:lstStyle/>
-          <a:p>
-            <a:pPr algn="ctr" indent="0" marL="0">
-              <a:lnSpc>
-                <a:spcPct val="180000"/>
-              </a:lnSpc>
-              <a:buNone/>
-            </a:pPr>
-            <a:r>
-              <a:rPr lang="en-US" sz="1950" dirty="0">
-                <a:solidFill>
-                  <a:srgbClr val="9A7D52"/>
-                </a:solidFill>
-                <a:latin typeface="Arial" pitchFamily="34" charset="0"/>
-                <a:ea typeface="Arial" pitchFamily="34" charset="-122"/>
-                <a:cs typeface="Arial" pitchFamily="34" charset="-120"/>
-              </a:rPr>
-              <a:t>로그인 처리 · 주문 관리 매출 집계</a:t>
-            </a:r>
-            <a:endParaRPr lang="en-US" sz="1950" dirty="0"/>
-          </a:p>
-        </p:txBody>
-      </p:sp>
-      <p:sp>
-        <p:nvSpPr>
-          <p:cNvPr id="17" name="Text 13"/>
-          <p:cNvSpPr/>
-          <p:nvPr/>
-        </p:nvSpPr>
-        <p:spPr>
-          <a:xfrm>
-            <a:off x="11861750" y="6053138"/>
-            <a:ext cx="495300" cy="514350"/>
-          </a:xfrm>
-          <a:prstGeom prst="rect">
-            <a:avLst/>
-          </a:prstGeom>
-          <a:noFill/>
-          <a:ln/>
-        </p:spPr>
-        <p:txBody>
-          <a:bodyPr wrap="square" lIns="25400" tIns="25400" rIns="25400" bIns="25400" rtlCol="0" anchor="t">
-            <a:normAutofit/>
-          </a:bodyPr>
-          <a:lstStyle/>
-          <a:p>
-            <a:pPr algn="l" indent="0" marL="0">
-              <a:buNone/>
-            </a:pPr>
-            <a:r>
-              <a:rPr lang="en-US" sz="3300" dirty="0">
-                <a:solidFill>
-                  <a:srgbClr val="C8956C"/>
-                </a:solidFill>
-                <a:latin typeface="Arial" pitchFamily="34" charset="0"/>
-                <a:ea typeface="Arial" pitchFamily="34" charset="-122"/>
-                <a:cs typeface="Arial" pitchFamily="34" charset="-120"/>
-              </a:rPr>
-              <a:t>→</a:t>
-            </a:r>
-            <a:endParaRPr lang="en-US" sz="3300" dirty="0"/>
-          </a:p>
-        </p:txBody>
-      </p:sp>
-      <p:sp>
-        <p:nvSpPr>
-          <p:cNvPr id="18" name="Shape 14"/>
-          <p:cNvSpPr/>
-          <p:nvPr/>
-        </p:nvSpPr>
-        <p:spPr>
-          <a:xfrm>
-            <a:off x="12661850" y="4473922"/>
-            <a:ext cx="4673650" cy="3634680"/>
-          </a:xfrm>
-          <a:prstGeom prst="roundRect">
-            <a:avLst>
-              <a:gd name="adj" fmla="val 5241"/>
-            </a:avLst>
-          </a:prstGeom>
-          <a:solidFill>
-            <a:srgbClr val="FFFFFF"/>
-          </a:solidFill>
-          <a:ln/>
-          <a:effectLst>
-            <a:outerShdw sx="100000" sy="100000" kx="0" ky="0" algn="bl" rotWithShape="0" blurRad="228600" dist="38100" dir="5400000">
-              <a:srgbClr val="3D3224">
-                <a:alpha val="6000"/>
-              </a:srgbClr>
-            </a:outerShdw>
-          </a:effectLst>
-        </p:spPr>
-      </p:sp>
-      <p:sp>
-        <p:nvSpPr>
-          <p:cNvPr id="19" name="Shape 15"/>
-          <p:cNvSpPr/>
-          <p:nvPr/>
-        </p:nvSpPr>
-        <p:spPr>
-          <a:xfrm>
-            <a:off x="12661850" y="4473922"/>
-            <a:ext cx="4673650" cy="38100"/>
-          </a:xfrm>
-          <a:prstGeom prst="rect">
-            <a:avLst/>
-          </a:prstGeom>
-          <a:solidFill>
-            <a:srgbClr val="5C4A33"/>
-          </a:solidFill>
-          <a:ln/>
-        </p:spPr>
-      </p:sp>
-      <p:pic>
-        <p:nvPicPr>
-          <p:cNvPr id="20" name="Image 2" descr="preencoded.png">    </p:cNvPr>
+          <p:cNvPr id="6" name="Image 0" descr="preencoded.png"/>
           <p:cNvPicPr>
             <a:picLocks noChangeAspect="1"/>
           </p:cNvPicPr>
@@ -8546,7 +9880,7 @@
         </p:blipFill>
         <p:spPr>
           <a:xfrm>
-            <a:off x="14750951" y="4866215"/>
+            <a:off x="3041600" y="4913535"/>
             <a:ext cx="495300" cy="495300"/>
           </a:xfrm>
           <a:prstGeom prst="rect">
@@ -8556,14 +9890,14 @@
       </p:pic>
       <p:sp>
         <p:nvSpPr>
-          <p:cNvPr id="21" name="Text 16"/>
-          <p:cNvSpPr/>
-          <p:nvPr/>
-        </p:nvSpPr>
-        <p:spPr>
-          <a:xfrm>
-            <a:off x="14183916" y="5578822"/>
-            <a:ext cx="1629519" cy="390525"/>
+          <p:cNvPr id="7" name="Text 4"/>
+          <p:cNvSpPr/>
+          <p:nvPr/>
+        </p:nvSpPr>
+        <p:spPr>
+          <a:xfrm>
+            <a:off x="2602706" y="5578822"/>
+            <a:ext cx="1373088" cy="390525"/>
           </a:xfrm>
           <a:prstGeom prst="rect">
             <a:avLst/>
@@ -8577,11 +9911,11 @@
           </a:bodyPr>
           <a:lstStyle/>
           <a:p>
-            <a:pPr algn="ctr" indent="0" marL="0">
+            <a:pPr marL="0" indent="0" algn="ctr">
               <a:buNone/>
             </a:pPr>
             <a:r>
-              <a:rPr lang="en-US" sz="1950" b="1" spc="225" kern="0" dirty="0">
+              <a:rPr lang="en-US" sz="1950" b="1" kern="0" spc="225" dirty="0">
                 <a:solidFill>
                   <a:srgbClr val="C8956C"/>
                 </a:solidFill>
@@ -8589,7 +9923,7 @@
                 <a:ea typeface="Arial" pitchFamily="34" charset="-122"/>
                 <a:cs typeface="Arial" pitchFamily="34" charset="-120"/>
               </a:rPr>
-              <a:t>3층 · 저장소</a:t>
+              <a:t>1층 · 화면</a:t>
             </a:r>
             <a:endParaRPr lang="en-US" sz="1950" dirty="0"/>
           </a:p>
@@ -8597,14 +9931,14 @@
       </p:sp>
       <p:sp>
         <p:nvSpPr>
-          <p:cNvPr id="22" name="Text 17"/>
-          <p:cNvSpPr/>
-          <p:nvPr/>
-        </p:nvSpPr>
-        <p:spPr>
-          <a:xfrm>
-            <a:off x="14345394" y="6121747"/>
-            <a:ext cx="1306562" cy="561975"/>
+          <p:cNvPr id="8" name="Text 5"/>
+          <p:cNvSpPr/>
+          <p:nvPr/>
+        </p:nvSpPr>
+        <p:spPr>
+          <a:xfrm>
+            <a:off x="2281758" y="6121747"/>
+            <a:ext cx="2014984" cy="561975"/>
           </a:xfrm>
           <a:prstGeom prst="rect">
             <a:avLst/>
@@ -8618,7 +9952,7 @@
           </a:bodyPr>
           <a:lstStyle/>
           <a:p>
-            <a:pPr algn="ctr" indent="0" marL="0">
+            <a:pPr marL="0" indent="0" algn="ctr">
               <a:buNone/>
             </a:pPr>
             <a:r>
@@ -8630,7 +9964,7 @@
                 <a:ea typeface="Arial" pitchFamily="34" charset="-122"/>
                 <a:cs typeface="Arial" pitchFamily="34" charset="-120"/>
               </a:rPr>
-              <a:t>MySQL</a:t>
+              <a:t>웹 브라우저</a:t>
             </a:r>
             <a:endParaRPr lang="en-US" sz="2850" dirty="0"/>
           </a:p>
@@ -8638,14 +9972,240 @@
       </p:sp>
       <p:sp>
         <p:nvSpPr>
-          <p:cNvPr id="23" name="Text 18"/>
-          <p:cNvSpPr/>
-          <p:nvPr/>
-        </p:nvSpPr>
-        <p:spPr>
-          <a:xfrm>
-            <a:off x="13794730" y="6798022"/>
-            <a:ext cx="2407890" cy="929580"/>
+          <p:cNvPr id="9" name="Text 6"/>
+          <p:cNvSpPr/>
+          <p:nvPr/>
+        </p:nvSpPr>
+        <p:spPr>
+          <a:xfrm>
+            <a:off x="2103277" y="6798022"/>
+            <a:ext cx="2371946" cy="929580"/>
+          </a:xfrm>
+          <a:prstGeom prst="rect">
+            <a:avLst/>
+          </a:prstGeom>
+          <a:noFill/>
+          <a:ln/>
+        </p:spPr>
+        <p:txBody>
+          <a:bodyPr wrap="square" lIns="25400" tIns="25400" rIns="25400" bIns="25400" rtlCol="0" anchor="t">
+            <a:normAutofit fontScale="92500" lnSpcReduction="10000"/>
+          </a:bodyPr>
+          <a:lstStyle/>
+          <a:p>
+            <a:pPr marL="0" indent="0" algn="ctr">
+              <a:lnSpc>
+                <a:spcPct val="180000"/>
+              </a:lnSpc>
+              <a:buNone/>
+            </a:pPr>
+            <a:r>
+              <a:rPr lang="en-US" sz="1950" dirty="0">
+                <a:solidFill>
+                  <a:srgbClr val="9A7D52"/>
+                </a:solidFill>
+                <a:latin typeface="Arial" pitchFamily="34" charset="0"/>
+                <a:ea typeface="Arial" pitchFamily="34" charset="-122"/>
+                <a:cs typeface="Arial" pitchFamily="34" charset="-120"/>
+              </a:rPr>
+              <a:t>사용자가 보는 </a:t>
+            </a:r>
+            <a:r>
+              <a:rPr lang="en-US" sz="1950" dirty="0" err="1">
+                <a:solidFill>
+                  <a:srgbClr val="9A7D52"/>
+                </a:solidFill>
+                <a:latin typeface="Arial" pitchFamily="34" charset="0"/>
+                <a:ea typeface="Arial" pitchFamily="34" charset="-122"/>
+                <a:cs typeface="Arial" pitchFamily="34" charset="-120"/>
+              </a:rPr>
+              <a:t>화면</a:t>
+            </a:r>
+            <a:r>
+              <a:rPr lang="en-US" sz="1950" dirty="0">
+                <a:solidFill>
+                  <a:srgbClr val="9A7D52"/>
+                </a:solidFill>
+                <a:latin typeface="Arial" pitchFamily="34" charset="0"/>
+                <a:ea typeface="Arial" pitchFamily="34" charset="-122"/>
+                <a:cs typeface="Arial" pitchFamily="34" charset="-120"/>
+              </a:rPr>
+              <a:t> </a:t>
+            </a:r>
+            <a:br>
+              <a:rPr lang="en-US" sz="1950" dirty="0">
+                <a:solidFill>
+                  <a:srgbClr val="9A7D52"/>
+                </a:solidFill>
+                <a:latin typeface="Arial" pitchFamily="34" charset="0"/>
+                <a:ea typeface="Arial" pitchFamily="34" charset="-122"/>
+                <a:cs typeface="Arial" pitchFamily="34" charset="-120"/>
+              </a:rPr>
+            </a:br>
+            <a:r>
+              <a:rPr lang="en-US" sz="1950" dirty="0" err="1">
+                <a:solidFill>
+                  <a:srgbClr val="9A7D52"/>
+                </a:solidFill>
+                <a:latin typeface="Arial" pitchFamily="34" charset="0"/>
+                <a:ea typeface="Arial" pitchFamily="34" charset="-122"/>
+                <a:cs typeface="Arial" pitchFamily="34" charset="-120"/>
+              </a:rPr>
+              <a:t>글래스모피즘</a:t>
+            </a:r>
+            <a:r>
+              <a:rPr lang="en-US" sz="1950" dirty="0">
+                <a:solidFill>
+                  <a:srgbClr val="9A7D52"/>
+                </a:solidFill>
+                <a:latin typeface="Arial" pitchFamily="34" charset="0"/>
+                <a:ea typeface="Arial" pitchFamily="34" charset="-122"/>
+                <a:cs typeface="Arial" pitchFamily="34" charset="-120"/>
+              </a:rPr>
+              <a:t> 디자인</a:t>
+            </a:r>
+            <a:endParaRPr lang="en-US" sz="1950" dirty="0"/>
+          </a:p>
+        </p:txBody>
+      </p:sp>
+      <p:sp>
+        <p:nvSpPr>
+          <p:cNvPr id="10" name="Text 7"/>
+          <p:cNvSpPr/>
+          <p:nvPr/>
+        </p:nvSpPr>
+        <p:spPr>
+          <a:xfrm>
+            <a:off x="6007001" y="6053138"/>
+            <a:ext cx="495300" cy="514350"/>
+          </a:xfrm>
+          <a:prstGeom prst="rect">
+            <a:avLst/>
+          </a:prstGeom>
+          <a:noFill/>
+          <a:ln/>
+        </p:spPr>
+        <p:txBody>
+          <a:bodyPr wrap="square" lIns="25400" tIns="25400" rIns="25400" bIns="25400" rtlCol="0" anchor="t">
+            <a:normAutofit lnSpcReduction="10000"/>
+          </a:bodyPr>
+          <a:lstStyle/>
+          <a:p>
+            <a:pPr marL="0" indent="0" algn="l">
+              <a:buNone/>
+            </a:pPr>
+            <a:r>
+              <a:rPr lang="en-US" sz="3300" dirty="0">
+                <a:solidFill>
+                  <a:srgbClr val="C8956C"/>
+                </a:solidFill>
+                <a:latin typeface="Arial" pitchFamily="34" charset="0"/>
+                <a:ea typeface="Arial" pitchFamily="34" charset="-122"/>
+                <a:cs typeface="Arial" pitchFamily="34" charset="-120"/>
+              </a:rPr>
+              <a:t>→</a:t>
+            </a:r>
+            <a:endParaRPr lang="en-US" sz="3300" dirty="0"/>
+          </a:p>
+        </p:txBody>
+      </p:sp>
+      <p:sp>
+        <p:nvSpPr>
+          <p:cNvPr id="11" name="Shape 8"/>
+          <p:cNvSpPr/>
+          <p:nvPr/>
+        </p:nvSpPr>
+        <p:spPr>
+          <a:xfrm>
+            <a:off x="6807101" y="4473922"/>
+            <a:ext cx="4673650" cy="3634680"/>
+          </a:xfrm>
+          <a:prstGeom prst="roundRect">
+            <a:avLst>
+              <a:gd name="adj" fmla="val 5241"/>
+            </a:avLst>
+          </a:prstGeom>
+          <a:solidFill>
+            <a:srgbClr val="FFFFFF"/>
+          </a:solidFill>
+          <a:ln/>
+          <a:effectLst>
+            <a:outerShdw blurRad="228600" dist="38100" dir="5400000" algn="bl" rotWithShape="0">
+              <a:srgbClr val="3D3224">
+                <a:alpha val="6000"/>
+              </a:srgbClr>
+            </a:outerShdw>
+          </a:effectLst>
+        </p:spPr>
+        <p:txBody>
+          <a:bodyPr/>
+          <a:lstStyle/>
+          <a:p>
+            <a:endParaRPr lang="ko-KR" altLang="en-US"/>
+          </a:p>
+        </p:txBody>
+      </p:sp>
+      <p:sp>
+        <p:nvSpPr>
+          <p:cNvPr id="12" name="Shape 9"/>
+          <p:cNvSpPr/>
+          <p:nvPr/>
+        </p:nvSpPr>
+        <p:spPr>
+          <a:xfrm>
+            <a:off x="6807101" y="4473922"/>
+            <a:ext cx="4673650" cy="38100"/>
+          </a:xfrm>
+          <a:prstGeom prst="rect">
+            <a:avLst/>
+          </a:prstGeom>
+          <a:solidFill>
+            <a:srgbClr val="9A7D52"/>
+          </a:solidFill>
+          <a:ln/>
+        </p:spPr>
+        <p:txBody>
+          <a:bodyPr/>
+          <a:lstStyle/>
+          <a:p>
+            <a:endParaRPr lang="ko-KR" altLang="en-US"/>
+          </a:p>
+        </p:txBody>
+      </p:sp>
+      <p:pic>
+        <p:nvPicPr>
+          <p:cNvPr id="13" name="Image 1" descr="preencoded.png"/>
+          <p:cNvPicPr>
+            <a:picLocks noChangeAspect="1"/>
+          </p:cNvPicPr>
+          <p:nvPr/>
+        </p:nvPicPr>
+        <p:blipFill>
+          <a:blip r:embed="rId4"/>
+          <a:stretch>
+            <a:fillRect/>
+          </a:stretch>
+        </p:blipFill>
+        <p:spPr>
+          <a:xfrm>
+            <a:off x="8984890" y="4888746"/>
+            <a:ext cx="495300" cy="495300"/>
+          </a:xfrm>
+          <a:prstGeom prst="rect">
+            <a:avLst/>
+          </a:prstGeom>
+        </p:spPr>
+      </p:pic>
+      <p:sp>
+        <p:nvSpPr>
+          <p:cNvPr id="14" name="Text 10"/>
+          <p:cNvSpPr/>
+          <p:nvPr/>
+        </p:nvSpPr>
+        <p:spPr>
+          <a:xfrm>
+            <a:off x="8545996" y="5578822"/>
+            <a:ext cx="1373088" cy="390525"/>
           </a:xfrm>
           <a:prstGeom prst="rect">
             <a:avLst/>
@@ -8659,7 +10219,343 @@
           </a:bodyPr>
           <a:lstStyle/>
           <a:p>
-            <a:pPr algn="ctr" indent="0" marL="0">
+            <a:pPr marL="0" indent="0" algn="ctr">
+              <a:buNone/>
+            </a:pPr>
+            <a:r>
+              <a:rPr lang="en-US" sz="1950" b="1" kern="0" spc="225" dirty="0">
+                <a:solidFill>
+                  <a:srgbClr val="C8956C"/>
+                </a:solidFill>
+                <a:latin typeface="Arial" pitchFamily="34" charset="0"/>
+                <a:ea typeface="Arial" pitchFamily="34" charset="-122"/>
+                <a:cs typeface="Arial" pitchFamily="34" charset="-120"/>
+              </a:rPr>
+              <a:t>2층 · 서버</a:t>
+            </a:r>
+            <a:endParaRPr lang="en-US" sz="1950" dirty="0"/>
+          </a:p>
+        </p:txBody>
+      </p:sp>
+      <p:sp>
+        <p:nvSpPr>
+          <p:cNvPr id="15" name="Text 11"/>
+          <p:cNvSpPr/>
+          <p:nvPr/>
+        </p:nvSpPr>
+        <p:spPr>
+          <a:xfrm>
+            <a:off x="8519877" y="6121747"/>
+            <a:ext cx="1425327" cy="561975"/>
+          </a:xfrm>
+          <a:prstGeom prst="rect">
+            <a:avLst/>
+          </a:prstGeom>
+          <a:noFill/>
+          <a:ln/>
+        </p:spPr>
+        <p:txBody>
+          <a:bodyPr wrap="square" lIns="25400" tIns="25400" rIns="25400" bIns="25400" rtlCol="0" anchor="t">
+            <a:normAutofit/>
+          </a:bodyPr>
+          <a:lstStyle/>
+          <a:p>
+            <a:pPr marL="0" indent="0" algn="ctr">
+              <a:buNone/>
+            </a:pPr>
+            <a:r>
+              <a:rPr lang="en-US" sz="2850" b="1" dirty="0">
+                <a:solidFill>
+                  <a:srgbClr val="5C4A33"/>
+                </a:solidFill>
+                <a:latin typeface="Arial" pitchFamily="34" charset="0"/>
+                <a:ea typeface="Arial" pitchFamily="34" charset="-122"/>
+                <a:cs typeface="Arial" pitchFamily="34" charset="-120"/>
+              </a:rPr>
+              <a:t>Node.js</a:t>
+            </a:r>
+            <a:endParaRPr lang="en-US" sz="2850" dirty="0"/>
+          </a:p>
+        </p:txBody>
+      </p:sp>
+      <p:sp>
+        <p:nvSpPr>
+          <p:cNvPr id="16" name="Text 12"/>
+          <p:cNvSpPr/>
+          <p:nvPr/>
+        </p:nvSpPr>
+        <p:spPr>
+          <a:xfrm>
+            <a:off x="7901583" y="6798022"/>
+            <a:ext cx="2661914" cy="929580"/>
+          </a:xfrm>
+          <a:prstGeom prst="rect">
+            <a:avLst/>
+          </a:prstGeom>
+          <a:noFill/>
+          <a:ln/>
+        </p:spPr>
+        <p:txBody>
+          <a:bodyPr wrap="square" lIns="25400" tIns="25400" rIns="25400" bIns="25400" rtlCol="0" anchor="t">
+            <a:normAutofit fontScale="92500" lnSpcReduction="10000"/>
+          </a:bodyPr>
+          <a:lstStyle/>
+          <a:p>
+            <a:pPr marL="0" indent="0" algn="ctr">
+              <a:lnSpc>
+                <a:spcPct val="180000"/>
+              </a:lnSpc>
+              <a:buNone/>
+            </a:pPr>
+            <a:r>
+              <a:rPr lang="en-US" sz="1950" dirty="0">
+                <a:solidFill>
+                  <a:srgbClr val="9A7D52"/>
+                </a:solidFill>
+                <a:latin typeface="Arial" pitchFamily="34" charset="0"/>
+                <a:ea typeface="Arial" pitchFamily="34" charset="-122"/>
+                <a:cs typeface="Arial" pitchFamily="34" charset="-120"/>
+              </a:rPr>
+              <a:t>로그인 처리 · 주문 관리 매출 집계</a:t>
+            </a:r>
+            <a:endParaRPr lang="en-US" sz="1950" dirty="0"/>
+          </a:p>
+        </p:txBody>
+      </p:sp>
+      <p:sp>
+        <p:nvSpPr>
+          <p:cNvPr id="17" name="Text 13"/>
+          <p:cNvSpPr/>
+          <p:nvPr/>
+        </p:nvSpPr>
+        <p:spPr>
+          <a:xfrm>
+            <a:off x="11861750" y="6053138"/>
+            <a:ext cx="495300" cy="514350"/>
+          </a:xfrm>
+          <a:prstGeom prst="rect">
+            <a:avLst/>
+          </a:prstGeom>
+          <a:noFill/>
+          <a:ln/>
+        </p:spPr>
+        <p:txBody>
+          <a:bodyPr wrap="square" lIns="25400" tIns="25400" rIns="25400" bIns="25400" rtlCol="0" anchor="t">
+            <a:normAutofit lnSpcReduction="10000"/>
+          </a:bodyPr>
+          <a:lstStyle/>
+          <a:p>
+            <a:pPr marL="0" indent="0" algn="l">
+              <a:buNone/>
+            </a:pPr>
+            <a:r>
+              <a:rPr lang="en-US" sz="3300" dirty="0">
+                <a:solidFill>
+                  <a:srgbClr val="C8956C"/>
+                </a:solidFill>
+                <a:latin typeface="Arial" pitchFamily="34" charset="0"/>
+                <a:ea typeface="Arial" pitchFamily="34" charset="-122"/>
+                <a:cs typeface="Arial" pitchFamily="34" charset="-120"/>
+              </a:rPr>
+              <a:t>→</a:t>
+            </a:r>
+            <a:endParaRPr lang="en-US" sz="3300" dirty="0"/>
+          </a:p>
+        </p:txBody>
+      </p:sp>
+      <p:sp>
+        <p:nvSpPr>
+          <p:cNvPr id="18" name="Shape 14"/>
+          <p:cNvSpPr/>
+          <p:nvPr/>
+        </p:nvSpPr>
+        <p:spPr>
+          <a:xfrm>
+            <a:off x="12661850" y="4473922"/>
+            <a:ext cx="4673650" cy="3634680"/>
+          </a:xfrm>
+          <a:prstGeom prst="roundRect">
+            <a:avLst>
+              <a:gd name="adj" fmla="val 5241"/>
+            </a:avLst>
+          </a:prstGeom>
+          <a:solidFill>
+            <a:srgbClr val="FFFFFF"/>
+          </a:solidFill>
+          <a:ln/>
+          <a:effectLst>
+            <a:outerShdw blurRad="228600" dist="38100" dir="5400000" algn="bl" rotWithShape="0">
+              <a:srgbClr val="3D3224">
+                <a:alpha val="6000"/>
+              </a:srgbClr>
+            </a:outerShdw>
+          </a:effectLst>
+        </p:spPr>
+        <p:txBody>
+          <a:bodyPr/>
+          <a:lstStyle/>
+          <a:p>
+            <a:endParaRPr lang="ko-KR" altLang="en-US"/>
+          </a:p>
+        </p:txBody>
+      </p:sp>
+      <p:sp>
+        <p:nvSpPr>
+          <p:cNvPr id="19" name="Shape 15"/>
+          <p:cNvSpPr/>
+          <p:nvPr/>
+        </p:nvSpPr>
+        <p:spPr>
+          <a:xfrm>
+            <a:off x="12661850" y="4473922"/>
+            <a:ext cx="4673650" cy="38100"/>
+          </a:xfrm>
+          <a:prstGeom prst="rect">
+            <a:avLst/>
+          </a:prstGeom>
+          <a:solidFill>
+            <a:srgbClr val="5C4A33"/>
+          </a:solidFill>
+          <a:ln/>
+        </p:spPr>
+        <p:txBody>
+          <a:bodyPr/>
+          <a:lstStyle/>
+          <a:p>
+            <a:endParaRPr lang="ko-KR" altLang="en-US"/>
+          </a:p>
+        </p:txBody>
+      </p:sp>
+      <p:pic>
+        <p:nvPicPr>
+          <p:cNvPr id="20" name="Image 2" descr="preencoded.png"/>
+          <p:cNvPicPr>
+            <a:picLocks noChangeAspect="1"/>
+          </p:cNvPicPr>
+          <p:nvPr/>
+        </p:nvPicPr>
+        <p:blipFill>
+          <a:blip r:embed="rId5"/>
+          <a:stretch>
+            <a:fillRect/>
+          </a:stretch>
+        </p:blipFill>
+        <p:spPr>
+          <a:xfrm>
+            <a:off x="14874959" y="4866215"/>
+            <a:ext cx="495300" cy="495300"/>
+          </a:xfrm>
+          <a:prstGeom prst="rect">
+            <a:avLst/>
+          </a:prstGeom>
+        </p:spPr>
+      </p:pic>
+      <p:sp>
+        <p:nvSpPr>
+          <p:cNvPr id="21" name="Text 16"/>
+          <p:cNvSpPr/>
+          <p:nvPr/>
+        </p:nvSpPr>
+        <p:spPr>
+          <a:xfrm>
+            <a:off x="14307850" y="5578822"/>
+            <a:ext cx="1629519" cy="390525"/>
+          </a:xfrm>
+          <a:prstGeom prst="rect">
+            <a:avLst/>
+          </a:prstGeom>
+          <a:noFill/>
+          <a:ln/>
+        </p:spPr>
+        <p:txBody>
+          <a:bodyPr wrap="square" lIns="25400" tIns="25400" rIns="25400" bIns="25400" rtlCol="0" anchor="t">
+            <a:normAutofit/>
+          </a:bodyPr>
+          <a:lstStyle/>
+          <a:p>
+            <a:pPr marL="0" indent="0" algn="ctr">
+              <a:buNone/>
+            </a:pPr>
+            <a:r>
+              <a:rPr lang="en-US" sz="1950" b="1" kern="0" spc="225" dirty="0">
+                <a:solidFill>
+                  <a:srgbClr val="C8956C"/>
+                </a:solidFill>
+                <a:latin typeface="Arial" pitchFamily="34" charset="0"/>
+                <a:ea typeface="Arial" pitchFamily="34" charset="-122"/>
+                <a:cs typeface="Arial" pitchFamily="34" charset="-120"/>
+              </a:rPr>
+              <a:t>3층 · 저장소</a:t>
+            </a:r>
+            <a:endParaRPr lang="en-US" sz="1950" dirty="0"/>
+          </a:p>
+        </p:txBody>
+      </p:sp>
+      <p:sp>
+        <p:nvSpPr>
+          <p:cNvPr id="22" name="Text 17"/>
+          <p:cNvSpPr/>
+          <p:nvPr/>
+        </p:nvSpPr>
+        <p:spPr>
+          <a:xfrm>
+            <a:off x="14469328" y="6121747"/>
+            <a:ext cx="1306562" cy="561975"/>
+          </a:xfrm>
+          <a:prstGeom prst="rect">
+            <a:avLst/>
+          </a:prstGeom>
+          <a:noFill/>
+          <a:ln/>
+        </p:spPr>
+        <p:txBody>
+          <a:bodyPr wrap="square" lIns="25400" tIns="25400" rIns="25400" bIns="25400" rtlCol="0" anchor="t">
+            <a:normAutofit/>
+          </a:bodyPr>
+          <a:lstStyle/>
+          <a:p>
+            <a:pPr marL="0" indent="0" algn="ctr">
+              <a:buNone/>
+            </a:pPr>
+            <a:r>
+              <a:rPr lang="en-US" sz="2850" b="1" dirty="0">
+                <a:solidFill>
+                  <a:srgbClr val="5C4A33"/>
+                </a:solidFill>
+                <a:latin typeface="Arial" pitchFamily="34" charset="0"/>
+                <a:ea typeface="Arial" pitchFamily="34" charset="-122"/>
+                <a:cs typeface="Arial" pitchFamily="34" charset="-120"/>
+              </a:rPr>
+              <a:t>MySQL</a:t>
+            </a:r>
+            <a:endParaRPr lang="en-US" sz="2850" dirty="0"/>
+          </a:p>
+        </p:txBody>
+      </p:sp>
+      <p:sp>
+        <p:nvSpPr>
+          <p:cNvPr id="23" name="Text 18"/>
+          <p:cNvSpPr/>
+          <p:nvPr/>
+        </p:nvSpPr>
+        <p:spPr>
+          <a:xfrm>
+            <a:off x="13794729" y="6798022"/>
+            <a:ext cx="2655761" cy="929580"/>
+          </a:xfrm>
+          <a:prstGeom prst="rect">
+            <a:avLst/>
+          </a:prstGeom>
+          <a:noFill/>
+          <a:ln/>
+        </p:spPr>
+        <p:txBody>
+          <a:bodyPr wrap="square" lIns="25400" tIns="25400" rIns="25400" bIns="25400" rtlCol="0" anchor="t">
+            <a:normAutofit fontScale="92500" lnSpcReduction="10000"/>
+          </a:bodyPr>
+          <a:lstStyle/>
+          <a:p>
+            <a:pPr marL="0" indent="0" algn="ctr">
               <a:lnSpc>
                 <a:spcPct val="180000"/>
               </a:lnSpc>
@@ -8724,6 +10620,13 @@
           </a:solidFill>
           <a:ln/>
         </p:spPr>
+        <p:txBody>
+          <a:bodyPr/>
+          <a:lstStyle/>
+          <a:p>
+            <a:endParaRPr lang="ko-KR" altLang="en-US"/>
+          </a:p>
+        </p:txBody>
       </p:sp>
       <p:sp>
         <p:nvSpPr>
@@ -8748,7 +10651,7 @@
           </a:bodyPr>
           <a:lstStyle/>
           <a:p>
-            <a:pPr algn="l" indent="0" marL="0">
+            <a:pPr marL="0" indent="0" algn="l">
               <a:buNone/>
             </a:pPr>
             <a:r>
@@ -8789,10 +10692,21 @@
           </a:bodyPr>
           <a:lstStyle/>
           <a:p>
-            <a:pPr algn="l" indent="0" marL="0">
+            <a:pPr marL="0" indent="0" algn="l">
               <a:buNone/>
             </a:pPr>
             <a:r>
+              <a:rPr lang="en-US" sz="2550" dirty="0" err="1">
+                <a:solidFill>
+                  <a:srgbClr val="9A7D52"/>
+                </a:solidFill>
+                <a:latin typeface="Arial" pitchFamily="34" charset="0"/>
+                <a:ea typeface="Arial" pitchFamily="34" charset="-122"/>
+                <a:cs typeface="Arial" pitchFamily="34" charset="-120"/>
+              </a:rPr>
+              <a:t>누가</a:t>
+            </a:r>
+            <a:r>
               <a:rPr lang="en-US" sz="2550" dirty="0">
                 <a:solidFill>
                   <a:srgbClr val="9A7D52"/>
@@ -8801,7 +10715,7 @@
                 <a:ea typeface="Arial" pitchFamily="34" charset="-122"/>
                 <a:cs typeface="Arial" pitchFamily="34" charset="-120"/>
               </a:rPr>
-              <a:t>누가, 어떤 기능을 사용하는지 정리한 설계도</a:t>
+              <a:t>, 어떤 기능을 사용하는지 정리한 설계도</a:t>
             </a:r>
             <a:endParaRPr lang="en-US" sz="2550" dirty="0"/>
           </a:p>
@@ -8825,35 +10739,49 @@
           </a:prstGeom>
           <a:ln/>
           <a:effectLst>
-            <a:outerShdw sx="100000" sy="100000" kx="0" ky="0" algn="bl" rotWithShape="0" blurRad="381000" dist="76200" dir="5400000">
+            <a:outerShdw blurRad="381000" dist="76200" dir="5400000" algn="bl" rotWithShape="0">
               <a:srgbClr val="3D3224">
                 <a:alpha val="12000"/>
               </a:srgbClr>
             </a:outerShdw>
           </a:effectLst>
         </p:spPr>
+        <p:txBody>
+          <a:bodyPr/>
+          <a:lstStyle/>
+          <a:p>
+            <a:endParaRPr lang="ko-KR" altLang="en-US"/>
+          </a:p>
+        </p:txBody>
       </p:sp>
       <p:pic>
         <p:nvPicPr>
-          <p:cNvPr id="6" name="Image 0" descr="preencoded.png">    </p:cNvPr>
+          <p:cNvPr id="6" name="Image 0" descr="preencoded.png"/>
           <p:cNvPicPr>
             <a:picLocks noChangeAspect="1"/>
           </p:cNvPicPr>
           <p:nvPr/>
         </p:nvPicPr>
         <p:blipFill>
-          <a:blip r:embed="rId1"/>
-          <a:srcRect l="0" r="0" t="0" b="0"/>
+          <a:blip r:embed="rId3"/>
+          <a:srcRect/>
           <a:stretch/>
         </p:blipFill>
         <p:spPr>
           <a:xfrm>
-            <a:off x="4762946" y="3057525"/>
-            <a:ext cx="8761958" cy="6476851"/>
-          </a:xfrm>
-          <a:prstGeom prst="rect">
-            <a:avLst/>
-          </a:prstGeom>
+            <a:off x="4208133" y="2952207"/>
+            <a:ext cx="9316771" cy="6886970"/>
+          </a:xfrm>
+          <a:prstGeom prst="rect">
+            <a:avLst/>
+          </a:prstGeom>
+          <a:effectLst>
+            <a:outerShdw blurRad="50800" dist="38100" dir="2700000" algn="tl" rotWithShape="0">
+              <a:prstClr val="black">
+                <a:alpha val="40000"/>
+              </a:prstClr>
+            </a:outerShdw>
+          </a:effectLst>
         </p:spPr>
       </p:pic>
     </p:spTree>
@@ -8872,6 +10800,7 @@
         <a:solidFill>
           <a:srgbClr val="FAF7F2"/>
         </a:solidFill>
+        <a:effectLst/>
       </p:bgPr>
     </p:bg>
     <p:spTree>
@@ -8911,7 +10840,7 @@
           </a:bodyPr>
           <a:lstStyle/>
           <a:p>
-            <a:pPr algn="l" indent="0" marL="0">
+            <a:pPr marL="0" indent="0" algn="l">
               <a:buNone/>
             </a:pPr>
             <a:r>
@@ -8952,10 +10881,21 @@
           </a:bodyPr>
           <a:lstStyle/>
           <a:p>
-            <a:pPr algn="l" indent="0" marL="0">
+            <a:pPr marL="0" indent="0" algn="l">
               <a:buNone/>
             </a:pPr>
             <a:r>
+              <a:rPr lang="en-US" sz="2550" dirty="0" err="1">
+                <a:solidFill>
+                  <a:srgbClr val="9A7D52"/>
+                </a:solidFill>
+                <a:latin typeface="Arial" pitchFamily="34" charset="0"/>
+                <a:ea typeface="Arial" pitchFamily="34" charset="-122"/>
+                <a:cs typeface="Arial" pitchFamily="34" charset="-120"/>
+              </a:rPr>
+              <a:t>데이터</a:t>
+            </a:r>
+            <a:r>
               <a:rPr lang="en-US" sz="2550" dirty="0">
                 <a:solidFill>
                   <a:srgbClr val="9A7D52"/>
@@ -8964,7 +10904,73 @@
                 <a:ea typeface="Arial" pitchFamily="34" charset="-122"/>
                 <a:cs typeface="Arial" pitchFamily="34" charset="-120"/>
               </a:rPr>
-              <a:t>데이터를 어떻게 저장하는지 설계한 도면 — 11개 테이블</a:t>
+              <a:t> </a:t>
+            </a:r>
+            <a:r>
+              <a:rPr lang="en-US" sz="2550" dirty="0" err="1">
+                <a:solidFill>
+                  <a:srgbClr val="9A7D52"/>
+                </a:solidFill>
+                <a:latin typeface="Arial" pitchFamily="34" charset="0"/>
+                <a:ea typeface="Arial" pitchFamily="34" charset="-122"/>
+                <a:cs typeface="Arial" pitchFamily="34" charset="-120"/>
+              </a:rPr>
+              <a:t>저장</a:t>
+            </a:r>
+            <a:r>
+              <a:rPr lang="en-US" sz="2550" dirty="0">
+                <a:solidFill>
+                  <a:srgbClr val="9A7D52"/>
+                </a:solidFill>
+                <a:latin typeface="Arial" pitchFamily="34" charset="0"/>
+                <a:ea typeface="Arial" pitchFamily="34" charset="-122"/>
+                <a:cs typeface="Arial" pitchFamily="34" charset="-120"/>
+              </a:rPr>
+              <a:t> </a:t>
+            </a:r>
+            <a:r>
+              <a:rPr lang="ko-KR" altLang="en-US" sz="2550" dirty="0">
+                <a:solidFill>
+                  <a:srgbClr val="9A7D52"/>
+                </a:solidFill>
+                <a:latin typeface="Arial" pitchFamily="34" charset="0"/>
+                <a:ea typeface="Arial" pitchFamily="34" charset="-122"/>
+                <a:cs typeface="Arial" pitchFamily="34" charset="-120"/>
+              </a:rPr>
+              <a:t>방법</a:t>
+            </a:r>
+            <a:r>
+              <a:rPr lang="en-US" sz="2550" dirty="0">
+                <a:solidFill>
+                  <a:srgbClr val="9A7D52"/>
+                </a:solidFill>
+                <a:latin typeface="Arial" pitchFamily="34" charset="0"/>
+                <a:ea typeface="Arial" pitchFamily="34" charset="-122"/>
+                <a:cs typeface="Arial" pitchFamily="34" charset="-120"/>
+              </a:rPr>
+              <a:t> </a:t>
+            </a:r>
+            <a:r>
+              <a:rPr lang="en-US" sz="2550" dirty="0" err="1">
+                <a:solidFill>
+                  <a:srgbClr val="9A7D52"/>
+                </a:solidFill>
+                <a:latin typeface="Arial" pitchFamily="34" charset="0"/>
+                <a:ea typeface="Arial" pitchFamily="34" charset="-122"/>
+                <a:cs typeface="Arial" pitchFamily="34" charset="-120"/>
+              </a:rPr>
+              <a:t>설계</a:t>
+            </a:r>
+            <a:r>
+              <a:rPr lang="en-US" sz="2550" dirty="0">
+                <a:solidFill>
+                  <a:srgbClr val="9A7D52"/>
+                </a:solidFill>
+                <a:latin typeface="Arial" pitchFamily="34" charset="0"/>
+                <a:ea typeface="Arial" pitchFamily="34" charset="-122"/>
+                <a:cs typeface="Arial" pitchFamily="34" charset="-120"/>
+              </a:rPr>
+              <a:t> 도면 — 11개 테이블</a:t>
             </a:r>
             <a:endParaRPr lang="en-US" sz="2550" dirty="0"/>
           </a:p>
@@ -8988,35 +10994,49 @@
           </a:prstGeom>
           <a:ln/>
           <a:effectLst>
-            <a:outerShdw sx="100000" sy="100000" kx="0" ky="0" algn="bl" rotWithShape="0" blurRad="381000" dist="76200" dir="5400000">
+            <a:outerShdw blurRad="381000" dist="76200" dir="5400000" algn="bl" rotWithShape="0">
               <a:srgbClr val="3D3224">
                 <a:alpha val="12000"/>
               </a:srgbClr>
             </a:outerShdw>
           </a:effectLst>
         </p:spPr>
+        <p:txBody>
+          <a:bodyPr/>
+          <a:lstStyle/>
+          <a:p>
+            <a:endParaRPr lang="ko-KR" altLang="en-US"/>
+          </a:p>
+        </p:txBody>
       </p:sp>
       <p:pic>
         <p:nvPicPr>
-          <p:cNvPr id="5" name="Image 0" descr="preencoded.png">    </p:cNvPr>
+          <p:cNvPr id="5" name="Image 0" descr="preencoded.png"/>
           <p:cNvPicPr>
             <a:picLocks noChangeAspect="1"/>
           </p:cNvPicPr>
           <p:nvPr/>
         </p:nvPicPr>
         <p:blipFill>
-          <a:blip r:embed="rId1"/>
-          <a:srcRect l="0" r="0" t="0" b="0"/>
+          <a:blip r:embed="rId3"/>
+          <a:srcRect/>
           <a:stretch/>
         </p:blipFill>
         <p:spPr>
           <a:xfrm>
-            <a:off x="4598640" y="3057525"/>
-            <a:ext cx="9090571" cy="6476851"/>
-          </a:xfrm>
-          <a:prstGeom prst="rect">
-            <a:avLst/>
-          </a:prstGeom>
+            <a:off x="4193659" y="3057525"/>
+            <a:ext cx="9900681" cy="7054038"/>
+          </a:xfrm>
+          <a:prstGeom prst="rect">
+            <a:avLst/>
+          </a:prstGeom>
+          <a:effectLst>
+            <a:outerShdw blurRad="50800" dist="38100" dir="2700000" algn="tl" rotWithShape="0">
+              <a:prstClr val="black">
+                <a:alpha val="40000"/>
+              </a:prstClr>
+            </a:outerShdw>
+          </a:effectLst>
         </p:spPr>
       </p:pic>
     </p:spTree>
@@ -9063,6 +11083,13 @@
           </a:solidFill>
           <a:ln/>
         </p:spPr>
+        <p:txBody>
+          <a:bodyPr/>
+          <a:lstStyle/>
+          <a:p>
+            <a:endParaRPr lang="ko-KR" altLang="en-US" dirty="0"/>
+          </a:p>
+        </p:txBody>
       </p:sp>
       <p:sp>
         <p:nvSpPr>
@@ -9083,11 +11110,11 @@
         </p:spPr>
         <p:txBody>
           <a:bodyPr wrap="square" lIns="25400" tIns="25400" rIns="25400" bIns="25400" rtlCol="0" anchor="t">
-            <a:normAutofit/>
+            <a:normAutofit fontScale="92500" lnSpcReduction="20000"/>
           </a:bodyPr>
           <a:lstStyle/>
           <a:p>
-            <a:pPr algn="l" indent="0" marL="0">
+            <a:pPr marL="0" indent="0" algn="l">
               <a:lnSpc>
                 <a:spcPct val="100000"/>
               </a:lnSpc>
@@ -9131,7 +11158,7 @@
           </a:bodyPr>
           <a:lstStyle/>
           <a:p>
-            <a:pPr algn="l" indent="0" marL="0">
+            <a:pPr marL="0" indent="0" algn="l">
               <a:buNone/>
             </a:pPr>
             <a:r>
@@ -9172,7 +11199,7 @@
           </a:bodyPr>
           <a:lstStyle/>
           <a:p>
-            <a:pPr algn="l" indent="0" marL="0">
+            <a:pPr marL="0" indent="0" algn="l">
               <a:lnSpc>
                 <a:spcPct val="180000"/>
               </a:lnSpc>
@@ -9214,6 +11241,14 @@
           </a:solidFill>
           <a:ln/>
         </p:spPr>
+        <p:txBody>
+          <a:bodyPr/>
+          <a:lstStyle/>
+          <a:p>
+            <a:pPr algn="ctr"/>
+            <a:endParaRPr lang="ko-KR" altLang="en-US"/>
+          </a:p>
+        </p:txBody>
       </p:sp>
       <p:sp>
         <p:nvSpPr>
@@ -9223,8 +11258,8 @@
         </p:nvSpPr>
         <p:spPr>
           <a:xfrm>
-            <a:off x="1143000" y="6834188"/>
-            <a:ext cx="707231" cy="371475"/>
+            <a:off x="1047750" y="6834188"/>
+            <a:ext cx="821530" cy="371475"/>
           </a:xfrm>
           <a:prstGeom prst="rect">
             <a:avLst/>
@@ -9238,7 +11273,7 @@
           </a:bodyPr>
           <a:lstStyle/>
           <a:p>
-            <a:pPr algn="l" indent="0" marL="0">
+            <a:pPr marL="0" indent="0" algn="ctr">
               <a:buNone/>
             </a:pPr>
             <a:r>
@@ -9277,6 +11312,14 @@
           </a:solidFill>
           <a:ln/>
         </p:spPr>
+        <p:txBody>
+          <a:bodyPr/>
+          <a:lstStyle/>
+          <a:p>
+            <a:pPr algn="ctr"/>
+            <a:endParaRPr lang="ko-KR" altLang="en-US"/>
+          </a:p>
+        </p:txBody>
       </p:sp>
       <p:sp>
         <p:nvSpPr>
@@ -9286,8 +11329,8 @@
         </p:nvSpPr>
         <p:spPr>
           <a:xfrm>
-            <a:off x="2311747" y="6834188"/>
-            <a:ext cx="707231" cy="371475"/>
+            <a:off x="2216497" y="6834188"/>
+            <a:ext cx="821531" cy="409575"/>
           </a:xfrm>
           <a:prstGeom prst="rect">
             <a:avLst/>
@@ -9301,7 +11344,7 @@
           </a:bodyPr>
           <a:lstStyle/>
           <a:p>
-            <a:pPr algn="l" indent="0" marL="0">
+            <a:pPr marL="0" indent="0" algn="ctr">
               <a:buNone/>
             </a:pPr>
             <a:r>
@@ -9340,6 +11383,14 @@
           </a:solidFill>
           <a:ln/>
         </p:spPr>
+        <p:txBody>
+          <a:bodyPr/>
+          <a:lstStyle/>
+          <a:p>
+            <a:pPr algn="ctr"/>
+            <a:endParaRPr lang="ko-KR" altLang="en-US"/>
+          </a:p>
+        </p:txBody>
       </p:sp>
       <p:sp>
         <p:nvSpPr>
@@ -9349,8 +11400,8 @@
         </p:nvSpPr>
         <p:spPr>
           <a:xfrm>
-            <a:off x="3480495" y="6834188"/>
-            <a:ext cx="496937" cy="371475"/>
+            <a:off x="3385245" y="6834188"/>
+            <a:ext cx="611237" cy="371475"/>
           </a:xfrm>
           <a:prstGeom prst="rect">
             <a:avLst/>
@@ -9364,7 +11415,7 @@
           </a:bodyPr>
           <a:lstStyle/>
           <a:p>
-            <a:pPr algn="l" indent="0" marL="0">
+            <a:pPr marL="0" indent="0" algn="ctr">
               <a:buNone/>
             </a:pPr>
             <a:r>
@@ -9382,64 +11433,452 @@
           </a:p>
         </p:txBody>
       </p:sp>
-      <p:sp>
-        <p:nvSpPr>
-          <p:cNvPr id="12" name="Shape 10"/>
-          <p:cNvSpPr/>
-          <p:nvPr/>
-        </p:nvSpPr>
-        <p:spPr>
-          <a:xfrm>
-            <a:off x="8953500" y="4614863"/>
-            <a:ext cx="8382000" cy="1247775"/>
-          </a:xfrm>
-          <a:prstGeom prst="roundRect">
-            <a:avLst>
-              <a:gd name="adj" fmla="val 15267"/>
-            </a:avLst>
-          </a:prstGeom>
-          <a:solidFill>
-            <a:srgbClr val="FFFFFF"/>
-          </a:solidFill>
-          <a:ln/>
-          <a:effectLst>
-            <a:outerShdw sx="100000" sy="100000" kx="0" ky="0" algn="bl" rotWithShape="0" blurRad="381000" dist="76200" dir="5400000">
-              <a:srgbClr val="3D3224">
-                <a:alpha val="12000"/>
-              </a:srgbClr>
-            </a:outerShdw>
-          </a:effectLst>
-        </p:spPr>
-      </p:sp>
-      <p:pic>
-        <p:nvPicPr>
-          <p:cNvPr id="13" name="Image 0" descr="preencoded.png">    </p:cNvPr>
-          <p:cNvPicPr>
-            <a:picLocks noChangeAspect="1"/>
-          </p:cNvPicPr>
-          <p:nvPr/>
-        </p:nvPicPr>
-        <p:blipFill>
-          <a:blip r:embed="rId1"/>
-          <a:stretch>
-            <a:fillRect/>
-          </a:stretch>
-        </p:blipFill>
-        <p:spPr>
-          <a:xfrm>
-            <a:off x="11715750" y="5072063"/>
-            <a:ext cx="2857500" cy="333375"/>
-          </a:xfrm>
-          <a:prstGeom prst="rect">
-            <a:avLst/>
-          </a:prstGeom>
-        </p:spPr>
-      </p:pic>
+      <p:grpSp>
+        <p:nvGrpSpPr>
+          <p:cNvPr id="14" name="그룹 13">
+            <a:extLst>
+              <a:ext uri="{FF2B5EF4-FFF2-40B4-BE49-F238E27FC236}">
+                <a16:creationId xmlns:a16="http://schemas.microsoft.com/office/drawing/2014/main" id="{26AA2054-4465-1B65-B620-C6AA98A582C1}"/>
+              </a:ext>
+            </a:extLst>
+          </p:cNvPr>
+          <p:cNvGrpSpPr/>
+          <p:nvPr/>
+        </p:nvGrpSpPr>
+        <p:grpSpPr>
+          <a:xfrm>
+            <a:off x="8991600" y="3609975"/>
+            <a:ext cx="8343900" cy="3257550"/>
+            <a:chOff x="8991600" y="3609975"/>
+            <a:chExt cx="8343900" cy="3257550"/>
+          </a:xfrm>
+        </p:grpSpPr>
+        <p:sp>
+          <p:nvSpPr>
+            <p:cNvPr id="15" name="Shape 10">
+              <a:extLst>
+                <a:ext uri="{FF2B5EF4-FFF2-40B4-BE49-F238E27FC236}">
+                  <a16:creationId xmlns:a16="http://schemas.microsoft.com/office/drawing/2014/main" id="{24AA3471-B0B8-76D1-5983-447D89FDF67B}"/>
+                </a:ext>
+              </a:extLst>
+            </p:cNvPr>
+            <p:cNvSpPr/>
+            <p:nvPr/>
+          </p:nvSpPr>
+          <p:spPr>
+            <a:xfrm>
+              <a:off x="8991600" y="3609975"/>
+              <a:ext cx="8343900" cy="3257550"/>
+            </a:xfrm>
+            <a:prstGeom prst="roundRect">
+              <a:avLst>
+                <a:gd name="adj" fmla="val 7018"/>
+              </a:avLst>
+            </a:prstGeom>
+            <a:solidFill>
+              <a:srgbClr val="FFFFFF"/>
+            </a:solidFill>
+            <a:ln/>
+            <a:effectLst>
+              <a:outerShdw blurRad="304800" dist="57150" dir="5400000" algn="bl" rotWithShape="0">
+                <a:srgbClr val="3D3224">
+                  <a:alpha val="8000"/>
+                </a:srgbClr>
+              </a:outerShdw>
+            </a:effectLst>
+          </p:spPr>
+          <p:txBody>
+            <a:bodyPr/>
+            <a:lstStyle/>
+            <a:p>
+              <a:endParaRPr lang="ko-KR" altLang="en-US"/>
+            </a:p>
+          </p:txBody>
+        </p:sp>
+        <p:pic>
+          <p:nvPicPr>
+            <p:cNvPr id="16" name="Image 0" descr="preencoded.png">
+              <a:extLst>
+                <a:ext uri="{FF2B5EF4-FFF2-40B4-BE49-F238E27FC236}">
+                  <a16:creationId xmlns:a16="http://schemas.microsoft.com/office/drawing/2014/main" id="{C2120356-69F3-8AE9-41F7-38BD349C92E3}"/>
+                </a:ext>
+              </a:extLst>
+            </p:cNvPr>
+            <p:cNvPicPr>
+              <a:picLocks noChangeAspect="1"/>
+            </p:cNvPicPr>
+            <p:nvPr/>
+          </p:nvPicPr>
+          <p:blipFill>
+            <a:blip r:embed="rId3"/>
+            <a:stretch>
+              <a:fillRect/>
+            </a:stretch>
+          </p:blipFill>
+          <p:spPr>
+            <a:xfrm>
+              <a:off x="12592050" y="4062028"/>
+              <a:ext cx="1143000" cy="1143000"/>
+            </a:xfrm>
+            <a:prstGeom prst="rect">
+              <a:avLst/>
+            </a:prstGeom>
+          </p:spPr>
+        </p:pic>
+        <p:sp>
+          <p:nvSpPr>
+            <p:cNvPr id="17" name="Shape 11">
+              <a:extLst>
+                <a:ext uri="{FF2B5EF4-FFF2-40B4-BE49-F238E27FC236}">
+                  <a16:creationId xmlns:a16="http://schemas.microsoft.com/office/drawing/2014/main" id="{3CD6B215-450D-5A42-4AEA-1F73EABC9BEB}"/>
+                </a:ext>
+              </a:extLst>
+            </p:cNvPr>
+            <p:cNvSpPr/>
+            <p:nvPr/>
+          </p:nvSpPr>
+          <p:spPr>
+            <a:xfrm>
+              <a:off x="11410801" y="5476875"/>
+              <a:ext cx="1016198" cy="933450"/>
+            </a:xfrm>
+            <a:prstGeom prst="roundRect">
+              <a:avLst>
+                <a:gd name="adj" fmla="val 12245"/>
+              </a:avLst>
+            </a:prstGeom>
+            <a:solidFill>
+              <a:srgbClr val="F3EDE4"/>
+            </a:solidFill>
+            <a:ln/>
+          </p:spPr>
+          <p:txBody>
+            <a:bodyPr/>
+            <a:lstStyle/>
+            <a:p>
+              <a:endParaRPr lang="ko-KR" altLang="en-US"/>
+            </a:p>
+          </p:txBody>
+        </p:sp>
+        <p:sp>
+          <p:nvSpPr>
+            <p:cNvPr id="18" name="Text 12">
+              <a:extLst>
+                <a:ext uri="{FF2B5EF4-FFF2-40B4-BE49-F238E27FC236}">
+                  <a16:creationId xmlns:a16="http://schemas.microsoft.com/office/drawing/2014/main" id="{64582D3B-050B-A5E9-6B0B-94E6816B0350}"/>
+                </a:ext>
+              </a:extLst>
+            </p:cNvPr>
+            <p:cNvSpPr/>
+            <p:nvPr/>
+          </p:nvSpPr>
+          <p:spPr>
+            <a:xfrm>
+              <a:off x="11601301" y="5629275"/>
+              <a:ext cx="635198" cy="285750"/>
+            </a:xfrm>
+            <a:prstGeom prst="rect">
+              <a:avLst/>
+            </a:prstGeom>
+            <a:noFill/>
+            <a:ln/>
+          </p:spPr>
+          <p:txBody>
+            <a:bodyPr wrap="square" lIns="25400" tIns="25400" rIns="25400" bIns="25400" rtlCol="0" anchor="t">
+              <a:normAutofit lnSpcReduction="10000"/>
+            </a:bodyPr>
+            <a:lstStyle/>
+            <a:p>
+              <a:pPr marL="0" indent="0" algn="ctr">
+                <a:buNone/>
+              </a:pPr>
+              <a:r>
+                <a:rPr lang="en-US" sz="1650" dirty="0">
+                  <a:solidFill>
+                    <a:srgbClr val="9A7D52"/>
+                  </a:solidFill>
+                  <a:latin typeface="Arial" pitchFamily="34" charset="0"/>
+                  <a:ea typeface="Arial" pitchFamily="34" charset="-122"/>
+                  <a:cs typeface="Arial" pitchFamily="34" charset="-120"/>
+                </a:rPr>
+                <a:t>Naver</a:t>
+              </a:r>
+              <a:endParaRPr lang="en-US" sz="1650" dirty="0"/>
+            </a:p>
+          </p:txBody>
+        </p:sp>
+        <p:pic>
+          <p:nvPicPr>
+            <p:cNvPr id="19" name="Image 1" descr="preencoded.png">
+              <a:extLst>
+                <a:ext uri="{FF2B5EF4-FFF2-40B4-BE49-F238E27FC236}">
+                  <a16:creationId xmlns:a16="http://schemas.microsoft.com/office/drawing/2014/main" id="{BAA3A837-CD27-B5B2-9EDD-E283D9891C71}"/>
+                </a:ext>
+              </a:extLst>
+            </p:cNvPr>
+            <p:cNvPicPr>
+              <a:picLocks noChangeAspect="1"/>
+            </p:cNvPicPr>
+            <p:nvPr/>
+          </p:nvPicPr>
+          <p:blipFill>
+            <a:blip r:embed="rId4"/>
+            <a:stretch>
+              <a:fillRect/>
+            </a:stretch>
+          </p:blipFill>
+          <p:spPr>
+            <a:xfrm>
+              <a:off x="11766500" y="5915025"/>
+              <a:ext cx="304800" cy="304800"/>
+            </a:xfrm>
+            <a:prstGeom prst="rect">
+              <a:avLst/>
+            </a:prstGeom>
+          </p:spPr>
+        </p:pic>
+        <p:sp>
+          <p:nvSpPr>
+            <p:cNvPr id="20" name="Shape 13">
+              <a:extLst>
+                <a:ext uri="{FF2B5EF4-FFF2-40B4-BE49-F238E27FC236}">
+                  <a16:creationId xmlns:a16="http://schemas.microsoft.com/office/drawing/2014/main" id="{999A869B-41A9-686D-E914-92F6FAE861A9}"/>
+                </a:ext>
+              </a:extLst>
+            </p:cNvPr>
+            <p:cNvSpPr/>
+            <p:nvPr/>
+          </p:nvSpPr>
+          <p:spPr>
+            <a:xfrm>
+              <a:off x="12579400" y="5476875"/>
+              <a:ext cx="1051471" cy="933450"/>
+            </a:xfrm>
+            <a:prstGeom prst="roundRect">
+              <a:avLst>
+                <a:gd name="adj" fmla="val 12245"/>
+              </a:avLst>
+            </a:prstGeom>
+            <a:solidFill>
+              <a:srgbClr val="F3EDE4"/>
+            </a:solidFill>
+            <a:ln/>
+          </p:spPr>
+          <p:txBody>
+            <a:bodyPr/>
+            <a:lstStyle/>
+            <a:p>
+              <a:endParaRPr lang="ko-KR" altLang="en-US"/>
+            </a:p>
+          </p:txBody>
+        </p:sp>
+        <p:sp>
+          <p:nvSpPr>
+            <p:cNvPr id="21" name="Text 14">
+              <a:extLst>
+                <a:ext uri="{FF2B5EF4-FFF2-40B4-BE49-F238E27FC236}">
+                  <a16:creationId xmlns:a16="http://schemas.microsoft.com/office/drawing/2014/main" id="{5070E4CC-C798-7751-639B-823C12FBA128}"/>
+                </a:ext>
+              </a:extLst>
+            </p:cNvPr>
+            <p:cNvSpPr/>
+            <p:nvPr/>
+          </p:nvSpPr>
+          <p:spPr>
+            <a:xfrm>
+              <a:off x="12769900" y="5629275"/>
+              <a:ext cx="670471" cy="285750"/>
+            </a:xfrm>
+            <a:prstGeom prst="rect">
+              <a:avLst/>
+            </a:prstGeom>
+            <a:noFill/>
+            <a:ln/>
+          </p:spPr>
+          <p:txBody>
+            <a:bodyPr wrap="square" lIns="25400" tIns="25400" rIns="25400" bIns="25400" rtlCol="0" anchor="t">
+              <a:normAutofit lnSpcReduction="10000"/>
+            </a:bodyPr>
+            <a:lstStyle/>
+            <a:p>
+              <a:pPr marL="0" indent="0" algn="ctr">
+                <a:buNone/>
+              </a:pPr>
+              <a:r>
+                <a:rPr lang="en-US" sz="1650" dirty="0">
+                  <a:solidFill>
+                    <a:srgbClr val="9A7D52"/>
+                  </a:solidFill>
+                  <a:latin typeface="Arial" pitchFamily="34" charset="0"/>
+                  <a:ea typeface="Arial" pitchFamily="34" charset="-122"/>
+                  <a:cs typeface="Arial" pitchFamily="34" charset="-120"/>
+                </a:rPr>
+                <a:t>Kakao</a:t>
+              </a:r>
+              <a:endParaRPr lang="en-US" sz="1650" dirty="0"/>
+            </a:p>
+          </p:txBody>
+        </p:sp>
+        <p:pic>
+          <p:nvPicPr>
+            <p:cNvPr id="22" name="Image 2" descr="preencoded.png">
+              <a:extLst>
+                <a:ext uri="{FF2B5EF4-FFF2-40B4-BE49-F238E27FC236}">
+                  <a16:creationId xmlns:a16="http://schemas.microsoft.com/office/drawing/2014/main" id="{A6458062-BA6C-BA73-FE64-25AF5A1ED34D}"/>
+                </a:ext>
+              </a:extLst>
+            </p:cNvPr>
+            <p:cNvPicPr>
+              <a:picLocks noChangeAspect="1"/>
+            </p:cNvPicPr>
+            <p:nvPr/>
+          </p:nvPicPr>
+          <p:blipFill>
+            <a:blip r:embed="rId5"/>
+            <a:stretch>
+              <a:fillRect/>
+            </a:stretch>
+          </p:blipFill>
+          <p:spPr>
+            <a:xfrm>
+              <a:off x="12952661" y="5915025"/>
+              <a:ext cx="304800" cy="304800"/>
+            </a:xfrm>
+            <a:prstGeom prst="rect">
+              <a:avLst/>
+            </a:prstGeom>
+          </p:spPr>
+        </p:pic>
+        <p:sp>
+          <p:nvSpPr>
+            <p:cNvPr id="23" name="Shape 15">
+              <a:extLst>
+                <a:ext uri="{FF2B5EF4-FFF2-40B4-BE49-F238E27FC236}">
+                  <a16:creationId xmlns:a16="http://schemas.microsoft.com/office/drawing/2014/main" id="{F1CDEDBF-B516-C141-0715-67D56892D909}"/>
+                </a:ext>
+              </a:extLst>
+            </p:cNvPr>
+            <p:cNvSpPr/>
+            <p:nvPr/>
+          </p:nvSpPr>
+          <p:spPr>
+            <a:xfrm>
+              <a:off x="13783270" y="5476875"/>
+              <a:ext cx="1133029" cy="933450"/>
+            </a:xfrm>
+            <a:prstGeom prst="roundRect">
+              <a:avLst>
+                <a:gd name="adj" fmla="val 12245"/>
+              </a:avLst>
+            </a:prstGeom>
+            <a:solidFill>
+              <a:srgbClr val="F3EDE4"/>
+            </a:solidFill>
+            <a:ln/>
+          </p:spPr>
+          <p:txBody>
+            <a:bodyPr/>
+            <a:lstStyle/>
+            <a:p>
+              <a:endParaRPr lang="ko-KR" altLang="en-US"/>
+            </a:p>
+          </p:txBody>
+        </p:sp>
+        <p:sp>
+          <p:nvSpPr>
+            <p:cNvPr id="24" name="Text 16">
+              <a:extLst>
+                <a:ext uri="{FF2B5EF4-FFF2-40B4-BE49-F238E27FC236}">
+                  <a16:creationId xmlns:a16="http://schemas.microsoft.com/office/drawing/2014/main" id="{7F266534-6931-E568-69C1-2ADBF1AE36D8}"/>
+                </a:ext>
+              </a:extLst>
+            </p:cNvPr>
+            <p:cNvSpPr/>
+            <p:nvPr/>
+          </p:nvSpPr>
+          <p:spPr>
+            <a:xfrm>
+              <a:off x="13973770" y="5629275"/>
+              <a:ext cx="752029" cy="285750"/>
+            </a:xfrm>
+            <a:prstGeom prst="rect">
+              <a:avLst/>
+            </a:prstGeom>
+            <a:noFill/>
+            <a:ln/>
+          </p:spPr>
+          <p:txBody>
+            <a:bodyPr wrap="square" lIns="25400" tIns="25400" rIns="25400" bIns="25400" rtlCol="0" anchor="t">
+              <a:normAutofit lnSpcReduction="10000"/>
+            </a:bodyPr>
+            <a:lstStyle/>
+            <a:p>
+              <a:pPr marL="0" indent="0" algn="ctr">
+                <a:buNone/>
+              </a:pPr>
+              <a:r>
+                <a:rPr lang="en-US" sz="1650" dirty="0">
+                  <a:solidFill>
+                    <a:srgbClr val="9A7D52"/>
+                  </a:solidFill>
+                  <a:latin typeface="Arial" pitchFamily="34" charset="0"/>
+                  <a:ea typeface="Arial" pitchFamily="34" charset="-122"/>
+                  <a:cs typeface="Arial" pitchFamily="34" charset="-120"/>
+                </a:rPr>
+                <a:t>Google</a:t>
+              </a:r>
+              <a:endParaRPr lang="en-US" sz="1650" dirty="0"/>
+            </a:p>
+          </p:txBody>
+        </p:sp>
+        <p:pic>
+          <p:nvPicPr>
+            <p:cNvPr id="25" name="Image 3" descr="preencoded.png">
+              <a:extLst>
+                <a:ext uri="{FF2B5EF4-FFF2-40B4-BE49-F238E27FC236}">
+                  <a16:creationId xmlns:a16="http://schemas.microsoft.com/office/drawing/2014/main" id="{CBB3B888-C6DC-D687-FF71-CFC9B9BAEA12}"/>
+                </a:ext>
+              </a:extLst>
+            </p:cNvPr>
+            <p:cNvPicPr>
+              <a:picLocks noChangeAspect="1"/>
+            </p:cNvPicPr>
+            <p:nvPr/>
+          </p:nvPicPr>
+          <p:blipFill>
+            <a:blip r:embed="rId6"/>
+            <a:stretch>
+              <a:fillRect/>
+            </a:stretch>
+          </p:blipFill>
+          <p:spPr>
+            <a:xfrm>
+              <a:off x="14197310" y="5915025"/>
+              <a:ext cx="304800" cy="304800"/>
+            </a:xfrm>
+            <a:prstGeom prst="rect">
+              <a:avLst/>
+            </a:prstGeom>
+          </p:spPr>
+        </p:pic>
+      </p:grpSp>
     </p:spTree>
   </p:cSld>
   <p:clrMapOvr>
     <a:masterClrMapping/>
   </p:clrMapOvr>
+  <mc:AlternateContent xmlns:mc="http://schemas.openxmlformats.org/markup-compatibility/2006">
+    <mc:Choice xmlns:p15="http://schemas.microsoft.com/office/powerpoint/2012/main" Requires="p15">
+      <p:transition xmlns:p14="http://schemas.microsoft.com/office/powerpoint/2010/main" spd="slow" p14:dur="2000">
+        <p15:prstTrans prst="prestige"/>
+      </p:transition>
+    </mc:Choice>
+    <mc:Fallback>
+      <p:transition spd="slow">
+        <p:fade/>
+      </p:transition>
+    </mc:Fallback>
+  </mc:AlternateContent>
 </p:sld>
 </file>
 
@@ -9736,4 +12175,319 @@
     </a:ext>
   </a:extLst>
 </a:theme>
+</file>
+
+<file path=ppt/theme/theme2.xml><?xml version="1.0" encoding="utf-8"?>
+<a:theme xmlns:a="http://schemas.openxmlformats.org/drawingml/2006/main" name="Office 테마">
+  <a:themeElements>
+    <a:clrScheme name="Office">
+      <a:dk1>
+        <a:sysClr val="windowText" lastClr="000000"/>
+      </a:dk1>
+      <a:lt1>
+        <a:sysClr val="window" lastClr="FFFFFF"/>
+      </a:lt1>
+      <a:dk2>
+        <a:srgbClr val="0E2841"/>
+      </a:dk2>
+      <a:lt2>
+        <a:srgbClr val="E8E8E8"/>
+      </a:lt2>
+      <a:accent1>
+        <a:srgbClr val="156082"/>
+      </a:accent1>
+      <a:accent2>
+        <a:srgbClr val="E97132"/>
+      </a:accent2>
+      <a:accent3>
+        <a:srgbClr val="196B24"/>
+      </a:accent3>
+      <a:accent4>
+        <a:srgbClr val="0F9ED5"/>
+      </a:accent4>
+      <a:accent5>
+        <a:srgbClr val="A02B93"/>
+      </a:accent5>
+      <a:accent6>
+        <a:srgbClr val="4EA72E"/>
+      </a:accent6>
+      <a:hlink>
+        <a:srgbClr val="467886"/>
+      </a:hlink>
+      <a:folHlink>
+        <a:srgbClr val="96607D"/>
+      </a:folHlink>
+    </a:clrScheme>
+    <a:fontScheme name="Office">
+      <a:majorFont>
+        <a:latin typeface="맑은 고딕" panose="02110004020202020204"/>
+        <a:ea typeface=""/>
+        <a:cs typeface=""/>
+        <a:font script="Jpan" typeface="游ゴシック Light"/>
+        <a:font script="Hang" typeface="맑은 고딕"/>
+        <a:font script="Hans" typeface="等线 Light"/>
+        <a:font script="Hant" typeface="新細明體"/>
+        <a:font script="Arab" typeface="Times New Roman"/>
+        <a:font script="Hebr" typeface="Times New Roman"/>
+        <a:font script="Thai" typeface="Angsana New"/>
+        <a:font script="Ethi" typeface="Nyala"/>
+        <a:font script="Beng" typeface="Vrinda"/>
+        <a:font script="Gujr" typeface="Shruti"/>
+        <a:font script="Khmr" typeface="MoolBoran"/>
+        <a:font script="Knda" typeface="Tunga"/>
+        <a:font script="Guru" typeface="Raavi"/>
+        <a:font script="Cans" typeface="Euphemia"/>
+        <a:font script="Cher" typeface="Plantagenet Cherokee"/>
+        <a:font script="Yiii" typeface="Microsoft Yi Baiti"/>
+        <a:font script="Tibt" typeface="Microsoft Himalaya"/>
+        <a:font script="Thaa" typeface="MV Boli"/>
+        <a:font script="Deva" typeface="Mangal"/>
+        <a:font script="Telu" typeface="Gautami"/>
+        <a:font script="Taml" typeface="Latha"/>
+        <a:font script="Syrc" typeface="Estrangelo Edessa"/>
+        <a:font script="Orya" typeface="Kalinga"/>
+        <a:font script="Mlym" typeface="Kartika"/>
+        <a:font script="Laoo" typeface="DokChampa"/>
+        <a:font script="Sinh" typeface="Iskoola Pota"/>
+        <a:font script="Mong" typeface="Mongolian Baiti"/>
+        <a:font script="Viet" typeface="Times New Roman"/>
+        <a:font script="Uigh" typeface="Microsoft Uighur"/>
+        <a:font script="Geor" typeface="Sylfaen"/>
+        <a:font script="Armn" typeface="Arial"/>
+        <a:font script="Bugi" typeface="Leelawadee UI"/>
+        <a:font script="Bopo" typeface="Microsoft JhengHei"/>
+        <a:font script="Java" typeface="Javanese Text"/>
+        <a:font script="Lisu" typeface="Segoe UI"/>
+        <a:font script="Mymr" typeface="Myanmar Text"/>
+        <a:font script="Nkoo" typeface="Ebrima"/>
+        <a:font script="Olck" typeface="Nirmala UI"/>
+        <a:font script="Osma" typeface="Ebrima"/>
+        <a:font script="Phag" typeface="Phagspa"/>
+        <a:font script="Syrn" typeface="Estrangelo Edessa"/>
+        <a:font script="Syrj" typeface="Estrangelo Edessa"/>
+        <a:font script="Syre" typeface="Estrangelo Edessa"/>
+        <a:font script="Sora" typeface="Nirmala UI"/>
+        <a:font script="Tale" typeface="Microsoft Tai Le"/>
+        <a:font script="Talu" typeface="Microsoft New Tai Lue"/>
+        <a:font script="Tfng" typeface="Ebrima"/>
+      </a:majorFont>
+      <a:minorFont>
+        <a:latin typeface="맑은 고딕" panose="02110004020202020204"/>
+        <a:ea typeface=""/>
+        <a:cs typeface=""/>
+        <a:font script="Jpan" typeface="游ゴシック"/>
+        <a:font script="Hang" typeface="맑은 고딕"/>
+        <a:font script="Hans" typeface="等线"/>
+        <a:font script="Hant" typeface="新細明體"/>
+        <a:font script="Arab" typeface="Arial"/>
+        <a:font script="Hebr" typeface="Arial"/>
+        <a:font script="Thai" typeface="Cordia New"/>
+        <a:font script="Ethi" typeface="Nyala"/>
+        <a:font script="Beng" typeface="Vrinda"/>
+        <a:font script="Gujr" typeface="Shruti"/>
+        <a:font script="Khmr" typeface="DaunPenh"/>
+        <a:font script="Knda" typeface="Tunga"/>
+        <a:font script="Guru" typeface="Raavi"/>
+        <a:font script="Cans" typeface="Euphemia"/>
+        <a:font script="Cher" typeface="Plantagenet Cherokee"/>
+        <a:font script="Yiii" typeface="Microsoft Yi Baiti"/>
+        <a:font script="Tibt" typeface="Microsoft Himalaya"/>
+        <a:font script="Thaa" typeface="MV Boli"/>
+        <a:font script="Deva" typeface="Mangal"/>
+        <a:font script="Telu" typeface="Gautami"/>
+        <a:font script="Taml" typeface="Latha"/>
+        <a:font script="Syrc" typeface="Estrangelo Edessa"/>
+        <a:font script="Orya" typeface="Kalinga"/>
+        <a:font script="Mlym" typeface="Kartika"/>
+        <a:font script="Laoo" typeface="DokChampa"/>
+        <a:font script="Sinh" typeface="Iskoola Pota"/>
+        <a:font script="Mong" typeface="Mongolian Baiti"/>
+        <a:font script="Viet" typeface="Arial"/>
+        <a:font script="Uigh" typeface="Microsoft Uighur"/>
+        <a:font script="Geor" typeface="Sylfaen"/>
+        <a:font script="Armn" typeface="Arial"/>
+        <a:font script="Bugi" typeface="Leelawadee UI"/>
+        <a:font script="Bopo" typeface="Microsoft JhengHei"/>
+        <a:font script="Java" typeface="Javanese Text"/>
+        <a:font script="Lisu" typeface="Segoe UI"/>
+        <a:font script="Mymr" typeface="Myanmar Text"/>
+        <a:font script="Nkoo" typeface="Ebrima"/>
+        <a:font script="Olck" typeface="Nirmala UI"/>
+        <a:font script="Osma" typeface="Ebrima"/>
+        <a:font script="Phag" typeface="Phagspa"/>
+        <a:font script="Syrn" typeface="Estrangelo Edessa"/>
+        <a:font script="Syrj" typeface="Estrangelo Edessa"/>
+        <a:font script="Syre" typeface="Estrangelo Edessa"/>
+        <a:font script="Sora" typeface="Nirmala UI"/>
+        <a:font script="Tale" typeface="Microsoft Tai Le"/>
+        <a:font script="Talu" typeface="Microsoft New Tai Lue"/>
+        <a:font script="Tfng" typeface="Ebrima"/>
+      </a:minorFont>
+    </a:fontScheme>
+    <a:fmtScheme name="Office">
+      <a:fillStyleLst>
+        <a:solidFill>
+          <a:schemeClr val="phClr"/>
+        </a:solidFill>
+        <a:gradFill rotWithShape="1">
+          <a:gsLst>
+            <a:gs pos="0">
+              <a:schemeClr val="phClr">
+                <a:lumMod val="110000"/>
+                <a:satMod val="105000"/>
+                <a:tint val="67000"/>
+              </a:schemeClr>
+            </a:gs>
+            <a:gs pos="50000">
+              <a:schemeClr val="phClr">
+                <a:lumMod val="105000"/>
+                <a:satMod val="103000"/>
+                <a:tint val="73000"/>
+              </a:schemeClr>
+            </a:gs>
+            <a:gs pos="100000">
+              <a:schemeClr val="phClr">
+                <a:lumMod val="105000"/>
+                <a:satMod val="109000"/>
+                <a:tint val="81000"/>
+              </a:schemeClr>
+            </a:gs>
+          </a:gsLst>
+          <a:lin ang="5400000" scaled="0"/>
+        </a:gradFill>
+        <a:gradFill rotWithShape="1">
+          <a:gsLst>
+            <a:gs pos="0">
+              <a:schemeClr val="phClr">
+                <a:satMod val="103000"/>
+                <a:lumMod val="102000"/>
+                <a:tint val="94000"/>
+              </a:schemeClr>
+            </a:gs>
+            <a:gs pos="50000">
+              <a:schemeClr val="phClr">
+                <a:satMod val="110000"/>
+                <a:lumMod val="100000"/>
+                <a:shade val="100000"/>
+              </a:schemeClr>
+            </a:gs>
+            <a:gs pos="100000">
+              <a:schemeClr val="phClr">
+                <a:lumMod val="99000"/>
+                <a:satMod val="120000"/>
+                <a:shade val="78000"/>
+              </a:schemeClr>
+            </a:gs>
+          </a:gsLst>
+          <a:lin ang="5400000" scaled="0"/>
+        </a:gradFill>
+      </a:fillStyleLst>
+      <a:lnStyleLst>
+        <a:ln w="12700" cap="flat" cmpd="sng" algn="ctr">
+          <a:solidFill>
+            <a:schemeClr val="phClr"/>
+          </a:solidFill>
+          <a:prstDash val="solid"/>
+          <a:miter lim="800000"/>
+        </a:ln>
+        <a:ln w="19050" cap="flat" cmpd="sng" algn="ctr">
+          <a:solidFill>
+            <a:schemeClr val="phClr"/>
+          </a:solidFill>
+          <a:prstDash val="solid"/>
+          <a:miter lim="800000"/>
+        </a:ln>
+        <a:ln w="25400" cap="flat" cmpd="sng" algn="ctr">
+          <a:solidFill>
+            <a:schemeClr val="phClr"/>
+          </a:solidFill>
+          <a:prstDash val="solid"/>
+          <a:miter lim="800000"/>
+        </a:ln>
+      </a:lnStyleLst>
+      <a:effectStyleLst>
+        <a:effectStyle>
+          <a:effectLst/>
+        </a:effectStyle>
+        <a:effectStyle>
+          <a:effectLst/>
+        </a:effectStyle>
+        <a:effectStyle>
+          <a:effectLst>
+            <a:outerShdw blurRad="57150" dist="19050" dir="5400000" algn="ctr" rotWithShape="0">
+              <a:srgbClr val="000000">
+                <a:alpha val="63000"/>
+              </a:srgbClr>
+            </a:outerShdw>
+          </a:effectLst>
+        </a:effectStyle>
+      </a:effectStyleLst>
+      <a:bgFillStyleLst>
+        <a:solidFill>
+          <a:schemeClr val="phClr"/>
+        </a:solidFill>
+        <a:solidFill>
+          <a:schemeClr val="phClr">
+            <a:tint val="95000"/>
+            <a:satMod val="170000"/>
+          </a:schemeClr>
+        </a:solidFill>
+        <a:gradFill rotWithShape="1">
+          <a:gsLst>
+            <a:gs pos="0">
+              <a:schemeClr val="phClr">
+                <a:tint val="93000"/>
+                <a:satMod val="150000"/>
+                <a:shade val="98000"/>
+                <a:lumMod val="102000"/>
+              </a:schemeClr>
+            </a:gs>
+            <a:gs pos="50000">
+              <a:schemeClr val="phClr">
+                <a:tint val="98000"/>
+                <a:satMod val="130000"/>
+                <a:shade val="90000"/>
+                <a:lumMod val="103000"/>
+              </a:schemeClr>
+            </a:gs>
+            <a:gs pos="100000">
+              <a:schemeClr val="phClr">
+                <a:shade val="63000"/>
+                <a:satMod val="120000"/>
+              </a:schemeClr>
+            </a:gs>
+          </a:gsLst>
+          <a:lin ang="5400000" scaled="0"/>
+        </a:gradFill>
+      </a:bgFillStyleLst>
+    </a:fmtScheme>
+  </a:themeElements>
+  <a:objectDefaults>
+    <a:lnDef>
+      <a:spPr/>
+      <a:bodyPr/>
+      <a:lstStyle/>
+      <a:style>
+        <a:lnRef idx="2">
+          <a:schemeClr val="accent1"/>
+        </a:lnRef>
+        <a:fillRef idx="0">
+          <a:schemeClr val="accent1"/>
+        </a:fillRef>
+        <a:effectRef idx="1">
+          <a:schemeClr val="accent1"/>
+        </a:effectRef>
+        <a:fontRef idx="minor">
+          <a:schemeClr val="tx1"/>
+        </a:fontRef>
+      </a:style>
+    </a:lnDef>
+  </a:objectDefaults>
+  <a:extraClrSchemeLst/>
+  <a:extLst>
+    <a:ext uri="{05A4C25C-085E-4340-85A3-A5531E510DB2}">
+      <thm15:themeFamily xmlns:thm15="http://schemas.microsoft.com/office/thememl/2012/main" name="Office Theme" id="{2E142A2C-CD16-42D6-873A-C26D2A0506FA}" vid="{1BDDFF52-6CD6-40A5-AB3C-68EB2F1E4D0A}"/>
+    </a:ext>
+  </a:extLst>
+</a:theme>
 </file>
--- a/tmp/프로젝트 제출양식/VARO_ShoppingMall.pptx
+++ b/tmp/프로젝트 제출양식/VARO_ShoppingMall.pptx
@@ -299,7 +299,22 @@
           <a:p>
             <a:r>
               <a:rPr lang="en-US" dirty="0"/>
-              <a:t>안녕하세요, 오하율입니다. 오늘 제가 혼자서 기획부터 개발까지 진행한 VARO 쇼핑몰 프로젝트를 소개해 드리겠습니다. 저는 비전공자로 개발을 시작했는데, 이 프로젝트를 통해 실제 쇼핑몰이 어떻게 만들어지는지 처음부터 끝까지 경험해 볼 수 있었습니다.</a:t>
+              <a:t>안녕하세요, 오하율입니다. 오늘 제가 혼자서 기획부터 개발까지 진행한 VARO 쇼핑몰 프로젝트를 소개해 드리겠습니다. </a:t>
+            </a:r>
+            <a:endParaRPr lang="en-US" dirty="0" smtClean="0"/>
+          </a:p>
+          <a:p>
+            <a:r>
+              <a:rPr lang="en-US" dirty="0" err="1" smtClean="0"/>
+              <a:t>저는</a:t>
+            </a:r>
+            <a:r>
+              <a:rPr lang="en-US" dirty="0" smtClean="0"/>
+              <a:t> </a:t>
+            </a:r>
+            <a:r>
+              <a:rPr lang="en-US" dirty="0"/>
+              <a:t>비전공자로 개발을 시작했는데, 이 프로젝트를 통해 실제 쇼핑몰이 어떻게 만들어지는지 처음부터 끝까지 경험해 볼 수 있었습니다.</a:t>
             </a:r>
           </a:p>
         </p:txBody>
@@ -386,7 +401,37 @@
           <a:p>
             <a:r>
               <a:rPr lang="en-US" dirty="0"/>
-              <a:t>두 번째는 쇼핑몰의 핵심인 상품 페이지예요. 화면에서 보시는 것처럼 주간 베스트 상품을 카테고리별로 보여주고, BEST, NEW, HOT, SALE 같은 배지를 달아서 한눈에 인기 상품을 알 수 있게 했어요. 상품 이미지에 마우스를 올리면 다른 각도의 사진도 볼 수 있습니다.</a:t>
+              <a:t>두 번째는 쇼핑몰의 핵심인 상품 페이지예요. </a:t>
+            </a:r>
+            <a:endParaRPr lang="en-US" dirty="0" smtClean="0"/>
+          </a:p>
+          <a:p>
+            <a:r>
+              <a:rPr lang="en-US" dirty="0" err="1" smtClean="0"/>
+              <a:t>화면에서</a:t>
+            </a:r>
+            <a:r>
+              <a:rPr lang="en-US" dirty="0" smtClean="0"/>
+              <a:t> </a:t>
+            </a:r>
+            <a:r>
+              <a:rPr lang="en-US" dirty="0"/>
+              <a:t>보시는 것처럼 주간 베스트 상품을 카테고리별로 보여주고, BEST, NEW, HOT, SALE 같은 배지를 달아서 한눈에 인기 상품을 알 수 있게 했어요. </a:t>
+            </a:r>
+            <a:endParaRPr lang="en-US" dirty="0" smtClean="0"/>
+          </a:p>
+          <a:p>
+            <a:r>
+              <a:rPr lang="en-US" dirty="0" err="1" smtClean="0"/>
+              <a:t>상품</a:t>
+            </a:r>
+            <a:r>
+              <a:rPr lang="en-US" dirty="0" smtClean="0"/>
+              <a:t> </a:t>
+            </a:r>
+            <a:r>
+              <a:rPr lang="en-US" dirty="0"/>
+              <a:t>이미지에 마우스를 올리면 다른 각도의 사진도 볼 수 있습니다.</a:t>
             </a:r>
           </a:p>
         </p:txBody>
@@ -473,7 +518,52 @@
           <a:p>
             <a:r>
               <a:rPr lang="en-US" dirty="0"/>
-              <a:t>세 번째는 장바구니와 결제 시스템이에요. 재미있는 건, 로그인 안 한 상태에서 장바구니에 담아놓은 상품이 나중에 로그인하면 자동으로 합쳐진다는 거예요. 그래서 상품이 사라지는 일이 없어요. 결제는 토스페이먼츠를 연동해서 카카오페이, 신용카드 등 다양한 방법으로 결제할 수 있습니다.</a:t>
+              <a:t>세 번째는 장바구니와 결제 시스템이에요. </a:t>
+            </a:r>
+            <a:endParaRPr lang="en-US" dirty="0" smtClean="0"/>
+          </a:p>
+          <a:p>
+            <a:r>
+              <a:rPr lang="en-US" dirty="0" err="1" smtClean="0"/>
+              <a:t>재미있는</a:t>
+            </a:r>
+            <a:r>
+              <a:rPr lang="en-US" dirty="0" smtClean="0"/>
+              <a:t> </a:t>
+            </a:r>
+            <a:r>
+              <a:rPr lang="en-US" dirty="0"/>
+              <a:t>건, 로그인 안 한 상태에서 장바구니에 담아놓은 상품이 나중에 로그인하면 자동으로 합쳐진다는 거예요. </a:t>
+            </a:r>
+            <a:endParaRPr lang="en-US" dirty="0" smtClean="0"/>
+          </a:p>
+          <a:p>
+            <a:r>
+              <a:rPr lang="en-US" dirty="0" err="1" smtClean="0"/>
+              <a:t>그래서</a:t>
+            </a:r>
+            <a:r>
+              <a:rPr lang="en-US" dirty="0" smtClean="0"/>
+              <a:t> </a:t>
+            </a:r>
+            <a:r>
+              <a:rPr lang="en-US" dirty="0"/>
+              <a:t>상품이 사라지는 일이 없어요. </a:t>
+            </a:r>
+            <a:endParaRPr lang="en-US" dirty="0" smtClean="0"/>
+          </a:p>
+          <a:p>
+            <a:r>
+              <a:rPr lang="en-US" dirty="0" err="1" smtClean="0"/>
+              <a:t>결제는</a:t>
+            </a:r>
+            <a:r>
+              <a:rPr lang="en-US" dirty="0" smtClean="0"/>
+              <a:t> </a:t>
+            </a:r>
+            <a:r>
+              <a:rPr lang="en-US" dirty="0"/>
+              <a:t>토스페이먼츠를 연동해서 카카오페이, 신용카드 등 다양한 방법으로 결제할 수 있습니다.</a:t>
             </a:r>
           </a:p>
         </p:txBody>
@@ -560,7 +650,61 @@
           <a:p>
             <a:r>
               <a:rPr lang="en-US" dirty="0"/>
-              <a:t>네 번째는 관리자 화면입니다. 관리자로 로그인하면 상품을 추가하거나 수정할 수 있고, 메인 배너 이미지도 바꿀 수 있어요. FAQ나 공지사항 같은 커뮤니티 게시판도 관리할 수 있습니다. 드래그해서 배너 순서를 바꾸거나, 상품에 NEW, HOT 같은 배지를 붙이는 것도 가능해요.</a:t>
+              <a:t>네 번째는 관리자 화면입니다. 관리자로 로그인하면 상품을 추가하거나 수정할 수 있고, 메인 배너 이미지도 바꿀 수 있어요. </a:t>
+            </a:r>
+            <a:endParaRPr lang="en-US" dirty="0" smtClean="0"/>
+          </a:p>
+          <a:p>
+            <a:r>
+              <a:rPr lang="en-US" dirty="0" smtClean="0"/>
+              <a:t>FAQ(</a:t>
+            </a:r>
+            <a:r>
+              <a:rPr lang="ko-KR" altLang="en-US" sz="1200" b="0" i="0" kern="1200" dirty="0" smtClean="0">
+                <a:solidFill>
+                  <a:schemeClr val="tx1"/>
+                </a:solidFill>
+                <a:effectLst/>
+                <a:latin typeface="+mn-lt"/>
+                <a:ea typeface="+mn-ea"/>
+                <a:cs typeface="+mn-cs"/>
+              </a:rPr>
+              <a:t>자주 하는 질문</a:t>
+            </a:r>
+            <a:r>
+              <a:rPr lang="en-US" altLang="ko-KR" sz="1200" b="0" i="0" kern="1200" dirty="0" smtClean="0">
+                <a:solidFill>
+                  <a:schemeClr val="tx1"/>
+                </a:solidFill>
+                <a:effectLst/>
+                <a:latin typeface="+mn-lt"/>
+                <a:ea typeface="+mn-ea"/>
+                <a:cs typeface="+mn-cs"/>
+              </a:rPr>
+              <a:t>)</a:t>
+            </a:r>
+            <a:r>
+              <a:rPr lang="en-US" dirty="0" smtClean="0"/>
+              <a:t>나 </a:t>
+            </a:r>
+            <a:r>
+              <a:rPr lang="en-US" dirty="0"/>
+              <a:t>공지사항 같은 커뮤니티 게시판도 관리할 수 있습니다. </a:t>
+            </a:r>
+            <a:endParaRPr lang="en-US" dirty="0" smtClean="0"/>
+          </a:p>
+          <a:p>
+            <a:r>
+              <a:rPr lang="en-US" dirty="0" err="1" smtClean="0"/>
+              <a:t>드래그해서</a:t>
+            </a:r>
+            <a:r>
+              <a:rPr lang="en-US" dirty="0" smtClean="0"/>
+              <a:t> </a:t>
+            </a:r>
+            <a:r>
+              <a:rPr lang="en-US" dirty="0"/>
+              <a:t>배너 순서를 바꾸거나, 상품에 NEW, HOT 같은 배지를 붙이는 것도 가능해요.</a:t>
             </a:r>
           </a:p>
         </p:txBody>
@@ -665,7 +809,61 @@
           <a:p>
             <a:r>
               <a:rPr lang="en-US" dirty="0"/>
-              <a:t>네 번째는 관리자 화면입니다. 관리자로 로그인하면 상품을 추가하거나 수정할 수 있고, 메인 배너 이미지도 바꿀 수 있어요. FAQ나 공지사항 같은 커뮤니티 게시판도 관리할 수 있습니다. 드래그해서 배너 순서를 바꾸거나, 상품에 NEW, HOT 같은 배지를 붙이는 것도 가능해요.</a:t>
+              <a:t>네 번째는 관리자 화면입니다. 관리자로 로그인하면 상품을 추가하거나 수정할 수 있고, 메인 배너 이미지도 바꿀 수 있어요. </a:t>
+            </a:r>
+            <a:endParaRPr lang="en-US" dirty="0" smtClean="0"/>
+          </a:p>
+          <a:p>
+            <a:r>
+              <a:rPr lang="en-US" dirty="0" smtClean="0"/>
+              <a:t>FAQ(</a:t>
+            </a:r>
+            <a:r>
+              <a:rPr lang="ko-KR" altLang="en-US" sz="1200" b="0" i="0" kern="1200" dirty="0" smtClean="0">
+                <a:solidFill>
+                  <a:schemeClr val="tx1"/>
+                </a:solidFill>
+                <a:effectLst/>
+                <a:latin typeface="+mn-lt"/>
+                <a:ea typeface="+mn-ea"/>
+                <a:cs typeface="+mn-cs"/>
+              </a:rPr>
+              <a:t>자주 하는 질문</a:t>
+            </a:r>
+            <a:r>
+              <a:rPr lang="en-US" altLang="ko-KR" sz="1200" b="0" i="0" kern="1200" dirty="0" smtClean="0">
+                <a:solidFill>
+                  <a:schemeClr val="tx1"/>
+                </a:solidFill>
+                <a:effectLst/>
+                <a:latin typeface="+mn-lt"/>
+                <a:ea typeface="+mn-ea"/>
+                <a:cs typeface="+mn-cs"/>
+              </a:rPr>
+              <a:t>)</a:t>
+            </a:r>
+            <a:r>
+              <a:rPr lang="en-US" dirty="0" smtClean="0"/>
+              <a:t>나 </a:t>
+            </a:r>
+            <a:r>
+              <a:rPr lang="en-US" dirty="0"/>
+              <a:t>공지사항 같은 커뮤니티 게시판도 관리할 수 있습니다. </a:t>
+            </a:r>
+            <a:endParaRPr lang="en-US" dirty="0" smtClean="0"/>
+          </a:p>
+          <a:p>
+            <a:r>
+              <a:rPr lang="en-US" dirty="0" err="1" smtClean="0"/>
+              <a:t>드래그해서</a:t>
+            </a:r>
+            <a:r>
+              <a:rPr lang="en-US" dirty="0" smtClean="0"/>
+              <a:t> </a:t>
+            </a:r>
+            <a:r>
+              <a:rPr lang="en-US" dirty="0"/>
+              <a:t>배너 순서를 바꾸거나, 상품에 NEW, HOT 같은 배지를 붙이는 것도 가능해요.</a:t>
             </a:r>
           </a:p>
         </p:txBody>
@@ -776,7 +974,61 @@
           <a:p>
             <a:r>
               <a:rPr lang="en-US" dirty="0"/>
-              <a:t>네 번째는 관리자 화면입니다. 관리자로 로그인하면 상품을 추가하거나 수정할 수 있고, 메인 배너 이미지도 바꿀 수 있어요. FAQ나 공지사항 같은 커뮤니티 게시판도 관리할 수 있습니다. 드래그해서 배너 순서를 바꾸거나, 상품에 NEW, HOT 같은 배지를 붙이는 것도 가능해요.</a:t>
+              <a:t>네 번째는 관리자 화면입니다. 관리자로 로그인하면 상품을 추가하거나 수정할 수 있고, 메인 배너 이미지도 바꿀 수 있어요. </a:t>
+            </a:r>
+            <a:endParaRPr lang="en-US" dirty="0" smtClean="0"/>
+          </a:p>
+          <a:p>
+            <a:r>
+              <a:rPr lang="en-US" dirty="0" smtClean="0"/>
+              <a:t>FAQ(</a:t>
+            </a:r>
+            <a:r>
+              <a:rPr lang="ko-KR" altLang="en-US" sz="1200" b="0" i="0" kern="1200" dirty="0" smtClean="0">
+                <a:solidFill>
+                  <a:schemeClr val="tx1"/>
+                </a:solidFill>
+                <a:effectLst/>
+                <a:latin typeface="+mn-lt"/>
+                <a:ea typeface="+mn-ea"/>
+                <a:cs typeface="+mn-cs"/>
+              </a:rPr>
+              <a:t>자주 하는 질문</a:t>
+            </a:r>
+            <a:r>
+              <a:rPr lang="en-US" altLang="ko-KR" sz="1200" b="0" i="0" kern="1200" dirty="0" smtClean="0">
+                <a:solidFill>
+                  <a:schemeClr val="tx1"/>
+                </a:solidFill>
+                <a:effectLst/>
+                <a:latin typeface="+mn-lt"/>
+                <a:ea typeface="+mn-ea"/>
+                <a:cs typeface="+mn-cs"/>
+              </a:rPr>
+              <a:t>)</a:t>
+            </a:r>
+            <a:r>
+              <a:rPr lang="en-US" dirty="0" smtClean="0"/>
+              <a:t>나 </a:t>
+            </a:r>
+            <a:r>
+              <a:rPr lang="en-US" dirty="0"/>
+              <a:t>공지사항 같은 커뮤니티 게시판도 관리할 수 있습니다. </a:t>
+            </a:r>
+            <a:endParaRPr lang="en-US" dirty="0" smtClean="0"/>
+          </a:p>
+          <a:p>
+            <a:r>
+              <a:rPr lang="en-US" dirty="0" err="1" smtClean="0"/>
+              <a:t>드래그해서</a:t>
+            </a:r>
+            <a:r>
+              <a:rPr lang="en-US" dirty="0" smtClean="0"/>
+              <a:t> </a:t>
+            </a:r>
+            <a:r>
+              <a:rPr lang="en-US" dirty="0"/>
+              <a:t>배너 순서를 바꾸거나, 상품에 NEW, HOT 같은 배지를 붙이는 것도 가능해요.</a:t>
             </a:r>
           </a:p>
         </p:txBody>
@@ -869,7 +1121,22 @@
           <a:p>
             <a:r>
               <a:rPr lang="en-US" dirty="0"/>
-              <a:t>이제 실제 VARO 쇼핑몰을 라이브로 보여드리겠습니다. 메인 페이지부터 상품 검색, 장바구니, 결제, 그리고 관리자 화면까지 순서대로 시연하겠습니다.</a:t>
+              <a:t>이제 실제 VARO 쇼핑몰을 라이브로 보여드리겠습니다. </a:t>
+            </a:r>
+            <a:endParaRPr lang="en-US" dirty="0" smtClean="0"/>
+          </a:p>
+          <a:p>
+            <a:r>
+              <a:rPr lang="en-US" dirty="0" err="1" smtClean="0"/>
+              <a:t>메인</a:t>
+            </a:r>
+            <a:r>
+              <a:rPr lang="en-US" dirty="0" smtClean="0"/>
+              <a:t> </a:t>
+            </a:r>
+            <a:r>
+              <a:rPr lang="en-US" dirty="0"/>
+              <a:t>페이지부터 상품 검색, 장바구니, 결제, 그리고 관리자 화면까지 순서대로 시연하겠습니다.</a:t>
             </a:r>
           </a:p>
         </p:txBody>
@@ -956,16 +1223,70 @@
           <a:p>
             <a:r>
               <a:rPr lang="en-US" dirty="0"/>
-              <a:t>프로젝트를 마치며 느낀 점입니다. 쇼핑몰을 이용만 해봤지, 직접 만들어보니 정말 많은 요소가 필요하다는 걸 알게 됐어요. 시간 관리를 좀 더 잘했으면 좋았을 것 같고, 테스트를 더 꼼꼼하게 했어야 했다는 반성도 있습니다. 하지만 처음부터 끝까지 혼자 만들어본 경험은 정말 값지다고 </a:t>
+              <a:t>프로젝트를 마치며 느낀 점입니다. 쇼핑몰을 이용만 해봤지, 직접 만들어보니 정말 많은 요소가 필요하다는 걸 </a:t>
+            </a:r>
+            <a:r>
+              <a:rPr lang="en-US" dirty="0" err="1" smtClean="0"/>
+              <a:t>알게</a:t>
+            </a:r>
+            <a:r>
+              <a:rPr lang="ko-KR" altLang="en-US" dirty="0" smtClean="0"/>
+              <a:t>되었습니다</a:t>
+            </a:r>
+            <a:r>
+              <a:rPr lang="en-US" dirty="0" smtClean="0"/>
+              <a:t>. </a:t>
+            </a:r>
+          </a:p>
+          <a:p>
+            <a:r>
+              <a:rPr lang="en-US" dirty="0" err="1" smtClean="0"/>
+              <a:t>시간</a:t>
+            </a:r>
+            <a:r>
+              <a:rPr lang="en-US" dirty="0" smtClean="0"/>
+              <a:t> </a:t>
+            </a:r>
+            <a:r>
+              <a:rPr lang="en-US" dirty="0"/>
+              <a:t>관리를 좀 더 잘했으면 좋았을 것 같고, 테스트를 더 꼼꼼하게 했어야 했다는 반성도 있습니다. </a:t>
+            </a:r>
+            <a:endParaRPr lang="en-US" dirty="0" smtClean="0"/>
+          </a:p>
+          <a:p>
+            <a:r>
+              <a:rPr lang="en-US" dirty="0" err="1" smtClean="0"/>
+              <a:t>하지만</a:t>
+            </a:r>
+            <a:r>
+              <a:rPr lang="en-US" dirty="0" smtClean="0"/>
+              <a:t> </a:t>
+            </a:r>
+            <a:r>
+              <a:rPr lang="en-US" dirty="0"/>
+              <a:t>처음부터 끝까지 혼자 만들어본 경험은 정말 </a:t>
             </a:r>
             <a:r>
               <a:rPr lang="en-US" dirty="0" err="1"/>
-              <a:t>생각해요</a:t>
+              <a:t>값지다고</a:t>
             </a:r>
             <a:r>
               <a:rPr lang="en-US" dirty="0"/>
+              <a:t> </a:t>
+            </a:r>
+            <a:r>
+              <a:rPr lang="en-US" dirty="0" err="1" smtClean="0"/>
+              <a:t>생각</a:t>
+            </a:r>
+            <a:r>
+              <a:rPr lang="ko-KR" altLang="en-US" dirty="0" smtClean="0"/>
+              <a:t>합니다</a:t>
+            </a:r>
+            <a:r>
+              <a:rPr lang="en-US" dirty="0" smtClean="0"/>
               <a:t>.</a:t>
             </a:r>
+            <a:endParaRPr lang="en-US" dirty="0"/>
           </a:p>
         </p:txBody>
       </p:sp>
@@ -1399,7 +1720,33 @@
           <a:p>
             <a:r>
               <a:rPr lang="en-US" dirty="0"/>
-              <a:t>이 화면은 프로젝트를 시작하기 전에 어떤 기능이 필요한지 정리한 요구사항 정의서입니다. 회원가입, 로그인, 상품 관리, 장바구니, 결제 같은 기능들을 하나하나 목록으로 만들고, 각각의 중요도를 매겨서 우선순위를 정했어요. 이렇게 미리 정리해두니까 개발할 때 빠뜨리는 기능 없이 체계적으로 진행할 수 있었습니다.</a:t>
+              <a:t>이 화면은 프로젝트를 시작하기 전에 어떤 기능이 필요한지 정리한 요구사항 정의서입니다. </a:t>
+            </a:r>
+            <a:endParaRPr lang="en-US" dirty="0" smtClean="0"/>
+          </a:p>
+          <a:p>
+            <a:r>
+              <a:rPr lang="en-US" dirty="0" err="1" smtClean="0"/>
+              <a:t>회원가입</a:t>
+            </a:r>
+            <a:r>
+              <a:rPr lang="en-US" dirty="0"/>
+              <a:t>, 로그인, 상품 관리, 장바구니, 결제 같은 기능들을 하나하나 목록으로 만들고, 각각의 중요도를 매겨서 우선순위를 정했어요. </a:t>
+            </a:r>
+            <a:endParaRPr lang="en-US" dirty="0" smtClean="0"/>
+          </a:p>
+          <a:p>
+            <a:r>
+              <a:rPr lang="en-US" dirty="0" err="1" smtClean="0"/>
+              <a:t>이렇게</a:t>
+            </a:r>
+            <a:r>
+              <a:rPr lang="en-US" dirty="0" smtClean="0"/>
+              <a:t> </a:t>
+            </a:r>
+            <a:r>
+              <a:rPr lang="en-US" dirty="0"/>
+              <a:t>미리 정리해두니까 개발할 때 빠뜨리는 기능 없이 체계적으로 진행할 수 있었습니다.</a:t>
             </a:r>
           </a:p>
         </p:txBody>
@@ -1486,7 +1833,33 @@
           <a:p>
             <a:r>
               <a:rPr lang="en-US" dirty="0"/>
-              <a:t>시스템 구조를 간단히 설명드리면, 3층짜리 건물이라고 생각하시면 돼요. 1층은 사용자가 보는 화면, 2층은 데이터를 처리하는 서버, 3층은 정보를 저장하는 데이터베이스예요. 사용자가 상품을 클릭하면, 서버가 데이터베이스에서 정보를 가져와서 화면에 보여주는 방식입니다.</a:t>
+              <a:t>시스템 구조를 간단히 설명드리면, 3층짜리 건물이라고 생각하시면 돼요. </a:t>
+            </a:r>
+            <a:endParaRPr lang="en-US" dirty="0" smtClean="0"/>
+          </a:p>
+          <a:p>
+            <a:r>
+              <a:rPr lang="en-US" dirty="0" smtClean="0"/>
+              <a:t>1</a:t>
+            </a:r>
+            <a:r>
+              <a:rPr lang="en-US" dirty="0"/>
+              <a:t>층은 사용자가 보는 화면, 2층은 데이터를 처리하는 서버, 3층은 정보를 저장하는 데이터베이스예요. </a:t>
+            </a:r>
+            <a:endParaRPr lang="en-US" dirty="0" smtClean="0"/>
+          </a:p>
+          <a:p>
+            <a:r>
+              <a:rPr lang="en-US" dirty="0" err="1" smtClean="0"/>
+              <a:t>사용자가</a:t>
+            </a:r>
+            <a:r>
+              <a:rPr lang="en-US" dirty="0" smtClean="0"/>
+              <a:t> </a:t>
+            </a:r>
+            <a:r>
+              <a:rPr lang="en-US" dirty="0"/>
+              <a:t>상품을 클릭하면, 서버가 데이터베이스에서 정보를 가져와서 화면에 보여주는 방식입니다.</a:t>
             </a:r>
           </a:p>
         </p:txBody>
@@ -1573,7 +1946,52 @@
           <a:p>
             <a:r>
               <a:rPr lang="en-US" dirty="0"/>
-              <a:t>이 다이어그램은 쇼핑몰을 누가, 어떻게 사용하는지를 그림으로 정리한 거예요. 왼쪽에 비회원, 아래쪽에 회원, 오른쪽에 관리자가 있고, 각각 할 수 있는 기능이 다릅니다. 비회원은 상품 검색과 주문만 가능하고, 회원은 리뷰 작성이나 장바구니 같은 추가 기능을 쓸 수 있어요. 관리자는 매출 확인이나 상품 관리 같은 운영 기능을 담당합니다.</a:t>
+              <a:t>이 다이어그램은 쇼핑몰을 누가, 어떻게 사용하는지를 그림으로 정리한 거예요. </a:t>
+            </a:r>
+            <a:endParaRPr lang="en-US" dirty="0" smtClean="0"/>
+          </a:p>
+          <a:p>
+            <a:r>
+              <a:rPr lang="en-US" dirty="0" err="1" smtClean="0"/>
+              <a:t>왼쪽에</a:t>
+            </a:r>
+            <a:r>
+              <a:rPr lang="en-US" dirty="0" smtClean="0"/>
+              <a:t> </a:t>
+            </a:r>
+            <a:r>
+              <a:rPr lang="en-US" dirty="0"/>
+              <a:t>비회원, 아래쪽에 회원, 오른쪽에 관리자가 있고, 각각 할 수 있는 기능이 다릅니다. </a:t>
+            </a:r>
+            <a:endParaRPr lang="en-US" dirty="0" smtClean="0"/>
+          </a:p>
+          <a:p>
+            <a:r>
+              <a:rPr lang="en-US" dirty="0" err="1" smtClean="0"/>
+              <a:t>비회원은</a:t>
+            </a:r>
+            <a:r>
+              <a:rPr lang="en-US" dirty="0" smtClean="0"/>
+              <a:t> </a:t>
+            </a:r>
+            <a:r>
+              <a:rPr lang="en-US" dirty="0"/>
+              <a:t>상품 검색과 주문만 가능하고, 회원은 리뷰 작성이나 장바구니 같은 추가 기능을 쓸 수 있어요. </a:t>
+            </a:r>
+            <a:endParaRPr lang="en-US" dirty="0" smtClean="0"/>
+          </a:p>
+          <a:p>
+            <a:r>
+              <a:rPr lang="en-US" dirty="0" err="1" smtClean="0"/>
+              <a:t>관리자는</a:t>
+            </a:r>
+            <a:r>
+              <a:rPr lang="en-US" dirty="0" smtClean="0"/>
+              <a:t> </a:t>
+            </a:r>
+            <a:r>
+              <a:rPr lang="en-US" dirty="0"/>
+              <a:t>매출 확인이나 상품 관리 같은 운영 기능을 담당합니다.</a:t>
             </a:r>
           </a:p>
         </p:txBody>
@@ -1660,7 +2078,22 @@
           <a:p>
             <a:r>
               <a:rPr lang="en-US" dirty="0"/>
-              <a:t>ER 다이어그램은 쉽게 말해서 데이터를 어떤 구조로 저장할지 설계한 도면이에요. 총 11개의 테이블, 그러니까 11개의 정보 저장 공간을 만들었어요. 예를 들어 회원 정보, 상품 정보, 주문 내역 등이 각각 따로 저장되고, 서로 연결되어 있어서 '누가 어떤 상품을 주문했는지' 같은 정보를 쉽게 찾을 수 있습니다.</a:t>
+              <a:t>ER 다이어그램은 쉽게 말해서 데이터를 어떤 구조로 저장할지 설계한 도면이에요. 총 11개의 테이블, 그러니까 11개의 정보 저장 공간을 만들었어요. </a:t>
+            </a:r>
+            <a:endParaRPr lang="en-US" dirty="0" smtClean="0"/>
+          </a:p>
+          <a:p>
+            <a:r>
+              <a:rPr lang="en-US" dirty="0" err="1" smtClean="0"/>
+              <a:t>예를</a:t>
+            </a:r>
+            <a:r>
+              <a:rPr lang="en-US" dirty="0" smtClean="0"/>
+              <a:t> </a:t>
+            </a:r>
+            <a:r>
+              <a:rPr lang="en-US" dirty="0"/>
+              <a:t>들어 회원 정보, 상품 정보, 주문 내역 등이 각각 따로 저장되고, 서로 연결되어 있어서 '누가 어떤 상품을 주문했는지' 같은 정보를 쉽게 찾을 수 있습니다.</a:t>
             </a:r>
           </a:p>
         </p:txBody>
@@ -1747,7 +2180,52 @@
           <a:p>
             <a:r>
               <a:rPr lang="en-US" dirty="0"/>
-              <a:t>첫 번째 주요 기능은 로그인입니다. 직접 아이디와 비밀번호를 만들어서 가입할 수도 있고, 네이버, 카카오, 구글 같은 소셜 계정으로 간편하게 로그인할 수도 있어요. 보안을 위해서 JWT라는 방식으로 로그인 상태를 안전하게 관리하고 있습니다. 비밀번호는 암호화해서 저장하기 때문에 관리자도 볼 수 없어요.</a:t>
+              <a:t>첫 번째 주요 기능은 로그인입니다. </a:t>
+            </a:r>
+            <a:endParaRPr lang="en-US" dirty="0" smtClean="0"/>
+          </a:p>
+          <a:p>
+            <a:r>
+              <a:rPr lang="en-US" dirty="0" err="1" smtClean="0"/>
+              <a:t>직접</a:t>
+            </a:r>
+            <a:r>
+              <a:rPr lang="en-US" dirty="0" smtClean="0"/>
+              <a:t> </a:t>
+            </a:r>
+            <a:r>
+              <a:rPr lang="en-US" dirty="0"/>
+              <a:t>아이디와 비밀번호를 만들어서 가입할 수도 있고, 네이버, 카카오, 구글 같은 소셜 계정으로 간편하게 로그인할 수도 있어요. </a:t>
+            </a:r>
+            <a:endParaRPr lang="en-US" dirty="0" smtClean="0"/>
+          </a:p>
+          <a:p>
+            <a:r>
+              <a:rPr lang="en-US" dirty="0" err="1" smtClean="0"/>
+              <a:t>보안을</a:t>
+            </a:r>
+            <a:r>
+              <a:rPr lang="en-US" dirty="0" smtClean="0"/>
+              <a:t> </a:t>
+            </a:r>
+            <a:r>
+              <a:rPr lang="en-US" dirty="0"/>
+              <a:t>위해서 JWT라는 방식으로 로그인 상태를 안전하게 관리하고 있습니다. </a:t>
+            </a:r>
+            <a:endParaRPr lang="en-US" dirty="0" smtClean="0"/>
+          </a:p>
+          <a:p>
+            <a:r>
+              <a:rPr lang="en-US" dirty="0" err="1" smtClean="0"/>
+              <a:t>비밀번호는</a:t>
+            </a:r>
+            <a:r>
+              <a:rPr lang="en-US" dirty="0" smtClean="0"/>
+              <a:t> </a:t>
+            </a:r>
+            <a:r>
+              <a:rPr lang="en-US" dirty="0"/>
+              <a:t>암호화해서 저장하기 때문에 관리자도 볼 수 없어요.</a:t>
             </a:r>
           </a:p>
         </p:txBody>
@@ -2286,13 +2764,15 @@
                 <a:solidFill>
                   <a:srgbClr val="5C4A33"/>
                 </a:solidFill>
-                <a:latin typeface="Arial" pitchFamily="34" charset="0"/>
+                <a:latin typeface="Colonna MT" panose="04020805060202030203" pitchFamily="82" charset="0"/>
                 <a:ea typeface="Arial" pitchFamily="34" charset="-122"/>
                 <a:cs typeface="Arial" pitchFamily="34" charset="-120"/>
               </a:rPr>
               <a:t>VARO</a:t>
             </a:r>
-            <a:endParaRPr lang="en-US" sz="9750" dirty="0"/>
+            <a:endParaRPr lang="en-US" sz="9750" dirty="0">
+              <a:latin typeface="Colonna MT" panose="04020805060202030203" pitchFamily="82" charset="0"/>
+            </a:endParaRPr>
           </a:p>
         </p:txBody>
       </p:sp>
@@ -2383,7 +2863,7 @@
         </p:spPr>
         <p:txBody>
           <a:bodyPr wrap="square" lIns="25400" tIns="25400" rIns="25400" bIns="25400" rtlCol="0" anchor="t">
-            <a:normAutofit fontScale="92500" lnSpcReduction="10000"/>
+            <a:normAutofit fontScale="85000" lnSpcReduction="20000"/>
           </a:bodyPr>
           <a:lstStyle/>
           <a:p>
@@ -2432,6 +2912,13 @@
   <p:clrMapOvr>
     <a:masterClrMapping/>
   </p:clrMapOvr>
+  <p:timing>
+    <p:tnLst>
+      <p:par>
+        <p:cTn id="1" dur="indefinite" restart="never" nodeType="tmRoot"/>
+      </p:par>
+    </p:tnLst>
+  </p:timing>
 </p:sld>
 </file>
 
@@ -2864,6 +3351,13 @@
   <p:clrMapOvr>
     <a:masterClrMapping/>
   </p:clrMapOvr>
+  <p:timing>
+    <p:tnLst>
+      <p:par>
+        <p:cTn id="1" dur="indefinite" restart="never" nodeType="tmRoot"/>
+      </p:par>
+    </p:tnLst>
+  </p:timing>
 </p:sld>
 </file>
 
@@ -3296,6 +3790,13 @@
   <p:clrMapOvr>
     <a:masterClrMapping/>
   </p:clrMapOvr>
+  <p:timing>
+    <p:tnLst>
+      <p:par>
+        <p:cTn id="1" dur="indefinite" restart="never" nodeType="tmRoot"/>
+      </p:par>
+    </p:tnLst>
+  </p:timing>
 </p:sld>
 </file>
 
@@ -3355,11 +3856,22 @@
                 <a:solidFill>
                   <a:srgbClr val="5C4A33"/>
                 </a:solidFill>
-                <a:latin typeface="Arial" pitchFamily="34" charset="0"/>
-                <a:ea typeface="Arial" pitchFamily="34" charset="-122"/>
-                <a:cs typeface="Arial" pitchFamily="34" charset="-120"/>
-              </a:rPr>
-              <a:t>Admin 관리 화면</a:t>
+                <a:latin typeface="Jokerman" panose="04090605060D06020702" pitchFamily="82" charset="0"/>
+                <a:ea typeface="Arial" pitchFamily="34" charset="-122"/>
+                <a:cs typeface="Arial" pitchFamily="34" charset="-120"/>
+              </a:rPr>
+              <a:t>Admin</a:t>
+            </a:r>
+            <a:r>
+              <a:rPr lang="en-US" sz="4800" b="1" dirty="0">
+                <a:solidFill>
+                  <a:srgbClr val="5C4A33"/>
+                </a:solidFill>
+                <a:latin typeface="Arial" pitchFamily="34" charset="0"/>
+                <a:ea typeface="Arial" pitchFamily="34" charset="-122"/>
+                <a:cs typeface="Arial" pitchFamily="34" charset="-120"/>
+              </a:rPr>
+              <a:t> 관리 화면</a:t>
             </a:r>
             <a:endParaRPr lang="en-US" sz="4800" dirty="0"/>
           </a:p>
@@ -3810,6 +4322,21 @@
   <p:clrMapOvr>
     <a:masterClrMapping/>
   </p:clrMapOvr>
+  <mc:AlternateContent xmlns:mc="http://schemas.openxmlformats.org/markup-compatibility/2006">
+    <mc:Choice xmlns:p14="http://schemas.microsoft.com/office/powerpoint/2010/main" Requires="p14">
+      <p:transition p14:dur="0"/>
+    </mc:Choice>
+    <mc:Fallback>
+      <p:transition/>
+    </mc:Fallback>
+  </mc:AlternateContent>
+  <p:timing>
+    <p:tnLst>
+      <p:par>
+        <p:cTn id="1" dur="indefinite" restart="never" nodeType="tmRoot"/>
+      </p:par>
+    </p:tnLst>
+  </p:timing>
 </p:sld>
 </file>
 
@@ -3873,11 +4400,22 @@
                 <a:solidFill>
                   <a:srgbClr val="5C4A33"/>
                 </a:solidFill>
-                <a:latin typeface="Arial" pitchFamily="34" charset="0"/>
-                <a:ea typeface="Arial" pitchFamily="34" charset="-122"/>
-                <a:cs typeface="Arial" pitchFamily="34" charset="-120"/>
-              </a:rPr>
-              <a:t>Admin 관리 화면</a:t>
+                <a:latin typeface="Jokerman" panose="04090605060D06020702" pitchFamily="82" charset="0"/>
+                <a:ea typeface="Arial" pitchFamily="34" charset="-122"/>
+                <a:cs typeface="Arial" pitchFamily="34" charset="-120"/>
+              </a:rPr>
+              <a:t>Admin</a:t>
+            </a:r>
+            <a:r>
+              <a:rPr lang="en-US" sz="4800" b="1" dirty="0">
+                <a:solidFill>
+                  <a:srgbClr val="5C4A33"/>
+                </a:solidFill>
+                <a:latin typeface="Arial" pitchFamily="34" charset="0"/>
+                <a:ea typeface="Arial" pitchFamily="34" charset="-122"/>
+                <a:cs typeface="Arial" pitchFamily="34" charset="-120"/>
+              </a:rPr>
+              <a:t> 관리 화면</a:t>
             </a:r>
             <a:endParaRPr lang="en-US" sz="4800" dirty="0"/>
           </a:p>
@@ -4361,7 +4899,7 @@
     <a:masterClrMapping/>
   </p:clrMapOvr>
   <mc:AlternateContent xmlns:mc="http://schemas.openxmlformats.org/markup-compatibility/2006">
-    <mc:Choice xmlns:p159="http://schemas.microsoft.com/office/powerpoint/2015/09/main" Requires="p159">
+    <mc:Choice xmlns:p159="http://schemas.microsoft.com/office/powerpoint/2015/09/main" xmlns="" Requires="p159">
       <p:transition xmlns:p14="http://schemas.microsoft.com/office/powerpoint/2010/main" spd="slow" p14:dur="2000">
         <p159:morph option="byObject"/>
       </p:transition>
@@ -4372,6 +4910,13 @@
       </p:transition>
     </mc:Fallback>
   </mc:AlternateContent>
+  <p:timing>
+    <p:tnLst>
+      <p:par>
+        <p:cTn id="1" dur="indefinite" restart="never" nodeType="tmRoot"/>
+      </p:par>
+    </p:tnLst>
+  </p:timing>
 </p:sld>
 </file>
 
@@ -4435,11 +4980,22 @@
                 <a:solidFill>
                   <a:srgbClr val="5C4A33"/>
                 </a:solidFill>
-                <a:latin typeface="Arial" pitchFamily="34" charset="0"/>
-                <a:ea typeface="Arial" pitchFamily="34" charset="-122"/>
-                <a:cs typeface="Arial" pitchFamily="34" charset="-120"/>
-              </a:rPr>
-              <a:t>Admin 관리 화면</a:t>
+                <a:latin typeface="Jokerman" panose="04090605060D06020702" pitchFamily="82" charset="0"/>
+                <a:ea typeface="Arial" pitchFamily="34" charset="-122"/>
+                <a:cs typeface="Arial" pitchFamily="34" charset="-120"/>
+              </a:rPr>
+              <a:t>Admin</a:t>
+            </a:r>
+            <a:r>
+              <a:rPr lang="en-US" sz="4800" b="1" dirty="0">
+                <a:solidFill>
+                  <a:srgbClr val="5C4A33"/>
+                </a:solidFill>
+                <a:latin typeface="Arial" pitchFamily="34" charset="0"/>
+                <a:ea typeface="Arial" pitchFamily="34" charset="-122"/>
+                <a:cs typeface="Arial" pitchFamily="34" charset="-120"/>
+              </a:rPr>
+              <a:t> 관리 화면</a:t>
             </a:r>
             <a:endParaRPr lang="en-US" sz="4800" dirty="0"/>
           </a:p>
@@ -4923,7 +5479,7 @@
     <a:masterClrMapping/>
   </p:clrMapOvr>
   <mc:AlternateContent xmlns:mc="http://schemas.openxmlformats.org/markup-compatibility/2006">
-    <mc:Choice xmlns:p159="http://schemas.microsoft.com/office/powerpoint/2015/09/main" Requires="p159">
+    <mc:Choice xmlns:p159="http://schemas.microsoft.com/office/powerpoint/2015/09/main" xmlns="" Requires="p159">
       <p:transition xmlns:p14="http://schemas.microsoft.com/office/powerpoint/2010/main" spd="slow" p14:dur="2000">
         <p159:morph option="byObject"/>
       </p:transition>
@@ -4934,6 +5490,13 @@
       </p:transition>
     </mc:Fallback>
   </mc:AlternateContent>
+  <p:timing>
+    <p:tnLst>
+      <p:par>
+        <p:cTn id="1" dur="indefinite" restart="never" nodeType="tmRoot"/>
+      </p:par>
+    </p:tnLst>
+  </p:timing>
 </p:sld>
 </file>
 
@@ -5055,64 +5618,79 @@
           </a:p>
         </p:txBody>
       </p:sp>
-      <p:sp>
-        <p:nvSpPr>
-          <p:cNvPr id="5" name="Shape 3"/>
-          <p:cNvSpPr/>
-          <p:nvPr/>
-        </p:nvSpPr>
-        <p:spPr>
+      <p:grpSp>
+        <p:nvGrpSpPr>
+          <p:cNvPr id="9" name="그룹 8"/>
+          <p:cNvGrpSpPr/>
+          <p:nvPr/>
+        </p:nvGrpSpPr>
+        <p:grpSpPr>
           <a:xfrm>
             <a:off x="8381851" y="3314700"/>
             <a:ext cx="1524000" cy="1524000"/>
-          </a:xfrm>
-          <a:prstGeom prst="ellipse">
-            <a:avLst/>
-          </a:prstGeom>
-          <a:solidFill>
-            <a:srgbClr val="5C4A33"/>
-          </a:solidFill>
-          <a:ln/>
-          <a:effectLst>
-            <a:outerShdw blurRad="101600" dist="50800" dir="16200000" algn="bl" rotWithShape="0">
-              <a:srgbClr val="C8956C">
-                <a:alpha val="800"/>
-              </a:srgbClr>
-            </a:outerShdw>
-          </a:effectLst>
-        </p:spPr>
-        <p:txBody>
-          <a:bodyPr/>
-          <a:lstStyle/>
-          <a:p>
-            <a:endParaRPr lang="ko-KR" altLang="en-US"/>
-          </a:p>
-        </p:txBody>
-      </p:sp>
-      <p:pic>
-        <p:nvPicPr>
-          <p:cNvPr id="6" name="Image 0" descr="preencoded.png"/>
-          <p:cNvPicPr>
-            <a:picLocks noChangeAspect="1"/>
-          </p:cNvPicPr>
-          <p:nvPr/>
-        </p:nvPicPr>
-        <p:blipFill>
-          <a:blip r:embed="rId3"/>
-          <a:stretch>
-            <a:fillRect/>
-          </a:stretch>
-        </p:blipFill>
-        <p:spPr>
-          <a:xfrm>
-            <a:off x="8800951" y="3733800"/>
-            <a:ext cx="685800" cy="685800"/>
-          </a:xfrm>
-          <a:prstGeom prst="rect">
-            <a:avLst/>
-          </a:prstGeom>
-        </p:spPr>
-      </p:pic>
+            <a:chOff x="8381851" y="3314700"/>
+            <a:chExt cx="1524000" cy="1524000"/>
+          </a:xfrm>
+        </p:grpSpPr>
+        <p:sp>
+          <p:nvSpPr>
+            <p:cNvPr id="5" name="Shape 3"/>
+            <p:cNvSpPr/>
+            <p:nvPr/>
+          </p:nvSpPr>
+          <p:spPr>
+            <a:xfrm>
+              <a:off x="8381851" y="3314700"/>
+              <a:ext cx="1524000" cy="1524000"/>
+            </a:xfrm>
+            <a:prstGeom prst="ellipse">
+              <a:avLst/>
+            </a:prstGeom>
+            <a:solidFill>
+              <a:srgbClr val="5C4A33"/>
+            </a:solidFill>
+            <a:ln/>
+            <a:effectLst>
+              <a:outerShdw blurRad="101600" dist="50800" dir="16200000" algn="bl" rotWithShape="0">
+                <a:srgbClr val="C8956C">
+                  <a:alpha val="800"/>
+                </a:srgbClr>
+              </a:outerShdw>
+            </a:effectLst>
+          </p:spPr>
+          <p:txBody>
+            <a:bodyPr/>
+            <a:lstStyle/>
+            <a:p>
+              <a:endParaRPr lang="ko-KR" altLang="en-US"/>
+            </a:p>
+          </p:txBody>
+        </p:sp>
+        <p:pic>
+          <p:nvPicPr>
+            <p:cNvPr id="6" name="Image 0" descr="preencoded.png"/>
+            <p:cNvPicPr>
+              <a:picLocks noChangeAspect="1"/>
+            </p:cNvPicPr>
+            <p:nvPr/>
+          </p:nvPicPr>
+          <p:blipFill>
+            <a:blip r:embed="rId3"/>
+            <a:stretch>
+              <a:fillRect/>
+            </a:stretch>
+          </p:blipFill>
+          <p:spPr>
+            <a:xfrm>
+              <a:off x="8800951" y="3733800"/>
+              <a:ext cx="685800" cy="685800"/>
+            </a:xfrm>
+            <a:prstGeom prst="rect">
+              <a:avLst/>
+            </a:prstGeom>
+          </p:spPr>
+        </p:pic>
+      </p:grpSp>
       <p:sp>
         <p:nvSpPr>
           <p:cNvPr id="7" name="Text 4"/>
@@ -5144,11 +5722,22 @@
                 <a:solidFill>
                   <a:srgbClr val="F3EDE4"/>
                 </a:solidFill>
-                <a:latin typeface="Arial" pitchFamily="34" charset="0"/>
-                <a:ea typeface="Arial" pitchFamily="34" charset="-122"/>
-                <a:cs typeface="Arial" pitchFamily="34" charset="-120"/>
-              </a:rPr>
-              <a:t>Live Demo</a:t>
+                <a:latin typeface="Arial Rounded MT Bold" panose="020F0704030504030204" pitchFamily="34" charset="0"/>
+                <a:ea typeface="Arial" pitchFamily="34" charset="-122"/>
+                <a:cs typeface="Arial" pitchFamily="34" charset="-120"/>
+              </a:rPr>
+              <a:t>Live</a:t>
+            </a:r>
+            <a:r>
+              <a:rPr lang="en-US" sz="6000" b="1" dirty="0">
+                <a:solidFill>
+                  <a:srgbClr val="F3EDE4"/>
+                </a:solidFill>
+                <a:latin typeface="Arial" pitchFamily="34" charset="0"/>
+                <a:ea typeface="Arial" pitchFamily="34" charset="-122"/>
+                <a:cs typeface="Arial" pitchFamily="34" charset="-120"/>
+              </a:rPr>
+              <a:t> Demo</a:t>
             </a:r>
             <a:endParaRPr lang="en-US" sz="6000" dirty="0"/>
           </a:p>
@@ -5200,6 +5789,77 @@
   <p:clrMapOvr>
     <a:masterClrMapping/>
   </p:clrMapOvr>
+  <p:timing>
+    <p:tnLst>
+      <p:par>
+        <p:cTn id="1" dur="indefinite" restart="never" nodeType="tmRoot">
+          <p:childTnLst>
+            <p:seq concurrent="1" nextAc="seek">
+              <p:cTn id="2" dur="indefinite" nodeType="mainSeq">
+                <p:childTnLst>
+                  <p:par>
+                    <p:cTn id="3" fill="hold">
+                      <p:stCondLst>
+                        <p:cond delay="indefinite"/>
+                        <p:cond evt="onBegin" delay="0">
+                          <p:tn val="2"/>
+                        </p:cond>
+                      </p:stCondLst>
+                      <p:childTnLst>
+                        <p:par>
+                          <p:cTn id="4" fill="hold">
+                            <p:stCondLst>
+                              <p:cond delay="0"/>
+                            </p:stCondLst>
+                            <p:childTnLst>
+                              <p:par>
+                                <p:cTn id="5" presetID="8" presetClass="emph" presetSubtype="0" fill="hold" nodeType="withEffect">
+                                  <p:stCondLst>
+                                    <p:cond delay="0"/>
+                                  </p:stCondLst>
+                                  <p:childTnLst>
+                                    <p:animRot by="21600000">
+                                      <p:cBhvr>
+                                        <p:cTn id="6" dur="2000" fill="hold"/>
+                                        <p:tgtEl>
+                                          <p:spTgt spid="9"/>
+                                        </p:tgtEl>
+                                        <p:attrNameLst>
+                                          <p:attrName>r</p:attrName>
+                                        </p:attrNameLst>
+                                      </p:cBhvr>
+                                    </p:animRot>
+                                  </p:childTnLst>
+                                </p:cTn>
+                              </p:par>
+                            </p:childTnLst>
+                          </p:cTn>
+                        </p:par>
+                      </p:childTnLst>
+                    </p:cTn>
+                  </p:par>
+                </p:childTnLst>
+              </p:cTn>
+              <p:prevCondLst>
+                <p:cond evt="onPrev" delay="0">
+                  <p:tgtEl>
+                    <p:sldTgt/>
+                  </p:tgtEl>
+                </p:cond>
+              </p:prevCondLst>
+              <p:nextCondLst>
+                <p:cond evt="onNext" delay="0">
+                  <p:tgtEl>
+                    <p:sldTgt/>
+                  </p:tgtEl>
+                </p:cond>
+              </p:nextCondLst>
+            </p:seq>
+          </p:childTnLst>
+        </p:cTn>
+      </p:par>
+    </p:tnLst>
+  </p:timing>
 </p:sld>
 </file>
 
@@ -5878,6 +6538,13 @@
   <p:clrMapOvr>
     <a:masterClrMapping/>
   </p:clrMapOvr>
+  <p:timing>
+    <p:tnLst>
+      <p:par>
+        <p:cTn id="1" dur="indefinite" restart="never" nodeType="tmRoot"/>
+      </p:par>
+    </p:tnLst>
+  </p:timing>
 </p:sld>
 </file>
 
@@ -6034,17 +6701,19 @@
               <a:buNone/>
             </a:pPr>
             <a:r>
-              <a:rPr lang="en-US" sz="9000" b="1" dirty="0">
+              <a:rPr lang="en-US" sz="9000" b="1" dirty="0" smtClean="0">
                 <a:solidFill>
                   <a:srgbClr val="5C4A33"/>
                 </a:solidFill>
-                <a:latin typeface="Arial" pitchFamily="34" charset="0"/>
+                <a:latin typeface="Arial Rounded MT Bold" panose="020F0704030504030204" pitchFamily="34" charset="0"/>
                 <a:ea typeface="Arial" pitchFamily="34" charset="-122"/>
                 <a:cs typeface="Arial" pitchFamily="34" charset="-120"/>
               </a:rPr>
               <a:t>Q&amp;A</a:t>
             </a:r>
-            <a:endParaRPr lang="en-US" sz="9000" dirty="0"/>
+            <a:endParaRPr lang="en-US" sz="9000" dirty="0">
+              <a:latin typeface="Arial Rounded MT Bold" panose="020F0704030504030204" pitchFamily="34" charset="0"/>
+            </a:endParaRPr>
           </a:p>
         </p:txBody>
       </p:sp>
@@ -6124,8 +6793,8 @@
         </p:nvSpPr>
         <p:spPr>
           <a:xfrm>
-            <a:off x="7714394" y="6534150"/>
-            <a:ext cx="2858914" cy="1133475"/>
+            <a:off x="6993279" y="6534150"/>
+            <a:ext cx="4301144" cy="2126889"/>
           </a:xfrm>
           <a:prstGeom prst="rect">
             <a:avLst/>
@@ -6135,7 +6804,7 @@
         </p:spPr>
         <p:txBody>
           <a:bodyPr wrap="square" lIns="25400" tIns="25400" rIns="25400" bIns="25400" rtlCol="0" anchor="t">
-            <a:normAutofit fontScale="92500"/>
+            <a:normAutofit/>
           </a:bodyPr>
           <a:lstStyle/>
           <a:p>
@@ -6146,7 +6815,7 @@
               <a:buNone/>
             </a:pPr>
             <a:r>
-              <a:rPr lang="en-US" sz="2100" b="1" dirty="0">
+              <a:rPr lang="en-US" sz="2100" b="1" dirty="0" smtClean="0">
                 <a:solidFill>
                   <a:srgbClr val="9A7D52"/>
                 </a:solidFill>
@@ -6154,10 +6823,10 @@
                 <a:ea typeface="Arial" pitchFamily="34" charset="-122"/>
                 <a:cs typeface="Arial" pitchFamily="34" charset="-120"/>
               </a:rPr>
-              <a:t>오하율 </a:t>
-            </a:r>
-            <a:r>
-              <a:rPr lang="en-US" sz="2100" dirty="0">
+              <a:t>오 하 율 </a:t>
+            </a:r>
+            <a:br>
+              <a:rPr lang="en-US" sz="2100" b="1" dirty="0" smtClean="0">
                 <a:solidFill>
                   <a:srgbClr val="9A7D52"/>
                 </a:solidFill>
@@ -6165,9 +6834,21 @@
                 <a:ea typeface="Arial" pitchFamily="34" charset="-122"/>
                 <a:cs typeface="Arial" pitchFamily="34" charset="-120"/>
               </a:rPr>
+            </a:br>
+            <a:r>
+              <a:rPr lang="en-US" sz="4000" dirty="0" smtClean="0">
+                <a:solidFill>
+                  <a:srgbClr val="9A7D52"/>
+                </a:solidFill>
+                <a:latin typeface="Brush Script MT" panose="03060802040406070304" pitchFamily="66" charset="0"/>
+                <a:ea typeface="Arial" pitchFamily="34" charset="-122"/>
+                <a:cs typeface="Arial" pitchFamily="34" charset="-120"/>
+              </a:rPr>
               <a:t>Ohayul.me@gmail.com</a:t>
             </a:r>
-            <a:endParaRPr lang="en-US" sz="2100" dirty="0"/>
+            <a:endParaRPr lang="en-US" sz="4000" dirty="0">
+              <a:latin typeface="Brush Script MT" panose="03060802040406070304" pitchFamily="66" charset="0"/>
+            </a:endParaRPr>
           </a:p>
         </p:txBody>
       </p:sp>
@@ -6176,6 +6857,138 @@
   <p:clrMapOvr>
     <a:masterClrMapping/>
   </p:clrMapOvr>
+  <p:timing>
+    <p:tnLst>
+      <p:par>
+        <p:cTn id="1" dur="indefinite" restart="never" nodeType="tmRoot">
+          <p:childTnLst>
+            <p:seq concurrent="1" nextAc="seek">
+              <p:cTn id="2" dur="indefinite" nodeType="mainSeq">
+                <p:childTnLst>
+                  <p:par>
+                    <p:cTn id="3" fill="hold">
+                      <p:stCondLst>
+                        <p:cond delay="indefinite"/>
+                        <p:cond evt="onBegin" delay="0">
+                          <p:tn val="2"/>
+                        </p:cond>
+                      </p:stCondLst>
+                      <p:childTnLst>
+                        <p:par>
+                          <p:cTn id="4" fill="hold">
+                            <p:stCondLst>
+                              <p:cond delay="0"/>
+                            </p:stCondLst>
+                            <p:childTnLst>
+                              <p:par>
+                                <p:cTn id="5" presetID="45" presetClass="entr" presetSubtype="0" fill="hold" nodeType="withEffect">
+                                  <p:stCondLst>
+                                    <p:cond delay="0"/>
+                                  </p:stCondLst>
+                                  <p:childTnLst>
+                                    <p:set>
+                                      <p:cBhvr>
+                                        <p:cTn id="6" dur="1" fill="hold">
+                                          <p:stCondLst>
+                                            <p:cond delay="0"/>
+                                          </p:stCondLst>
+                                        </p:cTn>
+                                        <p:tgtEl>
+                                          <p:spTgt spid="5"/>
+                                        </p:tgtEl>
+                                        <p:attrNameLst>
+                                          <p:attrName>style.visibility</p:attrName>
+                                        </p:attrNameLst>
+                                      </p:cBhvr>
+                                      <p:to>
+                                        <p:strVal val="visible"/>
+                                      </p:to>
+                                    </p:set>
+                                    <p:animEffect transition="in" filter="fade">
+                                      <p:cBhvr>
+                                        <p:cTn id="7" dur="2000"/>
+                                        <p:tgtEl>
+                                          <p:spTgt spid="5"/>
+                                        </p:tgtEl>
+                                      </p:cBhvr>
+                                    </p:animEffect>
+                                    <p:anim calcmode="lin" valueType="num">
+                                      <p:cBhvr>
+                                        <p:cTn id="8" dur="2000" fill="hold"/>
+                                        <p:tgtEl>
+                                          <p:spTgt spid="5"/>
+                                        </p:tgtEl>
+                                        <p:attrNameLst>
+                                          <p:attrName>ppt_w</p:attrName>
+                                        </p:attrNameLst>
+                                      </p:cBhvr>
+                                      <p:tavLst>
+                                        <p:tav tm="0" fmla="#ppt_w*sin(2.5*pi*$)">
+                                          <p:val>
+                                            <p:fltVal val="0"/>
+                                          </p:val>
+                                        </p:tav>
+                                        <p:tav tm="100000">
+                                          <p:val>
+                                            <p:fltVal val="1"/>
+                                          </p:val>
+                                        </p:tav>
+                                      </p:tavLst>
+                                    </p:anim>
+                                    <p:anim calcmode="lin" valueType="num">
+                                      <p:cBhvr>
+                                        <p:cTn id="9" dur="2000" fill="hold"/>
+                                        <p:tgtEl>
+                                          <p:spTgt spid="5"/>
+                                        </p:tgtEl>
+                                        <p:attrNameLst>
+                                          <p:attrName>ppt_h</p:attrName>
+                                        </p:attrNameLst>
+                                      </p:cBhvr>
+                                      <p:tavLst>
+                                        <p:tav tm="0">
+                                          <p:val>
+                                            <p:strVal val="#ppt_h"/>
+                                          </p:val>
+                                        </p:tav>
+                                        <p:tav tm="100000">
+                                          <p:val>
+                                            <p:strVal val="#ppt_h"/>
+                                          </p:val>
+                                        </p:tav>
+                                      </p:tavLst>
+                                    </p:anim>
+                                  </p:childTnLst>
+                                </p:cTn>
+                              </p:par>
+                            </p:childTnLst>
+                          </p:cTn>
+                        </p:par>
+                      </p:childTnLst>
+                    </p:cTn>
+                  </p:par>
+                </p:childTnLst>
+              </p:cTn>
+              <p:prevCondLst>
+                <p:cond evt="onPrev" delay="0">
+                  <p:tgtEl>
+                    <p:sldTgt/>
+                  </p:tgtEl>
+                </p:cond>
+              </p:prevCondLst>
+              <p:nextCondLst>
+                <p:cond evt="onNext" delay="0">
+                  <p:tgtEl>
+                    <p:sldTgt/>
+                  </p:tgtEl>
+                </p:cond>
+              </p:nextCondLst>
+            </p:seq>
+          </p:childTnLst>
+        </p:cTn>
+      </p:par>
+    </p:tnLst>
+  </p:timing>
 </p:sld>
 </file>
 
@@ -6235,13 +7048,15 @@
                 <a:solidFill>
                   <a:srgbClr val="5C4A33"/>
                 </a:solidFill>
-                <a:latin typeface="Arial" pitchFamily="34" charset="0"/>
+                <a:latin typeface="Algerian" panose="04020705040A02060702" pitchFamily="82" charset="0"/>
                 <a:ea typeface="Arial" pitchFamily="34" charset="-122"/>
                 <a:cs typeface="Arial" pitchFamily="34" charset="-120"/>
               </a:rPr>
               <a:t>Contents</a:t>
             </a:r>
-            <a:endParaRPr lang="en-US" sz="4800" dirty="0"/>
+            <a:endParaRPr lang="en-US" sz="4800" dirty="0">
+              <a:latin typeface="Algerian" panose="04020705040A02060702" pitchFamily="82" charset="0"/>
+            </a:endParaRPr>
           </a:p>
         </p:txBody>
       </p:sp>
@@ -7194,6 +8009,13 @@
   <p:clrMapOvr>
     <a:masterClrMapping/>
   </p:clrMapOvr>
+  <p:timing>
+    <p:tnLst>
+      <p:par>
+        <p:cTn id="1" dur="indefinite" restart="never" nodeType="tmRoot"/>
+      </p:par>
+    </p:tnLst>
+  </p:timing>
 </p:sld>
 </file>
 
@@ -7412,7 +8234,7 @@
         </p:spPr>
         <p:txBody>
           <a:bodyPr wrap="square" lIns="25400" tIns="25400" rIns="25400" bIns="25400" rtlCol="0" anchor="t">
-            <a:normAutofit fontScale="92500"/>
+            <a:normAutofit fontScale="92500" lnSpcReduction="10000"/>
           </a:bodyPr>
           <a:lstStyle/>
           <a:p>
@@ -7597,7 +8419,7 @@
         </p:spPr>
         <p:txBody>
           <a:bodyPr wrap="square" lIns="25400" tIns="25400" rIns="25400" bIns="25400" rtlCol="0" anchor="t">
-            <a:normAutofit fontScale="92500" lnSpcReduction="10000"/>
+            <a:normAutofit fontScale="92500" lnSpcReduction="20000"/>
           </a:bodyPr>
           <a:lstStyle/>
           <a:p>
@@ -7701,66 +8523,81 @@
           </a:p>
         </p:txBody>
       </p:sp>
-      <p:sp>
-        <p:nvSpPr>
-          <p:cNvPr id="14" name="Shape 10"/>
-          <p:cNvSpPr/>
-          <p:nvPr/>
-        </p:nvSpPr>
-        <p:spPr>
+      <p:grpSp>
+        <p:nvGrpSpPr>
+          <p:cNvPr id="19" name="그룹 18"/>
+          <p:cNvGrpSpPr/>
+          <p:nvPr/>
+        </p:nvGrpSpPr>
+        <p:grpSpPr>
           <a:xfrm>
             <a:off x="14287500" y="4533007"/>
             <a:ext cx="838200" cy="838200"/>
-          </a:xfrm>
-          <a:prstGeom prst="roundRect">
-            <a:avLst>
-              <a:gd name="adj" fmla="val 22727"/>
-            </a:avLst>
-          </a:prstGeom>
-          <a:solidFill>
-            <a:srgbClr val="F3EDE4"/>
-          </a:solidFill>
-          <a:ln/>
-          <a:effectLst>
-            <a:outerShdw blurRad="101600" dist="50800" dir="16200000" algn="bl" rotWithShape="0">
-              <a:srgbClr val="C8956C">
-                <a:alpha val="10000"/>
-              </a:srgbClr>
-            </a:outerShdw>
-          </a:effectLst>
-        </p:spPr>
-        <p:txBody>
-          <a:bodyPr/>
-          <a:lstStyle/>
-          <a:p>
-            <a:endParaRPr lang="ko-KR" altLang="en-US"/>
-          </a:p>
-        </p:txBody>
-      </p:sp>
-      <p:pic>
-        <p:nvPicPr>
-          <p:cNvPr id="15" name="Image 2" descr="preencoded.png"/>
-          <p:cNvPicPr>
-            <a:picLocks noChangeAspect="1"/>
-          </p:cNvPicPr>
-          <p:nvPr/>
-        </p:nvPicPr>
-        <p:blipFill>
-          <a:blip r:embed="rId5"/>
-          <a:stretch>
-            <a:fillRect/>
-          </a:stretch>
-        </p:blipFill>
-        <p:spPr>
-          <a:xfrm>
-            <a:off x="14497050" y="4742557"/>
-            <a:ext cx="419100" cy="419100"/>
-          </a:xfrm>
-          <a:prstGeom prst="rect">
-            <a:avLst/>
-          </a:prstGeom>
-        </p:spPr>
-      </p:pic>
+            <a:chOff x="14287500" y="4533007"/>
+            <a:chExt cx="838200" cy="838200"/>
+          </a:xfrm>
+        </p:grpSpPr>
+        <p:sp>
+          <p:nvSpPr>
+            <p:cNvPr id="14" name="Shape 10"/>
+            <p:cNvSpPr/>
+            <p:nvPr/>
+          </p:nvSpPr>
+          <p:spPr>
+            <a:xfrm>
+              <a:off x="14287500" y="4533007"/>
+              <a:ext cx="838200" cy="838200"/>
+            </a:xfrm>
+            <a:prstGeom prst="roundRect">
+              <a:avLst>
+                <a:gd name="adj" fmla="val 22727"/>
+              </a:avLst>
+            </a:prstGeom>
+            <a:solidFill>
+              <a:srgbClr val="F3EDE4"/>
+            </a:solidFill>
+            <a:ln/>
+            <a:effectLst>
+              <a:outerShdw blurRad="101600" dist="50800" dir="16200000" algn="bl" rotWithShape="0">
+                <a:srgbClr val="C8956C">
+                  <a:alpha val="10000"/>
+                </a:srgbClr>
+              </a:outerShdw>
+            </a:effectLst>
+          </p:spPr>
+          <p:txBody>
+            <a:bodyPr/>
+            <a:lstStyle/>
+            <a:p>
+              <a:endParaRPr lang="ko-KR" altLang="en-US"/>
+            </a:p>
+          </p:txBody>
+        </p:sp>
+        <p:pic>
+          <p:nvPicPr>
+            <p:cNvPr id="15" name="Image 2" descr="preencoded.png"/>
+            <p:cNvPicPr>
+              <a:picLocks noChangeAspect="1"/>
+            </p:cNvPicPr>
+            <p:nvPr/>
+          </p:nvPicPr>
+          <p:blipFill>
+            <a:blip r:embed="rId5"/>
+            <a:stretch>
+              <a:fillRect/>
+            </a:stretch>
+          </p:blipFill>
+          <p:spPr>
+            <a:xfrm>
+              <a:off x="14497050" y="4742557"/>
+              <a:ext cx="419100" cy="419100"/>
+            </a:xfrm>
+            <a:prstGeom prst="rect">
+              <a:avLst/>
+            </a:prstGeom>
+          </p:spPr>
+        </p:pic>
+      </p:grpSp>
       <p:sp>
         <p:nvSpPr>
           <p:cNvPr id="16" name="Text 11"/>
@@ -7821,7 +8658,7 @@
         </p:spPr>
         <p:txBody>
           <a:bodyPr wrap="square" lIns="25400" tIns="25400" rIns="25400" bIns="25400" rtlCol="0" anchor="t">
-            <a:normAutofit fontScale="92500"/>
+            <a:normAutofit fontScale="92500" lnSpcReduction="20000"/>
           </a:bodyPr>
           <a:lstStyle/>
           <a:p>
@@ -7865,7 +8702,7 @@
         </p:spPr>
         <p:txBody>
           <a:bodyPr wrap="square" lIns="25400" tIns="25400" rIns="25400" bIns="25400" rtlCol="0" anchor="t">
-            <a:normAutofit fontScale="92500" lnSpcReduction="10000"/>
+            <a:normAutofit fontScale="85000" lnSpcReduction="10000"/>
           </a:bodyPr>
           <a:lstStyle/>
           <a:p>
@@ -7876,6 +8713,17 @@
               <a:buNone/>
             </a:pPr>
             <a:r>
+              <a:rPr lang="en-US" sz="1800" dirty="0" smtClean="0">
+                <a:solidFill>
+                  <a:srgbClr val="7A6243"/>
+                </a:solidFill>
+                <a:latin typeface="Arial" pitchFamily="34" charset="0"/>
+                <a:ea typeface="Arial" pitchFamily="34" charset="-122"/>
+                <a:cs typeface="Arial" pitchFamily="34" charset="-120"/>
+              </a:rPr>
+              <a:t>15개 </a:t>
+            </a:r>
+            <a:r>
               <a:rPr lang="en-US" sz="1800" dirty="0">
                 <a:solidFill>
                   <a:srgbClr val="7A6243"/>
@@ -7884,7 +8732,7 @@
                 <a:ea typeface="Arial" pitchFamily="34" charset="-122"/>
                 <a:cs typeface="Arial" pitchFamily="34" charset="-120"/>
               </a:rPr>
-              <a:t>12개 핵심 기능 완성</a:t>
+              <a:t>핵심 기능 완성</a:t>
             </a:r>
             <a:endParaRPr lang="en-US" sz="1800" dirty="0"/>
           </a:p>
@@ -7895,6 +8743,13 @@
   <p:clrMapOvr>
     <a:masterClrMapping/>
   </p:clrMapOvr>
+  <p:timing>
+    <p:tnLst>
+      <p:par>
+        <p:cTn id="1" dur="indefinite" restart="never" nodeType="tmRoot"/>
+      </p:par>
+    </p:tnLst>
+  </p:timing>
 </p:sld>
 </file>
 
@@ -9468,6 +10323,13 @@
   <p:clrMapOvr>
     <a:masterClrMapping/>
   </p:clrMapOvr>
+  <p:timing>
+    <p:tnLst>
+      <p:par>
+        <p:cTn id="1" dur="indefinite" restart="never" nodeType="tmRoot"/>
+      </p:par>
+    </p:tnLst>
+  </p:timing>
 </p:sld>
 </file>
 
@@ -9657,7 +10519,7 @@
       </p:sp>
       <p:pic>
         <p:nvPicPr>
-          <p:cNvPr id="5" name="Image 0" descr="preencoded.png"/>
+          <p:cNvPr id="6" name="그림 5"/>
           <p:cNvPicPr>
             <a:picLocks noChangeAspect="1"/>
           </p:cNvPicPr>
@@ -9665,13 +10527,14 @@
         </p:nvPicPr>
         <p:blipFill>
           <a:blip r:embed="rId3"/>
-          <a:srcRect/>
-          <a:stretch/>
+          <a:stretch>
+            <a:fillRect/>
+          </a:stretch>
         </p:blipFill>
         <p:spPr>
           <a:xfrm>
-            <a:off x="597913" y="3286125"/>
-            <a:ext cx="17092174" cy="5741334"/>
+            <a:off x="679898" y="3286125"/>
+            <a:ext cx="17147092" cy="6135660"/>
           </a:xfrm>
           <a:prstGeom prst="rect">
             <a:avLst/>
@@ -9682,7 +10545,6 @@
                 <a:alpha val="40000"/>
               </a:prstClr>
             </a:outerShdw>
-            <a:softEdge rad="0"/>
           </a:effectLst>
         </p:spPr>
       </p:pic>
@@ -9691,6 +10553,13 @@
   <p:clrMapOvr>
     <a:masterClrMapping/>
   </p:clrMapOvr>
+  <p:timing>
+    <p:tnLst>
+      <p:par>
+        <p:cTn id="1" dur="indefinite" restart="never" nodeType="tmRoot"/>
+      </p:par>
+    </p:tnLst>
+  </p:timing>
 </p:sld>
 </file>
 
@@ -9989,7 +10858,7 @@
         </p:spPr>
         <p:txBody>
           <a:bodyPr wrap="square" lIns="25400" tIns="25400" rIns="25400" bIns="25400" rtlCol="0" anchor="t">
-            <a:normAutofit fontScale="92500" lnSpcReduction="10000"/>
+            <a:normAutofit fontScale="92500" lnSpcReduction="20000"/>
           </a:bodyPr>
           <a:lstStyle/>
           <a:p>
@@ -10297,7 +11166,7 @@
         </p:spPr>
         <p:txBody>
           <a:bodyPr wrap="square" lIns="25400" tIns="25400" rIns="25400" bIns="25400" rtlCol="0" anchor="t">
-            <a:normAutofit fontScale="92500" lnSpcReduction="10000"/>
+            <a:normAutofit fontScale="92500" lnSpcReduction="20000"/>
           </a:bodyPr>
           <a:lstStyle/>
           <a:p>
@@ -10551,7 +11420,7 @@
         </p:spPr>
         <p:txBody>
           <a:bodyPr wrap="square" lIns="25400" tIns="25400" rIns="25400" bIns="25400" rtlCol="0" anchor="t">
-            <a:normAutofit fontScale="92500" lnSpcReduction="10000"/>
+            <a:normAutofit fontScale="92500" lnSpcReduction="20000"/>
           </a:bodyPr>
           <a:lstStyle/>
           <a:p>
@@ -10581,6 +11450,13 @@
   <p:clrMapOvr>
     <a:masterClrMapping/>
   </p:clrMapOvr>
+  <p:timing>
+    <p:tnLst>
+      <p:par>
+        <p:cTn id="1" dur="indefinite" restart="never" nodeType="tmRoot"/>
+      </p:par>
+    </p:tnLst>
+  </p:timing>
 </p:sld>
 </file>
 
@@ -10789,6 +11665,13 @@
   <p:clrMapOvr>
     <a:masterClrMapping/>
   </p:clrMapOvr>
+  <p:timing>
+    <p:tnLst>
+      <p:par>
+        <p:cTn id="1" dur="indefinite" restart="never" nodeType="tmRoot"/>
+      </p:par>
+    </p:tnLst>
+  </p:timing>
 </p:sld>
 </file>
 
@@ -10970,7 +11853,29 @@
                 <a:ea typeface="Arial" pitchFamily="34" charset="-122"/>
                 <a:cs typeface="Arial" pitchFamily="34" charset="-120"/>
               </a:rPr>
-              <a:t> 도면 — 11개 테이블</a:t>
+              <a:t> 도면 — </a:t>
+            </a:r>
+            <a:r>
+              <a:rPr lang="en-US" sz="2550" dirty="0" smtClean="0">
+                <a:solidFill>
+                  <a:srgbClr val="9A7D52"/>
+                </a:solidFill>
+                <a:latin typeface="Arial" pitchFamily="34" charset="0"/>
+                <a:ea typeface="Arial" pitchFamily="34" charset="-122"/>
+                <a:cs typeface="Arial" pitchFamily="34" charset="-120"/>
+              </a:rPr>
+              <a:t>12개 </a:t>
+            </a:r>
+            <a:r>
+              <a:rPr lang="en-US" sz="2550" dirty="0">
+                <a:solidFill>
+                  <a:srgbClr val="9A7D52"/>
+                </a:solidFill>
+                <a:latin typeface="Arial" pitchFamily="34" charset="0"/>
+                <a:ea typeface="Arial" pitchFamily="34" charset="-122"/>
+                <a:cs typeface="Arial" pitchFamily="34" charset="-120"/>
+              </a:rPr>
+              <a:t>테이블</a:t>
             </a:r>
             <a:endParaRPr lang="en-US" sz="2550" dirty="0"/>
           </a:p>
@@ -11011,31 +11916,71 @@
       </p:sp>
       <p:pic>
         <p:nvPicPr>
-          <p:cNvPr id="5" name="Image 0" descr="preencoded.png"/>
+          <p:cNvPr id="6" name="그림 5"/>
           <p:cNvPicPr>
             <a:picLocks noChangeAspect="1"/>
           </p:cNvPicPr>
           <p:nvPr/>
         </p:nvPicPr>
         <p:blipFill>
-          <a:blip r:embed="rId3"/>
-          <a:srcRect/>
-          <a:stretch/>
+          <a:blip r:embed="rId3">
+            <a:extLst>
+              <a:ext uri="{28A0092B-C50C-407E-A947-70E740481C1C}">
+                <a14:useLocalDpi xmlns:a14="http://schemas.microsoft.com/office/drawing/2010/main" val="0"/>
+              </a:ext>
+            </a:extLst>
+          </a:blip>
+          <a:stretch>
+            <a:fillRect/>
+          </a:stretch>
         </p:blipFill>
         <p:spPr>
           <a:xfrm>
-            <a:off x="4193659" y="3057525"/>
-            <a:ext cx="9900681" cy="7054038"/>
-          </a:xfrm>
-          <a:prstGeom prst="rect">
-            <a:avLst/>
-          </a:prstGeom>
+            <a:off x="3529262" y="3057525"/>
+            <a:ext cx="11678653" cy="6856496"/>
+          </a:xfrm>
+          <a:prstGeom prst="rect">
+            <a:avLst/>
+          </a:prstGeom>
+          <a:gradFill>
+            <a:gsLst>
+              <a:gs pos="14000">
+                <a:schemeClr val="accent1">
+                  <a:lumMod val="5000"/>
+                  <a:lumOff val="95000"/>
+                </a:schemeClr>
+              </a:gs>
+              <a:gs pos="55000">
+                <a:schemeClr val="accent1">
+                  <a:lumMod val="45000"/>
+                  <a:lumOff val="55000"/>
+                </a:schemeClr>
+              </a:gs>
+              <a:gs pos="69000">
+                <a:schemeClr val="accent1">
+                  <a:lumMod val="45000"/>
+                  <a:lumOff val="55000"/>
+                </a:schemeClr>
+              </a:gs>
+              <a:gs pos="100000">
+                <a:schemeClr val="accent1">
+                  <a:lumMod val="30000"/>
+                  <a:lumOff val="70000"/>
+                </a:schemeClr>
+              </a:gs>
+            </a:gsLst>
+            <a:lin ang="5400000" scaled="1"/>
+          </a:gradFill>
+          <a:ln>
+            <a:noFill/>
+          </a:ln>
           <a:effectLst>
             <a:outerShdw blurRad="50800" dist="38100" dir="2700000" algn="tl" rotWithShape="0">
               <a:prstClr val="black">
                 <a:alpha val="40000"/>
               </a:prstClr>
             </a:outerShdw>
+            <a:softEdge rad="12700"/>
           </a:effectLst>
         </p:spPr>
       </p:pic>
@@ -11044,6 +11989,13 @@
   <p:clrMapOvr>
     <a:masterClrMapping/>
   </p:clrMapOvr>
+  <p:timing>
+    <p:tnLst>
+      <p:par>
+        <p:cTn id="1" dur="indefinite" restart="never" nodeType="tmRoot"/>
+      </p:par>
+    </p:tnLst>
+  </p:timing>
 </p:sld>
 </file>
 
@@ -11867,18 +12819,25 @@
   <p:clrMapOvr>
     <a:masterClrMapping/>
   </p:clrMapOvr>
-  <mc:AlternateContent xmlns:mc="http://schemas.openxmlformats.org/markup-compatibility/2006">
-    <mc:Choice xmlns:p15="http://schemas.microsoft.com/office/powerpoint/2012/main" Requires="p15">
+  <mc:AlternateContent xmlns:mc="http://schemas.openxmlformats.org/markup-compatibility/2006" xmlns:p15="http://schemas.microsoft.com/office/powerpoint/2012/main">
+    <mc:Choice Requires="p15">
       <p:transition xmlns:p14="http://schemas.microsoft.com/office/powerpoint/2010/main" spd="slow" p14:dur="2000">
         <p15:prstTrans prst="prestige"/>
       </p:transition>
     </mc:Choice>
-    <mc:Fallback>
+    <mc:Fallback xmlns="">
       <p:transition spd="slow">
         <p:fade/>
       </p:transition>
     </mc:Fallback>
   </mc:AlternateContent>
+  <p:timing>
+    <p:tnLst>
+      <p:par>
+        <p:cTn id="1" dur="indefinite" restart="never" nodeType="tmRoot"/>
+      </p:par>
+    </p:tnLst>
+  </p:timing>
 </p:sld>
 </file>
 
